--- a/folletos/2026-04/pptx/FIP_VANTRUST_LIQUIDEZ_ALTO_CAPITAL.pptx
+++ b/folletos/2026-04/pptx/FIP_VANTRUST_LIQUIDEZ_ALTO_CAPITAL.pptx
@@ -2927,7 +2927,7 @@
                 <a:ea typeface="Calibri" pitchFamily="34" charset="-122"/>
                 <a:cs typeface="Calibri" pitchFamily="34" charset="-120"/>
               </a:rPr>
-              <a:t>prueba CLP</a:t>
+              <a:t>prueba 2 CLP</a:t>
             </a:r>
             <a:endParaRPr lang="en-US" sz="800" dirty="0"/>
           </a:p>

--- a/folletos/2026-04/pptx/FIP_VANTRUST_LIQUIDEZ_ALTO_CAPITAL.pptx
+++ b/folletos/2026-04/pptx/FIP_VANTRUST_LIQUIDEZ_ALTO_CAPITAL.pptx
@@ -5363,7 +5363,7 @@
                 <a:ea typeface="Calibri" pitchFamily="34" charset="-122"/>
                 <a:cs typeface="Calibri" pitchFamily="34" charset="-120"/>
               </a:rPr>
-              <a:t>prueba CLP</a:t>
+              <a:t>prueba 3 CLP</a:t>
             </a:r>
             <a:endParaRPr lang="en-US" sz="800" dirty="0"/>
           </a:p>

--- a/folletos/2026-04/pptx/FIP_VANTRUST_LIQUIDEZ_ALTO_CAPITAL.pptx
+++ b/folletos/2026-04/pptx/FIP_VANTRUST_LIQUIDEZ_ALTO_CAPITAL.pptx
@@ -6323,7 +6323,7 @@
                 <a:ea typeface="Calibri" pitchFamily="34" charset="-122"/>
                 <a:cs typeface="Calibri" pitchFamily="34" charset="-120"/>
               </a:rPr>
-              <a:t>prueba CLP</a:t>
+              <a:t>prueba 4 CLP</a:t>
             </a:r>
             <a:endParaRPr lang="en-US" sz="800" dirty="0"/>
           </a:p>

--- a/folletos/2026-04/pptx/FIP_VANTRUST_LIQUIDEZ_ALTO_CAPITAL.pptx
+++ b/folletos/2026-04/pptx/FIP_VANTRUST_LIQUIDEZ_ALTO_CAPITAL.pptx
@@ -6373,7 +6373,7 @@
                 <a:ea typeface="Calibri" pitchFamily="34" charset="-122"/>
                 <a:cs typeface="Calibri" pitchFamily="34" charset="-120"/>
               </a:rPr>
-              <a:t>prueba CLP</a:t>
+              <a:t>prueba 6 CLP</a:t>
             </a:r>
             <a:endParaRPr lang="en-US" sz="800" dirty="0"/>
           </a:p>

--- a/folletos/2026-04/pptx/FIP_VANTRUST_LIQUIDEZ_ALTO_CAPITAL.pptx
+++ b/folletos/2026-04/pptx/FIP_VANTRUST_LIQUIDEZ_ALTO_CAPITAL.pptx
@@ -6373,7 +6373,7 @@
                 <a:ea typeface="Calibri" pitchFamily="34" charset="-122"/>
                 <a:cs typeface="Calibri" pitchFamily="34" charset="-120"/>
               </a:rPr>
-              <a:t>prueba 6 CLP</a:t>
+              <a:t>prueba CLP</a:t>
             </a:r>
             <a:endParaRPr lang="en-US" sz="800" dirty="0"/>
           </a:p>
@@ -33352,13 +33352,91 @@
       </p:sp>
       <p:sp>
         <p:nvSpPr>
-          <p:cNvPr id="8" name="Shape 6"/>
+          <p:cNvPr id="8" name="Text 6"/>
           <p:cNvSpPr/>
           <p:nvPr/>
         </p:nvSpPr>
         <p:spPr>
           <a:xfrm>
-            <a:off x="118872" y="1810512"/>
+            <a:off x="118872" y="1719072"/>
+            <a:ext cx="1188720" cy="173736"/>
+          </a:xfrm>
+          <a:prstGeom prst="rect">
+            <a:avLst/>
+          </a:prstGeom>
+          <a:noFill/>
+          <a:ln/>
+        </p:spPr>
+        <p:txBody>
+          <a:bodyPr wrap="square" lIns="0" tIns="0" rIns="0" bIns="0" rtlCol="0" anchor="ctr"/>
+          <a:lstStyle/>
+          <a:p>
+            <a:pPr indent="0" marL="0">
+              <a:buNone/>
+            </a:pPr>
+            <a:r>
+              <a:rPr lang="en-US" sz="750" dirty="0">
+                <a:solidFill>
+                  <a:srgbClr val="000000"/>
+                </a:solidFill>
+                <a:latin typeface="Calibri" pitchFamily="34" charset="0"/>
+                <a:ea typeface="Calibri" pitchFamily="34" charset="-122"/>
+                <a:cs typeface="Calibri" pitchFamily="34" charset="-120"/>
+              </a:rPr>
+              <a:t>CLP</a:t>
+            </a:r>
+            <a:endParaRPr lang="en-US" sz="750" dirty="0"/>
+          </a:p>
+        </p:txBody>
+      </p:sp>
+      <p:sp>
+        <p:nvSpPr>
+          <p:cNvPr id="9" name="Text 7"/>
+          <p:cNvSpPr/>
+          <p:nvPr/>
+        </p:nvSpPr>
+        <p:spPr>
+          <a:xfrm>
+            <a:off x="1307592" y="1719072"/>
+            <a:ext cx="1024128" cy="173736"/>
+          </a:xfrm>
+          <a:prstGeom prst="rect">
+            <a:avLst/>
+          </a:prstGeom>
+          <a:noFill/>
+          <a:ln/>
+        </p:spPr>
+        <p:txBody>
+          <a:bodyPr wrap="square" lIns="0" tIns="0" rIns="0" bIns="0" rtlCol="0" anchor="ctr"/>
+          <a:lstStyle/>
+          <a:p>
+            <a:pPr algn="r" indent="0" marL="0">
+              <a:buNone/>
+            </a:pPr>
+            <a:r>
+              <a:rPr lang="en-US" sz="750" b="1" dirty="0">
+                <a:solidFill>
+                  <a:srgbClr val="000000"/>
+                </a:solidFill>
+                <a:latin typeface="Calibri" pitchFamily="34" charset="0"/>
+                <a:ea typeface="Calibri" pitchFamily="34" charset="-122"/>
+                <a:cs typeface="Calibri" pitchFamily="34" charset="-120"/>
+              </a:rPr>
+              <a:t>100,00%</a:t>
+            </a:r>
+            <a:endParaRPr lang="en-US" sz="750" dirty="0"/>
+          </a:p>
+        </p:txBody>
+      </p:sp>
+      <p:sp>
+        <p:nvSpPr>
+          <p:cNvPr id="10" name="Shape 8"/>
+          <p:cNvSpPr/>
+          <p:nvPr/>
+        </p:nvSpPr>
+        <p:spPr>
+          <a:xfrm>
+            <a:off x="118872" y="2002536"/>
             <a:ext cx="2212848" cy="0"/>
           </a:xfrm>
           <a:prstGeom prst="line">
@@ -33375,13 +33453,13 @@
       </p:sp>
       <p:sp>
         <p:nvSpPr>
-          <p:cNvPr id="9" name="Text 7"/>
+          <p:cNvPr id="11" name="Text 9"/>
           <p:cNvSpPr/>
           <p:nvPr/>
         </p:nvSpPr>
         <p:spPr>
           <a:xfrm>
-            <a:off x="118872" y="1901952"/>
+            <a:off x="118872" y="2093976"/>
             <a:ext cx="2212848" cy="164592"/>
           </a:xfrm>
           <a:prstGeom prst="rect">
@@ -33414,13 +33492,13 @@
       </p:sp>
       <p:sp>
         <p:nvSpPr>
-          <p:cNvPr id="10" name="Shape 8"/>
+          <p:cNvPr id="12" name="Shape 10"/>
           <p:cNvSpPr/>
           <p:nvPr/>
         </p:nvSpPr>
         <p:spPr>
           <a:xfrm>
-            <a:off x="118872" y="2084832"/>
+            <a:off x="118872" y="2276856"/>
             <a:ext cx="2212848" cy="0"/>
           </a:xfrm>
           <a:prstGeom prst="line">
@@ -33437,13 +33515,169 @@
       </p:sp>
       <p:sp>
         <p:nvSpPr>
-          <p:cNvPr id="11" name="Text 9"/>
+          <p:cNvPr id="13" name="Text 11"/>
           <p:cNvSpPr/>
           <p:nvPr/>
         </p:nvSpPr>
         <p:spPr>
           <a:xfrm>
-            <a:off x="118872" y="2157984"/>
+            <a:off x="118872" y="2350008"/>
+            <a:ext cx="1371600" cy="164592"/>
+          </a:xfrm>
+          <a:prstGeom prst="rect">
+            <a:avLst/>
+          </a:prstGeom>
+          <a:noFill/>
+          <a:ln/>
+        </p:spPr>
+        <p:txBody>
+          <a:bodyPr wrap="square" lIns="0" tIns="0" rIns="0" bIns="0" rtlCol="0" anchor="ctr"/>
+          <a:lstStyle/>
+          <a:p>
+            <a:pPr indent="0" marL="0">
+              <a:buNone/>
+            </a:pPr>
+            <a:r>
+              <a:rPr lang="en-US" sz="700" dirty="0">
+                <a:solidFill>
+                  <a:srgbClr val="000000"/>
+                </a:solidFill>
+                <a:latin typeface="Calibri" pitchFamily="34" charset="0"/>
+                <a:ea typeface="Calibri" pitchFamily="34" charset="-122"/>
+                <a:cs typeface="Calibri" pitchFamily="34" charset="-120"/>
+              </a:rPr>
+              <a:t>Inmob</a:t>
+            </a:r>
+            <a:endParaRPr lang="en-US" sz="700" dirty="0"/>
+          </a:p>
+        </p:txBody>
+      </p:sp>
+      <p:sp>
+        <p:nvSpPr>
+          <p:cNvPr id="14" name="Text 12"/>
+          <p:cNvSpPr/>
+          <p:nvPr/>
+        </p:nvSpPr>
+        <p:spPr>
+          <a:xfrm>
+            <a:off x="1490472" y="2350008"/>
+            <a:ext cx="841248" cy="164592"/>
+          </a:xfrm>
+          <a:prstGeom prst="rect">
+            <a:avLst/>
+          </a:prstGeom>
+          <a:noFill/>
+          <a:ln/>
+        </p:spPr>
+        <p:txBody>
+          <a:bodyPr wrap="square" lIns="0" tIns="0" rIns="0" bIns="0" rtlCol="0" anchor="ctr"/>
+          <a:lstStyle/>
+          <a:p>
+            <a:pPr algn="r" indent="0" marL="0">
+              <a:buNone/>
+            </a:pPr>
+            <a:r>
+              <a:rPr lang="en-US" sz="700" b="1" dirty="0">
+                <a:solidFill>
+                  <a:srgbClr val="000000"/>
+                </a:solidFill>
+                <a:latin typeface="Calibri" pitchFamily="34" charset="0"/>
+                <a:ea typeface="Calibri" pitchFamily="34" charset="-122"/>
+                <a:cs typeface="Calibri" pitchFamily="34" charset="-120"/>
+              </a:rPr>
+              <a:t>57,39%</a:t>
+            </a:r>
+            <a:endParaRPr lang="en-US" sz="700" dirty="0"/>
+          </a:p>
+        </p:txBody>
+      </p:sp>
+      <p:sp>
+        <p:nvSpPr>
+          <p:cNvPr id="15" name="Text 13"/>
+          <p:cNvSpPr/>
+          <p:nvPr/>
+        </p:nvSpPr>
+        <p:spPr>
+          <a:xfrm>
+            <a:off x="118872" y="2523744"/>
+            <a:ext cx="1371600" cy="164592"/>
+          </a:xfrm>
+          <a:prstGeom prst="rect">
+            <a:avLst/>
+          </a:prstGeom>
+          <a:noFill/>
+          <a:ln/>
+        </p:spPr>
+        <p:txBody>
+          <a:bodyPr wrap="square" lIns="0" tIns="0" rIns="0" bIns="0" rtlCol="0" anchor="ctr"/>
+          <a:lstStyle/>
+          <a:p>
+            <a:pPr indent="0" marL="0">
+              <a:buNone/>
+            </a:pPr>
+            <a:r>
+              <a:rPr lang="en-US" sz="700" dirty="0">
+                <a:solidFill>
+                  <a:srgbClr val="000000"/>
+                </a:solidFill>
+                <a:latin typeface="Calibri" pitchFamily="34" charset="0"/>
+                <a:ea typeface="Calibri" pitchFamily="34" charset="-122"/>
+                <a:cs typeface="Calibri" pitchFamily="34" charset="-120"/>
+              </a:rPr>
+              <a:t>Revisar</a:t>
+            </a:r>
+            <a:endParaRPr lang="en-US" sz="700" dirty="0"/>
+          </a:p>
+        </p:txBody>
+      </p:sp>
+      <p:sp>
+        <p:nvSpPr>
+          <p:cNvPr id="16" name="Text 14"/>
+          <p:cNvSpPr/>
+          <p:nvPr/>
+        </p:nvSpPr>
+        <p:spPr>
+          <a:xfrm>
+            <a:off x="1490472" y="2523744"/>
+            <a:ext cx="841248" cy="164592"/>
+          </a:xfrm>
+          <a:prstGeom prst="rect">
+            <a:avLst/>
+          </a:prstGeom>
+          <a:noFill/>
+          <a:ln/>
+        </p:spPr>
+        <p:txBody>
+          <a:bodyPr wrap="square" lIns="0" tIns="0" rIns="0" bIns="0" rtlCol="0" anchor="ctr"/>
+          <a:lstStyle/>
+          <a:p>
+            <a:pPr algn="r" indent="0" marL="0">
+              <a:buNone/>
+            </a:pPr>
+            <a:r>
+              <a:rPr lang="en-US" sz="700" b="1" dirty="0">
+                <a:solidFill>
+                  <a:srgbClr val="000000"/>
+                </a:solidFill>
+                <a:latin typeface="Calibri" pitchFamily="34" charset="0"/>
+                <a:ea typeface="Calibri" pitchFamily="34" charset="-122"/>
+                <a:cs typeface="Calibri" pitchFamily="34" charset="-120"/>
+              </a:rPr>
+              <a:t>24,88%</a:t>
+            </a:r>
+            <a:endParaRPr lang="en-US" sz="700" dirty="0"/>
+          </a:p>
+        </p:txBody>
+      </p:sp>
+      <p:sp>
+        <p:nvSpPr>
+          <p:cNvPr id="17" name="Text 15"/>
+          <p:cNvSpPr/>
+          <p:nvPr/>
+        </p:nvSpPr>
+        <p:spPr>
+          <a:xfrm>
+            <a:off x="118872" y="2697480"/>
             <a:ext cx="1371600" cy="164592"/>
           </a:xfrm>
           <a:prstGeom prst="rect">
@@ -33476,13 +33710,13 @@
       </p:sp>
       <p:sp>
         <p:nvSpPr>
-          <p:cNvPr id="12" name="Text 10"/>
+          <p:cNvPr id="18" name="Text 16"/>
           <p:cNvSpPr/>
           <p:nvPr/>
         </p:nvSpPr>
         <p:spPr>
           <a:xfrm>
-            <a:off x="1490472" y="2157984"/>
+            <a:off x="1490472" y="2697480"/>
             <a:ext cx="841248" cy="164592"/>
           </a:xfrm>
           <a:prstGeom prst="rect">
@@ -33507,7 +33741,7 @@
                 <a:ea typeface="Calibri" pitchFamily="34" charset="-122"/>
                 <a:cs typeface="Calibri" pitchFamily="34" charset="-120"/>
               </a:rPr>
-              <a:t>100,00%</a:t>
+              <a:t>17,73%</a:t>
             </a:r>
             <a:endParaRPr lang="en-US" sz="700" dirty="0"/>
           </a:p>
@@ -33515,13 +33749,13 @@
       </p:sp>
       <p:sp>
         <p:nvSpPr>
-          <p:cNvPr id="13" name="Shape 11"/>
+          <p:cNvPr id="19" name="Shape 17"/>
           <p:cNvSpPr/>
           <p:nvPr/>
         </p:nvSpPr>
         <p:spPr>
           <a:xfrm>
-            <a:off x="118872" y="2423160"/>
+            <a:off x="118872" y="2962656"/>
             <a:ext cx="2212848" cy="0"/>
           </a:xfrm>
           <a:prstGeom prst="line">
@@ -33538,13 +33772,13 @@
       </p:sp>
       <p:sp>
         <p:nvSpPr>
-          <p:cNvPr id="14" name="Text 12"/>
+          <p:cNvPr id="20" name="Text 18"/>
           <p:cNvSpPr/>
           <p:nvPr/>
         </p:nvSpPr>
         <p:spPr>
           <a:xfrm>
-            <a:off x="118872" y="2514600"/>
+            <a:off x="118872" y="3054096"/>
             <a:ext cx="2212848" cy="164592"/>
           </a:xfrm>
           <a:prstGeom prst="rect">
@@ -33577,13 +33811,13 @@
       </p:sp>
       <p:sp>
         <p:nvSpPr>
-          <p:cNvPr id="15" name="Shape 13"/>
+          <p:cNvPr id="21" name="Shape 19"/>
           <p:cNvSpPr/>
           <p:nvPr/>
         </p:nvSpPr>
         <p:spPr>
           <a:xfrm>
-            <a:off x="118872" y="2697480"/>
+            <a:off x="118872" y="3236976"/>
             <a:ext cx="2212848" cy="0"/>
           </a:xfrm>
           <a:prstGeom prst="line">
@@ -33600,13 +33834,13 @@
       </p:sp>
       <p:sp>
         <p:nvSpPr>
-          <p:cNvPr id="16" name="Text 14"/>
+          <p:cNvPr id="22" name="Text 20"/>
           <p:cNvSpPr/>
           <p:nvPr/>
         </p:nvSpPr>
         <p:spPr>
           <a:xfrm>
-            <a:off x="118872" y="2770632"/>
+            <a:off x="118872" y="3310128"/>
             <a:ext cx="1371600" cy="182880"/>
           </a:xfrm>
           <a:prstGeom prst="rect">
@@ -33639,13 +33873,13 @@
       </p:sp>
       <p:sp>
         <p:nvSpPr>
-          <p:cNvPr id="17" name="Text 15"/>
+          <p:cNvPr id="23" name="Text 21"/>
           <p:cNvSpPr/>
           <p:nvPr/>
         </p:nvSpPr>
         <p:spPr>
           <a:xfrm>
-            <a:off x="1490472" y="2770632"/>
+            <a:off x="1490472" y="3310128"/>
             <a:ext cx="841248" cy="182880"/>
           </a:xfrm>
           <a:prstGeom prst="rect">
@@ -33670,7 +33904,7 @@
                 <a:ea typeface="Calibri" pitchFamily="34" charset="-122"/>
                 <a:cs typeface="Calibri" pitchFamily="34" charset="-120"/>
               </a:rPr>
-              <a:t>63,16%</a:t>
+              <a:t>65,32%</a:t>
             </a:r>
             <a:endParaRPr lang="en-US" sz="750" dirty="0"/>
           </a:p>
@@ -33678,13 +33912,13 @@
       </p:sp>
       <p:sp>
         <p:nvSpPr>
-          <p:cNvPr id="18" name="Text 16"/>
+          <p:cNvPr id="24" name="Text 22"/>
           <p:cNvSpPr/>
           <p:nvPr/>
         </p:nvSpPr>
         <p:spPr>
           <a:xfrm>
-            <a:off x="118872" y="2971800"/>
+            <a:off x="118872" y="3511296"/>
             <a:ext cx="1371600" cy="182880"/>
           </a:xfrm>
           <a:prstGeom prst="rect">
@@ -33717,13 +33951,13 @@
       </p:sp>
       <p:sp>
         <p:nvSpPr>
-          <p:cNvPr id="19" name="Text 17"/>
+          <p:cNvPr id="25" name="Text 23"/>
           <p:cNvSpPr/>
           <p:nvPr/>
         </p:nvSpPr>
         <p:spPr>
           <a:xfrm>
-            <a:off x="1490472" y="2971800"/>
+            <a:off x="1490472" y="3511296"/>
             <a:ext cx="841248" cy="182880"/>
           </a:xfrm>
           <a:prstGeom prst="rect">
@@ -33748,7 +33982,7 @@
                 <a:ea typeface="Calibri" pitchFamily="34" charset="-122"/>
                 <a:cs typeface="Calibri" pitchFamily="34" charset="-120"/>
               </a:rPr>
-              <a:t>28,00%</a:t>
+              <a:t>11,11%</a:t>
             </a:r>
             <a:endParaRPr lang="en-US" sz="750" dirty="0"/>
           </a:p>
@@ -33756,13 +33990,13 @@
       </p:sp>
       <p:sp>
         <p:nvSpPr>
-          <p:cNvPr id="20" name="Text 18"/>
+          <p:cNvPr id="26" name="Text 24"/>
           <p:cNvSpPr/>
           <p:nvPr/>
         </p:nvSpPr>
         <p:spPr>
           <a:xfrm>
-            <a:off x="118872" y="3172968"/>
+            <a:off x="118872" y="3712464"/>
             <a:ext cx="1371600" cy="182880"/>
           </a:xfrm>
           <a:prstGeom prst="rect">
@@ -33795,13 +34029,13 @@
       </p:sp>
       <p:sp>
         <p:nvSpPr>
-          <p:cNvPr id="21" name="Text 19"/>
+          <p:cNvPr id="27" name="Text 25"/>
           <p:cNvSpPr/>
           <p:nvPr/>
         </p:nvSpPr>
         <p:spPr>
           <a:xfrm>
-            <a:off x="1490472" y="3172968"/>
+            <a:off x="1490472" y="3712464"/>
             <a:ext cx="841248" cy="182880"/>
           </a:xfrm>
           <a:prstGeom prst="rect">
@@ -33826,7 +34060,7 @@
                 <a:ea typeface="Calibri" pitchFamily="34" charset="-122"/>
                 <a:cs typeface="Calibri" pitchFamily="34" charset="-120"/>
               </a:rPr>
-              <a:t>8,84%</a:t>
+              <a:t>23,57%</a:t>
             </a:r>
             <a:endParaRPr lang="en-US" sz="750" dirty="0"/>
           </a:p>
@@ -33834,13 +34068,13 @@
       </p:sp>
       <p:sp>
         <p:nvSpPr>
-          <p:cNvPr id="22" name="Text 20"/>
+          <p:cNvPr id="28" name="Text 26"/>
           <p:cNvSpPr/>
           <p:nvPr/>
         </p:nvSpPr>
         <p:spPr>
           <a:xfrm>
-            <a:off x="118872" y="3374136"/>
+            <a:off x="118872" y="3913632"/>
             <a:ext cx="1371600" cy="182880"/>
           </a:xfrm>
           <a:prstGeom prst="rect">
@@ -33873,13 +34107,13 @@
       </p:sp>
       <p:sp>
         <p:nvSpPr>
-          <p:cNvPr id="23" name="Text 21"/>
+          <p:cNvPr id="29" name="Text 27"/>
           <p:cNvSpPr/>
           <p:nvPr/>
         </p:nvSpPr>
         <p:spPr>
           <a:xfrm>
-            <a:off x="1490472" y="3374136"/>
+            <a:off x="1490472" y="3913632"/>
             <a:ext cx="841248" cy="182880"/>
           </a:xfrm>
           <a:prstGeom prst="rect">
@@ -33912,7 +34146,7 @@
       </p:sp>
       <p:sp>
         <p:nvSpPr>
-          <p:cNvPr id="24" name="Text 22"/>
+          <p:cNvPr id="30" name="Text 28"/>
           <p:cNvSpPr/>
           <p:nvPr/>
         </p:nvSpPr>
@@ -33951,7 +34185,7 @@
       </p:sp>
       <p:sp>
         <p:nvSpPr>
-          <p:cNvPr id="25" name="Shape 23"/>
+          <p:cNvPr id="31" name="Shape 29"/>
           <p:cNvSpPr/>
           <p:nvPr/>
         </p:nvSpPr>
@@ -33974,7 +34208,7 @@
       </p:sp>
       <p:sp>
         <p:nvSpPr>
-          <p:cNvPr id="26" name="Text 24"/>
+          <p:cNvPr id="32" name="Text 30"/>
           <p:cNvSpPr/>
           <p:nvPr/>
         </p:nvSpPr>
@@ -34030,7 +34264,7 @@
       </p:sp>
       <p:sp>
         <p:nvSpPr>
-          <p:cNvPr id="27" name="Text 25"/>
+          <p:cNvPr id="33" name="Text 31"/>
           <p:cNvSpPr/>
           <p:nvPr/>
         </p:nvSpPr>
@@ -34086,7 +34320,7 @@
       </p:sp>
       <p:sp>
         <p:nvSpPr>
-          <p:cNvPr id="28" name="Text 26"/>
+          <p:cNvPr id="34" name="Text 32"/>
           <p:cNvSpPr/>
           <p:nvPr/>
         </p:nvSpPr>
@@ -34142,7 +34376,7 @@
       </p:sp>
       <p:sp>
         <p:nvSpPr>
-          <p:cNvPr id="29" name="Text 27"/>
+          <p:cNvPr id="35" name="Text 33"/>
           <p:cNvSpPr/>
           <p:nvPr/>
         </p:nvSpPr>
@@ -34198,7 +34432,7 @@
       </p:sp>
       <p:sp>
         <p:nvSpPr>
-          <p:cNvPr id="30" name="Text 28"/>
+          <p:cNvPr id="36" name="Text 34"/>
           <p:cNvSpPr/>
           <p:nvPr/>
         </p:nvSpPr>
@@ -34254,7 +34488,7 @@
       </p:sp>
       <p:sp>
         <p:nvSpPr>
-          <p:cNvPr id="31" name="Text 29"/>
+          <p:cNvPr id="37" name="Text 35"/>
           <p:cNvSpPr/>
           <p:nvPr/>
         </p:nvSpPr>
@@ -34310,7 +34544,7 @@
       </p:sp>
       <p:sp>
         <p:nvSpPr>
-          <p:cNvPr id="32" name="Text 30"/>
+          <p:cNvPr id="38" name="Text 36"/>
           <p:cNvSpPr/>
           <p:nvPr/>
         </p:nvSpPr>
@@ -34366,7 +34600,7 @@
       </p:sp>
       <p:sp>
         <p:nvSpPr>
-          <p:cNvPr id="33" name="Text 31"/>
+          <p:cNvPr id="39" name="Text 37"/>
           <p:cNvSpPr/>
           <p:nvPr/>
         </p:nvSpPr>
@@ -34422,7 +34656,7 @@
       </p:sp>
       <p:sp>
         <p:nvSpPr>
-          <p:cNvPr id="34" name="Text 32"/>
+          <p:cNvPr id="40" name="Text 38"/>
           <p:cNvSpPr/>
           <p:nvPr/>
         </p:nvSpPr>
@@ -34478,7 +34712,7 @@
       </p:sp>
       <p:sp>
         <p:nvSpPr>
-          <p:cNvPr id="35" name="Shape 33"/>
+          <p:cNvPr id="41" name="Shape 39"/>
           <p:cNvSpPr/>
           <p:nvPr/>
         </p:nvSpPr>
@@ -34501,7 +34735,7 @@
       </p:sp>
       <p:sp>
         <p:nvSpPr>
-          <p:cNvPr id="36" name="Text 34"/>
+          <p:cNvPr id="42" name="Text 40"/>
           <p:cNvSpPr/>
           <p:nvPr/>
         </p:nvSpPr>
@@ -34540,7 +34774,7 @@
       </p:sp>
       <p:sp>
         <p:nvSpPr>
-          <p:cNvPr id="37" name="Shape 35"/>
+          <p:cNvPr id="43" name="Shape 41"/>
           <p:cNvSpPr/>
           <p:nvPr/>
         </p:nvSpPr>
@@ -34563,7 +34797,7 @@
       </p:sp>
       <p:sp>
         <p:nvSpPr>
-          <p:cNvPr id="38" name="Text 36"/>
+          <p:cNvPr id="44" name="Text 42"/>
           <p:cNvSpPr/>
           <p:nvPr/>
         </p:nvSpPr>

--- a/folletos/2026-04/pptx/FIP_VANTRUST_LIQUIDEZ_ALTO_CAPITAL.pptx
+++ b/folletos/2026-04/pptx/FIP_VANTRUST_LIQUIDEZ_ALTO_CAPITAL.pptx
@@ -6373,7 +6373,7 @@
                 <a:ea typeface="Calibri" pitchFamily="34" charset="-122"/>
                 <a:cs typeface="Calibri" pitchFamily="34" charset="-120"/>
               </a:rPr>
-              <a:t>prueba CLP</a:t>
+              <a:t>prueba 8 CLP</a:t>
             </a:r>
             <a:endParaRPr lang="en-US" sz="800" dirty="0"/>
           </a:p>

--- a/folletos/2026-04/pptx/FIP_VANTRUST_LIQUIDEZ_ALTO_CAPITAL.pptx
+++ b/folletos/2026-04/pptx/FIP_VANTRUST_LIQUIDEZ_ALTO_CAPITAL.pptx
@@ -3131,7 +3131,7 @@
                 <a:ea typeface="Calibri" pitchFamily="34" charset="-122"/>
                 <a:cs typeface="Calibri" pitchFamily="34" charset="-120"/>
               </a:rPr>
-              <a:t>prueba CLP</a:t>
+              <a:t>prueba 10 CLP</a:t>
             </a:r>
             <a:endParaRPr lang="en-US" sz="800" dirty="0"/>
           </a:p>

--- a/folletos/2026-04/pptx/FIP_VANTRUST_LIQUIDEZ_ALTO_CAPITAL.pptx
+++ b/folletos/2026-04/pptx/FIP_VANTRUST_LIQUIDEZ_ALTO_CAPITAL.pptx
@@ -3131,7 +3131,7 @@
                 <a:ea typeface="Calibri" pitchFamily="34" charset="-122"/>
                 <a:cs typeface="Calibri" pitchFamily="34" charset="-120"/>
               </a:rPr>
-              <a:t>prueba 10 CLP</a:t>
+              <a:t>prueba 11 CLP</a:t>
             </a:r>
             <a:endParaRPr lang="en-US" sz="800" dirty="0"/>
           </a:p>

--- a/folletos/2026-04/pptx/FIP_VANTRUST_LIQUIDEZ_ALTO_CAPITAL.pptx
+++ b/folletos/2026-04/pptx/FIP_VANTRUST_LIQUIDEZ_ALTO_CAPITAL.pptx
@@ -3131,7 +3131,7 @@
                 <a:ea typeface="Calibri" pitchFamily="34" charset="-122"/>
                 <a:cs typeface="Calibri" pitchFamily="34" charset="-120"/>
               </a:rPr>
-              <a:t>prueba CLP</a:t>
+              <a:t>prueba 11 CLP</a:t>
             </a:r>
             <a:endParaRPr lang="en-US" sz="800" dirty="0"/>
           </a:p>

--- a/folletos/2026-04/pptx/FIP_VANTRUST_LIQUIDEZ_ALTO_CAPITAL.pptx
+++ b/folletos/2026-04/pptx/FIP_VANTRUST_LIQUIDEZ_ALTO_CAPITAL.pptx
@@ -3131,7 +3131,7 @@
                 <a:ea typeface="Calibri" pitchFamily="34" charset="-122"/>
                 <a:cs typeface="Calibri" pitchFamily="34" charset="-120"/>
               </a:rPr>
-              <a:t>prueba 11 CLP</a:t>
+              <a:t>prueba 12 CLP</a:t>
             </a:r>
             <a:endParaRPr lang="en-US" sz="800" dirty="0"/>
           </a:p>

--- a/folletos/2026-04/pptx/FIP_VANTRUST_LIQUIDEZ_ALTO_CAPITAL.pptx
+++ b/folletos/2026-04/pptx/FIP_VANTRUST_LIQUIDEZ_ALTO_CAPITAL.pptx
@@ -3113,7 +3113,7 @@
                 <a:ea typeface="Calibri" pitchFamily="34" charset="-122"/>
                 <a:cs typeface="Calibri" pitchFamily="34" charset="-120"/>
               </a:rPr>
-              <a:t>prueba CLP</a:t>
+              <a:t>prueba 12 CLP</a:t>
             </a:r>
             <a:endParaRPr lang="en-US" sz="800" dirty="0"/>
           </a:p>

--- a/folletos/2026-04/pptx/FIP_VANTRUST_LIQUIDEZ_ALTO_CAPITAL.pptx
+++ b/folletos/2026-04/pptx/FIP_VANTRUST_LIQUIDEZ_ALTO_CAPITAL.pptx
@@ -3113,7 +3113,7 @@
                 <a:ea typeface="Calibri" pitchFamily="34" charset="-122"/>
                 <a:cs typeface="Calibri" pitchFamily="34" charset="-120"/>
               </a:rPr>
-              <a:t>prueba 12 CLP</a:t>
+              <a:t>prueba CLP</a:t>
             </a:r>
             <a:endParaRPr lang="en-US" sz="800" dirty="0"/>
           </a:p>
@@ -7144,7 +7144,7 @@
                           <a:ea typeface="Calibri" pitchFamily="34" charset="-122"/>
                           <a:cs typeface="Calibri" pitchFamily="34" charset="-120"/>
                         </a:rPr>
-                        <a:t>0.00%</a:t>
+                        <a:t>0.20%</a:t>
                       </a:r>
                       <a:endParaRPr lang="en-US" sz="500" dirty="0">
                         <a:latin typeface="Calibri" charset="0"/>
@@ -7209,7 +7209,7 @@
                           <a:ea typeface="Calibri" pitchFamily="34" charset="-122"/>
                           <a:cs typeface="Calibri" pitchFamily="34" charset="-120"/>
                         </a:rPr>
-                        <a:t>0.00%</a:t>
+                        <a:t>0.20%</a:t>
                       </a:r>
                       <a:endParaRPr lang="en-US" sz="500" dirty="0">
                         <a:latin typeface="Calibri" charset="0"/>
@@ -7274,7 +7274,7 @@
                           <a:ea typeface="Calibri" pitchFamily="34" charset="-122"/>
                           <a:cs typeface="Calibri" pitchFamily="34" charset="-120"/>
                         </a:rPr>
-                        <a:t>0.00%</a:t>
+                        <a:t>0.21%</a:t>
                       </a:r>
                       <a:endParaRPr lang="en-US" sz="500" dirty="0">
                         <a:latin typeface="Calibri" charset="0"/>
@@ -7339,7 +7339,7 @@
                           <a:ea typeface="Calibri" pitchFamily="34" charset="-122"/>
                           <a:cs typeface="Calibri" pitchFamily="34" charset="-120"/>
                         </a:rPr>
-                        <a:t>0.00%</a:t>
+                        <a:t>0.20%</a:t>
                       </a:r>
                       <a:endParaRPr lang="en-US" sz="500" dirty="0">
                         <a:latin typeface="Calibri" charset="0"/>
@@ -7404,7 +7404,7 @@
                           <a:ea typeface="Calibri" pitchFamily="34" charset="-122"/>
                           <a:cs typeface="Calibri" pitchFamily="34" charset="-120"/>
                         </a:rPr>
-                        <a:t>0.00%</a:t>
+                        <a:t>0.21%</a:t>
                       </a:r>
                       <a:endParaRPr lang="en-US" sz="500" dirty="0">
                         <a:latin typeface="Calibri" charset="0"/>
@@ -7469,7 +7469,7 @@
                           <a:ea typeface="Calibri" pitchFamily="34" charset="-122"/>
                           <a:cs typeface="Calibri" pitchFamily="34" charset="-120"/>
                         </a:rPr>
-                        <a:t>0.00%</a:t>
+                        <a:t>0.22%</a:t>
                       </a:r>
                       <a:endParaRPr lang="en-US" sz="500" dirty="0">
                         <a:latin typeface="Calibri" charset="0"/>
@@ -7534,7 +7534,7 @@
                           <a:ea typeface="Calibri" pitchFamily="34" charset="-122"/>
                           <a:cs typeface="Calibri" pitchFamily="34" charset="-120"/>
                         </a:rPr>
-                        <a:t>0.00%</a:t>
+                        <a:t>0.22%</a:t>
                       </a:r>
                       <a:endParaRPr lang="en-US" sz="500" dirty="0">
                         <a:latin typeface="Calibri" charset="0"/>
@@ -7599,7 +7599,7 @@
                           <a:ea typeface="Calibri" pitchFamily="34" charset="-122"/>
                           <a:cs typeface="Calibri" pitchFamily="34" charset="-120"/>
                         </a:rPr>
-                        <a:t>0.00%</a:t>
+                        <a:t>0.22%</a:t>
                       </a:r>
                       <a:endParaRPr lang="en-US" sz="500" dirty="0">
                         <a:latin typeface="Calibri" charset="0"/>
@@ -7664,7 +7664,7 @@
                           <a:ea typeface="Calibri" pitchFamily="34" charset="-122"/>
                           <a:cs typeface="Calibri" pitchFamily="34" charset="-120"/>
                         </a:rPr>
-                        <a:t>0.00%</a:t>
+                        <a:t>0.22%</a:t>
                       </a:r>
                       <a:endParaRPr lang="en-US" sz="500" dirty="0">
                         <a:latin typeface="Calibri" charset="0"/>
@@ -7729,7 +7729,7 @@
                           <a:ea typeface="Calibri" pitchFamily="34" charset="-122"/>
                           <a:cs typeface="Calibri" pitchFamily="34" charset="-120"/>
                         </a:rPr>
-                        <a:t>0.00%</a:t>
+                        <a:t>0.22%</a:t>
                       </a:r>
                       <a:endParaRPr lang="en-US" sz="500" dirty="0">
                         <a:latin typeface="Calibri" charset="0"/>
@@ -7794,7 +7794,7 @@
                           <a:ea typeface="Calibri" pitchFamily="34" charset="-122"/>
                           <a:cs typeface="Calibri" pitchFamily="34" charset="-120"/>
                         </a:rPr>
-                        <a:t>0.00%</a:t>
+                        <a:t>0.22%</a:t>
                       </a:r>
                       <a:endParaRPr lang="en-US" sz="500" dirty="0">
                         <a:latin typeface="Calibri" charset="0"/>
@@ -7924,7 +7924,7 @@
                           <a:ea typeface="Calibri" pitchFamily="34" charset="-122"/>
                           <a:cs typeface="Calibri" pitchFamily="34" charset="-120"/>
                         </a:rPr>
-                        <a:t>3.12%</a:t>
+                        <a:t>5.54%</a:t>
                       </a:r>
                       <a:endParaRPr lang="en-US" sz="500" dirty="0">
                         <a:latin typeface="Calibri" charset="0"/>
@@ -8596,7 +8596,7 @@
                           <a:ea typeface="Calibri" pitchFamily="34" charset="-122"/>
                           <a:cs typeface="Calibri" pitchFamily="34" charset="-120"/>
                         </a:rPr>
-                        <a:t>0.00%</a:t>
+                        <a:t>0.29%</a:t>
                       </a:r>
                       <a:endParaRPr lang="en-US" sz="500" dirty="0">
                         <a:latin typeface="Calibri" charset="0"/>
@@ -8661,7 +8661,7 @@
                           <a:ea typeface="Calibri" pitchFamily="34" charset="-122"/>
                           <a:cs typeface="Calibri" pitchFamily="34" charset="-120"/>
                         </a:rPr>
-                        <a:t>0.00%</a:t>
+                        <a:t>0.29%</a:t>
                       </a:r>
                       <a:endParaRPr lang="en-US" sz="500" dirty="0">
                         <a:latin typeface="Calibri" charset="0"/>
@@ -8726,7 +8726,7 @@
                           <a:ea typeface="Calibri" pitchFamily="34" charset="-122"/>
                           <a:cs typeface="Calibri" pitchFamily="34" charset="-120"/>
                         </a:rPr>
-                        <a:t>0.00%</a:t>
+                        <a:t>0.39%</a:t>
                       </a:r>
                       <a:endParaRPr lang="en-US" sz="500" dirty="0">
                         <a:latin typeface="Calibri" charset="0"/>
@@ -8791,7 +8791,7 @@
                           <a:ea typeface="Calibri" pitchFamily="34" charset="-122"/>
                           <a:cs typeface="Calibri" pitchFamily="34" charset="-120"/>
                         </a:rPr>
-                        <a:t>0.01%</a:t>
+                        <a:t>0.98%</a:t>
                       </a:r>
                       <a:endParaRPr lang="en-US" sz="500" dirty="0">
                         <a:latin typeface="Calibri" charset="0"/>
@@ -10019,7 +10019,7 @@
                           <a:ea typeface="Calibri" pitchFamily="34" charset="-122"/>
                           <a:cs typeface="Calibri" pitchFamily="34" charset="-120"/>
                         </a:rPr>
-                        <a:t>0.00%</a:t>
+                        <a:t>0.23%</a:t>
                       </a:r>
                       <a:endParaRPr lang="en-US" sz="500" dirty="0">
                         <a:latin typeface="Calibri" charset="0"/>
@@ -10084,7 +10084,7 @@
                           <a:ea typeface="Calibri" pitchFamily="34" charset="-122"/>
                           <a:cs typeface="Calibri" pitchFamily="34" charset="-120"/>
                         </a:rPr>
-                        <a:t>0.00%</a:t>
+                        <a:t>0.25%</a:t>
                       </a:r>
                       <a:endParaRPr lang="en-US" sz="500" dirty="0">
                         <a:latin typeface="Calibri" charset="0"/>
@@ -10149,7 +10149,7 @@
                           <a:ea typeface="Calibri" pitchFamily="34" charset="-122"/>
                           <a:cs typeface="Calibri" pitchFamily="34" charset="-120"/>
                         </a:rPr>
-                        <a:t>0.00%</a:t>
+                        <a:t>0.25%</a:t>
                       </a:r>
                       <a:endParaRPr lang="en-US" sz="500" dirty="0">
                         <a:latin typeface="Calibri" charset="0"/>
@@ -10214,7 +10214,7 @@
                           <a:ea typeface="Calibri" pitchFamily="34" charset="-122"/>
                           <a:cs typeface="Calibri" pitchFamily="34" charset="-120"/>
                         </a:rPr>
-                        <a:t>0.00%</a:t>
+                        <a:t>0.26%</a:t>
                       </a:r>
                       <a:endParaRPr lang="en-US" sz="500" dirty="0">
                         <a:latin typeface="Calibri" charset="0"/>
@@ -10279,7 +10279,7 @@
                           <a:ea typeface="Calibri" pitchFamily="34" charset="-122"/>
                           <a:cs typeface="Calibri" pitchFamily="34" charset="-120"/>
                         </a:rPr>
-                        <a:t>0.00%</a:t>
+                        <a:t>0.26%</a:t>
                       </a:r>
                       <a:endParaRPr lang="en-US" sz="500" dirty="0">
                         <a:latin typeface="Calibri" charset="0"/>
@@ -10344,7 +10344,7 @@
                           <a:ea typeface="Calibri" pitchFamily="34" charset="-122"/>
                           <a:cs typeface="Calibri" pitchFamily="34" charset="-120"/>
                         </a:rPr>
-                        <a:t>0.00%</a:t>
+                        <a:t>0.28%</a:t>
                       </a:r>
                       <a:endParaRPr lang="en-US" sz="500" dirty="0">
                         <a:latin typeface="Calibri" charset="0"/>
@@ -10409,7 +10409,7 @@
                           <a:ea typeface="Calibri" pitchFamily="34" charset="-122"/>
                           <a:cs typeface="Calibri" pitchFamily="34" charset="-120"/>
                         </a:rPr>
-                        <a:t>0.00%</a:t>
+                        <a:t>0.24%</a:t>
                       </a:r>
                       <a:endParaRPr lang="en-US" sz="500" dirty="0">
                         <a:latin typeface="Calibri" charset="0"/>
@@ -10474,7 +10474,7 @@
                           <a:ea typeface="Calibri" pitchFamily="34" charset="-122"/>
                           <a:cs typeface="Calibri" pitchFamily="34" charset="-120"/>
                         </a:rPr>
-                        <a:t>0.00%</a:t>
+                        <a:t>0.22%</a:t>
                       </a:r>
                       <a:endParaRPr lang="en-US" sz="500" dirty="0">
                         <a:latin typeface="Calibri" charset="0"/>
@@ -10539,7 +10539,7 @@
                           <a:ea typeface="Calibri" pitchFamily="34" charset="-122"/>
                           <a:cs typeface="Calibri" pitchFamily="34" charset="-120"/>
                         </a:rPr>
-                        <a:t>0.00%</a:t>
+                        <a:t>0.22%</a:t>
                       </a:r>
                       <a:endParaRPr lang="en-US" sz="500" dirty="0">
                         <a:latin typeface="Calibri" charset="0"/>
@@ -10604,7 +10604,7 @@
                           <a:ea typeface="Calibri" pitchFamily="34" charset="-122"/>
                           <a:cs typeface="Calibri" pitchFamily="34" charset="-120"/>
                         </a:rPr>
-                        <a:t>0.00%</a:t>
+                        <a:t>0.18%</a:t>
                       </a:r>
                       <a:endParaRPr lang="en-US" sz="500" dirty="0">
                         <a:latin typeface="Calibri" charset="0"/>
@@ -10734,7 +10734,7 @@
                           <a:ea typeface="Calibri" pitchFamily="34" charset="-122"/>
                           <a:cs typeface="Calibri" pitchFamily="34" charset="-120"/>
                         </a:rPr>
-                        <a:t>2.93%</a:t>
+                        <a:t>5.40%</a:t>
                       </a:r>
                       <a:endParaRPr lang="en-US" sz="500" dirty="0">
                         <a:latin typeface="Calibri" charset="0"/>
@@ -10920,7 +10920,7 @@
                           <a:ea typeface="Calibri" pitchFamily="34" charset="-122"/>
                           <a:cs typeface="Calibri" pitchFamily="34" charset="-120"/>
                         </a:rPr>
-                        <a:t>0.00%</a:t>
+                        <a:t>0.29%</a:t>
                       </a:r>
                       <a:endParaRPr lang="en-US" sz="500" dirty="0">
                         <a:latin typeface="Calibri" charset="0"/>
@@ -10985,7 +10985,7 @@
                           <a:ea typeface="Calibri" pitchFamily="34" charset="-122"/>
                           <a:cs typeface="Calibri" pitchFamily="34" charset="-120"/>
                         </a:rPr>
-                        <a:t>0.00%</a:t>
+                        <a:t>0.28%</a:t>
                       </a:r>
                       <a:endParaRPr lang="en-US" sz="500" dirty="0">
                         <a:latin typeface="Calibri" charset="0"/>
@@ -11050,7 +11050,7 @@
                           <a:ea typeface="Calibri" pitchFamily="34" charset="-122"/>
                           <a:cs typeface="Calibri" pitchFamily="34" charset="-120"/>
                         </a:rPr>
-                        <a:t>0.00%</a:t>
+                        <a:t>0.29%</a:t>
                       </a:r>
                       <a:endParaRPr lang="en-US" sz="500" dirty="0">
                         <a:latin typeface="Calibri" charset="0"/>
@@ -11115,7 +11115,7 @@
                           <a:ea typeface="Calibri" pitchFamily="34" charset="-122"/>
                           <a:cs typeface="Calibri" pitchFamily="34" charset="-120"/>
                         </a:rPr>
-                        <a:t>0.00%</a:t>
+                        <a:t>0.31%</a:t>
                       </a:r>
                       <a:endParaRPr lang="en-US" sz="500" dirty="0">
                         <a:latin typeface="Calibri" charset="0"/>
@@ -11180,7 +11180,7 @@
                           <a:ea typeface="Calibri" pitchFamily="34" charset="-122"/>
                           <a:cs typeface="Calibri" pitchFamily="34" charset="-120"/>
                         </a:rPr>
-                        <a:t>0.00%</a:t>
+                        <a:t>0.32%</a:t>
                       </a:r>
                       <a:endParaRPr lang="en-US" sz="500" dirty="0">
                         <a:latin typeface="Calibri" charset="0"/>
@@ -11245,7 +11245,7 @@
                           <a:ea typeface="Calibri" pitchFamily="34" charset="-122"/>
                           <a:cs typeface="Calibri" pitchFamily="34" charset="-120"/>
                         </a:rPr>
-                        <a:t>0.00%</a:t>
+                        <a:t>0.32%</a:t>
                       </a:r>
                       <a:endParaRPr lang="en-US" sz="500" dirty="0">
                         <a:latin typeface="Calibri" charset="0"/>
@@ -11310,7 +11310,7 @@
                           <a:ea typeface="Calibri" pitchFamily="34" charset="-122"/>
                           <a:cs typeface="Calibri" pitchFamily="34" charset="-120"/>
                         </a:rPr>
-                        <a:t>0.00%</a:t>
+                        <a:t>0.30%</a:t>
                       </a:r>
                       <a:endParaRPr lang="en-US" sz="500" dirty="0">
                         <a:latin typeface="Calibri" charset="0"/>
@@ -11375,7 +11375,7 @@
                           <a:ea typeface="Calibri" pitchFamily="34" charset="-122"/>
                           <a:cs typeface="Calibri" pitchFamily="34" charset="-120"/>
                         </a:rPr>
-                        <a:t>0.00%</a:t>
+                        <a:t>0.28%</a:t>
                       </a:r>
                       <a:endParaRPr lang="en-US" sz="500" dirty="0">
                         <a:latin typeface="Calibri" charset="0"/>
@@ -11440,7 +11440,7 @@
                           <a:ea typeface="Calibri" pitchFamily="34" charset="-122"/>
                           <a:cs typeface="Calibri" pitchFamily="34" charset="-120"/>
                         </a:rPr>
-                        <a:t>0.00%</a:t>
+                        <a:t>0.25%</a:t>
                       </a:r>
                       <a:endParaRPr lang="en-US" sz="500" dirty="0">
                         <a:latin typeface="Calibri" charset="0"/>
@@ -11505,7 +11505,7 @@
                           <a:ea typeface="Calibri" pitchFamily="34" charset="-122"/>
                           <a:cs typeface="Calibri" pitchFamily="34" charset="-120"/>
                         </a:rPr>
-                        <a:t>0.00%</a:t>
+                        <a:t>0.22%</a:t>
                       </a:r>
                       <a:endParaRPr lang="en-US" sz="500" dirty="0">
                         <a:latin typeface="Calibri" charset="0"/>
@@ -11570,7 +11570,7 @@
                           <a:ea typeface="Calibri" pitchFamily="34" charset="-122"/>
                           <a:cs typeface="Calibri" pitchFamily="34" charset="-120"/>
                         </a:rPr>
-                        <a:t>0.00%</a:t>
+                        <a:t>0.19%</a:t>
                       </a:r>
                       <a:endParaRPr lang="en-US" sz="500" dirty="0">
                         <a:latin typeface="Calibri" charset="0"/>
@@ -11635,7 +11635,7 @@
                           <a:ea typeface="Calibri" pitchFamily="34" charset="-122"/>
                           <a:cs typeface="Calibri" pitchFamily="34" charset="-120"/>
                         </a:rPr>
-                        <a:t>0.00%</a:t>
+                        <a:t>0.19%</a:t>
                       </a:r>
                       <a:endParaRPr lang="en-US" sz="500" dirty="0">
                         <a:latin typeface="Calibri" charset="0"/>
@@ -11700,7 +11700,7 @@
                           <a:ea typeface="Calibri" pitchFamily="34" charset="-122"/>
                           <a:cs typeface="Calibri" pitchFamily="34" charset="-120"/>
                         </a:rPr>
-                        <a:t>0.03%</a:t>
+                        <a:t>3.28%</a:t>
                       </a:r>
                       <a:endParaRPr lang="en-US" sz="500" dirty="0">
                         <a:latin typeface="Calibri" charset="0"/>
@@ -12928,7 +12928,7 @@
                           <a:ea typeface="Calibri" pitchFamily="34" charset="-122"/>
                           <a:cs typeface="Calibri" pitchFamily="34" charset="-120"/>
                         </a:rPr>
-                        <a:t>0.00%</a:t>
+                        <a:t>0.17%</a:t>
                       </a:r>
                       <a:endParaRPr lang="en-US" sz="500" dirty="0">
                         <a:latin typeface="Calibri" charset="0"/>
@@ -12993,7 +12993,7 @@
                           <a:ea typeface="Calibri" pitchFamily="34" charset="-122"/>
                           <a:cs typeface="Calibri" pitchFamily="34" charset="-120"/>
                         </a:rPr>
-                        <a:t>0.00%</a:t>
+                        <a:t>0.16%</a:t>
                       </a:r>
                       <a:endParaRPr lang="en-US" sz="500" dirty="0">
                         <a:latin typeface="Calibri" charset="0"/>
@@ -13058,7 +13058,7 @@
                           <a:ea typeface="Calibri" pitchFamily="34" charset="-122"/>
                           <a:cs typeface="Calibri" pitchFamily="34" charset="-120"/>
                         </a:rPr>
-                        <a:t>0.00%</a:t>
+                        <a:t>0.22%</a:t>
                       </a:r>
                       <a:endParaRPr lang="en-US" sz="500" dirty="0">
                         <a:latin typeface="Calibri" charset="0"/>
@@ -13123,7 +13123,7 @@
                           <a:ea typeface="Calibri" pitchFamily="34" charset="-122"/>
                           <a:cs typeface="Calibri" pitchFamily="34" charset="-120"/>
                         </a:rPr>
-                        <a:t>0.00%</a:t>
+                        <a:t>0.05%</a:t>
                       </a:r>
                       <a:endParaRPr lang="en-US" sz="500" dirty="0">
                         <a:latin typeface="Calibri" charset="0"/>
@@ -13188,7 +13188,7 @@
                           <a:ea typeface="Calibri" pitchFamily="34" charset="-122"/>
                           <a:cs typeface="Calibri" pitchFamily="34" charset="-120"/>
                         </a:rPr>
-                        <a:t>0.00%</a:t>
+                        <a:t>0.03%</a:t>
                       </a:r>
                       <a:endParaRPr lang="en-US" sz="500" dirty="0">
                         <a:latin typeface="Calibri" charset="0"/>
@@ -13253,7 +13253,7 @@
                           <a:ea typeface="Calibri" pitchFamily="34" charset="-122"/>
                           <a:cs typeface="Calibri" pitchFamily="34" charset="-120"/>
                         </a:rPr>
-                        <a:t>0.00%</a:t>
+                        <a:t>0.03%</a:t>
                       </a:r>
                       <a:endParaRPr lang="en-US" sz="500" dirty="0">
                         <a:latin typeface="Calibri" charset="0"/>
@@ -13318,7 +13318,7 @@
                           <a:ea typeface="Calibri" pitchFamily="34" charset="-122"/>
                           <a:cs typeface="Calibri" pitchFamily="34" charset="-120"/>
                         </a:rPr>
-                        <a:t>0.00%</a:t>
+                        <a:t>0.02%</a:t>
                       </a:r>
                       <a:endParaRPr lang="en-US" sz="500" dirty="0">
                         <a:latin typeface="Calibri" charset="0"/>
@@ -13383,7 +13383,7 @@
                           <a:ea typeface="Calibri" pitchFamily="34" charset="-122"/>
                           <a:cs typeface="Calibri" pitchFamily="34" charset="-120"/>
                         </a:rPr>
-                        <a:t>0.00%</a:t>
+                        <a:t>0.02%</a:t>
                       </a:r>
                       <a:endParaRPr lang="en-US" sz="500" dirty="0">
                         <a:latin typeface="Calibri" charset="0"/>
@@ -13448,7 +13448,7 @@
                           <a:ea typeface="Calibri" pitchFamily="34" charset="-122"/>
                           <a:cs typeface="Calibri" pitchFamily="34" charset="-120"/>
                         </a:rPr>
-                        <a:t>0.00%</a:t>
+                        <a:t>0.01%</a:t>
                       </a:r>
                       <a:endParaRPr lang="en-US" sz="500" dirty="0">
                         <a:latin typeface="Calibri" charset="0"/>
@@ -13513,7 +13513,7 @@
                           <a:ea typeface="Calibri" pitchFamily="34" charset="-122"/>
                           <a:cs typeface="Calibri" pitchFamily="34" charset="-120"/>
                         </a:rPr>
-                        <a:t>0.00%</a:t>
+                        <a:t>0.01%</a:t>
                       </a:r>
                       <a:endParaRPr lang="en-US" sz="500" dirty="0">
                         <a:latin typeface="Calibri" charset="0"/>
@@ -13643,7 +13643,7 @@
                           <a:ea typeface="Calibri" pitchFamily="34" charset="-122"/>
                           <a:cs typeface="Calibri" pitchFamily="34" charset="-120"/>
                         </a:rPr>
-                        <a:t>0.89%</a:t>
+                        <a:t>1.61%</a:t>
                       </a:r>
                       <a:endParaRPr lang="en-US" sz="500" dirty="0">
                         <a:latin typeface="Calibri" charset="0"/>
@@ -13829,7 +13829,7 @@
                           <a:ea typeface="Calibri" pitchFamily="34" charset="-122"/>
                           <a:cs typeface="Calibri" pitchFamily="34" charset="-120"/>
                         </a:rPr>
-                        <a:t>0.00%</a:t>
+                        <a:t>0.18%</a:t>
                       </a:r>
                       <a:endParaRPr lang="en-US" sz="500" dirty="0">
                         <a:latin typeface="Calibri" charset="0"/>
@@ -13894,7 +13894,7 @@
                           <a:ea typeface="Calibri" pitchFamily="34" charset="-122"/>
                           <a:cs typeface="Calibri" pitchFamily="34" charset="-120"/>
                         </a:rPr>
-                        <a:t>0.00%</a:t>
+                        <a:t>0.18%</a:t>
                       </a:r>
                       <a:endParaRPr lang="en-US" sz="500" dirty="0">
                         <a:latin typeface="Calibri" charset="0"/>
@@ -13959,7 +13959,7 @@
                           <a:ea typeface="Calibri" pitchFamily="34" charset="-122"/>
                           <a:cs typeface="Calibri" pitchFamily="34" charset="-120"/>
                         </a:rPr>
-                        <a:t>0.00%</a:t>
+                        <a:t>0.18%</a:t>
                       </a:r>
                       <a:endParaRPr lang="en-US" sz="500" dirty="0">
                         <a:latin typeface="Calibri" charset="0"/>
@@ -14024,7 +14024,7 @@
                           <a:ea typeface="Calibri" pitchFamily="34" charset="-122"/>
                           <a:cs typeface="Calibri" pitchFamily="34" charset="-120"/>
                         </a:rPr>
-                        <a:t>0.00%</a:t>
+                        <a:t>0.18%</a:t>
                       </a:r>
                       <a:endParaRPr lang="en-US" sz="500" dirty="0">
                         <a:latin typeface="Calibri" charset="0"/>
@@ -14089,7 +14089,7 @@
                           <a:ea typeface="Calibri" pitchFamily="34" charset="-122"/>
                           <a:cs typeface="Calibri" pitchFamily="34" charset="-120"/>
                         </a:rPr>
-                        <a:t>0.00%</a:t>
+                        <a:t>0.18%</a:t>
                       </a:r>
                       <a:endParaRPr lang="en-US" sz="500" dirty="0">
                         <a:latin typeface="Calibri" charset="0"/>
@@ -14154,7 +14154,7 @@
                           <a:ea typeface="Calibri" pitchFamily="34" charset="-122"/>
                           <a:cs typeface="Calibri" pitchFamily="34" charset="-120"/>
                         </a:rPr>
-                        <a:t>0.00%</a:t>
+                        <a:t>0.18%</a:t>
                       </a:r>
                       <a:endParaRPr lang="en-US" sz="500" dirty="0">
                         <a:latin typeface="Calibri" charset="0"/>
@@ -14219,7 +14219,7 @@
                           <a:ea typeface="Calibri" pitchFamily="34" charset="-122"/>
                           <a:cs typeface="Calibri" pitchFamily="34" charset="-120"/>
                         </a:rPr>
-                        <a:t>0.00%</a:t>
+                        <a:t>0.18%</a:t>
                       </a:r>
                       <a:endParaRPr lang="en-US" sz="500" dirty="0">
                         <a:latin typeface="Calibri" charset="0"/>
@@ -14284,7 +14284,7 @@
                           <a:ea typeface="Calibri" pitchFamily="34" charset="-122"/>
                           <a:cs typeface="Calibri" pitchFamily="34" charset="-120"/>
                         </a:rPr>
-                        <a:t>0.00%</a:t>
+                        <a:t>0.16%</a:t>
                       </a:r>
                       <a:endParaRPr lang="en-US" sz="500" dirty="0">
                         <a:latin typeface="Calibri" charset="0"/>
@@ -14349,7 +14349,7 @@
                           <a:ea typeface="Calibri" pitchFamily="34" charset="-122"/>
                           <a:cs typeface="Calibri" pitchFamily="34" charset="-120"/>
                         </a:rPr>
-                        <a:t>0.00%</a:t>
+                        <a:t>0.16%</a:t>
                       </a:r>
                       <a:endParaRPr lang="en-US" sz="500" dirty="0">
                         <a:latin typeface="Calibri" charset="0"/>
@@ -14414,7 +14414,7 @@
                           <a:ea typeface="Calibri" pitchFamily="34" charset="-122"/>
                           <a:cs typeface="Calibri" pitchFamily="34" charset="-120"/>
                         </a:rPr>
-                        <a:t>0.00%</a:t>
+                        <a:t>0.13%</a:t>
                       </a:r>
                       <a:endParaRPr lang="en-US" sz="500" dirty="0">
                         <a:latin typeface="Calibri" charset="0"/>
@@ -14479,7 +14479,7 @@
                           <a:ea typeface="Calibri" pitchFamily="34" charset="-122"/>
                           <a:cs typeface="Calibri" pitchFamily="34" charset="-120"/>
                         </a:rPr>
-                        <a:t>0.00%</a:t>
+                        <a:t>0.16%</a:t>
                       </a:r>
                       <a:endParaRPr lang="en-US" sz="500" dirty="0">
                         <a:latin typeface="Calibri" charset="0"/>
@@ -14544,7 +14544,7 @@
                           <a:ea typeface="Calibri" pitchFamily="34" charset="-122"/>
                           <a:cs typeface="Calibri" pitchFamily="34" charset="-120"/>
                         </a:rPr>
-                        <a:t>0.00%</a:t>
+                        <a:t>0.37%</a:t>
                       </a:r>
                       <a:endParaRPr lang="en-US" sz="500" dirty="0">
                         <a:latin typeface="Calibri" charset="0"/>
@@ -14609,7 +14609,7 @@
                           <a:ea typeface="Calibri" pitchFamily="34" charset="-122"/>
                           <a:cs typeface="Calibri" pitchFamily="34" charset="-120"/>
                         </a:rPr>
-                        <a:t>0.02%</a:t>
+                        <a:t>2.26%</a:t>
                       </a:r>
                       <a:endParaRPr lang="en-US" sz="500" dirty="0">
                         <a:latin typeface="Calibri" charset="0"/>
@@ -15837,7 +15837,7 @@
                           <a:ea typeface="Calibri" pitchFamily="34" charset="-122"/>
                           <a:cs typeface="Calibri" pitchFamily="34" charset="-120"/>
                         </a:rPr>
-                        <a:t>0.00%</a:t>
+                        <a:t>0.01%</a:t>
                       </a:r>
                       <a:endParaRPr lang="en-US" sz="500" dirty="0">
                         <a:latin typeface="Calibri" charset="0"/>
@@ -15902,7 +15902,7 @@
                           <a:ea typeface="Calibri" pitchFamily="34" charset="-122"/>
                           <a:cs typeface="Calibri" pitchFamily="34" charset="-120"/>
                         </a:rPr>
-                        <a:t>0.00%</a:t>
+                        <a:t>0.01%</a:t>
                       </a:r>
                       <a:endParaRPr lang="en-US" sz="500" dirty="0">
                         <a:latin typeface="Calibri" charset="0"/>
@@ -15967,7 +15967,7 @@
                           <a:ea typeface="Calibri" pitchFamily="34" charset="-122"/>
                           <a:cs typeface="Calibri" pitchFamily="34" charset="-120"/>
                         </a:rPr>
-                        <a:t>0.00%</a:t>
+                        <a:t>0.01%</a:t>
                       </a:r>
                       <a:endParaRPr lang="en-US" sz="500" dirty="0">
                         <a:latin typeface="Calibri" charset="0"/>
@@ -16032,7 +16032,7 @@
                           <a:ea typeface="Calibri" pitchFamily="34" charset="-122"/>
                           <a:cs typeface="Calibri" pitchFamily="34" charset="-120"/>
                         </a:rPr>
-                        <a:t>0.00%</a:t>
+                        <a:t>0.01%</a:t>
                       </a:r>
                       <a:endParaRPr lang="en-US" sz="500" dirty="0">
                         <a:latin typeface="Calibri" charset="0"/>
@@ -16097,7 +16097,7 @@
                           <a:ea typeface="Calibri" pitchFamily="34" charset="-122"/>
                           <a:cs typeface="Calibri" pitchFamily="34" charset="-120"/>
                         </a:rPr>
-                        <a:t>0.00%</a:t>
+                        <a:t>0.01%</a:t>
                       </a:r>
                       <a:endParaRPr lang="en-US" sz="500" dirty="0">
                         <a:latin typeface="Calibri" charset="0"/>
@@ -16162,7 +16162,7 @@
                           <a:ea typeface="Calibri" pitchFamily="34" charset="-122"/>
                           <a:cs typeface="Calibri" pitchFamily="34" charset="-120"/>
                         </a:rPr>
-                        <a:t>0.00%</a:t>
+                        <a:t>0.01%</a:t>
                       </a:r>
                       <a:endParaRPr lang="en-US" sz="500" dirty="0">
                         <a:latin typeface="Calibri" charset="0"/>
@@ -16227,7 +16227,7 @@
                           <a:ea typeface="Calibri" pitchFamily="34" charset="-122"/>
                           <a:cs typeface="Calibri" pitchFamily="34" charset="-120"/>
                         </a:rPr>
-                        <a:t>0.00%</a:t>
+                        <a:t>0.01%</a:t>
                       </a:r>
                       <a:endParaRPr lang="en-US" sz="500" dirty="0">
                         <a:latin typeface="Calibri" charset="0"/>
@@ -16292,7 +16292,7 @@
                           <a:ea typeface="Calibri" pitchFamily="34" charset="-122"/>
                           <a:cs typeface="Calibri" pitchFamily="34" charset="-120"/>
                         </a:rPr>
-                        <a:t>-0.00%</a:t>
+                        <a:t>-0.01%</a:t>
                       </a:r>
                       <a:endParaRPr lang="en-US" sz="500" dirty="0">
                         <a:latin typeface="Calibri" charset="0"/>
@@ -16357,7 +16357,7 @@
                           <a:ea typeface="Calibri" pitchFamily="34" charset="-122"/>
                           <a:cs typeface="Calibri" pitchFamily="34" charset="-120"/>
                         </a:rPr>
-                        <a:t>0.00%</a:t>
+                        <a:t>0.10%</a:t>
                       </a:r>
                       <a:endParaRPr lang="en-US" sz="500" dirty="0">
                         <a:latin typeface="Calibri" charset="0"/>
@@ -16422,7 +16422,7 @@
                           <a:ea typeface="Calibri" pitchFamily="34" charset="-122"/>
                           <a:cs typeface="Calibri" pitchFamily="34" charset="-120"/>
                         </a:rPr>
-                        <a:t>0.00%</a:t>
+                        <a:t>0.13%</a:t>
                       </a:r>
                       <a:endParaRPr lang="en-US" sz="500" dirty="0">
                         <a:latin typeface="Calibri" charset="0"/>
@@ -16552,7 +16552,7 @@
                           <a:ea typeface="Calibri" pitchFamily="34" charset="-122"/>
                           <a:cs typeface="Calibri" pitchFamily="34" charset="-120"/>
                         </a:rPr>
-                        <a:t>0.60%</a:t>
+                        <a:t>0.85%</a:t>
                       </a:r>
                       <a:endParaRPr lang="en-US" sz="500" dirty="0">
                         <a:latin typeface="Calibri" charset="0"/>
@@ -16738,7 +16738,7 @@
                           <a:ea typeface="Calibri" pitchFamily="34" charset="-122"/>
                           <a:cs typeface="Calibri" pitchFamily="34" charset="-120"/>
                         </a:rPr>
-                        <a:t>0.00%</a:t>
+                        <a:t>0.10%</a:t>
                       </a:r>
                       <a:endParaRPr lang="en-US" sz="500" dirty="0">
                         <a:latin typeface="Calibri" charset="0"/>
@@ -16803,7 +16803,7 @@
                           <a:ea typeface="Calibri" pitchFamily="34" charset="-122"/>
                           <a:cs typeface="Calibri" pitchFamily="34" charset="-120"/>
                         </a:rPr>
-                        <a:t>0.00%</a:t>
+                        <a:t>0.12%</a:t>
                       </a:r>
                       <a:endParaRPr lang="en-US" sz="500" dirty="0">
                         <a:latin typeface="Calibri" charset="0"/>
@@ -16868,7 +16868,7 @@
                           <a:ea typeface="Calibri" pitchFamily="34" charset="-122"/>
                           <a:cs typeface="Calibri" pitchFamily="34" charset="-120"/>
                         </a:rPr>
-                        <a:t>0.00%</a:t>
+                        <a:t>0.11%</a:t>
                       </a:r>
                       <a:endParaRPr lang="en-US" sz="500" dirty="0">
                         <a:latin typeface="Calibri" charset="0"/>
@@ -16933,7 +16933,7 @@
                           <a:ea typeface="Calibri" pitchFamily="34" charset="-122"/>
                           <a:cs typeface="Calibri" pitchFamily="34" charset="-120"/>
                         </a:rPr>
-                        <a:t>0.00%</a:t>
+                        <a:t>0.08%</a:t>
                       </a:r>
                       <a:endParaRPr lang="en-US" sz="500" dirty="0">
                         <a:latin typeface="Calibri" charset="0"/>
@@ -16998,7 +16998,7 @@
                           <a:ea typeface="Calibri" pitchFamily="34" charset="-122"/>
                           <a:cs typeface="Calibri" pitchFamily="34" charset="-120"/>
                         </a:rPr>
-                        <a:t>0.00%</a:t>
+                        <a:t>0.16%</a:t>
                       </a:r>
                       <a:endParaRPr lang="en-US" sz="500" dirty="0">
                         <a:latin typeface="Calibri" charset="0"/>
@@ -17063,7 +17063,7 @@
                           <a:ea typeface="Calibri" pitchFamily="34" charset="-122"/>
                           <a:cs typeface="Calibri" pitchFamily="34" charset="-120"/>
                         </a:rPr>
-                        <a:t>0.00%</a:t>
+                        <a:t>0.13%</a:t>
                       </a:r>
                       <a:endParaRPr lang="en-US" sz="500" dirty="0">
                         <a:latin typeface="Calibri" charset="0"/>
@@ -17128,7 +17128,7 @@
                           <a:ea typeface="Calibri" pitchFamily="34" charset="-122"/>
                           <a:cs typeface="Calibri" pitchFamily="34" charset="-120"/>
                         </a:rPr>
-                        <a:t>0.00%</a:t>
+                        <a:t>0.10%</a:t>
                       </a:r>
                       <a:endParaRPr lang="en-US" sz="500" dirty="0">
                         <a:latin typeface="Calibri" charset="0"/>
@@ -17193,7 +17193,7 @@
                           <a:ea typeface="Calibri" pitchFamily="34" charset="-122"/>
                           <a:cs typeface="Calibri" pitchFamily="34" charset="-120"/>
                         </a:rPr>
-                        <a:t>0.00%</a:t>
+                        <a:t>0.10%</a:t>
                       </a:r>
                       <a:endParaRPr lang="en-US" sz="500" dirty="0">
                         <a:latin typeface="Calibri" charset="0"/>
@@ -17258,7 +17258,7 @@
                           <a:ea typeface="Calibri" pitchFamily="34" charset="-122"/>
                           <a:cs typeface="Calibri" pitchFamily="34" charset="-120"/>
                         </a:rPr>
-                        <a:t>0.00%</a:t>
+                        <a:t>0.12%</a:t>
                       </a:r>
                       <a:endParaRPr lang="en-US" sz="500" dirty="0">
                         <a:latin typeface="Calibri" charset="0"/>
@@ -17323,7 +17323,7 @@
                           <a:ea typeface="Calibri" pitchFamily="34" charset="-122"/>
                           <a:cs typeface="Calibri" pitchFamily="34" charset="-120"/>
                         </a:rPr>
-                        <a:t>0.00%</a:t>
+                        <a:t>0.12%</a:t>
                       </a:r>
                       <a:endParaRPr lang="en-US" sz="500" dirty="0">
                         <a:latin typeface="Calibri" charset="0"/>
@@ -17388,7 +17388,7 @@
                           <a:ea typeface="Calibri" pitchFamily="34" charset="-122"/>
                           <a:cs typeface="Calibri" pitchFamily="34" charset="-120"/>
                         </a:rPr>
-                        <a:t>0.00%</a:t>
+                        <a:t>0.17%</a:t>
                       </a:r>
                       <a:endParaRPr lang="en-US" sz="500" dirty="0">
                         <a:latin typeface="Calibri" charset="0"/>
@@ -17453,7 +17453,7 @@
                           <a:ea typeface="Calibri" pitchFamily="34" charset="-122"/>
                           <a:cs typeface="Calibri" pitchFamily="34" charset="-120"/>
                         </a:rPr>
-                        <a:t>0.00%</a:t>
+                        <a:t>0.23%</a:t>
                       </a:r>
                       <a:endParaRPr lang="en-US" sz="500" dirty="0">
                         <a:latin typeface="Calibri" charset="0"/>
@@ -17518,7 +17518,7 @@
                           <a:ea typeface="Calibri" pitchFamily="34" charset="-122"/>
                           <a:cs typeface="Calibri" pitchFamily="34" charset="-120"/>
                         </a:rPr>
-                        <a:t>0.02%</a:t>
+                        <a:t>1.55%</a:t>
                       </a:r>
                       <a:endParaRPr lang="en-US" sz="500" dirty="0">
                         <a:latin typeface="Calibri" charset="0"/>
@@ -18746,7 +18746,7 @@
                           <a:ea typeface="Calibri" pitchFamily="34" charset="-122"/>
                           <a:cs typeface="Calibri" pitchFamily="34" charset="-120"/>
                         </a:rPr>
-                        <a:t>0.00%</a:t>
+                        <a:t>0.35%</a:t>
                       </a:r>
                       <a:endParaRPr lang="en-US" sz="500" dirty="0">
                         <a:latin typeface="Calibri" charset="0"/>
@@ -18811,7 +18811,7 @@
                           <a:ea typeface="Calibri" pitchFamily="34" charset="-122"/>
                           <a:cs typeface="Calibri" pitchFamily="34" charset="-120"/>
                         </a:rPr>
-                        <a:t>0.00%</a:t>
+                        <a:t>0.37%</a:t>
                       </a:r>
                       <a:endParaRPr lang="en-US" sz="500" dirty="0">
                         <a:latin typeface="Calibri" charset="0"/>
@@ -18876,7 +18876,7 @@
                           <a:ea typeface="Calibri" pitchFamily="34" charset="-122"/>
                           <a:cs typeface="Calibri" pitchFamily="34" charset="-120"/>
                         </a:rPr>
-                        <a:t>0.00%</a:t>
+                        <a:t>0.46%</a:t>
                       </a:r>
                       <a:endParaRPr lang="en-US" sz="500" dirty="0">
                         <a:latin typeface="Calibri" charset="0"/>
@@ -18941,7 +18941,7 @@
                           <a:ea typeface="Calibri" pitchFamily="34" charset="-122"/>
                           <a:cs typeface="Calibri" pitchFamily="34" charset="-120"/>
                         </a:rPr>
-                        <a:t>0.01%</a:t>
+                        <a:t>0.53%</a:t>
                       </a:r>
                       <a:endParaRPr lang="en-US" sz="500" dirty="0">
                         <a:latin typeface="Calibri" charset="0"/>
@@ -19006,7 +19006,7 @@
                           <a:ea typeface="Calibri" pitchFamily="34" charset="-122"/>
                           <a:cs typeface="Calibri" pitchFamily="34" charset="-120"/>
                         </a:rPr>
-                        <a:t>0.01%</a:t>
+                        <a:t>0.59%</a:t>
                       </a:r>
                       <a:endParaRPr lang="en-US" sz="500" dirty="0">
                         <a:latin typeface="Calibri" charset="0"/>
@@ -19071,7 +19071,7 @@
                           <a:ea typeface="Calibri" pitchFamily="34" charset="-122"/>
                           <a:cs typeface="Calibri" pitchFamily="34" charset="-120"/>
                         </a:rPr>
-                        <a:t>0.01%</a:t>
+                        <a:t>0.63%</a:t>
                       </a:r>
                       <a:endParaRPr lang="en-US" sz="500" dirty="0">
                         <a:latin typeface="Calibri" charset="0"/>
@@ -19136,7 +19136,7 @@
                           <a:ea typeface="Calibri" pitchFamily="34" charset="-122"/>
                           <a:cs typeface="Calibri" pitchFamily="34" charset="-120"/>
                         </a:rPr>
-                        <a:t>0.01%</a:t>
+                        <a:t>0.68%</a:t>
                       </a:r>
                       <a:endParaRPr lang="en-US" sz="500" dirty="0">
                         <a:latin typeface="Calibri" charset="0"/>
@@ -19201,7 +19201,7 @@
                           <a:ea typeface="Calibri" pitchFamily="34" charset="-122"/>
                           <a:cs typeface="Calibri" pitchFamily="34" charset="-120"/>
                         </a:rPr>
-                        <a:t>0.01%</a:t>
+                        <a:t>0.73%</a:t>
                       </a:r>
                       <a:endParaRPr lang="en-US" sz="500" dirty="0">
                         <a:latin typeface="Calibri" charset="0"/>
@@ -19266,7 +19266,7 @@
                           <a:ea typeface="Calibri" pitchFamily="34" charset="-122"/>
                           <a:cs typeface="Calibri" pitchFamily="34" charset="-120"/>
                         </a:rPr>
-                        <a:t>0.01%</a:t>
+                        <a:t>0.78%</a:t>
                       </a:r>
                       <a:endParaRPr lang="en-US" sz="500" dirty="0">
                         <a:latin typeface="Calibri" charset="0"/>
@@ -19331,7 +19331,7 @@
                           <a:ea typeface="Calibri" pitchFamily="34" charset="-122"/>
                           <a:cs typeface="Calibri" pitchFamily="34" charset="-120"/>
                         </a:rPr>
-                        <a:t>0.01%</a:t>
+                        <a:t>0.79%</a:t>
                       </a:r>
                       <a:endParaRPr lang="en-US" sz="500" dirty="0">
                         <a:latin typeface="Calibri" charset="0"/>
@@ -19461,7 +19461,7 @@
                           <a:ea typeface="Calibri" pitchFamily="34" charset="-122"/>
                           <a:cs typeface="Calibri" pitchFamily="34" charset="-120"/>
                         </a:rPr>
-                        <a:t>8.50%</a:t>
+                        <a:t>15.02%</a:t>
                       </a:r>
                       <a:endParaRPr lang="en-US" sz="500" dirty="0">
                         <a:latin typeface="Calibri" charset="0"/>
@@ -19647,7 +19647,7 @@
                           <a:ea typeface="Calibri" pitchFamily="34" charset="-122"/>
                           <a:cs typeface="Calibri" pitchFamily="34" charset="-120"/>
                         </a:rPr>
-                        <a:t>0.00%</a:t>
+                        <a:t>0.31%</a:t>
                       </a:r>
                       <a:endParaRPr lang="en-US" sz="500" dirty="0">
                         <a:latin typeface="Calibri" charset="0"/>
@@ -19712,7 +19712,7 @@
                           <a:ea typeface="Calibri" pitchFamily="34" charset="-122"/>
                           <a:cs typeface="Calibri" pitchFamily="34" charset="-120"/>
                         </a:rPr>
-                        <a:t>0.00%</a:t>
+                        <a:t>0.41%</a:t>
                       </a:r>
                       <a:endParaRPr lang="en-US" sz="500" dirty="0">
                         <a:latin typeface="Calibri" charset="0"/>
@@ -19777,7 +19777,7 @@
                           <a:ea typeface="Calibri" pitchFamily="34" charset="-122"/>
                           <a:cs typeface="Calibri" pitchFamily="34" charset="-120"/>
                         </a:rPr>
-                        <a:t>0.00%</a:t>
+                        <a:t>0.49%</a:t>
                       </a:r>
                       <a:endParaRPr lang="en-US" sz="500" dirty="0">
                         <a:latin typeface="Calibri" charset="0"/>
@@ -19842,7 +19842,7 @@
                           <a:ea typeface="Calibri" pitchFamily="34" charset="-122"/>
                           <a:cs typeface="Calibri" pitchFamily="34" charset="-120"/>
                         </a:rPr>
-                        <a:t>0.01%</a:t>
+                        <a:t>0.68%</a:t>
                       </a:r>
                       <a:endParaRPr lang="en-US" sz="500" dirty="0">
                         <a:latin typeface="Calibri" charset="0"/>
@@ -19907,7 +19907,7 @@
                           <a:ea typeface="Calibri" pitchFamily="34" charset="-122"/>
                           <a:cs typeface="Calibri" pitchFamily="34" charset="-120"/>
                         </a:rPr>
-                        <a:t>0.01%</a:t>
+                        <a:t>0.73%</a:t>
                       </a:r>
                       <a:endParaRPr lang="en-US" sz="500" dirty="0">
                         <a:latin typeface="Calibri" charset="0"/>
@@ -19972,7 +19972,7 @@
                           <a:ea typeface="Calibri" pitchFamily="34" charset="-122"/>
                           <a:cs typeface="Calibri" pitchFamily="34" charset="-120"/>
                         </a:rPr>
-                        <a:t>0.01%</a:t>
+                        <a:t>0.67%</a:t>
                       </a:r>
                       <a:endParaRPr lang="en-US" sz="500" dirty="0">
                         <a:latin typeface="Calibri" charset="0"/>
@@ -20037,7 +20037,7 @@
                           <a:ea typeface="Calibri" pitchFamily="34" charset="-122"/>
                           <a:cs typeface="Calibri" pitchFamily="34" charset="-120"/>
                         </a:rPr>
-                        <a:t>0.01%</a:t>
+                        <a:t>0.76%</a:t>
                       </a:r>
                       <a:endParaRPr lang="en-US" sz="500" dirty="0">
                         <a:latin typeface="Calibri" charset="0"/>
@@ -20102,7 +20102,7 @@
                           <a:ea typeface="Calibri" pitchFamily="34" charset="-122"/>
                           <a:cs typeface="Calibri" pitchFamily="34" charset="-120"/>
                         </a:rPr>
-                        <a:t>0.01%</a:t>
+                        <a:t>0.80%</a:t>
                       </a:r>
                       <a:endParaRPr lang="en-US" sz="500" dirty="0">
                         <a:latin typeface="Calibri" charset="0"/>
@@ -20167,7 +20167,7 @@
                           <a:ea typeface="Calibri" pitchFamily="34" charset="-122"/>
                           <a:cs typeface="Calibri" pitchFamily="34" charset="-120"/>
                         </a:rPr>
-                        <a:t>0.01%</a:t>
+                        <a:t>0.84%</a:t>
                       </a:r>
                       <a:endParaRPr lang="en-US" sz="500" dirty="0">
                         <a:latin typeface="Calibri" charset="0"/>
@@ -20232,7 +20232,7 @@
                           <a:ea typeface="Calibri" pitchFamily="34" charset="-122"/>
                           <a:cs typeface="Calibri" pitchFamily="34" charset="-120"/>
                         </a:rPr>
-                        <a:t>0.01%</a:t>
+                        <a:t>0.90%</a:t>
                       </a:r>
                       <a:endParaRPr lang="en-US" sz="500" dirty="0">
                         <a:latin typeface="Calibri" charset="0"/>
@@ -20297,7 +20297,7 @@
                           <a:ea typeface="Calibri" pitchFamily="34" charset="-122"/>
                           <a:cs typeface="Calibri" pitchFamily="34" charset="-120"/>
                         </a:rPr>
-                        <a:t>0.01%</a:t>
+                        <a:t>0.92%</a:t>
                       </a:r>
                       <a:endParaRPr lang="en-US" sz="500" dirty="0">
                         <a:latin typeface="Calibri" charset="0"/>
@@ -20362,7 +20362,7 @@
                           <a:ea typeface="Calibri" pitchFamily="34" charset="-122"/>
                           <a:cs typeface="Calibri" pitchFamily="34" charset="-120"/>
                         </a:rPr>
-                        <a:t>0.01%</a:t>
+                        <a:t>1.00%</a:t>
                       </a:r>
                       <a:endParaRPr lang="en-US" sz="500" dirty="0">
                         <a:latin typeface="Calibri" charset="0"/>
@@ -20427,7 +20427,7 @@
                           <a:ea typeface="Calibri" pitchFamily="34" charset="-122"/>
                           <a:cs typeface="Calibri" pitchFamily="34" charset="-120"/>
                         </a:rPr>
-                        <a:t>0.09%</a:t>
+                        <a:t>8.86%</a:t>
                       </a:r>
                       <a:endParaRPr lang="en-US" sz="500" dirty="0">
                         <a:latin typeface="Calibri" charset="0"/>
@@ -21655,7 +21655,7 @@
                           <a:ea typeface="Calibri" pitchFamily="34" charset="-122"/>
                           <a:cs typeface="Calibri" pitchFamily="34" charset="-120"/>
                         </a:rPr>
-                        <a:t>0.01%</a:t>
+                        <a:t>0.79%</a:t>
                       </a:r>
                       <a:endParaRPr lang="en-US" sz="500" dirty="0">
                         <a:latin typeface="Calibri" charset="0"/>
@@ -21720,7 +21720,7 @@
                           <a:ea typeface="Calibri" pitchFamily="34" charset="-122"/>
                           <a:cs typeface="Calibri" pitchFamily="34" charset="-120"/>
                         </a:rPr>
-                        <a:t>0.01%</a:t>
+                        <a:t>0.79%</a:t>
                       </a:r>
                       <a:endParaRPr lang="en-US" sz="500" dirty="0">
                         <a:latin typeface="Calibri" charset="0"/>
@@ -21785,7 +21785,7 @@
                           <a:ea typeface="Calibri" pitchFamily="34" charset="-122"/>
                           <a:cs typeface="Calibri" pitchFamily="34" charset="-120"/>
                         </a:rPr>
-                        <a:t>0.01%</a:t>
+                        <a:t>0.80%</a:t>
                       </a:r>
                       <a:endParaRPr lang="en-US" sz="500" dirty="0">
                         <a:latin typeface="Calibri" charset="0"/>
@@ -21850,7 +21850,7 @@
                           <a:ea typeface="Calibri" pitchFamily="34" charset="-122"/>
                           <a:cs typeface="Calibri" pitchFamily="34" charset="-120"/>
                         </a:rPr>
-                        <a:t>0.01%</a:t>
+                        <a:t>0.80%</a:t>
                       </a:r>
                       <a:endParaRPr lang="en-US" sz="500" dirty="0">
                         <a:latin typeface="Calibri" charset="0"/>
@@ -21915,7 +21915,7 @@
                           <a:ea typeface="Calibri" pitchFamily="34" charset="-122"/>
                           <a:cs typeface="Calibri" pitchFamily="34" charset="-120"/>
                         </a:rPr>
-                        <a:t>0.01%</a:t>
+                        <a:t>0.80%</a:t>
                       </a:r>
                       <a:endParaRPr lang="en-US" sz="500" dirty="0">
                         <a:latin typeface="Calibri" charset="0"/>
@@ -21980,7 +21980,7 @@
                           <a:ea typeface="Calibri" pitchFamily="34" charset="-122"/>
                           <a:cs typeface="Calibri" pitchFamily="34" charset="-120"/>
                         </a:rPr>
-                        <a:t>0.01%</a:t>
+                        <a:t>0.79%</a:t>
                       </a:r>
                       <a:endParaRPr lang="en-US" sz="500" dirty="0">
                         <a:latin typeface="Calibri" charset="0"/>
@@ -22045,7 +22045,7 @@
                           <a:ea typeface="Calibri" pitchFamily="34" charset="-122"/>
                           <a:cs typeface="Calibri" pitchFamily="34" charset="-120"/>
                         </a:rPr>
-                        <a:t>0.01%</a:t>
+                        <a:t>0.74%</a:t>
                       </a:r>
                       <a:endParaRPr lang="en-US" sz="500" dirty="0">
                         <a:latin typeface="Calibri" charset="0"/>
@@ -22110,7 +22110,7 @@
                           <a:ea typeface="Calibri" pitchFamily="34" charset="-122"/>
                           <a:cs typeface="Calibri" pitchFamily="34" charset="-120"/>
                         </a:rPr>
-                        <a:t>0.01%</a:t>
+                        <a:t>0.68%</a:t>
                       </a:r>
                       <a:endParaRPr lang="en-US" sz="500" dirty="0">
                         <a:latin typeface="Calibri" charset="0"/>
@@ -22175,7 +22175,7 @@
                           <a:ea typeface="Calibri" pitchFamily="34" charset="-122"/>
                           <a:cs typeface="Calibri" pitchFamily="34" charset="-120"/>
                         </a:rPr>
-                        <a:t>0.01%</a:t>
+                        <a:t>0.65%</a:t>
                       </a:r>
                       <a:endParaRPr lang="en-US" sz="500" dirty="0">
                         <a:latin typeface="Calibri" charset="0"/>
@@ -22240,7 +22240,7 @@
                           <a:ea typeface="Calibri" pitchFamily="34" charset="-122"/>
                           <a:cs typeface="Calibri" pitchFamily="34" charset="-120"/>
                         </a:rPr>
-                        <a:t>0.01%</a:t>
+                        <a:t>0.62%</a:t>
                       </a:r>
                       <a:endParaRPr lang="en-US" sz="500" dirty="0">
                         <a:latin typeface="Calibri" charset="0"/>
@@ -22370,7 +22370,7 @@
                           <a:ea typeface="Calibri" pitchFamily="34" charset="-122"/>
                           <a:cs typeface="Calibri" pitchFamily="34" charset="-120"/>
                         </a:rPr>
-                        <a:t>7.57%</a:t>
+                        <a:t>15.78%</a:t>
                       </a:r>
                       <a:endParaRPr lang="en-US" sz="500" dirty="0">
                         <a:latin typeface="Calibri" charset="0"/>
@@ -22556,7 +22556,7 @@
                           <a:ea typeface="Calibri" pitchFamily="34" charset="-122"/>
                           <a:cs typeface="Calibri" pitchFamily="34" charset="-120"/>
                         </a:rPr>
-                        <a:t>0.01%</a:t>
+                        <a:t>0.96%</a:t>
                       </a:r>
                       <a:endParaRPr lang="en-US" sz="500" dirty="0">
                         <a:latin typeface="Calibri" charset="0"/>
@@ -22621,7 +22621,7 @@
                           <a:ea typeface="Calibri" pitchFamily="34" charset="-122"/>
                           <a:cs typeface="Calibri" pitchFamily="34" charset="-120"/>
                         </a:rPr>
-                        <a:t>0.01%</a:t>
+                        <a:t>0.84%</a:t>
                       </a:r>
                       <a:endParaRPr lang="en-US" sz="500" dirty="0">
                         <a:latin typeface="Calibri" charset="0"/>
@@ -22686,7 +22686,7 @@
                           <a:ea typeface="Calibri" pitchFamily="34" charset="-122"/>
                           <a:cs typeface="Calibri" pitchFamily="34" charset="-120"/>
                         </a:rPr>
-                        <a:t>0.01%</a:t>
+                        <a:t>0.96%</a:t>
                       </a:r>
                       <a:endParaRPr lang="en-US" sz="500" dirty="0">
                         <a:latin typeface="Calibri" charset="0"/>
@@ -22751,7 +22751,7 @@
                           <a:ea typeface="Calibri" pitchFamily="34" charset="-122"/>
                           <a:cs typeface="Calibri" pitchFamily="34" charset="-120"/>
                         </a:rPr>
-                        <a:t>0.01%</a:t>
+                        <a:t>0.99%</a:t>
                       </a:r>
                       <a:endParaRPr lang="en-US" sz="500" dirty="0">
                         <a:latin typeface="Calibri" charset="0"/>
@@ -22816,7 +22816,7 @@
                           <a:ea typeface="Calibri" pitchFamily="34" charset="-122"/>
                           <a:cs typeface="Calibri" pitchFamily="34" charset="-120"/>
                         </a:rPr>
-                        <a:t>0.01%</a:t>
+                        <a:t>0.98%</a:t>
                       </a:r>
                       <a:endParaRPr lang="en-US" sz="500" dirty="0">
                         <a:latin typeface="Calibri" charset="0"/>
@@ -22881,7 +22881,7 @@
                           <a:ea typeface="Calibri" pitchFamily="34" charset="-122"/>
                           <a:cs typeface="Calibri" pitchFamily="34" charset="-120"/>
                         </a:rPr>
-                        <a:t>0.01%</a:t>
+                        <a:t>0.97%</a:t>
                       </a:r>
                       <a:endParaRPr lang="en-US" sz="500" dirty="0">
                         <a:latin typeface="Calibri" charset="0"/>
@@ -22946,7 +22946,7 @@
                           <a:ea typeface="Calibri" pitchFamily="34" charset="-122"/>
                           <a:cs typeface="Calibri" pitchFamily="34" charset="-120"/>
                         </a:rPr>
-                        <a:t>0.01%</a:t>
+                        <a:t>0.98%</a:t>
                       </a:r>
                       <a:endParaRPr lang="en-US" sz="500" dirty="0">
                         <a:latin typeface="Calibri" charset="0"/>
@@ -23011,7 +23011,7 @@
                           <a:ea typeface="Calibri" pitchFamily="34" charset="-122"/>
                           <a:cs typeface="Calibri" pitchFamily="34" charset="-120"/>
                         </a:rPr>
-                        <a:t>0.01%</a:t>
+                        <a:t>0.93%</a:t>
                       </a:r>
                       <a:endParaRPr lang="en-US" sz="500" dirty="0">
                         <a:latin typeface="Calibri" charset="0"/>
@@ -23076,7 +23076,7 @@
                           <a:ea typeface="Calibri" pitchFamily="34" charset="-122"/>
                           <a:cs typeface="Calibri" pitchFamily="34" charset="-120"/>
                         </a:rPr>
-                        <a:t>0.01%</a:t>
+                        <a:t>0.92%</a:t>
                       </a:r>
                       <a:endParaRPr lang="en-US" sz="500" dirty="0">
                         <a:latin typeface="Calibri" charset="0"/>
@@ -23141,7 +23141,7 @@
                           <a:ea typeface="Calibri" pitchFamily="34" charset="-122"/>
                           <a:cs typeface="Calibri" pitchFamily="34" charset="-120"/>
                         </a:rPr>
-                        <a:t>0.01%</a:t>
+                        <a:t>0.82%</a:t>
                       </a:r>
                       <a:endParaRPr lang="en-US" sz="500" dirty="0">
                         <a:latin typeface="Calibri" charset="0"/>
@@ -23206,7 +23206,7 @@
                           <a:ea typeface="Calibri" pitchFamily="34" charset="-122"/>
                           <a:cs typeface="Calibri" pitchFamily="34" charset="-120"/>
                         </a:rPr>
-                        <a:t>0.01%</a:t>
+                        <a:t>0.73%</a:t>
                       </a:r>
                       <a:endParaRPr lang="en-US" sz="500" dirty="0">
                         <a:latin typeface="Calibri" charset="0"/>
@@ -23271,7 +23271,7 @@
                           <a:ea typeface="Calibri" pitchFamily="34" charset="-122"/>
                           <a:cs typeface="Calibri" pitchFamily="34" charset="-120"/>
                         </a:rPr>
-                        <a:t>0.01%</a:t>
+                        <a:t>1.22%</a:t>
                       </a:r>
                       <a:endParaRPr lang="en-US" sz="500" dirty="0">
                         <a:latin typeface="Calibri" charset="0"/>
@@ -23336,7 +23336,7 @@
                           <a:ea typeface="Calibri" pitchFamily="34" charset="-122"/>
                           <a:cs typeface="Calibri" pitchFamily="34" charset="-120"/>
                         </a:rPr>
-                        <a:t>0.11%</a:t>
+                        <a:t>11.90%</a:t>
                       </a:r>
                       <a:endParaRPr lang="en-US" sz="500" dirty="0">
                         <a:latin typeface="Calibri" charset="0"/>
@@ -24564,7 +24564,7 @@
                           <a:ea typeface="Calibri" pitchFamily="34" charset="-122"/>
                           <a:cs typeface="Calibri" pitchFamily="34" charset="-120"/>
                         </a:rPr>
-                        <a:t>0.01%</a:t>
+                        <a:t>0.53%</a:t>
                       </a:r>
                       <a:endParaRPr lang="en-US" sz="500" dirty="0">
                         <a:latin typeface="Calibri" charset="0"/>
@@ -24629,7 +24629,7 @@
                           <a:ea typeface="Calibri" pitchFamily="34" charset="-122"/>
                           <a:cs typeface="Calibri" pitchFamily="34" charset="-120"/>
                         </a:rPr>
-                        <a:t>0.00%</a:t>
+                        <a:t>0.48%</a:t>
                       </a:r>
                       <a:endParaRPr lang="en-US" sz="500" dirty="0">
                         <a:latin typeface="Calibri" charset="0"/>
@@ -24694,7 +24694,7 @@
                           <a:ea typeface="Calibri" pitchFamily="34" charset="-122"/>
                           <a:cs typeface="Calibri" pitchFamily="34" charset="-120"/>
                         </a:rPr>
-                        <a:t>0.00%</a:t>
+                        <a:t>0.43%</a:t>
                       </a:r>
                       <a:endParaRPr lang="en-US" sz="500" dirty="0">
                         <a:latin typeface="Calibri" charset="0"/>
@@ -24759,7 +24759,7 @@
                           <a:ea typeface="Calibri" pitchFamily="34" charset="-122"/>
                           <a:cs typeface="Calibri" pitchFamily="34" charset="-120"/>
                         </a:rPr>
-                        <a:t>0.00%</a:t>
+                        <a:t>0.40%</a:t>
                       </a:r>
                       <a:endParaRPr lang="en-US" sz="500" dirty="0">
                         <a:latin typeface="Calibri" charset="0"/>
@@ -24824,7 +24824,7 @@
                           <a:ea typeface="Calibri" pitchFamily="34" charset="-122"/>
                           <a:cs typeface="Calibri" pitchFamily="34" charset="-120"/>
                         </a:rPr>
-                        <a:t>0.00%</a:t>
+                        <a:t>0.37%</a:t>
                       </a:r>
                       <a:endParaRPr lang="en-US" sz="500" dirty="0">
                         <a:latin typeface="Calibri" charset="0"/>
@@ -24889,7 +24889,7 @@
                           <a:ea typeface="Calibri" pitchFamily="34" charset="-122"/>
                           <a:cs typeface="Calibri" pitchFamily="34" charset="-120"/>
                         </a:rPr>
-                        <a:t>0.00%</a:t>
+                        <a:t>0.35%</a:t>
                       </a:r>
                       <a:endParaRPr lang="en-US" sz="500" dirty="0">
                         <a:latin typeface="Calibri" charset="0"/>
@@ -24954,7 +24954,7 @@
                           <a:ea typeface="Calibri" pitchFamily="34" charset="-122"/>
                           <a:cs typeface="Calibri" pitchFamily="34" charset="-120"/>
                         </a:rPr>
-                        <a:t>0.00%</a:t>
+                        <a:t>0.35%</a:t>
                       </a:r>
                       <a:endParaRPr lang="en-US" sz="500" dirty="0">
                         <a:latin typeface="Calibri" charset="0"/>
@@ -25019,7 +25019,7 @@
                           <a:ea typeface="Calibri" pitchFamily="34" charset="-122"/>
                           <a:cs typeface="Calibri" pitchFamily="34" charset="-120"/>
                         </a:rPr>
-                        <a:t>0.00%</a:t>
+                        <a:t>0.34%</a:t>
                       </a:r>
                       <a:endParaRPr lang="en-US" sz="500" dirty="0">
                         <a:latin typeface="Calibri" charset="0"/>
@@ -25084,7 +25084,7 @@
                           <a:ea typeface="Calibri" pitchFamily="34" charset="-122"/>
                           <a:cs typeface="Calibri" pitchFamily="34" charset="-120"/>
                         </a:rPr>
-                        <a:t>0.00%</a:t>
+                        <a:t>0.33%</a:t>
                       </a:r>
                       <a:endParaRPr lang="en-US" sz="500" dirty="0">
                         <a:latin typeface="Calibri" charset="0"/>
@@ -25149,7 +25149,7 @@
                           <a:ea typeface="Calibri" pitchFamily="34" charset="-122"/>
                           <a:cs typeface="Calibri" pitchFamily="34" charset="-120"/>
                         </a:rPr>
-                        <a:t>0.00%</a:t>
+                        <a:t>0.32%</a:t>
                       </a:r>
                       <a:endParaRPr lang="en-US" sz="500" dirty="0">
                         <a:latin typeface="Calibri" charset="0"/>
@@ -25279,7 +25279,7 @@
                           <a:ea typeface="Calibri" pitchFamily="34" charset="-122"/>
                           <a:cs typeface="Calibri" pitchFamily="34" charset="-120"/>
                         </a:rPr>
-                        <a:t>-2.95%</a:t>
+                        <a:t>0.86%</a:t>
                       </a:r>
                       <a:endParaRPr lang="en-US" sz="500" dirty="0">
                         <a:latin typeface="Calibri" charset="0"/>
@@ -25465,7 +25465,7 @@
                           <a:ea typeface="Calibri" pitchFamily="34" charset="-122"/>
                           <a:cs typeface="Calibri" pitchFamily="34" charset="-120"/>
                         </a:rPr>
-                        <a:t>0.01%</a:t>
+                        <a:t>0.92%</a:t>
                       </a:r>
                       <a:endParaRPr lang="en-US" sz="500" dirty="0">
                         <a:latin typeface="Calibri" charset="0"/>
@@ -25530,7 +25530,7 @@
                           <a:ea typeface="Calibri" pitchFamily="34" charset="-122"/>
                           <a:cs typeface="Calibri" pitchFamily="34" charset="-120"/>
                         </a:rPr>
-                        <a:t>0.01%</a:t>
+                        <a:t>0.72%</a:t>
                       </a:r>
                       <a:endParaRPr lang="en-US" sz="500" dirty="0">
                         <a:latin typeface="Calibri" charset="0"/>
@@ -25595,7 +25595,7 @@
                           <a:ea typeface="Calibri" pitchFamily="34" charset="-122"/>
                           <a:cs typeface="Calibri" pitchFamily="34" charset="-120"/>
                         </a:rPr>
-                        <a:t>0.01%</a:t>
+                        <a:t>0.70%</a:t>
                       </a:r>
                       <a:endParaRPr lang="en-US" sz="500" dirty="0">
                         <a:latin typeface="Calibri" charset="0"/>
@@ -25660,7 +25660,7 @@
                           <a:ea typeface="Calibri" pitchFamily="34" charset="-122"/>
                           <a:cs typeface="Calibri" pitchFamily="34" charset="-120"/>
                         </a:rPr>
-                        <a:t>0.01%</a:t>
+                        <a:t>0.61%</a:t>
                       </a:r>
                       <a:endParaRPr lang="en-US" sz="500" dirty="0">
                         <a:latin typeface="Calibri" charset="0"/>
@@ -25725,7 +25725,7 @@
                           <a:ea typeface="Calibri" pitchFamily="34" charset="-122"/>
                           <a:cs typeface="Calibri" pitchFamily="34" charset="-120"/>
                         </a:rPr>
-                        <a:t>0.01%</a:t>
+                        <a:t>0.62%</a:t>
                       </a:r>
                       <a:endParaRPr lang="en-US" sz="500" dirty="0">
                         <a:latin typeface="Calibri" charset="0"/>
@@ -25790,7 +25790,7 @@
                           <a:ea typeface="Calibri" pitchFamily="34" charset="-122"/>
                           <a:cs typeface="Calibri" pitchFamily="34" charset="-120"/>
                         </a:rPr>
-                        <a:t>0.01%</a:t>
+                        <a:t>0.59%</a:t>
                       </a:r>
                       <a:endParaRPr lang="en-US" sz="500" dirty="0">
                         <a:latin typeface="Calibri" charset="0"/>
@@ -25855,7 +25855,7 @@
                           <a:ea typeface="Calibri" pitchFamily="34" charset="-122"/>
                           <a:cs typeface="Calibri" pitchFamily="34" charset="-120"/>
                         </a:rPr>
-                        <a:t>0.00%</a:t>
+                        <a:t>0.45%</a:t>
                       </a:r>
                       <a:endParaRPr lang="en-US" sz="500" dirty="0">
                         <a:latin typeface="Calibri" charset="0"/>
@@ -25920,7 +25920,7 @@
                           <a:ea typeface="Calibri" pitchFamily="34" charset="-122"/>
                           <a:cs typeface="Calibri" pitchFamily="34" charset="-120"/>
                         </a:rPr>
-                        <a:t>0.00%</a:t>
+                        <a:t>0.43%</a:t>
                       </a:r>
                       <a:endParaRPr lang="en-US" sz="500" dirty="0">
                         <a:latin typeface="Calibri" charset="0"/>
@@ -25985,7 +25985,7 @@
                           <a:ea typeface="Calibri" pitchFamily="34" charset="-122"/>
                           <a:cs typeface="Calibri" pitchFamily="34" charset="-120"/>
                         </a:rPr>
-                        <a:t>0.01%</a:t>
+                        <a:t>0.51%</a:t>
                       </a:r>
                       <a:endParaRPr lang="en-US" sz="500" dirty="0">
                         <a:latin typeface="Calibri" charset="0"/>
@@ -26050,7 +26050,7 @@
                           <a:ea typeface="Calibri" pitchFamily="34" charset="-122"/>
                           <a:cs typeface="Calibri" pitchFamily="34" charset="-120"/>
                         </a:rPr>
-                        <a:t>0.00%</a:t>
+                        <a:t>0.46%</a:t>
                       </a:r>
                       <a:endParaRPr lang="en-US" sz="500" dirty="0">
                         <a:latin typeface="Calibri" charset="0"/>
@@ -26115,7 +26115,7 @@
                           <a:ea typeface="Calibri" pitchFamily="34" charset="-122"/>
                           <a:cs typeface="Calibri" pitchFamily="34" charset="-120"/>
                         </a:rPr>
-                        <a:t>0.00%</a:t>
+                        <a:t>0.42%</a:t>
                       </a:r>
                       <a:endParaRPr lang="en-US" sz="500" dirty="0">
                         <a:latin typeface="Calibri" charset="0"/>
@@ -26180,7 +26180,7 @@
                           <a:ea typeface="Calibri" pitchFamily="34" charset="-122"/>
                           <a:cs typeface="Calibri" pitchFamily="34" charset="-120"/>
                         </a:rPr>
-                        <a:t>0.00%</a:t>
+                        <a:t>0.49%</a:t>
                       </a:r>
                       <a:endParaRPr lang="en-US" sz="500" dirty="0">
                         <a:latin typeface="Calibri" charset="0"/>
@@ -26245,7 +26245,7 @@
                           <a:ea typeface="Calibri" pitchFamily="34" charset="-122"/>
                           <a:cs typeface="Calibri" pitchFamily="34" charset="-120"/>
                         </a:rPr>
-                        <a:t>0.07%</a:t>
+                        <a:t>7.14%</a:t>
                       </a:r>
                       <a:endParaRPr lang="en-US" sz="500" dirty="0">
                         <a:latin typeface="Calibri" charset="0"/>
@@ -28374,7 +28374,7 @@
                           <a:ea typeface="Calibri" pitchFamily="34" charset="-122"/>
                           <a:cs typeface="Calibri" pitchFamily="34" charset="-120"/>
                         </a:rPr>
-                        <a:t>0.00%</a:t>
+                        <a:t>0.40%</a:t>
                       </a:r>
                       <a:endParaRPr lang="en-US" sz="500" dirty="0">
                         <a:latin typeface="Calibri" charset="0"/>
@@ -28439,7 +28439,7 @@
                           <a:ea typeface="Calibri" pitchFamily="34" charset="-122"/>
                           <a:cs typeface="Calibri" pitchFamily="34" charset="-120"/>
                         </a:rPr>
-                        <a:t>0.00%</a:t>
+                        <a:t>0.42%</a:t>
                       </a:r>
                       <a:endParaRPr lang="en-US" sz="500" dirty="0">
                         <a:latin typeface="Calibri" charset="0"/>
@@ -28504,7 +28504,7 @@
                           <a:ea typeface="Calibri" pitchFamily="34" charset="-122"/>
                           <a:cs typeface="Calibri" pitchFamily="34" charset="-120"/>
                         </a:rPr>
-                        <a:t>0.00%</a:t>
+                        <a:t>0.45%</a:t>
                       </a:r>
                       <a:endParaRPr lang="en-US" sz="500" dirty="0">
                         <a:latin typeface="Calibri" charset="0"/>
@@ -28569,7 +28569,7 @@
                           <a:ea typeface="Calibri" pitchFamily="34" charset="-122"/>
                           <a:cs typeface="Calibri" pitchFamily="34" charset="-120"/>
                         </a:rPr>
-                        <a:t>0.00%</a:t>
+                        <a:t>0.46%</a:t>
                       </a:r>
                       <a:endParaRPr lang="en-US" sz="500" dirty="0">
                         <a:latin typeface="Calibri" charset="0"/>
@@ -28634,7 +28634,7 @@
                           <a:ea typeface="Calibri" pitchFamily="34" charset="-122"/>
                           <a:cs typeface="Calibri" pitchFamily="34" charset="-120"/>
                         </a:rPr>
-                        <a:t>0.00%</a:t>
+                        <a:t>0.44%</a:t>
                       </a:r>
                       <a:endParaRPr lang="en-US" sz="500" dirty="0">
                         <a:latin typeface="Calibri" charset="0"/>
@@ -28699,7 +28699,7 @@
                           <a:ea typeface="Calibri" pitchFamily="34" charset="-122"/>
                           <a:cs typeface="Calibri" pitchFamily="34" charset="-120"/>
                         </a:rPr>
-                        <a:t>0.01%</a:t>
+                        <a:t>0.51%</a:t>
                       </a:r>
                       <a:endParaRPr lang="en-US" sz="500" dirty="0">
                         <a:latin typeface="Calibri" charset="0"/>
@@ -28764,7 +28764,7 @@
                           <a:ea typeface="Calibri" pitchFamily="34" charset="-122"/>
                           <a:cs typeface="Calibri" pitchFamily="34" charset="-120"/>
                         </a:rPr>
-                        <a:t>0.01%</a:t>
+                        <a:t>0.50%</a:t>
                       </a:r>
                       <a:endParaRPr lang="en-US" sz="500" dirty="0">
                         <a:latin typeface="Calibri" charset="0"/>
@@ -29154,7 +29154,7 @@
                           <a:ea typeface="Calibri" pitchFamily="34" charset="-122"/>
                           <a:cs typeface="Calibri" pitchFamily="34" charset="-120"/>
                         </a:rPr>
-                        <a:t>2.48%</a:t>
+                        <a:t>5.75%</a:t>
                       </a:r>
                       <a:endParaRPr lang="en-US" sz="500" dirty="0">
                         <a:latin typeface="Calibri" charset="0"/>

--- a/folletos/2026-04/pptx/FIP_VANTRUST_LIQUIDEZ_ALTO_CAPITAL.pptx
+++ b/folletos/2026-04/pptx/FIP_VANTRUST_LIQUIDEZ_ALTO_CAPITAL.pptx
@@ -3113,7 +3113,7 @@
                 <a:ea typeface="Calibri" pitchFamily="34" charset="-122"/>
                 <a:cs typeface="Calibri" pitchFamily="34" charset="-120"/>
               </a:rPr>
-              <a:t>prueba CLP</a:t>
+              <a:t>prueba 13 CLP</a:t>
             </a:r>
             <a:endParaRPr lang="en-US" sz="800" dirty="0"/>
           </a:p>

--- a/folletos/2026-04/pptx/FIP_VANTRUST_LIQUIDEZ_ALTO_CAPITAL.pptx
+++ b/folletos/2026-04/pptx/FIP_VANTRUST_LIQUIDEZ_ALTO_CAPITAL.pptx
@@ -189,38 +189,284 @@
           </c:marker>
           <c:cat>
             <c:multiLvlStrRef>
-              <c:f>Sheet1!$A$2:$A$11</c:f>
+              <c:f>Sheet1!$A$2:$A$93</c:f>
               <c:multiLvlStrCache>
-                <c:ptCount val="10"/>
+                <c:ptCount val="92"/>
                 <c:lvl>
                   <c:pt idx="0">
+                    <c:v>Sep 2018</c:v>
+                  </c:pt>
+                  <c:pt idx="1">
+                    <c:v>Oct 2018</c:v>
+                  </c:pt>
+                  <c:pt idx="2">
+                    <c:v>Nov 2018</c:v>
+                  </c:pt>
+                  <c:pt idx="3">
+                    <c:v>Dec 2018</c:v>
+                  </c:pt>
+                  <c:pt idx="4">
+                    <c:v>Jan 2019</c:v>
+                  </c:pt>
+                  <c:pt idx="5">
+                    <c:v>Feb 2019</c:v>
+                  </c:pt>
+                  <c:pt idx="6">
+                    <c:v>Mar 2019</c:v>
+                  </c:pt>
+                  <c:pt idx="7">
+                    <c:v>Apr 2019</c:v>
+                  </c:pt>
+                  <c:pt idx="8">
+                    <c:v>May 2019</c:v>
+                  </c:pt>
+                  <c:pt idx="9">
+                    <c:v>Jun 2019</c:v>
+                  </c:pt>
+                  <c:pt idx="10">
+                    <c:v>Jul 2019</c:v>
+                  </c:pt>
+                  <c:pt idx="11">
+                    <c:v>Aug 2019</c:v>
+                  </c:pt>
+                  <c:pt idx="12">
+                    <c:v>Sep 2019</c:v>
+                  </c:pt>
+                  <c:pt idx="13">
+                    <c:v>Oct 2019</c:v>
+                  </c:pt>
+                  <c:pt idx="14">
+                    <c:v>Nov 2019</c:v>
+                  </c:pt>
+                  <c:pt idx="15">
+                    <c:v>Dec 2019</c:v>
+                  </c:pt>
+                  <c:pt idx="16">
+                    <c:v>Jan 2020</c:v>
+                  </c:pt>
+                  <c:pt idx="17">
+                    <c:v>Feb 2020</c:v>
+                  </c:pt>
+                  <c:pt idx="18">
+                    <c:v>Mar 2020</c:v>
+                  </c:pt>
+                  <c:pt idx="19">
+                    <c:v>Apr 2020</c:v>
+                  </c:pt>
+                  <c:pt idx="20">
+                    <c:v>May 2020</c:v>
+                  </c:pt>
+                  <c:pt idx="21">
+                    <c:v>Jun 2020</c:v>
+                  </c:pt>
+                  <c:pt idx="22">
+                    <c:v>Jul 2020</c:v>
+                  </c:pt>
+                  <c:pt idx="23">
+                    <c:v>Aug 2020</c:v>
+                  </c:pt>
+                  <c:pt idx="24">
+                    <c:v>Sep 2020</c:v>
+                  </c:pt>
+                  <c:pt idx="25">
+                    <c:v>Oct 2020</c:v>
+                  </c:pt>
+                  <c:pt idx="26">
+                    <c:v>Nov 2020</c:v>
+                  </c:pt>
+                  <c:pt idx="27">
+                    <c:v>Dec 2020</c:v>
+                  </c:pt>
+                  <c:pt idx="28">
+                    <c:v>Jan 2021</c:v>
+                  </c:pt>
+                  <c:pt idx="29">
+                    <c:v>Feb 2021</c:v>
+                  </c:pt>
+                  <c:pt idx="30">
+                    <c:v>Mar 2021</c:v>
+                  </c:pt>
+                  <c:pt idx="31">
+                    <c:v>Apr 2021</c:v>
+                  </c:pt>
+                  <c:pt idx="32">
+                    <c:v>May 2021</c:v>
+                  </c:pt>
+                  <c:pt idx="33">
+                    <c:v>Jun 2021</c:v>
+                  </c:pt>
+                  <c:pt idx="34">
+                    <c:v>Jul 2021</c:v>
+                  </c:pt>
+                  <c:pt idx="35">
+                    <c:v>Aug 2021</c:v>
+                  </c:pt>
+                  <c:pt idx="36">
+                    <c:v>Sep 2021</c:v>
+                  </c:pt>
+                  <c:pt idx="37">
+                    <c:v>Oct 2021</c:v>
+                  </c:pt>
+                  <c:pt idx="38">
+                    <c:v>Nov 2021</c:v>
+                  </c:pt>
+                  <c:pt idx="39">
+                    <c:v>Dec 2021</c:v>
+                  </c:pt>
+                  <c:pt idx="40">
+                    <c:v>Jan 2022</c:v>
+                  </c:pt>
+                  <c:pt idx="41">
+                    <c:v>Feb 2022</c:v>
+                  </c:pt>
+                  <c:pt idx="42">
+                    <c:v>Mar 2022</c:v>
+                  </c:pt>
+                  <c:pt idx="43">
+                    <c:v>Apr 2022</c:v>
+                  </c:pt>
+                  <c:pt idx="44">
+                    <c:v>May 2022</c:v>
+                  </c:pt>
+                  <c:pt idx="45">
+                    <c:v>Jun 2022</c:v>
+                  </c:pt>
+                  <c:pt idx="46">
+                    <c:v>Jul 2022</c:v>
+                  </c:pt>
+                  <c:pt idx="47">
+                    <c:v>Aug 2022</c:v>
+                  </c:pt>
+                  <c:pt idx="48">
+                    <c:v>Sep 2022</c:v>
+                  </c:pt>
+                  <c:pt idx="49">
+                    <c:v>Oct 2022</c:v>
+                  </c:pt>
+                  <c:pt idx="50">
+                    <c:v>Nov 2022</c:v>
+                  </c:pt>
+                  <c:pt idx="51">
+                    <c:v>Dec 2022</c:v>
+                  </c:pt>
+                  <c:pt idx="52">
+                    <c:v>Jan 2023</c:v>
+                  </c:pt>
+                  <c:pt idx="53">
+                    <c:v>Feb 2023</c:v>
+                  </c:pt>
+                  <c:pt idx="54">
+                    <c:v>Mar 2023</c:v>
+                  </c:pt>
+                  <c:pt idx="55">
+                    <c:v>Apr 2023</c:v>
+                  </c:pt>
+                  <c:pt idx="56">
+                    <c:v>May 2023</c:v>
+                  </c:pt>
+                  <c:pt idx="57">
+                    <c:v>Jun 2023</c:v>
+                  </c:pt>
+                  <c:pt idx="58">
+                    <c:v>Jul 2023</c:v>
+                  </c:pt>
+                  <c:pt idx="59">
+                    <c:v>Aug 2023</c:v>
+                  </c:pt>
+                  <c:pt idx="60">
+                    <c:v>Sep 2023</c:v>
+                  </c:pt>
+                  <c:pt idx="61">
+                    <c:v>Oct 2023</c:v>
+                  </c:pt>
+                  <c:pt idx="62">
+                    <c:v>Nov 2023</c:v>
+                  </c:pt>
+                  <c:pt idx="63">
+                    <c:v>Dec 2023</c:v>
+                  </c:pt>
+                  <c:pt idx="64">
+                    <c:v>Jan 2024</c:v>
+                  </c:pt>
+                  <c:pt idx="65">
+                    <c:v>Feb 2024</c:v>
+                  </c:pt>
+                  <c:pt idx="66">
+                    <c:v>Mar 2024</c:v>
+                  </c:pt>
+                  <c:pt idx="67">
+                    <c:v>Apr 2024</c:v>
+                  </c:pt>
+                  <c:pt idx="68">
+                    <c:v>May 2024</c:v>
+                  </c:pt>
+                  <c:pt idx="69">
+                    <c:v>Jun 2024</c:v>
+                  </c:pt>
+                  <c:pt idx="70">
+                    <c:v>Jul 2024</c:v>
+                  </c:pt>
+                  <c:pt idx="71">
+                    <c:v>Aug 2024</c:v>
+                  </c:pt>
+                  <c:pt idx="72">
+                    <c:v>Sep 2024</c:v>
+                  </c:pt>
+                  <c:pt idx="73">
+                    <c:v>Oct 2024</c:v>
+                  </c:pt>
+                  <c:pt idx="74">
+                    <c:v>Nov 2024</c:v>
+                  </c:pt>
+                  <c:pt idx="75">
+                    <c:v>Dec 2024</c:v>
+                  </c:pt>
+                  <c:pt idx="76">
+                    <c:v>Jan 2025</c:v>
+                  </c:pt>
+                  <c:pt idx="77">
+                    <c:v>Feb 2025</c:v>
+                  </c:pt>
+                  <c:pt idx="78">
+                    <c:v>Mar 2025</c:v>
+                  </c:pt>
+                  <c:pt idx="79">
+                    <c:v>Apr 2025</c:v>
+                  </c:pt>
+                  <c:pt idx="80">
+                    <c:v>May 2025</c:v>
+                  </c:pt>
+                  <c:pt idx="81">
+                    <c:v>Jun 2025</c:v>
+                  </c:pt>
+                  <c:pt idx="82">
                     <c:v>Jul 2025</c:v>
                   </c:pt>
-                  <c:pt idx="1">
+                  <c:pt idx="83">
                     <c:v>Aug 2025</c:v>
                   </c:pt>
-                  <c:pt idx="2">
+                  <c:pt idx="84">
                     <c:v>Sep 2025</c:v>
                   </c:pt>
-                  <c:pt idx="3">
+                  <c:pt idx="85">
                     <c:v>Oct 2025</c:v>
                   </c:pt>
-                  <c:pt idx="4">
+                  <c:pt idx="86">
                     <c:v>Nov 2025</c:v>
                   </c:pt>
-                  <c:pt idx="5">
+                  <c:pt idx="87">
                     <c:v>Dec 2025</c:v>
                   </c:pt>
-                  <c:pt idx="6">
+                  <c:pt idx="88">
                     <c:v>Jan 2026</c:v>
                   </c:pt>
-                  <c:pt idx="7">
+                  <c:pt idx="89">
                     <c:v>Feb 2026</c:v>
                   </c:pt>
-                  <c:pt idx="8">
+                  <c:pt idx="90">
                     <c:v>Mar 2026</c:v>
                   </c:pt>
-                  <c:pt idx="9">
+                  <c:pt idx="91">
                     <c:v>Apr 2026</c:v>
                   </c:pt>
                 </c:lvl>
@@ -229,39 +475,285 @@
           </c:cat>
           <c:val>
             <c:numRef>
-              <c:f>Sheet1!$B$2:$B$11</c:f>
+              <c:f>Sheet1!$B$2:$B$93</c:f>
               <c:numCache>
                 <c:formatCode>General</c:formatCode>
-                <c:ptCount val="10"/>
+                <c:ptCount val="92"/>
                 <c:pt idx="0">
                   <c:v>100</c:v>
                 </c:pt>
                 <c:pt idx="1">
-                  <c:v>100.4</c:v>
+                  <c:v>100.23</c:v>
                 </c:pt>
                 <c:pt idx="2">
-                  <c:v>100.79</c:v>
+                  <c:v>100.46</c:v>
                 </c:pt>
                 <c:pt idx="3">
-                  <c:v>101.19</c:v>
+                  <c:v>100.7</c:v>
                 </c:pt>
                 <c:pt idx="4">
-                  <c:v>101.59</c:v>
+                  <c:v>100.94</c:v>
                 </c:pt>
                 <c:pt idx="5">
-                  <c:v>101.98</c:v>
+                  <c:v>101.17</c:v>
                 </c:pt>
                 <c:pt idx="6">
-                  <c:v>102.37</c:v>
+                  <c:v>101.43</c:v>
                 </c:pt>
                 <c:pt idx="7">
-                  <c:v>102.75</c:v>
+                  <c:v>101.68</c:v>
                 </c:pt>
                 <c:pt idx="8">
-                  <c:v>103.14</c:v>
+                  <c:v>101.95</c:v>
                 </c:pt>
                 <c:pt idx="9">
-                  <c:v>103.52</c:v>
+                  <c:v>102.17</c:v>
+                </c:pt>
+                <c:pt idx="10">
+                  <c:v>102.39</c:v>
+                </c:pt>
+                <c:pt idx="11">
+                  <c:v>102.61</c:v>
+                </c:pt>
+                <c:pt idx="12">
+                  <c:v>102.79</c:v>
+                </c:pt>
+                <c:pt idx="13">
+                  <c:v>102.96</c:v>
+                </c:pt>
+                <c:pt idx="14">
+                  <c:v>103.11</c:v>
+                </c:pt>
+                <c:pt idx="15">
+                  <c:v>103.26</c:v>
+                </c:pt>
+                <c:pt idx="16">
+                  <c:v>103.43</c:v>
+                </c:pt>
+                <c:pt idx="17">
+                  <c:v>103.58</c:v>
+                </c:pt>
+                <c:pt idx="18">
+                  <c:v>103.69</c:v>
+                </c:pt>
+                <c:pt idx="19">
+                  <c:v>103.74</c:v>
+                </c:pt>
+                <c:pt idx="20">
+                  <c:v>103.78</c:v>
+                </c:pt>
+                <c:pt idx="21">
+                  <c:v>103.82</c:v>
+                </c:pt>
+                <c:pt idx="22">
+                  <c:v>103.87</c:v>
+                </c:pt>
+                <c:pt idx="23">
+                  <c:v>103.91</c:v>
+                </c:pt>
+                <c:pt idx="24">
+                  <c:v>103.95</c:v>
+                </c:pt>
+                <c:pt idx="25">
+                  <c:v>103.99</c:v>
+                </c:pt>
+                <c:pt idx="26">
+                  <c:v>104.02</c:v>
+                </c:pt>
+                <c:pt idx="27">
+                  <c:v>104.06</c:v>
+                </c:pt>
+                <c:pt idx="28">
+                  <c:v>104.09</c:v>
+                </c:pt>
+                <c:pt idx="29">
+                  <c:v>104.12</c:v>
+                </c:pt>
+                <c:pt idx="30">
+                  <c:v>104.14</c:v>
+                </c:pt>
+                <c:pt idx="31">
+                  <c:v>104.17</c:v>
+                </c:pt>
+                <c:pt idx="32">
+                  <c:v>104.2</c:v>
+                </c:pt>
+                <c:pt idx="33">
+                  <c:v>104.23</c:v>
+                </c:pt>
+                <c:pt idx="34">
+                  <c:v>104.28</c:v>
+                </c:pt>
+                <c:pt idx="35">
+                  <c:v>104.35</c:v>
+                </c:pt>
+                <c:pt idx="36">
+                  <c:v>104.48</c:v>
+                </c:pt>
+                <c:pt idx="37">
+                  <c:v>104.69</c:v>
+                </c:pt>
+                <c:pt idx="38">
+                  <c:v>104.92</c:v>
+                </c:pt>
+                <c:pt idx="39">
+                  <c:v>105.25</c:v>
+                </c:pt>
+                <c:pt idx="40">
+                  <c:v>105.61</c:v>
+                </c:pt>
+                <c:pt idx="41">
+                  <c:v>106.06</c:v>
+                </c:pt>
+                <c:pt idx="42">
+                  <c:v>106.58</c:v>
+                </c:pt>
+                <c:pt idx="43">
+                  <c:v>107.16</c:v>
+                </c:pt>
+                <c:pt idx="44">
+                  <c:v>107.92</c:v>
+                </c:pt>
+                <c:pt idx="45">
+                  <c:v>108.72</c:v>
+                </c:pt>
+                <c:pt idx="46">
+                  <c:v>109.54</c:v>
+                </c:pt>
+                <c:pt idx="47">
+                  <c:v>110.52</c:v>
+                </c:pt>
+                <c:pt idx="48">
+                  <c:v>111.5</c:v>
+                </c:pt>
+                <c:pt idx="49">
+                  <c:v>112.46</c:v>
+                </c:pt>
+                <c:pt idx="50">
+                  <c:v>113.62</c:v>
+                </c:pt>
+                <c:pt idx="51">
+                  <c:v>114.69</c:v>
+                </c:pt>
+                <c:pt idx="52">
+                  <c:v>115.84</c:v>
+                </c:pt>
+                <c:pt idx="53">
+                  <c:v>116.86</c:v>
+                </c:pt>
+                <c:pt idx="54">
+                  <c:v>118</c:v>
+                </c:pt>
+                <c:pt idx="55">
+                  <c:v>119.03</c:v>
+                </c:pt>
+                <c:pt idx="56">
+                  <c:v>120.27</c:v>
+                </c:pt>
+                <c:pt idx="57">
+                  <c:v>121.4</c:v>
+                </c:pt>
+                <c:pt idx="58">
+                  <c:v>122.58</c:v>
+                </c:pt>
+                <c:pt idx="59">
+                  <c:v>123.67</c:v>
+                </c:pt>
+                <c:pt idx="60">
+                  <c:v>124.63</c:v>
+                </c:pt>
+                <c:pt idx="61">
+                  <c:v>125.69</c:v>
+                </c:pt>
+                <c:pt idx="62">
+                  <c:v>126.63</c:v>
+                </c:pt>
+                <c:pt idx="63">
+                  <c:v>127.53</c:v>
+                </c:pt>
+                <c:pt idx="64">
+                  <c:v>128.47</c:v>
+                </c:pt>
+                <c:pt idx="65">
+                  <c:v>129.25</c:v>
+                </c:pt>
+                <c:pt idx="66">
+                  <c:v>129.98</c:v>
+                </c:pt>
+                <c:pt idx="67">
+                  <c:v>130.77</c:v>
+                </c:pt>
+                <c:pt idx="68">
+                  <c:v>131.5</c:v>
+                </c:pt>
+                <c:pt idx="69">
+                  <c:v>132.1</c:v>
+                </c:pt>
+                <c:pt idx="70">
+                  <c:v>132.8</c:v>
+                </c:pt>
+                <c:pt idx="71">
+                  <c:v>133.44</c:v>
+                </c:pt>
+                <c:pt idx="72">
+                  <c:v>134.08</c:v>
+                </c:pt>
+                <c:pt idx="73">
+                  <c:v>134.68</c:v>
+                </c:pt>
+                <c:pt idx="74">
+                  <c:v>135.27</c:v>
+                </c:pt>
+                <c:pt idx="75">
+                  <c:v>135.87</c:v>
+                </c:pt>
+                <c:pt idx="76">
+                  <c:v>136.48</c:v>
+                </c:pt>
+                <c:pt idx="77">
+                  <c:v>137.01</c:v>
+                </c:pt>
+                <c:pt idx="78">
+                  <c:v>137.6</c:v>
+                </c:pt>
+                <c:pt idx="79">
+                  <c:v>138.18</c:v>
+                </c:pt>
+                <c:pt idx="80">
+                  <c:v>138.75</c:v>
+                </c:pt>
+                <c:pt idx="81">
+                  <c:v>139.35</c:v>
+                </c:pt>
+                <c:pt idx="82">
+                  <c:v>139.95</c:v>
+                </c:pt>
+                <c:pt idx="83">
+                  <c:v>140.49</c:v>
+                </c:pt>
+                <c:pt idx="84">
+                  <c:v>141.08</c:v>
+                </c:pt>
+                <c:pt idx="85">
+                  <c:v>141.64</c:v>
+                </c:pt>
+                <c:pt idx="86">
+                  <c:v>142.18</c:v>
+                </c:pt>
+                <c:pt idx="87">
+                  <c:v>142.77</c:v>
+                </c:pt>
+                <c:pt idx="88">
+                  <c:v>143.33</c:v>
+                </c:pt>
+                <c:pt idx="89">
+                  <c:v>143.85</c:v>
+                </c:pt>
+                <c:pt idx="90">
+                  <c:v>144.41</c:v>
+                </c:pt>
+                <c:pt idx="91">
+                  <c:v>144.95</c:v>
                 </c:pt>
               </c:numCache>
             </c:numRef>
@@ -339,38 +831,284 @@
           </c:marker>
           <c:cat>
             <c:multiLvlStrRef>
-              <c:f>Sheet1!$A$2:$A$11</c:f>
+              <c:f>Sheet1!$A$2:$A$93</c:f>
               <c:multiLvlStrCache>
-                <c:ptCount val="10"/>
+                <c:ptCount val="92"/>
                 <c:lvl>
                   <c:pt idx="0">
+                    <c:v>Sep 2018</c:v>
+                  </c:pt>
+                  <c:pt idx="1">
+                    <c:v>Oct 2018</c:v>
+                  </c:pt>
+                  <c:pt idx="2">
+                    <c:v>Nov 2018</c:v>
+                  </c:pt>
+                  <c:pt idx="3">
+                    <c:v>Dec 2018</c:v>
+                  </c:pt>
+                  <c:pt idx="4">
+                    <c:v>Jan 2019</c:v>
+                  </c:pt>
+                  <c:pt idx="5">
+                    <c:v>Feb 2019</c:v>
+                  </c:pt>
+                  <c:pt idx="6">
+                    <c:v>Mar 2019</c:v>
+                  </c:pt>
+                  <c:pt idx="7">
+                    <c:v>Apr 2019</c:v>
+                  </c:pt>
+                  <c:pt idx="8">
+                    <c:v>May 2019</c:v>
+                  </c:pt>
+                  <c:pt idx="9">
+                    <c:v>Jun 2019</c:v>
+                  </c:pt>
+                  <c:pt idx="10">
+                    <c:v>Jul 2019</c:v>
+                  </c:pt>
+                  <c:pt idx="11">
+                    <c:v>Aug 2019</c:v>
+                  </c:pt>
+                  <c:pt idx="12">
+                    <c:v>Sep 2019</c:v>
+                  </c:pt>
+                  <c:pt idx="13">
+                    <c:v>Oct 2019</c:v>
+                  </c:pt>
+                  <c:pt idx="14">
+                    <c:v>Nov 2019</c:v>
+                  </c:pt>
+                  <c:pt idx="15">
+                    <c:v>Dec 2019</c:v>
+                  </c:pt>
+                  <c:pt idx="16">
+                    <c:v>Jan 2020</c:v>
+                  </c:pt>
+                  <c:pt idx="17">
+                    <c:v>Feb 2020</c:v>
+                  </c:pt>
+                  <c:pt idx="18">
+                    <c:v>Mar 2020</c:v>
+                  </c:pt>
+                  <c:pt idx="19">
+                    <c:v>Apr 2020</c:v>
+                  </c:pt>
+                  <c:pt idx="20">
+                    <c:v>May 2020</c:v>
+                  </c:pt>
+                  <c:pt idx="21">
+                    <c:v>Jun 2020</c:v>
+                  </c:pt>
+                  <c:pt idx="22">
+                    <c:v>Jul 2020</c:v>
+                  </c:pt>
+                  <c:pt idx="23">
+                    <c:v>Aug 2020</c:v>
+                  </c:pt>
+                  <c:pt idx="24">
+                    <c:v>Sep 2020</c:v>
+                  </c:pt>
+                  <c:pt idx="25">
+                    <c:v>Oct 2020</c:v>
+                  </c:pt>
+                  <c:pt idx="26">
+                    <c:v>Nov 2020</c:v>
+                  </c:pt>
+                  <c:pt idx="27">
+                    <c:v>Dec 2020</c:v>
+                  </c:pt>
+                  <c:pt idx="28">
+                    <c:v>Jan 2021</c:v>
+                  </c:pt>
+                  <c:pt idx="29">
+                    <c:v>Feb 2021</c:v>
+                  </c:pt>
+                  <c:pt idx="30">
+                    <c:v>Mar 2021</c:v>
+                  </c:pt>
+                  <c:pt idx="31">
+                    <c:v>Apr 2021</c:v>
+                  </c:pt>
+                  <c:pt idx="32">
+                    <c:v>May 2021</c:v>
+                  </c:pt>
+                  <c:pt idx="33">
+                    <c:v>Jun 2021</c:v>
+                  </c:pt>
+                  <c:pt idx="34">
+                    <c:v>Jul 2021</c:v>
+                  </c:pt>
+                  <c:pt idx="35">
+                    <c:v>Aug 2021</c:v>
+                  </c:pt>
+                  <c:pt idx="36">
+                    <c:v>Sep 2021</c:v>
+                  </c:pt>
+                  <c:pt idx="37">
+                    <c:v>Oct 2021</c:v>
+                  </c:pt>
+                  <c:pt idx="38">
+                    <c:v>Nov 2021</c:v>
+                  </c:pt>
+                  <c:pt idx="39">
+                    <c:v>Dec 2021</c:v>
+                  </c:pt>
+                  <c:pt idx="40">
+                    <c:v>Jan 2022</c:v>
+                  </c:pt>
+                  <c:pt idx="41">
+                    <c:v>Feb 2022</c:v>
+                  </c:pt>
+                  <c:pt idx="42">
+                    <c:v>Mar 2022</c:v>
+                  </c:pt>
+                  <c:pt idx="43">
+                    <c:v>Apr 2022</c:v>
+                  </c:pt>
+                  <c:pt idx="44">
+                    <c:v>May 2022</c:v>
+                  </c:pt>
+                  <c:pt idx="45">
+                    <c:v>Jun 2022</c:v>
+                  </c:pt>
+                  <c:pt idx="46">
+                    <c:v>Jul 2022</c:v>
+                  </c:pt>
+                  <c:pt idx="47">
+                    <c:v>Aug 2022</c:v>
+                  </c:pt>
+                  <c:pt idx="48">
+                    <c:v>Sep 2022</c:v>
+                  </c:pt>
+                  <c:pt idx="49">
+                    <c:v>Oct 2022</c:v>
+                  </c:pt>
+                  <c:pt idx="50">
+                    <c:v>Nov 2022</c:v>
+                  </c:pt>
+                  <c:pt idx="51">
+                    <c:v>Dec 2022</c:v>
+                  </c:pt>
+                  <c:pt idx="52">
+                    <c:v>Jan 2023</c:v>
+                  </c:pt>
+                  <c:pt idx="53">
+                    <c:v>Feb 2023</c:v>
+                  </c:pt>
+                  <c:pt idx="54">
+                    <c:v>Mar 2023</c:v>
+                  </c:pt>
+                  <c:pt idx="55">
+                    <c:v>Apr 2023</c:v>
+                  </c:pt>
+                  <c:pt idx="56">
+                    <c:v>May 2023</c:v>
+                  </c:pt>
+                  <c:pt idx="57">
+                    <c:v>Jun 2023</c:v>
+                  </c:pt>
+                  <c:pt idx="58">
+                    <c:v>Jul 2023</c:v>
+                  </c:pt>
+                  <c:pt idx="59">
+                    <c:v>Aug 2023</c:v>
+                  </c:pt>
+                  <c:pt idx="60">
+                    <c:v>Sep 2023</c:v>
+                  </c:pt>
+                  <c:pt idx="61">
+                    <c:v>Oct 2023</c:v>
+                  </c:pt>
+                  <c:pt idx="62">
+                    <c:v>Nov 2023</c:v>
+                  </c:pt>
+                  <c:pt idx="63">
+                    <c:v>Dec 2023</c:v>
+                  </c:pt>
+                  <c:pt idx="64">
+                    <c:v>Jan 2024</c:v>
+                  </c:pt>
+                  <c:pt idx="65">
+                    <c:v>Feb 2024</c:v>
+                  </c:pt>
+                  <c:pt idx="66">
+                    <c:v>Mar 2024</c:v>
+                  </c:pt>
+                  <c:pt idx="67">
+                    <c:v>Apr 2024</c:v>
+                  </c:pt>
+                  <c:pt idx="68">
+                    <c:v>May 2024</c:v>
+                  </c:pt>
+                  <c:pt idx="69">
+                    <c:v>Jun 2024</c:v>
+                  </c:pt>
+                  <c:pt idx="70">
+                    <c:v>Jul 2024</c:v>
+                  </c:pt>
+                  <c:pt idx="71">
+                    <c:v>Aug 2024</c:v>
+                  </c:pt>
+                  <c:pt idx="72">
+                    <c:v>Sep 2024</c:v>
+                  </c:pt>
+                  <c:pt idx="73">
+                    <c:v>Oct 2024</c:v>
+                  </c:pt>
+                  <c:pt idx="74">
+                    <c:v>Nov 2024</c:v>
+                  </c:pt>
+                  <c:pt idx="75">
+                    <c:v>Dec 2024</c:v>
+                  </c:pt>
+                  <c:pt idx="76">
+                    <c:v>Jan 2025</c:v>
+                  </c:pt>
+                  <c:pt idx="77">
+                    <c:v>Feb 2025</c:v>
+                  </c:pt>
+                  <c:pt idx="78">
+                    <c:v>Mar 2025</c:v>
+                  </c:pt>
+                  <c:pt idx="79">
+                    <c:v>Apr 2025</c:v>
+                  </c:pt>
+                  <c:pt idx="80">
+                    <c:v>May 2025</c:v>
+                  </c:pt>
+                  <c:pt idx="81">
+                    <c:v>Jun 2025</c:v>
+                  </c:pt>
+                  <c:pt idx="82">
                     <c:v>Jul 2025</c:v>
                   </c:pt>
-                  <c:pt idx="1">
+                  <c:pt idx="83">
                     <c:v>Aug 2025</c:v>
                   </c:pt>
-                  <c:pt idx="2">
+                  <c:pt idx="84">
                     <c:v>Sep 2025</c:v>
                   </c:pt>
-                  <c:pt idx="3">
+                  <c:pt idx="85">
                     <c:v>Oct 2025</c:v>
                   </c:pt>
-                  <c:pt idx="4">
+                  <c:pt idx="86">
                     <c:v>Nov 2025</c:v>
                   </c:pt>
-                  <c:pt idx="5">
+                  <c:pt idx="87">
                     <c:v>Dec 2025</c:v>
                   </c:pt>
-                  <c:pt idx="6">
+                  <c:pt idx="88">
                     <c:v>Jan 2026</c:v>
                   </c:pt>
-                  <c:pt idx="7">
+                  <c:pt idx="89">
                     <c:v>Feb 2026</c:v>
                   </c:pt>
-                  <c:pt idx="8">
+                  <c:pt idx="90">
                     <c:v>Mar 2026</c:v>
                   </c:pt>
-                  <c:pt idx="9">
+                  <c:pt idx="91">
                     <c:v>Apr 2026</c:v>
                   </c:pt>
                 </c:lvl>
@@ -379,39 +1117,285 @@
           </c:cat>
           <c:val>
             <c:numRef>
-              <c:f>Sheet1!$C$2:$C$11</c:f>
+              <c:f>Sheet1!$C$2:$C$93</c:f>
               <c:numCache>
                 <c:formatCode>General</c:formatCode>
-                <c:ptCount val="10"/>
+                <c:ptCount val="92"/>
                 <c:pt idx="0">
                   <c:v>100</c:v>
                 </c:pt>
                 <c:pt idx="1">
-                  <c:v>100.49</c:v>
+                  <c:v>100.16</c:v>
                 </c:pt>
                 <c:pt idx="2">
-                  <c:v>100.94</c:v>
+                  <c:v>100.46</c:v>
                 </c:pt>
                 <c:pt idx="3">
-                  <c:v>101.4</c:v>
+                  <c:v>100.87</c:v>
                 </c:pt>
                 <c:pt idx="4">
-                  <c:v>101.94</c:v>
+                  <c:v>101.17</c:v>
                 </c:pt>
                 <c:pt idx="5">
-                  <c:v>102.44</c:v>
+                  <c:v>101.43</c:v>
                 </c:pt>
                 <c:pt idx="6">
-                  <c:v>103</c:v>
+                  <c:v>101.74</c:v>
                 </c:pt>
                 <c:pt idx="7">
-                  <c:v>103.51</c:v>
+                  <c:v>102.06</c:v>
                 </c:pt>
                 <c:pt idx="8">
-                  <c:v>104.1</c:v>
+                  <c:v>102.39</c:v>
                 </c:pt>
                 <c:pt idx="9">
-                  <c:v>104.68</c:v>
+                  <c:v>102.72</c:v>
+                </c:pt>
+                <c:pt idx="10">
+                  <c:v>103.04</c:v>
+                </c:pt>
+                <c:pt idx="11">
+                  <c:v>103.33</c:v>
+                </c:pt>
+                <c:pt idx="12">
+                  <c:v>103.59</c:v>
+                </c:pt>
+                <c:pt idx="13">
+                  <c:v>103.83</c:v>
+                </c:pt>
+                <c:pt idx="14">
+                  <c:v>104.02</c:v>
+                </c:pt>
+                <c:pt idx="15">
+                  <c:v>104.22</c:v>
+                </c:pt>
+                <c:pt idx="16">
+                  <c:v>104.42</c:v>
+                </c:pt>
+                <c:pt idx="17">
+                  <c:v>104.6</c:v>
+                </c:pt>
+                <c:pt idx="18">
+                  <c:v>104.79</c:v>
+                </c:pt>
+                <c:pt idx="19">
+                  <c:v>104.98</c:v>
+                </c:pt>
+                <c:pt idx="20">
+                  <c:v>105.17</c:v>
+                </c:pt>
+                <c:pt idx="21">
+                  <c:v>105.36</c:v>
+                </c:pt>
+                <c:pt idx="22">
+                  <c:v>105.54</c:v>
+                </c:pt>
+                <c:pt idx="23">
+                  <c:v>105.71</c:v>
+                </c:pt>
+                <c:pt idx="24">
+                  <c:v>105.86</c:v>
+                </c:pt>
+                <c:pt idx="25">
+                  <c:v>106</c:v>
+                </c:pt>
+                <c:pt idx="26">
+                  <c:v>106.17</c:v>
+                </c:pt>
+                <c:pt idx="27">
+                  <c:v>106.57</c:v>
+                </c:pt>
+                <c:pt idx="28">
+                  <c:v>106.68</c:v>
+                </c:pt>
+                <c:pt idx="29">
+                  <c:v>106.8</c:v>
+                </c:pt>
+                <c:pt idx="30">
+                  <c:v>106.93</c:v>
+                </c:pt>
+                <c:pt idx="31">
+                  <c:v>107.01</c:v>
+                </c:pt>
+                <c:pt idx="32">
+                  <c:v>107.18</c:v>
+                </c:pt>
+                <c:pt idx="33">
+                  <c:v>107.33</c:v>
+                </c:pt>
+                <c:pt idx="34">
+                  <c:v>107.44</c:v>
+                </c:pt>
+                <c:pt idx="35">
+                  <c:v>107.55</c:v>
+                </c:pt>
+                <c:pt idx="36">
+                  <c:v>107.68</c:v>
+                </c:pt>
+                <c:pt idx="37">
+                  <c:v>107.82</c:v>
+                </c:pt>
+                <c:pt idx="38">
+                  <c:v>108</c:v>
+                </c:pt>
+                <c:pt idx="39">
+                  <c:v>108.25</c:v>
+                </c:pt>
+                <c:pt idx="40">
+                  <c:v>108.6</c:v>
+                </c:pt>
+                <c:pt idx="41">
+                  <c:v>109.02</c:v>
+                </c:pt>
+                <c:pt idx="42">
+                  <c:v>109.57</c:v>
+                </c:pt>
+                <c:pt idx="43">
+                  <c:v>110.32</c:v>
+                </c:pt>
+                <c:pt idx="44">
+                  <c:v>111.16</c:v>
+                </c:pt>
+                <c:pt idx="45">
+                  <c:v>111.9</c:v>
+                </c:pt>
+                <c:pt idx="46">
+                  <c:v>112.78</c:v>
+                </c:pt>
+                <c:pt idx="47">
+                  <c:v>113.71</c:v>
+                </c:pt>
+                <c:pt idx="48">
+                  <c:v>114.66</c:v>
+                </c:pt>
+                <c:pt idx="49">
+                  <c:v>115.63</c:v>
+                </c:pt>
+                <c:pt idx="50">
+                  <c:v>116.8</c:v>
+                </c:pt>
+                <c:pt idx="51">
+                  <c:v>117.97</c:v>
+                </c:pt>
+                <c:pt idx="52">
+                  <c:v>119.18</c:v>
+                </c:pt>
+                <c:pt idx="53">
+                  <c:v>120.11</c:v>
+                </c:pt>
+                <c:pt idx="54">
+                  <c:v>121.3</c:v>
+                </c:pt>
+                <c:pt idx="55">
+                  <c:v>122.42</c:v>
+                </c:pt>
+                <c:pt idx="56">
+                  <c:v>123.73</c:v>
+                </c:pt>
+                <c:pt idx="57">
+                  <c:v>124.93</c:v>
+                </c:pt>
+                <c:pt idx="58">
+                  <c:v>126.2</c:v>
+                </c:pt>
+                <c:pt idx="59">
+                  <c:v>127.42</c:v>
+                </c:pt>
+                <c:pt idx="60">
+                  <c:v>128.59</c:v>
+                </c:pt>
+                <c:pt idx="61">
+                  <c:v>129.68</c:v>
+                </c:pt>
+                <c:pt idx="62">
+                  <c:v>130.63</c:v>
+                </c:pt>
+                <c:pt idx="63">
+                  <c:v>132.27</c:v>
+                </c:pt>
+                <c:pt idx="64">
+                  <c:v>133.53</c:v>
+                </c:pt>
+                <c:pt idx="65">
+                  <c:v>134.46</c:v>
+                </c:pt>
+                <c:pt idx="66">
+                  <c:v>135.33</c:v>
+                </c:pt>
+                <c:pt idx="67">
+                  <c:v>136.24</c:v>
+                </c:pt>
+                <c:pt idx="68">
+                  <c:v>137.11</c:v>
+                </c:pt>
+                <c:pt idx="69">
+                  <c:v>137.92</c:v>
+                </c:pt>
+                <c:pt idx="70">
+                  <c:v>138.56</c:v>
+                </c:pt>
+                <c:pt idx="71">
+                  <c:v>139.17</c:v>
+                </c:pt>
+                <c:pt idx="72">
+                  <c:v>139.88</c:v>
+                </c:pt>
+                <c:pt idx="73">
+                  <c:v>140.55</c:v>
+                </c:pt>
+                <c:pt idx="74">
+                  <c:v>141.14</c:v>
+                </c:pt>
+                <c:pt idx="75">
+                  <c:v>141.86</c:v>
+                </c:pt>
+                <c:pt idx="76">
+                  <c:v>142.45</c:v>
+                </c:pt>
+                <c:pt idx="77">
+                  <c:v>143.01</c:v>
+                </c:pt>
+                <c:pt idx="78">
+                  <c:v>143.67</c:v>
+                </c:pt>
+                <c:pt idx="79">
+                  <c:v>144.33</c:v>
+                </c:pt>
+                <c:pt idx="80">
+                  <c:v>144.99</c:v>
+                </c:pt>
+                <c:pt idx="81">
+                  <c:v>145.73</c:v>
+                </c:pt>
+                <c:pt idx="82">
+                  <c:v>146.49</c:v>
+                </c:pt>
+                <c:pt idx="83">
+                  <c:v>147.2</c:v>
+                </c:pt>
+                <c:pt idx="84">
+                  <c:v>147.86</c:v>
+                </c:pt>
+                <c:pt idx="85">
+                  <c:v>148.54</c:v>
+                </c:pt>
+                <c:pt idx="86">
+                  <c:v>149.33</c:v>
+                </c:pt>
+                <c:pt idx="87">
+                  <c:v>150.07</c:v>
+                </c:pt>
+                <c:pt idx="88">
+                  <c:v>150.88</c:v>
+                </c:pt>
+                <c:pt idx="89">
+                  <c:v>151.63</c:v>
+                </c:pt>
+                <c:pt idx="90">
+                  <c:v>152.49</c:v>
+                </c:pt>
+                <c:pt idx="91">
+                  <c:v>153.34</c:v>
                 </c:pt>
               </c:numCache>
             </c:numRef>
@@ -489,38 +1473,284 @@
           </c:marker>
           <c:cat>
             <c:multiLvlStrRef>
-              <c:f>Sheet1!$A$2:$A$11</c:f>
+              <c:f>Sheet1!$A$2:$A$93</c:f>
               <c:multiLvlStrCache>
-                <c:ptCount val="10"/>
+                <c:ptCount val="92"/>
                 <c:lvl>
                   <c:pt idx="0">
+                    <c:v>Sep 2018</c:v>
+                  </c:pt>
+                  <c:pt idx="1">
+                    <c:v>Oct 2018</c:v>
+                  </c:pt>
+                  <c:pt idx="2">
+                    <c:v>Nov 2018</c:v>
+                  </c:pt>
+                  <c:pt idx="3">
+                    <c:v>Dec 2018</c:v>
+                  </c:pt>
+                  <c:pt idx="4">
+                    <c:v>Jan 2019</c:v>
+                  </c:pt>
+                  <c:pt idx="5">
+                    <c:v>Feb 2019</c:v>
+                  </c:pt>
+                  <c:pt idx="6">
+                    <c:v>Mar 2019</c:v>
+                  </c:pt>
+                  <c:pt idx="7">
+                    <c:v>Apr 2019</c:v>
+                  </c:pt>
+                  <c:pt idx="8">
+                    <c:v>May 2019</c:v>
+                  </c:pt>
+                  <c:pt idx="9">
+                    <c:v>Jun 2019</c:v>
+                  </c:pt>
+                  <c:pt idx="10">
+                    <c:v>Jul 2019</c:v>
+                  </c:pt>
+                  <c:pt idx="11">
+                    <c:v>Aug 2019</c:v>
+                  </c:pt>
+                  <c:pt idx="12">
+                    <c:v>Sep 2019</c:v>
+                  </c:pt>
+                  <c:pt idx="13">
+                    <c:v>Oct 2019</c:v>
+                  </c:pt>
+                  <c:pt idx="14">
+                    <c:v>Nov 2019</c:v>
+                  </c:pt>
+                  <c:pt idx="15">
+                    <c:v>Dec 2019</c:v>
+                  </c:pt>
+                  <c:pt idx="16">
+                    <c:v>Jan 2020</c:v>
+                  </c:pt>
+                  <c:pt idx="17">
+                    <c:v>Feb 2020</c:v>
+                  </c:pt>
+                  <c:pt idx="18">
+                    <c:v>Mar 2020</c:v>
+                  </c:pt>
+                  <c:pt idx="19">
+                    <c:v>Apr 2020</c:v>
+                  </c:pt>
+                  <c:pt idx="20">
+                    <c:v>May 2020</c:v>
+                  </c:pt>
+                  <c:pt idx="21">
+                    <c:v>Jun 2020</c:v>
+                  </c:pt>
+                  <c:pt idx="22">
+                    <c:v>Jul 2020</c:v>
+                  </c:pt>
+                  <c:pt idx="23">
+                    <c:v>Aug 2020</c:v>
+                  </c:pt>
+                  <c:pt idx="24">
+                    <c:v>Sep 2020</c:v>
+                  </c:pt>
+                  <c:pt idx="25">
+                    <c:v>Oct 2020</c:v>
+                  </c:pt>
+                  <c:pt idx="26">
+                    <c:v>Nov 2020</c:v>
+                  </c:pt>
+                  <c:pt idx="27">
+                    <c:v>Dec 2020</c:v>
+                  </c:pt>
+                  <c:pt idx="28">
+                    <c:v>Jan 2021</c:v>
+                  </c:pt>
+                  <c:pt idx="29">
+                    <c:v>Feb 2021</c:v>
+                  </c:pt>
+                  <c:pt idx="30">
+                    <c:v>Mar 2021</c:v>
+                  </c:pt>
+                  <c:pt idx="31">
+                    <c:v>Apr 2021</c:v>
+                  </c:pt>
+                  <c:pt idx="32">
+                    <c:v>May 2021</c:v>
+                  </c:pt>
+                  <c:pt idx="33">
+                    <c:v>Jun 2021</c:v>
+                  </c:pt>
+                  <c:pt idx="34">
+                    <c:v>Jul 2021</c:v>
+                  </c:pt>
+                  <c:pt idx="35">
+                    <c:v>Aug 2021</c:v>
+                  </c:pt>
+                  <c:pt idx="36">
+                    <c:v>Sep 2021</c:v>
+                  </c:pt>
+                  <c:pt idx="37">
+                    <c:v>Oct 2021</c:v>
+                  </c:pt>
+                  <c:pt idx="38">
+                    <c:v>Nov 2021</c:v>
+                  </c:pt>
+                  <c:pt idx="39">
+                    <c:v>Dec 2021</c:v>
+                  </c:pt>
+                  <c:pt idx="40">
+                    <c:v>Jan 2022</c:v>
+                  </c:pt>
+                  <c:pt idx="41">
+                    <c:v>Feb 2022</c:v>
+                  </c:pt>
+                  <c:pt idx="42">
+                    <c:v>Mar 2022</c:v>
+                  </c:pt>
+                  <c:pt idx="43">
+                    <c:v>Apr 2022</c:v>
+                  </c:pt>
+                  <c:pt idx="44">
+                    <c:v>May 2022</c:v>
+                  </c:pt>
+                  <c:pt idx="45">
+                    <c:v>Jun 2022</c:v>
+                  </c:pt>
+                  <c:pt idx="46">
+                    <c:v>Jul 2022</c:v>
+                  </c:pt>
+                  <c:pt idx="47">
+                    <c:v>Aug 2022</c:v>
+                  </c:pt>
+                  <c:pt idx="48">
+                    <c:v>Sep 2022</c:v>
+                  </c:pt>
+                  <c:pt idx="49">
+                    <c:v>Oct 2022</c:v>
+                  </c:pt>
+                  <c:pt idx="50">
+                    <c:v>Nov 2022</c:v>
+                  </c:pt>
+                  <c:pt idx="51">
+                    <c:v>Dec 2022</c:v>
+                  </c:pt>
+                  <c:pt idx="52">
+                    <c:v>Jan 2023</c:v>
+                  </c:pt>
+                  <c:pt idx="53">
+                    <c:v>Feb 2023</c:v>
+                  </c:pt>
+                  <c:pt idx="54">
+                    <c:v>Mar 2023</c:v>
+                  </c:pt>
+                  <c:pt idx="55">
+                    <c:v>Apr 2023</c:v>
+                  </c:pt>
+                  <c:pt idx="56">
+                    <c:v>May 2023</c:v>
+                  </c:pt>
+                  <c:pt idx="57">
+                    <c:v>Jun 2023</c:v>
+                  </c:pt>
+                  <c:pt idx="58">
+                    <c:v>Jul 2023</c:v>
+                  </c:pt>
+                  <c:pt idx="59">
+                    <c:v>Aug 2023</c:v>
+                  </c:pt>
+                  <c:pt idx="60">
+                    <c:v>Sep 2023</c:v>
+                  </c:pt>
+                  <c:pt idx="61">
+                    <c:v>Oct 2023</c:v>
+                  </c:pt>
+                  <c:pt idx="62">
+                    <c:v>Nov 2023</c:v>
+                  </c:pt>
+                  <c:pt idx="63">
+                    <c:v>Dec 2023</c:v>
+                  </c:pt>
+                  <c:pt idx="64">
+                    <c:v>Jan 2024</c:v>
+                  </c:pt>
+                  <c:pt idx="65">
+                    <c:v>Feb 2024</c:v>
+                  </c:pt>
+                  <c:pt idx="66">
+                    <c:v>Mar 2024</c:v>
+                  </c:pt>
+                  <c:pt idx="67">
+                    <c:v>Apr 2024</c:v>
+                  </c:pt>
+                  <c:pt idx="68">
+                    <c:v>May 2024</c:v>
+                  </c:pt>
+                  <c:pt idx="69">
+                    <c:v>Jun 2024</c:v>
+                  </c:pt>
+                  <c:pt idx="70">
+                    <c:v>Jul 2024</c:v>
+                  </c:pt>
+                  <c:pt idx="71">
+                    <c:v>Aug 2024</c:v>
+                  </c:pt>
+                  <c:pt idx="72">
+                    <c:v>Sep 2024</c:v>
+                  </c:pt>
+                  <c:pt idx="73">
+                    <c:v>Oct 2024</c:v>
+                  </c:pt>
+                  <c:pt idx="74">
+                    <c:v>Nov 2024</c:v>
+                  </c:pt>
+                  <c:pt idx="75">
+                    <c:v>Dec 2024</c:v>
+                  </c:pt>
+                  <c:pt idx="76">
+                    <c:v>Jan 2025</c:v>
+                  </c:pt>
+                  <c:pt idx="77">
+                    <c:v>Feb 2025</c:v>
+                  </c:pt>
+                  <c:pt idx="78">
+                    <c:v>Mar 2025</c:v>
+                  </c:pt>
+                  <c:pt idx="79">
+                    <c:v>Apr 2025</c:v>
+                  </c:pt>
+                  <c:pt idx="80">
+                    <c:v>May 2025</c:v>
+                  </c:pt>
+                  <c:pt idx="81">
+                    <c:v>Jun 2025</c:v>
+                  </c:pt>
+                  <c:pt idx="82">
                     <c:v>Jul 2025</c:v>
                   </c:pt>
-                  <c:pt idx="1">
+                  <c:pt idx="83">
                     <c:v>Aug 2025</c:v>
                   </c:pt>
-                  <c:pt idx="2">
+                  <c:pt idx="84">
                     <c:v>Sep 2025</c:v>
                   </c:pt>
-                  <c:pt idx="3">
+                  <c:pt idx="85">
                     <c:v>Oct 2025</c:v>
                   </c:pt>
-                  <c:pt idx="4">
+                  <c:pt idx="86">
                     <c:v>Nov 2025</c:v>
                   </c:pt>
-                  <c:pt idx="5">
+                  <c:pt idx="87">
                     <c:v>Dec 2025</c:v>
                   </c:pt>
-                  <c:pt idx="6">
+                  <c:pt idx="88">
                     <c:v>Jan 2026</c:v>
                   </c:pt>
-                  <c:pt idx="7">
+                  <c:pt idx="89">
                     <c:v>Feb 2026</c:v>
                   </c:pt>
-                  <c:pt idx="8">
+                  <c:pt idx="90">
                     <c:v>Mar 2026</c:v>
                   </c:pt>
-                  <c:pt idx="9">
+                  <c:pt idx="91">
                     <c:v>Apr 2026</c:v>
                   </c:pt>
                 </c:lvl>
@@ -529,39 +1759,285 @@
           </c:cat>
           <c:val>
             <c:numRef>
-              <c:f>Sheet1!$D$2:$D$11</c:f>
+              <c:f>Sheet1!$D$2:$D$93</c:f>
               <c:numCache>
                 <c:formatCode>General</c:formatCode>
-                <c:ptCount val="10"/>
+                <c:ptCount val="92"/>
                 <c:pt idx="0">
                   <c:v>100</c:v>
                 </c:pt>
                 <c:pt idx="1">
-                  <c:v>100.3</c:v>
+                  <c:v>442.43</c:v>
                 </c:pt>
                 <c:pt idx="2">
-                  <c:v>100.58</c:v>
+                  <c:v>442.88</c:v>
                 </c:pt>
                 <c:pt idx="3">
-                  <c:v>100.87</c:v>
+                  <c:v>443.5</c:v>
                 </c:pt>
                 <c:pt idx="4">
-                  <c:v>101.15</c:v>
+                  <c:v>444.1</c:v>
                 </c:pt>
                 <c:pt idx="5">
-                  <c:v>101.71</c:v>
+                  <c:v>444.68</c:v>
                 </c:pt>
                 <c:pt idx="6">
-                  <c:v>101.71</c:v>
+                  <c:v>445.33</c:v>
                 </c:pt>
                 <c:pt idx="7">
-                  <c:v>101.96</c:v>
+                  <c:v>445.96</c:v>
                 </c:pt>
                 <c:pt idx="8">
-                  <c:v>102.23</c:v>
+                  <c:v>446.57</c:v>
                 </c:pt>
                 <c:pt idx="9">
-                  <c:v>102.5</c:v>
+                  <c:v>447.1</c:v>
+                </c:pt>
+                <c:pt idx="10">
+                  <c:v>447.57</c:v>
+                </c:pt>
+                <c:pt idx="11">
+                  <c:v>448</c:v>
+                </c:pt>
+                <c:pt idx="12">
+                  <c:v>448.48</c:v>
+                </c:pt>
+                <c:pt idx="13">
+                  <c:v>448.77</c:v>
+                </c:pt>
+                <c:pt idx="14">
+                  <c:v>449.08</c:v>
+                </c:pt>
+                <c:pt idx="15">
+                  <c:v>449.36</c:v>
+                </c:pt>
+                <c:pt idx="16">
+                  <c:v>449.59</c:v>
+                </c:pt>
+                <c:pt idx="17">
+                  <c:v>449.8</c:v>
+                </c:pt>
+                <c:pt idx="18">
+                  <c:v>450.23</c:v>
+                </c:pt>
+                <c:pt idx="19">
+                  <c:v>451.22</c:v>
+                </c:pt>
+                <c:pt idx="20">
+                  <c:v>451.29</c:v>
+                </c:pt>
+                <c:pt idx="21">
+                  <c:v>451.36</c:v>
+                </c:pt>
+                <c:pt idx="22">
+                  <c:v>451.41</c:v>
+                </c:pt>
+                <c:pt idx="23">
+                  <c:v>451.49</c:v>
+                </c:pt>
+                <c:pt idx="24">
+                  <c:v>451.53</c:v>
+                </c:pt>
+                <c:pt idx="25">
+                  <c:v>451.56</c:v>
+                </c:pt>
+                <c:pt idx="26">
+                  <c:v>451.58</c:v>
+                </c:pt>
+                <c:pt idx="27">
+                  <c:v>451.61</c:v>
+                </c:pt>
+                <c:pt idx="28">
+                  <c:v>451.63</c:v>
+                </c:pt>
+                <c:pt idx="29">
+                  <c:v>451.66</c:v>
+                </c:pt>
+                <c:pt idx="30">
+                  <c:v>451.68</c:v>
+                </c:pt>
+                <c:pt idx="31">
+                  <c:v>451.71</c:v>
+                </c:pt>
+                <c:pt idx="32">
+                  <c:v>451.74</c:v>
+                </c:pt>
+                <c:pt idx="33">
+                  <c:v>451.77</c:v>
+                </c:pt>
+                <c:pt idx="34">
+                  <c:v>451.79</c:v>
+                </c:pt>
+                <c:pt idx="35">
+                  <c:v>451.82</c:v>
+                </c:pt>
+                <c:pt idx="36">
+                  <c:v>451.77</c:v>
+                </c:pt>
+                <c:pt idx="37">
+                  <c:v>452.23</c:v>
+                </c:pt>
+                <c:pt idx="38">
+                  <c:v>452.8</c:v>
+                </c:pt>
+                <c:pt idx="39">
+                  <c:v>453.63</c:v>
+                </c:pt>
+                <c:pt idx="40">
+                  <c:v>454.79</c:v>
+                </c:pt>
+                <c:pt idx="41">
+                  <c:v>456.29</c:v>
+                </c:pt>
+                <c:pt idx="42">
+                  <c:v>458.02</c:v>
+                </c:pt>
+                <c:pt idx="43">
+                  <c:v>460.12</c:v>
+                </c:pt>
+                <c:pt idx="44">
+                  <c:v>462.65</c:v>
+                </c:pt>
+                <c:pt idx="45">
+                  <c:v>465.38</c:v>
+                </c:pt>
+                <c:pt idx="46">
+                  <c:v>468.41</c:v>
+                </c:pt>
+                <c:pt idx="47">
+                  <c:v>471.7</c:v>
+                </c:pt>
+                <c:pt idx="48">
+                  <c:v>475.16</c:v>
+                </c:pt>
+                <c:pt idx="49">
+                  <c:v>478.6</c:v>
+                </c:pt>
+                <c:pt idx="50">
+                  <c:v>482.78</c:v>
+                </c:pt>
+                <c:pt idx="51">
+                  <c:v>486.61</c:v>
+                </c:pt>
+                <c:pt idx="52">
+                  <c:v>490.72</c:v>
+                </c:pt>
+                <c:pt idx="53">
+                  <c:v>494.34</c:v>
+                </c:pt>
+                <c:pt idx="54">
+                  <c:v>498.4</c:v>
+                </c:pt>
+                <c:pt idx="55">
+                  <c:v>502.12</c:v>
+                </c:pt>
+                <c:pt idx="56">
+                  <c:v>506.55</c:v>
+                </c:pt>
+                <c:pt idx="57">
+                  <c:v>510.61</c:v>
+                </c:pt>
+                <c:pt idx="58">
+                  <c:v>514.8</c:v>
+                </c:pt>
+                <c:pt idx="59">
+                  <c:v>518.71</c:v>
+                </c:pt>
+                <c:pt idx="60">
+                  <c:v>522.23</c:v>
+                </c:pt>
+                <c:pt idx="61">
+                  <c:v>525.71</c:v>
+                </c:pt>
+                <c:pt idx="62">
+                  <c:v>528.95</c:v>
+                </c:pt>
+                <c:pt idx="63">
+                  <c:v>532.18</c:v>
+                </c:pt>
+                <c:pt idx="64">
+                  <c:v>535.31</c:v>
+                </c:pt>
+                <c:pt idx="65">
+                  <c:v>538.03</c:v>
+                </c:pt>
+                <c:pt idx="66">
+                  <c:v>540.42</c:v>
+                </c:pt>
+                <c:pt idx="67">
+                  <c:v>542.97</c:v>
+                </c:pt>
+                <c:pt idx="68">
+                  <c:v>545.24</c:v>
+                </c:pt>
+                <c:pt idx="69">
+                  <c:v>547.23</c:v>
+                </c:pt>
+                <c:pt idx="70">
+                  <c:v>549.22</c:v>
+                </c:pt>
+                <c:pt idx="71">
+                  <c:v>551.21</c:v>
+                </c:pt>
+                <c:pt idx="72">
+                  <c:v>553.07</c:v>
+                </c:pt>
+                <c:pt idx="73">
+                  <c:v>554.96</c:v>
+                </c:pt>
+                <c:pt idx="74">
+                  <c:v>556.74</c:v>
+                </c:pt>
+                <c:pt idx="75">
+                  <c:v>558.54</c:v>
+                </c:pt>
+                <c:pt idx="76">
+                  <c:v>560.23</c:v>
+                </c:pt>
+                <c:pt idx="77">
+                  <c:v>561.78</c:v>
+                </c:pt>
+                <c:pt idx="78">
+                  <c:v>563.5</c:v>
+                </c:pt>
+                <c:pt idx="79">
+                  <c:v>565.17</c:v>
+                </c:pt>
+                <c:pt idx="80">
+                  <c:v>566.92</c:v>
+                </c:pt>
+                <c:pt idx="81">
+                  <c:v>568.62</c:v>
+                </c:pt>
+                <c:pt idx="82">
+                  <c:v>570.3</c:v>
+                </c:pt>
+                <c:pt idx="83">
+                  <c:v>572.01</c:v>
+                </c:pt>
+                <c:pt idx="84">
+                  <c:v>573.59</c:v>
+                </c:pt>
+                <c:pt idx="85">
+                  <c:v>575.23</c:v>
+                </c:pt>
+                <c:pt idx="86">
+                  <c:v>576.84</c:v>
+                </c:pt>
+                <c:pt idx="87">
+                  <c:v>578.48</c:v>
+                </c:pt>
+                <c:pt idx="88">
+                  <c:v>580.05</c:v>
+                </c:pt>
+                <c:pt idx="89">
+                  <c:v>581.47</c:v>
+                </c:pt>
+                <c:pt idx="90">
+                  <c:v>583.03</c:v>
+                </c:pt>
+                <c:pt idx="91">
+                  <c:v>584.55</c:v>
                 </c:pt>
               </c:numCache>
             </c:numRef>
@@ -637,7 +2113,7 @@
         <c:auto val="1"/>
         <c:lblAlgn val="ctr"/>
         <c:noMultiLvlLbl val="1"/>
-        <c:tickLblSkip val="1"/>
+        <c:tickLblSkip val="9"/>
       </c:catAx>
       <c:valAx>
         <c:axId val="2094734552"/>
@@ -3113,7 +4589,7 @@
                 <a:ea typeface="Calibri" pitchFamily="34" charset="-122"/>
                 <a:cs typeface="Calibri" pitchFamily="34" charset="-120"/>
               </a:rPr>
-              <a:t>prueba 13 CLP</a:t>
+              <a:t>prueba CLP</a:t>
             </a:r>
             <a:endParaRPr lang="en-US" sz="800" dirty="0"/>
           </a:p>
@@ -3783,7 +5259,7 @@
                           <a:ea typeface="Calibri" pitchFamily="34" charset="-122"/>
                           <a:cs typeface="Calibri" pitchFamily="34" charset="-120"/>
                         </a:rPr>
-                        <a:t>0.37%</a:t>
+                        <a:t>0.38%</a:t>
                       </a:r>
                       <a:endParaRPr lang="en-US" sz="750" dirty="0">
                         <a:latin typeface="Calibri" charset="0"/>
@@ -3919,7 +5395,7 @@
                           <a:ea typeface="Calibri" pitchFamily="34" charset="-122"/>
                           <a:cs typeface="Calibri" pitchFamily="34" charset="-120"/>
                         </a:rPr>
-                        <a:t>2.30%</a:t>
+                        <a:t>2.33%</a:t>
                       </a:r>
                       <a:endParaRPr lang="en-US" sz="750" dirty="0">
                         <a:latin typeface="Calibri" charset="0"/>
@@ -3987,7 +5463,7 @@
                           <a:ea typeface="Calibri" pitchFamily="34" charset="-122"/>
                           <a:cs typeface="Calibri" pitchFamily="34" charset="-120"/>
                         </a:rPr>
-                        <a:t>4.82%</a:t>
+                        <a:t>4.90%</a:t>
                       </a:r>
                       <a:endParaRPr lang="en-US" sz="750" dirty="0">
                         <a:latin typeface="Calibri" charset="0"/>
@@ -4807,7 +6283,7 @@
                           <a:ea typeface="Calibri" pitchFamily="34" charset="-122"/>
                           <a:cs typeface="Calibri" pitchFamily="34" charset="-120"/>
                         </a:rPr>
-                        <a:t>—</a:t>
+                        <a:t>6.25%</a:t>
                       </a:r>
                       <a:endParaRPr lang="en-US" sz="750" dirty="0">
                         <a:latin typeface="Calibri" charset="0"/>
@@ -5017,20 +6493,20 @@
               <a:tblPr/>
               <a:tblGrid>
                 <a:gridCol w="201168"/>
-                <a:gridCol w="822960"/>
-                <a:gridCol w="246888"/>
-                <a:gridCol w="246888"/>
-                <a:gridCol w="246888"/>
-                <a:gridCol w="246888"/>
-                <a:gridCol w="246888"/>
-                <a:gridCol w="246888"/>
-                <a:gridCol w="246888"/>
-                <a:gridCol w="246888"/>
-                <a:gridCol w="246888"/>
-                <a:gridCol w="246888"/>
-                <a:gridCol w="246888"/>
-                <a:gridCol w="246888"/>
-                <a:gridCol w="283464"/>
+                <a:gridCol w="804672"/>
+                <a:gridCol w="292608"/>
+                <a:gridCol w="292608"/>
+                <a:gridCol w="292608"/>
+                <a:gridCol w="292608"/>
+                <a:gridCol w="292608"/>
+                <a:gridCol w="292608"/>
+                <a:gridCol w="292608"/>
+                <a:gridCol w="292608"/>
+                <a:gridCol w="292608"/>
+                <a:gridCol w="292608"/>
+                <a:gridCol w="292608"/>
+                <a:gridCol w="292608"/>
+                <a:gridCol w="301752"/>
               </a:tblGrid>
               <a:tr h="123444">
                 <a:tc>
@@ -6178,6 +7654,201 @@
                           <a:ea typeface="Calibri" pitchFamily="34" charset="-122"/>
                           <a:cs typeface="Calibri" pitchFamily="34" charset="-120"/>
                         </a:rPr>
+                        <a:t>0.34%</a:t>
+                      </a:r>
+                      <a:endParaRPr lang="en-US" sz="500" dirty="0">
+                        <a:latin typeface="Calibri" charset="0"/>
+                        <a:ea typeface="Calibri" charset="0"/>
+                        <a:cs typeface="Calibri" charset="0"/>
+                      </a:endParaRPr>
+                    </a:p>
+                  </a:txBody>
+                  <a:tcPr marL="91440" marR="91440" marT="45720" marB="45720">
+                    <a:lnL w="2540" cap="flat" cmpd="sng" algn="ctr">
+                      <a:solidFill>
+                        <a:srgbClr val="EEEEEE"/>
+                      </a:solidFill>
+                      <a:prstDash val="solid"/>
+                      <a:round/>
+                      <a:headEnd type="none" w="med" len="med"/>
+                      <a:tailEnd type="none" w="med" len="med"/>
+                    </a:lnL>
+                    <a:lnR w="2540" cap="flat" cmpd="sng" algn="ctr">
+                      <a:solidFill>
+                        <a:srgbClr val="EEEEEE"/>
+                      </a:solidFill>
+                      <a:prstDash val="solid"/>
+                      <a:round/>
+                      <a:headEnd type="none" w="med" len="med"/>
+                      <a:tailEnd type="none" w="med" len="med"/>
+                    </a:lnR>
+                    <a:lnT w="2540" cap="flat" cmpd="sng" algn="ctr">
+                      <a:solidFill>
+                        <a:srgbClr val="EEEEEE"/>
+                      </a:solidFill>
+                      <a:prstDash val="solid"/>
+                      <a:round/>
+                      <a:headEnd type="none" w="med" len="med"/>
+                      <a:tailEnd type="none" w="med" len="med"/>
+                    </a:lnT>
+                    <a:lnB w="2540" cap="flat" cmpd="sng" algn="ctr">
+                      <a:solidFill>
+                        <a:srgbClr val="EEEEEE"/>
+                      </a:solidFill>
+                      <a:prstDash val="solid"/>
+                      <a:round/>
+                      <a:headEnd type="none" w="med" len="med"/>
+                      <a:tailEnd type="none" w="med" len="med"/>
+                    </a:lnB>
+                  </a:tcPr>
+                </a:tc>
+                <a:tc>
+                  <a:txBody>
+                    <a:bodyPr/>
+                    <a:lstStyle/>
+                    <a:p>
+                      <a:pPr algn="ctr" indent="0" marL="0">
+                        <a:buNone/>
+                      </a:pPr>
+                      <a:r>
+                        <a:rPr lang="en-US" sz="500" dirty="0">
+                          <a:solidFill>
+                            <a:srgbClr val="777777"/>
+                          </a:solidFill>
+                          <a:latin typeface="Calibri" pitchFamily="34" charset="0"/>
+                          <a:ea typeface="Calibri" pitchFamily="34" charset="-122"/>
+                          <a:cs typeface="Calibri" pitchFamily="34" charset="-120"/>
+                        </a:rPr>
+                        <a:t>0.19%</a:t>
+                      </a:r>
+                      <a:endParaRPr lang="en-US" sz="500" dirty="0">
+                        <a:latin typeface="Calibri" charset="0"/>
+                        <a:ea typeface="Calibri" charset="0"/>
+                        <a:cs typeface="Calibri" charset="0"/>
+                      </a:endParaRPr>
+                    </a:p>
+                  </a:txBody>
+                  <a:tcPr marL="91440" marR="91440" marT="45720" marB="45720">
+                    <a:lnL w="2540" cap="flat" cmpd="sng" algn="ctr">
+                      <a:solidFill>
+                        <a:srgbClr val="EEEEEE"/>
+                      </a:solidFill>
+                      <a:prstDash val="solid"/>
+                      <a:round/>
+                      <a:headEnd type="none" w="med" len="med"/>
+                      <a:tailEnd type="none" w="med" len="med"/>
+                    </a:lnL>
+                    <a:lnR w="2540" cap="flat" cmpd="sng" algn="ctr">
+                      <a:solidFill>
+                        <a:srgbClr val="EEEEEE"/>
+                      </a:solidFill>
+                      <a:prstDash val="solid"/>
+                      <a:round/>
+                      <a:headEnd type="none" w="med" len="med"/>
+                      <a:tailEnd type="none" w="med" len="med"/>
+                    </a:lnR>
+                    <a:lnT w="2540" cap="flat" cmpd="sng" algn="ctr">
+                      <a:solidFill>
+                        <a:srgbClr val="EEEEEE"/>
+                      </a:solidFill>
+                      <a:prstDash val="solid"/>
+                      <a:round/>
+                      <a:headEnd type="none" w="med" len="med"/>
+                      <a:tailEnd type="none" w="med" len="med"/>
+                    </a:lnT>
+                    <a:lnB w="2540" cap="flat" cmpd="sng" algn="ctr">
+                      <a:solidFill>
+                        <a:srgbClr val="EEEEEE"/>
+                      </a:solidFill>
+                      <a:prstDash val="solid"/>
+                      <a:round/>
+                      <a:headEnd type="none" w="med" len="med"/>
+                      <a:tailEnd type="none" w="med" len="med"/>
+                    </a:lnB>
+                  </a:tcPr>
+                </a:tc>
+                <a:tc>
+                  <a:txBody>
+                    <a:bodyPr/>
+                    <a:lstStyle/>
+                    <a:p>
+                      <a:pPr algn="ctr" indent="0" marL="0">
+                        <a:buNone/>
+                      </a:pPr>
+                      <a:r>
+                        <a:rPr lang="en-US" sz="500" dirty="0">
+                          <a:solidFill>
+                            <a:srgbClr val="777777"/>
+                          </a:solidFill>
+                          <a:latin typeface="Calibri" pitchFamily="34" charset="0"/>
+                          <a:ea typeface="Calibri" pitchFamily="34" charset="-122"/>
+                          <a:cs typeface="Calibri" pitchFamily="34" charset="-120"/>
+                        </a:rPr>
+                        <a:t>0.22%</a:t>
+                      </a:r>
+                      <a:endParaRPr lang="en-US" sz="500" dirty="0">
+                        <a:latin typeface="Calibri" charset="0"/>
+                        <a:ea typeface="Calibri" charset="0"/>
+                        <a:cs typeface="Calibri" charset="0"/>
+                      </a:endParaRPr>
+                    </a:p>
+                  </a:txBody>
+                  <a:tcPr marL="91440" marR="91440" marT="45720" marB="45720">
+                    <a:lnL w="2540" cap="flat" cmpd="sng" algn="ctr">
+                      <a:solidFill>
+                        <a:srgbClr val="EEEEEE"/>
+                      </a:solidFill>
+                      <a:prstDash val="solid"/>
+                      <a:round/>
+                      <a:headEnd type="none" w="med" len="med"/>
+                      <a:tailEnd type="none" w="med" len="med"/>
+                    </a:lnL>
+                    <a:lnR w="2540" cap="flat" cmpd="sng" algn="ctr">
+                      <a:solidFill>
+                        <a:srgbClr val="EEEEEE"/>
+                      </a:solidFill>
+                      <a:prstDash val="solid"/>
+                      <a:round/>
+                      <a:headEnd type="none" w="med" len="med"/>
+                      <a:tailEnd type="none" w="med" len="med"/>
+                    </a:lnR>
+                    <a:lnT w="2540" cap="flat" cmpd="sng" algn="ctr">
+                      <a:solidFill>
+                        <a:srgbClr val="EEEEEE"/>
+                      </a:solidFill>
+                      <a:prstDash val="solid"/>
+                      <a:round/>
+                      <a:headEnd type="none" w="med" len="med"/>
+                      <a:tailEnd type="none" w="med" len="med"/>
+                    </a:lnT>
+                    <a:lnB w="2540" cap="flat" cmpd="sng" algn="ctr">
+                      <a:solidFill>
+                        <a:srgbClr val="EEEEEE"/>
+                      </a:solidFill>
+                      <a:prstDash val="solid"/>
+                      <a:round/>
+                      <a:headEnd type="none" w="med" len="med"/>
+                      <a:tailEnd type="none" w="med" len="med"/>
+                    </a:lnB>
+                  </a:tcPr>
+                </a:tc>
+                <a:tc>
+                  <a:txBody>
+                    <a:bodyPr/>
+                    <a:lstStyle/>
+                    <a:p>
+                      <a:pPr algn="ctr" indent="0" marL="0">
+                        <a:buNone/>
+                      </a:pPr>
+                      <a:r>
+                        <a:rPr lang="en-US" sz="500" dirty="0">
+                          <a:solidFill>
+                            <a:srgbClr val="777777"/>
+                          </a:solidFill>
+                          <a:latin typeface="Calibri" pitchFamily="34" charset="0"/>
+                          <a:ea typeface="Calibri" pitchFamily="34" charset="-122"/>
+                          <a:cs typeface="Calibri" pitchFamily="34" charset="-120"/>
+                        </a:rPr>
                         <a:t>0.21%</a:t>
                       </a:r>
                       <a:endParaRPr lang="en-US" sz="500" dirty="0">
@@ -6373,6 +8044,71 @@
                           <a:ea typeface="Calibri" pitchFamily="34" charset="-122"/>
                           <a:cs typeface="Calibri" pitchFamily="34" charset="-120"/>
                         </a:rPr>
+                        <a:t>0.22%</a:t>
+                      </a:r>
+                      <a:endParaRPr lang="en-US" sz="500" dirty="0">
+                        <a:latin typeface="Calibri" charset="0"/>
+                        <a:ea typeface="Calibri" charset="0"/>
+                        <a:cs typeface="Calibri" charset="0"/>
+                      </a:endParaRPr>
+                    </a:p>
+                  </a:txBody>
+                  <a:tcPr marL="91440" marR="91440" marT="45720" marB="45720">
+                    <a:lnL w="2540" cap="flat" cmpd="sng" algn="ctr">
+                      <a:solidFill>
+                        <a:srgbClr val="EEEEEE"/>
+                      </a:solidFill>
+                      <a:prstDash val="solid"/>
+                      <a:round/>
+                      <a:headEnd type="none" w="med" len="med"/>
+                      <a:tailEnd type="none" w="med" len="med"/>
+                    </a:lnL>
+                    <a:lnR w="2540" cap="flat" cmpd="sng" algn="ctr">
+                      <a:solidFill>
+                        <a:srgbClr val="EEEEEE"/>
+                      </a:solidFill>
+                      <a:prstDash val="solid"/>
+                      <a:round/>
+                      <a:headEnd type="none" w="med" len="med"/>
+                      <a:tailEnd type="none" w="med" len="med"/>
+                    </a:lnR>
+                    <a:lnT w="2540" cap="flat" cmpd="sng" algn="ctr">
+                      <a:solidFill>
+                        <a:srgbClr val="EEEEEE"/>
+                      </a:solidFill>
+                      <a:prstDash val="solid"/>
+                      <a:round/>
+                      <a:headEnd type="none" w="med" len="med"/>
+                      <a:tailEnd type="none" w="med" len="med"/>
+                    </a:lnT>
+                    <a:lnB w="2540" cap="flat" cmpd="sng" algn="ctr">
+                      <a:solidFill>
+                        <a:srgbClr val="EEEEEE"/>
+                      </a:solidFill>
+                      <a:prstDash val="solid"/>
+                      <a:round/>
+                      <a:headEnd type="none" w="med" len="med"/>
+                      <a:tailEnd type="none" w="med" len="med"/>
+                    </a:lnB>
+                  </a:tcPr>
+                </a:tc>
+                <a:tc>
+                  <a:txBody>
+                    <a:bodyPr/>
+                    <a:lstStyle/>
+                    <a:p>
+                      <a:pPr algn="ctr" indent="0" marL="0">
+                        <a:buNone/>
+                      </a:pPr>
+                      <a:r>
+                        <a:rPr lang="en-US" sz="500" dirty="0">
+                          <a:solidFill>
+                            <a:srgbClr val="777777"/>
+                          </a:solidFill>
+                          <a:latin typeface="Calibri" pitchFamily="34" charset="0"/>
+                          <a:ea typeface="Calibri" pitchFamily="34" charset="-122"/>
+                          <a:cs typeface="Calibri" pitchFamily="34" charset="-120"/>
+                        </a:rPr>
                         <a:t>0.21%</a:t>
                       </a:r>
                       <a:endParaRPr lang="en-US" sz="500" dirty="0">
@@ -6438,7 +8174,7 @@
                           <a:ea typeface="Calibri" pitchFamily="34" charset="-122"/>
                           <a:cs typeface="Calibri" pitchFamily="34" charset="-120"/>
                         </a:rPr>
-                        <a:t>0.21%</a:t>
+                        <a:t>0.20%</a:t>
                       </a:r>
                       <a:endParaRPr lang="en-US" sz="500" dirty="0">
                         <a:latin typeface="Calibri" charset="0"/>
@@ -6503,7 +8239,7 @@
                           <a:ea typeface="Calibri" pitchFamily="34" charset="-122"/>
                           <a:cs typeface="Calibri" pitchFamily="34" charset="-120"/>
                         </a:rPr>
-                        <a:t>0.21%</a:t>
+                        <a:t>0.23%</a:t>
                       </a:r>
                       <a:endParaRPr lang="en-US" sz="500" dirty="0">
                         <a:latin typeface="Calibri" charset="0"/>
@@ -6568,7 +8304,7 @@
                           <a:ea typeface="Calibri" pitchFamily="34" charset="-122"/>
                           <a:cs typeface="Calibri" pitchFamily="34" charset="-120"/>
                         </a:rPr>
-                        <a:t>0.21%</a:t>
+                        <a:t>0.23%</a:t>
                       </a:r>
                       <a:endParaRPr lang="en-US" sz="500" dirty="0">
                         <a:latin typeface="Calibri" charset="0"/>
@@ -6633,64 +8369,64 @@
                           <a:ea typeface="Calibri" pitchFamily="34" charset="-122"/>
                           <a:cs typeface="Calibri" pitchFamily="34" charset="-120"/>
                         </a:rPr>
-                        <a:t>0.21%</a:t>
-                      </a:r>
-                      <a:endParaRPr lang="en-US" sz="500" dirty="0">
-                        <a:latin typeface="Calibri" charset="0"/>
-                        <a:ea typeface="Calibri" charset="0"/>
-                        <a:cs typeface="Calibri" charset="0"/>
-                      </a:endParaRPr>
-                    </a:p>
-                  </a:txBody>
-                  <a:tcPr marL="91440" marR="91440" marT="45720" marB="45720">
-                    <a:lnL w="2540" cap="flat" cmpd="sng" algn="ctr">
-                      <a:solidFill>
-                        <a:srgbClr val="EEEEEE"/>
-                      </a:solidFill>
-                      <a:prstDash val="solid"/>
-                      <a:round/>
-                      <a:headEnd type="none" w="med" len="med"/>
-                      <a:tailEnd type="none" w="med" len="med"/>
-                    </a:lnL>
-                    <a:lnR w="2540" cap="flat" cmpd="sng" algn="ctr">
-                      <a:solidFill>
-                        <a:srgbClr val="EEEEEE"/>
-                      </a:solidFill>
-                      <a:prstDash val="solid"/>
-                      <a:round/>
-                      <a:headEnd type="none" w="med" len="med"/>
-                      <a:tailEnd type="none" w="med" len="med"/>
-                    </a:lnR>
-                    <a:lnT w="2540" cap="flat" cmpd="sng" algn="ctr">
-                      <a:solidFill>
-                        <a:srgbClr val="EEEEEE"/>
-                      </a:solidFill>
-                      <a:prstDash val="solid"/>
-                      <a:round/>
-                      <a:headEnd type="none" w="med" len="med"/>
-                      <a:tailEnd type="none" w="med" len="med"/>
-                    </a:lnT>
-                    <a:lnB w="2540" cap="flat" cmpd="sng" algn="ctr">
-                      <a:solidFill>
-                        <a:srgbClr val="EEEEEE"/>
-                      </a:solidFill>
-                      <a:prstDash val="solid"/>
-                      <a:round/>
-                      <a:headEnd type="none" w="med" len="med"/>
-                      <a:tailEnd type="none" w="med" len="med"/>
-                    </a:lnB>
-                  </a:tcPr>
-                </a:tc>
-                <a:tc>
-                  <a:txBody>
-                    <a:bodyPr/>
-                    <a:lstStyle/>
-                    <a:p>
-                      <a:pPr algn="ctr" indent="0" marL="0">
-                        <a:buNone/>
-                      </a:pPr>
-                      <a:r>
-                        <a:rPr lang="en-US" sz="500" dirty="0">
+                        <a:t>0.24%</a:t>
+                      </a:r>
+                      <a:endParaRPr lang="en-US" sz="500" dirty="0">
+                        <a:latin typeface="Calibri" charset="0"/>
+                        <a:ea typeface="Calibri" charset="0"/>
+                        <a:cs typeface="Calibri" charset="0"/>
+                      </a:endParaRPr>
+                    </a:p>
+                  </a:txBody>
+                  <a:tcPr marL="91440" marR="91440" marT="45720" marB="45720">
+                    <a:lnL w="2540" cap="flat" cmpd="sng" algn="ctr">
+                      <a:solidFill>
+                        <a:srgbClr val="EEEEEE"/>
+                      </a:solidFill>
+                      <a:prstDash val="solid"/>
+                      <a:round/>
+                      <a:headEnd type="none" w="med" len="med"/>
+                      <a:tailEnd type="none" w="med" len="med"/>
+                    </a:lnL>
+                    <a:lnR w="2540" cap="flat" cmpd="sng" algn="ctr">
+                      <a:solidFill>
+                        <a:srgbClr val="EEEEEE"/>
+                      </a:solidFill>
+                      <a:prstDash val="solid"/>
+                      <a:round/>
+                      <a:headEnd type="none" w="med" len="med"/>
+                      <a:tailEnd type="none" w="med" len="med"/>
+                    </a:lnR>
+                    <a:lnT w="2540" cap="flat" cmpd="sng" algn="ctr">
+                      <a:solidFill>
+                        <a:srgbClr val="EEEEEE"/>
+                      </a:solidFill>
+                      <a:prstDash val="solid"/>
+                      <a:round/>
+                      <a:headEnd type="none" w="med" len="med"/>
+                      <a:tailEnd type="none" w="med" len="med"/>
+                    </a:lnT>
+                    <a:lnB w="2540" cap="flat" cmpd="sng" algn="ctr">
+                      <a:solidFill>
+                        <a:srgbClr val="EEEEEE"/>
+                      </a:solidFill>
+                      <a:prstDash val="solid"/>
+                      <a:round/>
+                      <a:headEnd type="none" w="med" len="med"/>
+                      <a:tailEnd type="none" w="med" len="med"/>
+                    </a:lnB>
+                  </a:tcPr>
+                </a:tc>
+                <a:tc>
+                  <a:txBody>
+                    <a:bodyPr/>
+                    <a:lstStyle/>
+                    <a:p>
+                      <a:pPr algn="ctr" indent="0" marL="0">
+                        <a:buNone/>
+                      </a:pPr>
+                      <a:r>
+                        <a:rPr lang="en-US" sz="500" b="1" dirty="0">
                           <a:solidFill>
                             <a:srgbClr val="777777"/>
                           </a:solidFill>
@@ -6698,267 +8434,7 @@
                           <a:ea typeface="Calibri" pitchFamily="34" charset="-122"/>
                           <a:cs typeface="Calibri" pitchFamily="34" charset="-120"/>
                         </a:rPr>
-                        <a:t>0.21%</a:t>
-                      </a:r>
-                      <a:endParaRPr lang="en-US" sz="500" dirty="0">
-                        <a:latin typeface="Calibri" charset="0"/>
-                        <a:ea typeface="Calibri" charset="0"/>
-                        <a:cs typeface="Calibri" charset="0"/>
-                      </a:endParaRPr>
-                    </a:p>
-                  </a:txBody>
-                  <a:tcPr marL="91440" marR="91440" marT="45720" marB="45720">
-                    <a:lnL w="2540" cap="flat" cmpd="sng" algn="ctr">
-                      <a:solidFill>
-                        <a:srgbClr val="EEEEEE"/>
-                      </a:solidFill>
-                      <a:prstDash val="solid"/>
-                      <a:round/>
-                      <a:headEnd type="none" w="med" len="med"/>
-                      <a:tailEnd type="none" w="med" len="med"/>
-                    </a:lnL>
-                    <a:lnR w="2540" cap="flat" cmpd="sng" algn="ctr">
-                      <a:solidFill>
-                        <a:srgbClr val="EEEEEE"/>
-                      </a:solidFill>
-                      <a:prstDash val="solid"/>
-                      <a:round/>
-                      <a:headEnd type="none" w="med" len="med"/>
-                      <a:tailEnd type="none" w="med" len="med"/>
-                    </a:lnR>
-                    <a:lnT w="2540" cap="flat" cmpd="sng" algn="ctr">
-                      <a:solidFill>
-                        <a:srgbClr val="EEEEEE"/>
-                      </a:solidFill>
-                      <a:prstDash val="solid"/>
-                      <a:round/>
-                      <a:headEnd type="none" w="med" len="med"/>
-                      <a:tailEnd type="none" w="med" len="med"/>
-                    </a:lnT>
-                    <a:lnB w="2540" cap="flat" cmpd="sng" algn="ctr">
-                      <a:solidFill>
-                        <a:srgbClr val="EEEEEE"/>
-                      </a:solidFill>
-                      <a:prstDash val="solid"/>
-                      <a:round/>
-                      <a:headEnd type="none" w="med" len="med"/>
-                      <a:tailEnd type="none" w="med" len="med"/>
-                    </a:lnB>
-                  </a:tcPr>
-                </a:tc>
-                <a:tc>
-                  <a:txBody>
-                    <a:bodyPr/>
-                    <a:lstStyle/>
-                    <a:p>
-                      <a:pPr algn="ctr" indent="0" marL="0">
-                        <a:buNone/>
-                      </a:pPr>
-                      <a:r>
-                        <a:rPr lang="en-US" sz="500" dirty="0">
-                          <a:solidFill>
-                            <a:srgbClr val="777777"/>
-                          </a:solidFill>
-                          <a:latin typeface="Calibri" pitchFamily="34" charset="0"/>
-                          <a:ea typeface="Calibri" pitchFamily="34" charset="-122"/>
-                          <a:cs typeface="Calibri" pitchFamily="34" charset="-120"/>
-                        </a:rPr>
-                        <a:t>0.22%</a:t>
-                      </a:r>
-                      <a:endParaRPr lang="en-US" sz="500" dirty="0">
-                        <a:latin typeface="Calibri" charset="0"/>
-                        <a:ea typeface="Calibri" charset="0"/>
-                        <a:cs typeface="Calibri" charset="0"/>
-                      </a:endParaRPr>
-                    </a:p>
-                  </a:txBody>
-                  <a:tcPr marL="91440" marR="91440" marT="45720" marB="45720">
-                    <a:lnL w="2540" cap="flat" cmpd="sng" algn="ctr">
-                      <a:solidFill>
-                        <a:srgbClr val="EEEEEE"/>
-                      </a:solidFill>
-                      <a:prstDash val="solid"/>
-                      <a:round/>
-                      <a:headEnd type="none" w="med" len="med"/>
-                      <a:tailEnd type="none" w="med" len="med"/>
-                    </a:lnL>
-                    <a:lnR w="2540" cap="flat" cmpd="sng" algn="ctr">
-                      <a:solidFill>
-                        <a:srgbClr val="EEEEEE"/>
-                      </a:solidFill>
-                      <a:prstDash val="solid"/>
-                      <a:round/>
-                      <a:headEnd type="none" w="med" len="med"/>
-                      <a:tailEnd type="none" w="med" len="med"/>
-                    </a:lnR>
-                    <a:lnT w="2540" cap="flat" cmpd="sng" algn="ctr">
-                      <a:solidFill>
-                        <a:srgbClr val="EEEEEE"/>
-                      </a:solidFill>
-                      <a:prstDash val="solid"/>
-                      <a:round/>
-                      <a:headEnd type="none" w="med" len="med"/>
-                      <a:tailEnd type="none" w="med" len="med"/>
-                    </a:lnT>
-                    <a:lnB w="2540" cap="flat" cmpd="sng" algn="ctr">
-                      <a:solidFill>
-                        <a:srgbClr val="EEEEEE"/>
-                      </a:solidFill>
-                      <a:prstDash val="solid"/>
-                      <a:round/>
-                      <a:headEnd type="none" w="med" len="med"/>
-                      <a:tailEnd type="none" w="med" len="med"/>
-                    </a:lnB>
-                  </a:tcPr>
-                </a:tc>
-                <a:tc>
-                  <a:txBody>
-                    <a:bodyPr/>
-                    <a:lstStyle/>
-                    <a:p>
-                      <a:pPr algn="ctr" indent="0" marL="0">
-                        <a:buNone/>
-                      </a:pPr>
-                      <a:r>
-                        <a:rPr lang="en-US" sz="500" dirty="0">
-                          <a:solidFill>
-                            <a:srgbClr val="777777"/>
-                          </a:solidFill>
-                          <a:latin typeface="Calibri" pitchFamily="34" charset="0"/>
-                          <a:ea typeface="Calibri" pitchFamily="34" charset="-122"/>
-                          <a:cs typeface="Calibri" pitchFamily="34" charset="-120"/>
-                        </a:rPr>
-                        <a:t>0.23%</a:t>
-                      </a:r>
-                      <a:endParaRPr lang="en-US" sz="500" dirty="0">
-                        <a:latin typeface="Calibri" charset="0"/>
-                        <a:ea typeface="Calibri" charset="0"/>
-                        <a:cs typeface="Calibri" charset="0"/>
-                      </a:endParaRPr>
-                    </a:p>
-                  </a:txBody>
-                  <a:tcPr marL="91440" marR="91440" marT="45720" marB="45720">
-                    <a:lnL w="2540" cap="flat" cmpd="sng" algn="ctr">
-                      <a:solidFill>
-                        <a:srgbClr val="EEEEEE"/>
-                      </a:solidFill>
-                      <a:prstDash val="solid"/>
-                      <a:round/>
-                      <a:headEnd type="none" w="med" len="med"/>
-                      <a:tailEnd type="none" w="med" len="med"/>
-                    </a:lnL>
-                    <a:lnR w="2540" cap="flat" cmpd="sng" algn="ctr">
-                      <a:solidFill>
-                        <a:srgbClr val="EEEEEE"/>
-                      </a:solidFill>
-                      <a:prstDash val="solid"/>
-                      <a:round/>
-                      <a:headEnd type="none" w="med" len="med"/>
-                      <a:tailEnd type="none" w="med" len="med"/>
-                    </a:lnR>
-                    <a:lnT w="2540" cap="flat" cmpd="sng" algn="ctr">
-                      <a:solidFill>
-                        <a:srgbClr val="EEEEEE"/>
-                      </a:solidFill>
-                      <a:prstDash val="solid"/>
-                      <a:round/>
-                      <a:headEnd type="none" w="med" len="med"/>
-                      <a:tailEnd type="none" w="med" len="med"/>
-                    </a:lnT>
-                    <a:lnB w="2540" cap="flat" cmpd="sng" algn="ctr">
-                      <a:solidFill>
-                        <a:srgbClr val="EEEEEE"/>
-                      </a:solidFill>
-                      <a:prstDash val="solid"/>
-                      <a:round/>
-                      <a:headEnd type="none" w="med" len="med"/>
-                      <a:tailEnd type="none" w="med" len="med"/>
-                    </a:lnB>
-                  </a:tcPr>
-                </a:tc>
-                <a:tc>
-                  <a:txBody>
-                    <a:bodyPr/>
-                    <a:lstStyle/>
-                    <a:p>
-                      <a:pPr algn="ctr" indent="0" marL="0">
-                        <a:buNone/>
-                      </a:pPr>
-                      <a:r>
-                        <a:rPr lang="en-US" sz="500" dirty="0">
-                          <a:solidFill>
-                            <a:srgbClr val="777777"/>
-                          </a:solidFill>
-                          <a:latin typeface="Calibri" pitchFamily="34" charset="0"/>
-                          <a:ea typeface="Calibri" pitchFamily="34" charset="-122"/>
-                          <a:cs typeface="Calibri" pitchFamily="34" charset="-120"/>
-                        </a:rPr>
-                        <a:t>0.23%</a:t>
-                      </a:r>
-                      <a:endParaRPr lang="en-US" sz="500" dirty="0">
-                        <a:latin typeface="Calibri" charset="0"/>
-                        <a:ea typeface="Calibri" charset="0"/>
-                        <a:cs typeface="Calibri" charset="0"/>
-                      </a:endParaRPr>
-                    </a:p>
-                  </a:txBody>
-                  <a:tcPr marL="91440" marR="91440" marT="45720" marB="45720">
-                    <a:lnL w="2540" cap="flat" cmpd="sng" algn="ctr">
-                      <a:solidFill>
-                        <a:srgbClr val="EEEEEE"/>
-                      </a:solidFill>
-                      <a:prstDash val="solid"/>
-                      <a:round/>
-                      <a:headEnd type="none" w="med" len="med"/>
-                      <a:tailEnd type="none" w="med" len="med"/>
-                    </a:lnL>
-                    <a:lnR w="2540" cap="flat" cmpd="sng" algn="ctr">
-                      <a:solidFill>
-                        <a:srgbClr val="EEEEEE"/>
-                      </a:solidFill>
-                      <a:prstDash val="solid"/>
-                      <a:round/>
-                      <a:headEnd type="none" w="med" len="med"/>
-                      <a:tailEnd type="none" w="med" len="med"/>
-                    </a:lnR>
-                    <a:lnT w="2540" cap="flat" cmpd="sng" algn="ctr">
-                      <a:solidFill>
-                        <a:srgbClr val="EEEEEE"/>
-                      </a:solidFill>
-                      <a:prstDash val="solid"/>
-                      <a:round/>
-                      <a:headEnd type="none" w="med" len="med"/>
-                      <a:tailEnd type="none" w="med" len="med"/>
-                    </a:lnT>
-                    <a:lnB w="2540" cap="flat" cmpd="sng" algn="ctr">
-                      <a:solidFill>
-                        <a:srgbClr val="EEEEEE"/>
-                      </a:solidFill>
-                      <a:prstDash val="solid"/>
-                      <a:round/>
-                      <a:headEnd type="none" w="med" len="med"/>
-                      <a:tailEnd type="none" w="med" len="med"/>
-                    </a:lnB>
-                  </a:tcPr>
-                </a:tc>
-                <a:tc>
-                  <a:txBody>
-                    <a:bodyPr/>
-                    <a:lstStyle/>
-                    <a:p>
-                      <a:pPr algn="ctr" indent="0" marL="0">
-                        <a:buNone/>
-                      </a:pPr>
-                      <a:r>
-                        <a:rPr lang="en-US" sz="500" b="1" dirty="0">
-                          <a:solidFill>
-                            <a:srgbClr val="777777"/>
-                          </a:solidFill>
-                          <a:latin typeface="Calibri" pitchFamily="34" charset="0"/>
-                          <a:ea typeface="Calibri" pitchFamily="34" charset="-122"/>
-                          <a:cs typeface="Calibri" pitchFamily="34" charset="-120"/>
-                        </a:rPr>
-                        <a:t>2.58%</a:t>
+                        <a:t>2.74%</a:t>
                       </a:r>
                       <a:endParaRPr lang="en-US" sz="500" dirty="0">
                         <a:latin typeface="Calibri" charset="0"/>
@@ -7859,7 +9335,7 @@
                           <a:ea typeface="Calibri" pitchFamily="34" charset="-122"/>
                           <a:cs typeface="Calibri" pitchFamily="34" charset="-120"/>
                         </a:rPr>
-                        <a:t>3.10%</a:t>
+                        <a:t>0.22%</a:t>
                       </a:r>
                       <a:endParaRPr lang="en-US" sz="500" dirty="0">
                         <a:latin typeface="Calibri" charset="0"/>
@@ -7924,7 +9400,7 @@
                           <a:ea typeface="Calibri" pitchFamily="34" charset="-122"/>
                           <a:cs typeface="Calibri" pitchFamily="34" charset="-120"/>
                         </a:rPr>
-                        <a:t>5.54%</a:t>
+                        <a:t>2.62%</a:t>
                       </a:r>
                       <a:endParaRPr lang="en-US" sz="500" dirty="0">
                         <a:latin typeface="Calibri" charset="0"/>
@@ -8791,7 +10267,7 @@
                           <a:ea typeface="Calibri" pitchFamily="34" charset="-122"/>
                           <a:cs typeface="Calibri" pitchFamily="34" charset="-120"/>
                         </a:rPr>
-                        <a:t>0.98%</a:t>
+                        <a:t>0.87%</a:t>
                       </a:r>
                       <a:endParaRPr lang="en-US" sz="500" dirty="0">
                         <a:latin typeface="Calibri" charset="0"/>
@@ -8988,6 +10464,71 @@
                           <a:ea typeface="Calibri" pitchFamily="34" charset="-122"/>
                           <a:cs typeface="Calibri" pitchFamily="34" charset="-120"/>
                         </a:rPr>
+                        <a:t>0.25%</a:t>
+                      </a:r>
+                      <a:endParaRPr lang="en-US" sz="500" dirty="0">
+                        <a:latin typeface="Calibri" charset="0"/>
+                        <a:ea typeface="Calibri" charset="0"/>
+                        <a:cs typeface="Calibri" charset="0"/>
+                      </a:endParaRPr>
+                    </a:p>
+                  </a:txBody>
+                  <a:tcPr marL="91440" marR="91440" marT="45720" marB="45720">
+                    <a:lnL w="2540" cap="flat" cmpd="sng" algn="ctr">
+                      <a:solidFill>
+                        <a:srgbClr val="EEEEEE"/>
+                      </a:solidFill>
+                      <a:prstDash val="solid"/>
+                      <a:round/>
+                      <a:headEnd type="none" w="med" len="med"/>
+                      <a:tailEnd type="none" w="med" len="med"/>
+                    </a:lnL>
+                    <a:lnR w="2540" cap="flat" cmpd="sng" algn="ctr">
+                      <a:solidFill>
+                        <a:srgbClr val="EEEEEE"/>
+                      </a:solidFill>
+                      <a:prstDash val="solid"/>
+                      <a:round/>
+                      <a:headEnd type="none" w="med" len="med"/>
+                      <a:tailEnd type="none" w="med" len="med"/>
+                    </a:lnR>
+                    <a:lnT w="2540" cap="flat" cmpd="sng" algn="ctr">
+                      <a:solidFill>
+                        <a:srgbClr val="EEEEEE"/>
+                      </a:solidFill>
+                      <a:prstDash val="solid"/>
+                      <a:round/>
+                      <a:headEnd type="none" w="med" len="med"/>
+                      <a:tailEnd type="none" w="med" len="med"/>
+                    </a:lnT>
+                    <a:lnB w="2540" cap="flat" cmpd="sng" algn="ctr">
+                      <a:solidFill>
+                        <a:srgbClr val="EEEEEE"/>
+                      </a:solidFill>
+                      <a:prstDash val="solid"/>
+                      <a:round/>
+                      <a:headEnd type="none" w="med" len="med"/>
+                      <a:tailEnd type="none" w="med" len="med"/>
+                    </a:lnB>
+                  </a:tcPr>
+                </a:tc>
+                <a:tc>
+                  <a:txBody>
+                    <a:bodyPr/>
+                    <a:lstStyle/>
+                    <a:p>
+                      <a:pPr algn="ctr" indent="0" marL="0">
+                        <a:buNone/>
+                      </a:pPr>
+                      <a:r>
+                        <a:rPr lang="en-US" sz="500" dirty="0">
+                          <a:solidFill>
+                            <a:srgbClr val="777777"/>
+                          </a:solidFill>
+                          <a:latin typeface="Calibri" pitchFamily="34" charset="0"/>
+                          <a:ea typeface="Calibri" pitchFamily="34" charset="-122"/>
+                          <a:cs typeface="Calibri" pitchFamily="34" charset="-120"/>
+                        </a:rPr>
                         <a:t>0.23%</a:t>
                       </a:r>
                       <a:endParaRPr lang="en-US" sz="500" dirty="0">
@@ -9053,6 +10594,71 @@
                           <a:ea typeface="Calibri" pitchFamily="34" charset="-122"/>
                           <a:cs typeface="Calibri" pitchFamily="34" charset="-120"/>
                         </a:rPr>
+                        <a:t>0.26%</a:t>
+                      </a:r>
+                      <a:endParaRPr lang="en-US" sz="500" dirty="0">
+                        <a:latin typeface="Calibri" charset="0"/>
+                        <a:ea typeface="Calibri" charset="0"/>
+                        <a:cs typeface="Calibri" charset="0"/>
+                      </a:endParaRPr>
+                    </a:p>
+                  </a:txBody>
+                  <a:tcPr marL="91440" marR="91440" marT="45720" marB="45720">
+                    <a:lnL w="2540" cap="flat" cmpd="sng" algn="ctr">
+                      <a:solidFill>
+                        <a:srgbClr val="EEEEEE"/>
+                      </a:solidFill>
+                      <a:prstDash val="solid"/>
+                      <a:round/>
+                      <a:headEnd type="none" w="med" len="med"/>
+                      <a:tailEnd type="none" w="med" len="med"/>
+                    </a:lnL>
+                    <a:lnR w="2540" cap="flat" cmpd="sng" algn="ctr">
+                      <a:solidFill>
+                        <a:srgbClr val="EEEEEE"/>
+                      </a:solidFill>
+                      <a:prstDash val="solid"/>
+                      <a:round/>
+                      <a:headEnd type="none" w="med" len="med"/>
+                      <a:tailEnd type="none" w="med" len="med"/>
+                    </a:lnR>
+                    <a:lnT w="2540" cap="flat" cmpd="sng" algn="ctr">
+                      <a:solidFill>
+                        <a:srgbClr val="EEEEEE"/>
+                      </a:solidFill>
+                      <a:prstDash val="solid"/>
+                      <a:round/>
+                      <a:headEnd type="none" w="med" len="med"/>
+                      <a:tailEnd type="none" w="med" len="med"/>
+                    </a:lnT>
+                    <a:lnB w="2540" cap="flat" cmpd="sng" algn="ctr">
+                      <a:solidFill>
+                        <a:srgbClr val="EEEEEE"/>
+                      </a:solidFill>
+                      <a:prstDash val="solid"/>
+                      <a:round/>
+                      <a:headEnd type="none" w="med" len="med"/>
+                      <a:tailEnd type="none" w="med" len="med"/>
+                    </a:lnB>
+                  </a:tcPr>
+                </a:tc>
+                <a:tc>
+                  <a:txBody>
+                    <a:bodyPr/>
+                    <a:lstStyle/>
+                    <a:p>
+                      <a:pPr algn="ctr" indent="0" marL="0">
+                        <a:buNone/>
+                      </a:pPr>
+                      <a:r>
+                        <a:rPr lang="en-US" sz="500" dirty="0">
+                          <a:solidFill>
+                            <a:srgbClr val="777777"/>
+                          </a:solidFill>
+                          <a:latin typeface="Calibri" pitchFamily="34" charset="0"/>
+                          <a:ea typeface="Calibri" pitchFamily="34" charset="-122"/>
+                          <a:cs typeface="Calibri" pitchFamily="34" charset="-120"/>
+                        </a:rPr>
                         <a:t>0.25%</a:t>
                       </a:r>
                       <a:endParaRPr lang="en-US" sz="500" dirty="0">
@@ -9118,7 +10724,7 @@
                           <a:ea typeface="Calibri" pitchFamily="34" charset="-122"/>
                           <a:cs typeface="Calibri" pitchFamily="34" charset="-120"/>
                         </a:rPr>
-                        <a:t>0.25%</a:t>
+                        <a:t>0.26%</a:t>
                       </a:r>
                       <a:endParaRPr lang="en-US" sz="500" dirty="0">
                         <a:latin typeface="Calibri" charset="0"/>
@@ -9183,7 +10789,7 @@
                           <a:ea typeface="Calibri" pitchFamily="34" charset="-122"/>
                           <a:cs typeface="Calibri" pitchFamily="34" charset="-120"/>
                         </a:rPr>
-                        <a:t>0.25%</a:t>
+                        <a:t>0.22%</a:t>
                       </a:r>
                       <a:endParaRPr lang="en-US" sz="500" dirty="0">
                         <a:latin typeface="Calibri" charset="0"/>
@@ -9248,7 +10854,7 @@
                           <a:ea typeface="Calibri" pitchFamily="34" charset="-122"/>
                           <a:cs typeface="Calibri" pitchFamily="34" charset="-120"/>
                         </a:rPr>
-                        <a:t>0.25%</a:t>
+                        <a:t>0.21%</a:t>
                       </a:r>
                       <a:endParaRPr lang="en-US" sz="500" dirty="0">
                         <a:latin typeface="Calibri" charset="0"/>
@@ -9378,7 +10984,7 @@
                           <a:ea typeface="Calibri" pitchFamily="34" charset="-122"/>
                           <a:cs typeface="Calibri" pitchFamily="34" charset="-120"/>
                         </a:rPr>
-                        <a:t>0.21%</a:t>
+                        <a:t>0.17%</a:t>
                       </a:r>
                       <a:endParaRPr lang="en-US" sz="500" dirty="0">
                         <a:latin typeface="Calibri" charset="0"/>
@@ -9443,7 +11049,7 @@
                           <a:ea typeface="Calibri" pitchFamily="34" charset="-122"/>
                           <a:cs typeface="Calibri" pitchFamily="34" charset="-120"/>
                         </a:rPr>
-                        <a:t>0.21%</a:t>
+                        <a:t>0.17%</a:t>
                       </a:r>
                       <a:endParaRPr lang="en-US" sz="500" dirty="0">
                         <a:latin typeface="Calibri" charset="0"/>
@@ -9508,7 +11114,7 @@
                           <a:ea typeface="Calibri" pitchFamily="34" charset="-122"/>
                           <a:cs typeface="Calibri" pitchFamily="34" charset="-120"/>
                         </a:rPr>
-                        <a:t>0.17%</a:t>
+                        <a:t>0.14%</a:t>
                       </a:r>
                       <a:endParaRPr lang="en-US" sz="500" dirty="0">
                         <a:latin typeface="Calibri" charset="0"/>
@@ -9573,64 +11179,64 @@
                           <a:ea typeface="Calibri" pitchFamily="34" charset="-122"/>
                           <a:cs typeface="Calibri" pitchFamily="34" charset="-120"/>
                         </a:rPr>
-                        <a:t>0.16%</a:t>
-                      </a:r>
-                      <a:endParaRPr lang="en-US" sz="500" dirty="0">
-                        <a:latin typeface="Calibri" charset="0"/>
-                        <a:ea typeface="Calibri" charset="0"/>
-                        <a:cs typeface="Calibri" charset="0"/>
-                      </a:endParaRPr>
-                    </a:p>
-                  </a:txBody>
-                  <a:tcPr marL="91440" marR="91440" marT="45720" marB="45720">
-                    <a:lnL w="2540" cap="flat" cmpd="sng" algn="ctr">
-                      <a:solidFill>
-                        <a:srgbClr val="EEEEEE"/>
-                      </a:solidFill>
-                      <a:prstDash val="solid"/>
-                      <a:round/>
-                      <a:headEnd type="none" w="med" len="med"/>
-                      <a:tailEnd type="none" w="med" len="med"/>
-                    </a:lnL>
-                    <a:lnR w="2540" cap="flat" cmpd="sng" algn="ctr">
-                      <a:solidFill>
-                        <a:srgbClr val="EEEEEE"/>
-                      </a:solidFill>
-                      <a:prstDash val="solid"/>
-                      <a:round/>
-                      <a:headEnd type="none" w="med" len="med"/>
-                      <a:tailEnd type="none" w="med" len="med"/>
-                    </a:lnR>
-                    <a:lnT w="2540" cap="flat" cmpd="sng" algn="ctr">
-                      <a:solidFill>
-                        <a:srgbClr val="EEEEEE"/>
-                      </a:solidFill>
-                      <a:prstDash val="solid"/>
-                      <a:round/>
-                      <a:headEnd type="none" w="med" len="med"/>
-                      <a:tailEnd type="none" w="med" len="med"/>
-                    </a:lnT>
-                    <a:lnB w="2540" cap="flat" cmpd="sng" algn="ctr">
-                      <a:solidFill>
-                        <a:srgbClr val="EEEEEE"/>
-                      </a:solidFill>
-                      <a:prstDash val="solid"/>
-                      <a:round/>
-                      <a:headEnd type="none" w="med" len="med"/>
-                      <a:tailEnd type="none" w="med" len="med"/>
-                    </a:lnB>
-                  </a:tcPr>
-                </a:tc>
-                <a:tc>
-                  <a:txBody>
-                    <a:bodyPr/>
-                    <a:lstStyle/>
-                    <a:p>
-                      <a:pPr algn="ctr" indent="0" marL="0">
-                        <a:buNone/>
-                      </a:pPr>
-                      <a:r>
-                        <a:rPr lang="en-US" sz="500" dirty="0">
+                        <a:t>0.15%</a:t>
+                      </a:r>
+                      <a:endParaRPr lang="en-US" sz="500" dirty="0">
+                        <a:latin typeface="Calibri" charset="0"/>
+                        <a:ea typeface="Calibri" charset="0"/>
+                        <a:cs typeface="Calibri" charset="0"/>
+                      </a:endParaRPr>
+                    </a:p>
+                  </a:txBody>
+                  <a:tcPr marL="91440" marR="91440" marT="45720" marB="45720">
+                    <a:lnL w="2540" cap="flat" cmpd="sng" algn="ctr">
+                      <a:solidFill>
+                        <a:srgbClr val="EEEEEE"/>
+                      </a:solidFill>
+                      <a:prstDash val="solid"/>
+                      <a:round/>
+                      <a:headEnd type="none" w="med" len="med"/>
+                      <a:tailEnd type="none" w="med" len="med"/>
+                    </a:lnL>
+                    <a:lnR w="2540" cap="flat" cmpd="sng" algn="ctr">
+                      <a:solidFill>
+                        <a:srgbClr val="EEEEEE"/>
+                      </a:solidFill>
+                      <a:prstDash val="solid"/>
+                      <a:round/>
+                      <a:headEnd type="none" w="med" len="med"/>
+                      <a:tailEnd type="none" w="med" len="med"/>
+                    </a:lnR>
+                    <a:lnT w="2540" cap="flat" cmpd="sng" algn="ctr">
+                      <a:solidFill>
+                        <a:srgbClr val="EEEEEE"/>
+                      </a:solidFill>
+                      <a:prstDash val="solid"/>
+                      <a:round/>
+                      <a:headEnd type="none" w="med" len="med"/>
+                      <a:tailEnd type="none" w="med" len="med"/>
+                    </a:lnT>
+                    <a:lnB w="2540" cap="flat" cmpd="sng" algn="ctr">
+                      <a:solidFill>
+                        <a:srgbClr val="EEEEEE"/>
+                      </a:solidFill>
+                      <a:prstDash val="solid"/>
+                      <a:round/>
+                      <a:headEnd type="none" w="med" len="med"/>
+                      <a:tailEnd type="none" w="med" len="med"/>
+                    </a:lnB>
+                  </a:tcPr>
+                </a:tc>
+                <a:tc>
+                  <a:txBody>
+                    <a:bodyPr/>
+                    <a:lstStyle/>
+                    <a:p>
+                      <a:pPr algn="ctr" indent="0" marL="0">
+                        <a:buNone/>
+                      </a:pPr>
+                      <a:r>
+                        <a:rPr lang="en-US" sz="500" b="1" dirty="0">
                           <a:solidFill>
                             <a:srgbClr val="777777"/>
                           </a:solidFill>
@@ -9638,137 +11244,7 @@
                           <a:ea typeface="Calibri" pitchFamily="34" charset="-122"/>
                           <a:cs typeface="Calibri" pitchFamily="34" charset="-120"/>
                         </a:rPr>
-                        <a:t>0.15%</a:t>
-                      </a:r>
-                      <a:endParaRPr lang="en-US" sz="500" dirty="0">
-                        <a:latin typeface="Calibri" charset="0"/>
-                        <a:ea typeface="Calibri" charset="0"/>
-                        <a:cs typeface="Calibri" charset="0"/>
-                      </a:endParaRPr>
-                    </a:p>
-                  </a:txBody>
-                  <a:tcPr marL="91440" marR="91440" marT="45720" marB="45720">
-                    <a:lnL w="2540" cap="flat" cmpd="sng" algn="ctr">
-                      <a:solidFill>
-                        <a:srgbClr val="EEEEEE"/>
-                      </a:solidFill>
-                      <a:prstDash val="solid"/>
-                      <a:round/>
-                      <a:headEnd type="none" w="med" len="med"/>
-                      <a:tailEnd type="none" w="med" len="med"/>
-                    </a:lnL>
-                    <a:lnR w="2540" cap="flat" cmpd="sng" algn="ctr">
-                      <a:solidFill>
-                        <a:srgbClr val="EEEEEE"/>
-                      </a:solidFill>
-                      <a:prstDash val="solid"/>
-                      <a:round/>
-                      <a:headEnd type="none" w="med" len="med"/>
-                      <a:tailEnd type="none" w="med" len="med"/>
-                    </a:lnR>
-                    <a:lnT w="2540" cap="flat" cmpd="sng" algn="ctr">
-                      <a:solidFill>
-                        <a:srgbClr val="EEEEEE"/>
-                      </a:solidFill>
-                      <a:prstDash val="solid"/>
-                      <a:round/>
-                      <a:headEnd type="none" w="med" len="med"/>
-                      <a:tailEnd type="none" w="med" len="med"/>
-                    </a:lnT>
-                    <a:lnB w="2540" cap="flat" cmpd="sng" algn="ctr">
-                      <a:solidFill>
-                        <a:srgbClr val="EEEEEE"/>
-                      </a:solidFill>
-                      <a:prstDash val="solid"/>
-                      <a:round/>
-                      <a:headEnd type="none" w="med" len="med"/>
-                      <a:tailEnd type="none" w="med" len="med"/>
-                    </a:lnB>
-                  </a:tcPr>
-                </a:tc>
-                <a:tc>
-                  <a:txBody>
-                    <a:bodyPr/>
-                    <a:lstStyle/>
-                    <a:p>
-                      <a:pPr algn="ctr" indent="0" marL="0">
-                        <a:buNone/>
-                      </a:pPr>
-                      <a:r>
-                        <a:rPr lang="en-US" sz="500" dirty="0">
-                          <a:solidFill>
-                            <a:srgbClr val="777777"/>
-                          </a:solidFill>
-                          <a:latin typeface="Calibri" pitchFamily="34" charset="0"/>
-                          <a:ea typeface="Calibri" pitchFamily="34" charset="-122"/>
-                          <a:cs typeface="Calibri" pitchFamily="34" charset="-120"/>
-                        </a:rPr>
-                        <a:t>0.15%</a:t>
-                      </a:r>
-                      <a:endParaRPr lang="en-US" sz="500" dirty="0">
-                        <a:latin typeface="Calibri" charset="0"/>
-                        <a:ea typeface="Calibri" charset="0"/>
-                        <a:cs typeface="Calibri" charset="0"/>
-                      </a:endParaRPr>
-                    </a:p>
-                  </a:txBody>
-                  <a:tcPr marL="91440" marR="91440" marT="45720" marB="45720">
-                    <a:lnL w="2540" cap="flat" cmpd="sng" algn="ctr">
-                      <a:solidFill>
-                        <a:srgbClr val="EEEEEE"/>
-                      </a:solidFill>
-                      <a:prstDash val="solid"/>
-                      <a:round/>
-                      <a:headEnd type="none" w="med" len="med"/>
-                      <a:tailEnd type="none" w="med" len="med"/>
-                    </a:lnL>
-                    <a:lnR w="2540" cap="flat" cmpd="sng" algn="ctr">
-                      <a:solidFill>
-                        <a:srgbClr val="EEEEEE"/>
-                      </a:solidFill>
-                      <a:prstDash val="solid"/>
-                      <a:round/>
-                      <a:headEnd type="none" w="med" len="med"/>
-                      <a:tailEnd type="none" w="med" len="med"/>
-                    </a:lnR>
-                    <a:lnT w="2540" cap="flat" cmpd="sng" algn="ctr">
-                      <a:solidFill>
-                        <a:srgbClr val="EEEEEE"/>
-                      </a:solidFill>
-                      <a:prstDash val="solid"/>
-                      <a:round/>
-                      <a:headEnd type="none" w="med" len="med"/>
-                      <a:tailEnd type="none" w="med" len="med"/>
-                    </a:lnT>
-                    <a:lnB w="2540" cap="flat" cmpd="sng" algn="ctr">
-                      <a:solidFill>
-                        <a:srgbClr val="EEEEEE"/>
-                      </a:solidFill>
-                      <a:prstDash val="solid"/>
-                      <a:round/>
-                      <a:headEnd type="none" w="med" len="med"/>
-                      <a:tailEnd type="none" w="med" len="med"/>
-                    </a:lnB>
-                  </a:tcPr>
-                </a:tc>
-                <a:tc>
-                  <a:txBody>
-                    <a:bodyPr/>
-                    <a:lstStyle/>
-                    <a:p>
-                      <a:pPr algn="ctr" indent="0" marL="0">
-                        <a:buNone/>
-                      </a:pPr>
-                      <a:r>
-                        <a:rPr lang="en-US" sz="500" b="1" dirty="0">
-                          <a:solidFill>
-                            <a:srgbClr val="777777"/>
-                          </a:solidFill>
-                          <a:latin typeface="Calibri" pitchFamily="34" charset="0"/>
-                          <a:ea typeface="Calibri" pitchFamily="34" charset="-122"/>
-                          <a:cs typeface="Calibri" pitchFamily="34" charset="-120"/>
-                        </a:rPr>
-                        <a:t>2.52%</a:t>
+                        <a:t>2.55%</a:t>
                       </a:r>
                       <a:endParaRPr lang="en-US" sz="500" dirty="0">
                         <a:latin typeface="Calibri" charset="0"/>
@@ -9954,7 +11430,7 @@
                           <a:ea typeface="Calibri" pitchFamily="34" charset="-122"/>
                           <a:cs typeface="Calibri" pitchFamily="34" charset="-120"/>
                         </a:rPr>
-                        <a:t>0.00%</a:t>
+                        <a:t>0.22%</a:t>
                       </a:r>
                       <a:endParaRPr lang="en-US" sz="500" dirty="0">
                         <a:latin typeface="Calibri" charset="0"/>
@@ -10669,7 +12145,7 @@
                           <a:ea typeface="Calibri" pitchFamily="34" charset="-122"/>
                           <a:cs typeface="Calibri" pitchFamily="34" charset="-120"/>
                         </a:rPr>
-                        <a:t>2.91%</a:t>
+                        <a:t>0.17%</a:t>
                       </a:r>
                       <a:endParaRPr lang="en-US" sz="500" dirty="0">
                         <a:latin typeface="Calibri" charset="0"/>
@@ -10734,7 +12210,7 @@
                           <a:ea typeface="Calibri" pitchFamily="34" charset="-122"/>
                           <a:cs typeface="Calibri" pitchFamily="34" charset="-120"/>
                         </a:rPr>
-                        <a:t>5.40%</a:t>
+                        <a:t>2.80%</a:t>
                       </a:r>
                       <a:endParaRPr lang="en-US" sz="500" dirty="0">
                         <a:latin typeface="Calibri" charset="0"/>
@@ -11700,7 +13176,7 @@
                           <a:ea typeface="Calibri" pitchFamily="34" charset="-122"/>
                           <a:cs typeface="Calibri" pitchFamily="34" charset="-120"/>
                         </a:rPr>
-                        <a:t>3.28%</a:t>
+                        <a:t>3.33%</a:t>
                       </a:r>
                       <a:endParaRPr lang="en-US" sz="500" dirty="0">
                         <a:latin typeface="Calibri" charset="0"/>
@@ -11897,7 +13373,7 @@
                           <a:ea typeface="Calibri" pitchFamily="34" charset="-122"/>
                           <a:cs typeface="Calibri" pitchFamily="34" charset="-120"/>
                         </a:rPr>
-                        <a:t>0.15%</a:t>
+                        <a:t>0.17%</a:t>
                       </a:r>
                       <a:endParaRPr lang="en-US" sz="500" dirty="0">
                         <a:latin typeface="Calibri" charset="0"/>
@@ -11962,7 +13438,7 @@
                           <a:ea typeface="Calibri" pitchFamily="34" charset="-122"/>
                           <a:cs typeface="Calibri" pitchFamily="34" charset="-120"/>
                         </a:rPr>
-                        <a:t>0.15%</a:t>
+                        <a:t>0.14%</a:t>
                       </a:r>
                       <a:endParaRPr lang="en-US" sz="500" dirty="0">
                         <a:latin typeface="Calibri" charset="0"/>
@@ -12092,6 +13568,71 @@
                           <a:ea typeface="Calibri" pitchFamily="34" charset="-122"/>
                           <a:cs typeface="Calibri" pitchFamily="34" charset="-120"/>
                         </a:rPr>
+                        <a:t>0.05%</a:t>
+                      </a:r>
+                      <a:endParaRPr lang="en-US" sz="500" dirty="0">
+                        <a:latin typeface="Calibri" charset="0"/>
+                        <a:ea typeface="Calibri" charset="0"/>
+                        <a:cs typeface="Calibri" charset="0"/>
+                      </a:endParaRPr>
+                    </a:p>
+                  </a:txBody>
+                  <a:tcPr marL="91440" marR="91440" marT="45720" marB="45720">
+                    <a:lnL w="2540" cap="flat" cmpd="sng" algn="ctr">
+                      <a:solidFill>
+                        <a:srgbClr val="EEEEEE"/>
+                      </a:solidFill>
+                      <a:prstDash val="solid"/>
+                      <a:round/>
+                      <a:headEnd type="none" w="med" len="med"/>
+                      <a:tailEnd type="none" w="med" len="med"/>
+                    </a:lnL>
+                    <a:lnR w="2540" cap="flat" cmpd="sng" algn="ctr">
+                      <a:solidFill>
+                        <a:srgbClr val="EEEEEE"/>
+                      </a:solidFill>
+                      <a:prstDash val="solid"/>
+                      <a:round/>
+                      <a:headEnd type="none" w="med" len="med"/>
+                      <a:tailEnd type="none" w="med" len="med"/>
+                    </a:lnR>
+                    <a:lnT w="2540" cap="flat" cmpd="sng" algn="ctr">
+                      <a:solidFill>
+                        <a:srgbClr val="EEEEEE"/>
+                      </a:solidFill>
+                      <a:prstDash val="solid"/>
+                      <a:round/>
+                      <a:headEnd type="none" w="med" len="med"/>
+                      <a:tailEnd type="none" w="med" len="med"/>
+                    </a:lnT>
+                    <a:lnB w="2540" cap="flat" cmpd="sng" algn="ctr">
+                      <a:solidFill>
+                        <a:srgbClr val="EEEEEE"/>
+                      </a:solidFill>
+                      <a:prstDash val="solid"/>
+                      <a:round/>
+                      <a:headEnd type="none" w="med" len="med"/>
+                      <a:tailEnd type="none" w="med" len="med"/>
+                    </a:lnB>
+                  </a:tcPr>
+                </a:tc>
+                <a:tc>
+                  <a:txBody>
+                    <a:bodyPr/>
+                    <a:lstStyle/>
+                    <a:p>
+                      <a:pPr algn="ctr" indent="0" marL="0">
+                        <a:buNone/>
+                      </a:pPr>
+                      <a:r>
+                        <a:rPr lang="en-US" sz="500" dirty="0">
+                          <a:solidFill>
+                            <a:srgbClr val="777777"/>
+                          </a:solidFill>
+                          <a:latin typeface="Calibri" pitchFamily="34" charset="0"/>
+                          <a:ea typeface="Calibri" pitchFamily="34" charset="-122"/>
+                          <a:cs typeface="Calibri" pitchFamily="34" charset="-120"/>
+                        </a:rPr>
                         <a:t>0.04%</a:t>
                       </a:r>
                       <a:endParaRPr lang="en-US" sz="500" dirty="0">
@@ -12222,6 +13763,71 @@
                           <a:ea typeface="Calibri" pitchFamily="34" charset="-122"/>
                           <a:cs typeface="Calibri" pitchFamily="34" charset="-120"/>
                         </a:rPr>
+                        <a:t>0.05%</a:t>
+                      </a:r>
+                      <a:endParaRPr lang="en-US" sz="500" dirty="0">
+                        <a:latin typeface="Calibri" charset="0"/>
+                        <a:ea typeface="Calibri" charset="0"/>
+                        <a:cs typeface="Calibri" charset="0"/>
+                      </a:endParaRPr>
+                    </a:p>
+                  </a:txBody>
+                  <a:tcPr marL="91440" marR="91440" marT="45720" marB="45720">
+                    <a:lnL w="2540" cap="flat" cmpd="sng" algn="ctr">
+                      <a:solidFill>
+                        <a:srgbClr val="EEEEEE"/>
+                      </a:solidFill>
+                      <a:prstDash val="solid"/>
+                      <a:round/>
+                      <a:headEnd type="none" w="med" len="med"/>
+                      <a:tailEnd type="none" w="med" len="med"/>
+                    </a:lnL>
+                    <a:lnR w="2540" cap="flat" cmpd="sng" algn="ctr">
+                      <a:solidFill>
+                        <a:srgbClr val="EEEEEE"/>
+                      </a:solidFill>
+                      <a:prstDash val="solid"/>
+                      <a:round/>
+                      <a:headEnd type="none" w="med" len="med"/>
+                      <a:tailEnd type="none" w="med" len="med"/>
+                    </a:lnR>
+                    <a:lnT w="2540" cap="flat" cmpd="sng" algn="ctr">
+                      <a:solidFill>
+                        <a:srgbClr val="EEEEEE"/>
+                      </a:solidFill>
+                      <a:prstDash val="solid"/>
+                      <a:round/>
+                      <a:headEnd type="none" w="med" len="med"/>
+                      <a:tailEnd type="none" w="med" len="med"/>
+                    </a:lnT>
+                    <a:lnB w="2540" cap="flat" cmpd="sng" algn="ctr">
+                      <a:solidFill>
+                        <a:srgbClr val="EEEEEE"/>
+                      </a:solidFill>
+                      <a:prstDash val="solid"/>
+                      <a:round/>
+                      <a:headEnd type="none" w="med" len="med"/>
+                      <a:tailEnd type="none" w="med" len="med"/>
+                    </a:lnB>
+                  </a:tcPr>
+                </a:tc>
+                <a:tc>
+                  <a:txBody>
+                    <a:bodyPr/>
+                    <a:lstStyle/>
+                    <a:p>
+                      <a:pPr algn="ctr" indent="0" marL="0">
+                        <a:buNone/>
+                      </a:pPr>
+                      <a:r>
+                        <a:rPr lang="en-US" sz="500" dirty="0">
+                          <a:solidFill>
+                            <a:srgbClr val="777777"/>
+                          </a:solidFill>
+                          <a:latin typeface="Calibri" pitchFamily="34" charset="0"/>
+                          <a:ea typeface="Calibri" pitchFamily="34" charset="-122"/>
+                          <a:cs typeface="Calibri" pitchFamily="34" charset="-120"/>
+                        </a:rPr>
                         <a:t>0.04%</a:t>
                       </a:r>
                       <a:endParaRPr lang="en-US" sz="500" dirty="0">
@@ -12417,137 +14023,7 @@
                           <a:ea typeface="Calibri" pitchFamily="34" charset="-122"/>
                           <a:cs typeface="Calibri" pitchFamily="34" charset="-120"/>
                         </a:rPr>
-                        <a:t>0.04%</a:t>
-                      </a:r>
-                      <a:endParaRPr lang="en-US" sz="500" dirty="0">
-                        <a:latin typeface="Calibri" charset="0"/>
-                        <a:ea typeface="Calibri" charset="0"/>
-                        <a:cs typeface="Calibri" charset="0"/>
-                      </a:endParaRPr>
-                    </a:p>
-                  </a:txBody>
-                  <a:tcPr marL="91440" marR="91440" marT="45720" marB="45720">
-                    <a:lnL w="2540" cap="flat" cmpd="sng" algn="ctr">
-                      <a:solidFill>
-                        <a:srgbClr val="EEEEEE"/>
-                      </a:solidFill>
-                      <a:prstDash val="solid"/>
-                      <a:round/>
-                      <a:headEnd type="none" w="med" len="med"/>
-                      <a:tailEnd type="none" w="med" len="med"/>
-                    </a:lnL>
-                    <a:lnR w="2540" cap="flat" cmpd="sng" algn="ctr">
-                      <a:solidFill>
-                        <a:srgbClr val="EEEEEE"/>
-                      </a:solidFill>
-                      <a:prstDash val="solid"/>
-                      <a:round/>
-                      <a:headEnd type="none" w="med" len="med"/>
-                      <a:tailEnd type="none" w="med" len="med"/>
-                    </a:lnR>
-                    <a:lnT w="2540" cap="flat" cmpd="sng" algn="ctr">
-                      <a:solidFill>
-                        <a:srgbClr val="EEEEEE"/>
-                      </a:solidFill>
-                      <a:prstDash val="solid"/>
-                      <a:round/>
-                      <a:headEnd type="none" w="med" len="med"/>
-                      <a:tailEnd type="none" w="med" len="med"/>
-                    </a:lnT>
-                    <a:lnB w="2540" cap="flat" cmpd="sng" algn="ctr">
-                      <a:solidFill>
-                        <a:srgbClr val="EEEEEE"/>
-                      </a:solidFill>
-                      <a:prstDash val="solid"/>
-                      <a:round/>
-                      <a:headEnd type="none" w="med" len="med"/>
-                      <a:tailEnd type="none" w="med" len="med"/>
-                    </a:lnB>
-                  </a:tcPr>
-                </a:tc>
-                <a:tc>
-                  <a:txBody>
-                    <a:bodyPr/>
-                    <a:lstStyle/>
-                    <a:p>
-                      <a:pPr algn="ctr" indent="0" marL="0">
-                        <a:buNone/>
-                      </a:pPr>
-                      <a:r>
-                        <a:rPr lang="en-US" sz="500" dirty="0">
-                          <a:solidFill>
-                            <a:srgbClr val="777777"/>
-                          </a:solidFill>
-                          <a:latin typeface="Calibri" pitchFamily="34" charset="0"/>
-                          <a:ea typeface="Calibri" pitchFamily="34" charset="-122"/>
-                          <a:cs typeface="Calibri" pitchFamily="34" charset="-120"/>
-                        </a:rPr>
-                        <a:t>0.04%</a:t>
-                      </a:r>
-                      <a:endParaRPr lang="en-US" sz="500" dirty="0">
-                        <a:latin typeface="Calibri" charset="0"/>
-                        <a:ea typeface="Calibri" charset="0"/>
-                        <a:cs typeface="Calibri" charset="0"/>
-                      </a:endParaRPr>
-                    </a:p>
-                  </a:txBody>
-                  <a:tcPr marL="91440" marR="91440" marT="45720" marB="45720">
-                    <a:lnL w="2540" cap="flat" cmpd="sng" algn="ctr">
-                      <a:solidFill>
-                        <a:srgbClr val="EEEEEE"/>
-                      </a:solidFill>
-                      <a:prstDash val="solid"/>
-                      <a:round/>
-                      <a:headEnd type="none" w="med" len="med"/>
-                      <a:tailEnd type="none" w="med" len="med"/>
-                    </a:lnL>
-                    <a:lnR w="2540" cap="flat" cmpd="sng" algn="ctr">
-                      <a:solidFill>
-                        <a:srgbClr val="EEEEEE"/>
-                      </a:solidFill>
-                      <a:prstDash val="solid"/>
-                      <a:round/>
-                      <a:headEnd type="none" w="med" len="med"/>
-                      <a:tailEnd type="none" w="med" len="med"/>
-                    </a:lnR>
-                    <a:lnT w="2540" cap="flat" cmpd="sng" algn="ctr">
-                      <a:solidFill>
-                        <a:srgbClr val="EEEEEE"/>
-                      </a:solidFill>
-                      <a:prstDash val="solid"/>
-                      <a:round/>
-                      <a:headEnd type="none" w="med" len="med"/>
-                      <a:tailEnd type="none" w="med" len="med"/>
-                    </a:lnT>
-                    <a:lnB w="2540" cap="flat" cmpd="sng" algn="ctr">
-                      <a:solidFill>
-                        <a:srgbClr val="EEEEEE"/>
-                      </a:solidFill>
-                      <a:prstDash val="solid"/>
-                      <a:round/>
-                      <a:headEnd type="none" w="med" len="med"/>
-                      <a:tailEnd type="none" w="med" len="med"/>
-                    </a:lnB>
-                  </a:tcPr>
-                </a:tc>
-                <a:tc>
-                  <a:txBody>
-                    <a:bodyPr/>
-                    <a:lstStyle/>
-                    <a:p>
-                      <a:pPr algn="ctr" indent="0" marL="0">
-                        <a:buNone/>
-                      </a:pPr>
-                      <a:r>
-                        <a:rPr lang="en-US" sz="500" dirty="0">
-                          <a:solidFill>
-                            <a:srgbClr val="777777"/>
-                          </a:solidFill>
-                          <a:latin typeface="Calibri" pitchFamily="34" charset="0"/>
-                          <a:ea typeface="Calibri" pitchFamily="34" charset="-122"/>
-                          <a:cs typeface="Calibri" pitchFamily="34" charset="-120"/>
-                        </a:rPr>
-                        <a:t>0.04%</a:t>
+                        <a:t>0.03%</a:t>
                       </a:r>
                       <a:endParaRPr lang="en-US" sz="500" dirty="0">
                         <a:latin typeface="Calibri" charset="0"/>
@@ -12863,7 +14339,7 @@
                           <a:ea typeface="Calibri" pitchFamily="34" charset="-122"/>
                           <a:cs typeface="Calibri" pitchFamily="34" charset="-120"/>
                         </a:rPr>
-                        <a:t>0.00%</a:t>
+                        <a:t>0.17%</a:t>
                       </a:r>
                       <a:endParaRPr lang="en-US" sz="500" dirty="0">
                         <a:latin typeface="Calibri" charset="0"/>
@@ -13578,7 +15054,7 @@
                           <a:ea typeface="Calibri" pitchFamily="34" charset="-122"/>
                           <a:cs typeface="Calibri" pitchFamily="34" charset="-120"/>
                         </a:rPr>
-                        <a:t>0.89%</a:t>
+                        <a:t>0.01%</a:t>
                       </a:r>
                       <a:endParaRPr lang="en-US" sz="500" dirty="0">
                         <a:latin typeface="Calibri" charset="0"/>
@@ -13643,7 +15119,7 @@
                           <a:ea typeface="Calibri" pitchFamily="34" charset="-122"/>
                           <a:cs typeface="Calibri" pitchFamily="34" charset="-120"/>
                         </a:rPr>
-                        <a:t>1.61%</a:t>
+                        <a:t>0.50%</a:t>
                       </a:r>
                       <a:endParaRPr lang="en-US" sz="500" dirty="0">
                         <a:latin typeface="Calibri" charset="0"/>
@@ -14806,7 +16282,7 @@
                           <a:ea typeface="Calibri" pitchFamily="34" charset="-122"/>
                           <a:cs typeface="Calibri" pitchFamily="34" charset="-120"/>
                         </a:rPr>
-                        <a:t>0.04%</a:t>
+                        <a:t>0.03%</a:t>
                       </a:r>
                       <a:endParaRPr lang="en-US" sz="500" dirty="0">
                         <a:latin typeface="Calibri" charset="0"/>
@@ -14871,7 +16347,7 @@
                           <a:ea typeface="Calibri" pitchFamily="34" charset="-122"/>
                           <a:cs typeface="Calibri" pitchFamily="34" charset="-120"/>
                         </a:rPr>
-                        <a:t>0.04%</a:t>
+                        <a:t>0.02%</a:t>
                       </a:r>
                       <a:endParaRPr lang="en-US" sz="500" dirty="0">
                         <a:latin typeface="Calibri" charset="0"/>
@@ -14936,7 +16412,7 @@
                           <a:ea typeface="Calibri" pitchFamily="34" charset="-122"/>
                           <a:cs typeface="Calibri" pitchFamily="34" charset="-120"/>
                         </a:rPr>
-                        <a:t>0.04%</a:t>
+                        <a:t>0.03%</a:t>
                       </a:r>
                       <a:endParaRPr lang="en-US" sz="500" dirty="0">
                         <a:latin typeface="Calibri" charset="0"/>
@@ -15001,7 +16477,7 @@
                           <a:ea typeface="Calibri" pitchFamily="34" charset="-122"/>
                           <a:cs typeface="Calibri" pitchFamily="34" charset="-120"/>
                         </a:rPr>
-                        <a:t>0.04%</a:t>
+                        <a:t>0.03%</a:t>
                       </a:r>
                       <a:endParaRPr lang="en-US" sz="500" dirty="0">
                         <a:latin typeface="Calibri" charset="0"/>
@@ -15066,7 +16542,7 @@
                           <a:ea typeface="Calibri" pitchFamily="34" charset="-122"/>
                           <a:cs typeface="Calibri" pitchFamily="34" charset="-120"/>
                         </a:rPr>
-                        <a:t>0.04%</a:t>
+                        <a:t>0.02%</a:t>
                       </a:r>
                       <a:endParaRPr lang="en-US" sz="500" dirty="0">
                         <a:latin typeface="Calibri" charset="0"/>
@@ -15131,7 +16607,7 @@
                           <a:ea typeface="Calibri" pitchFamily="34" charset="-122"/>
                           <a:cs typeface="Calibri" pitchFamily="34" charset="-120"/>
                         </a:rPr>
-                        <a:t>0.04%</a:t>
+                        <a:t>0.03%</a:t>
                       </a:r>
                       <a:endParaRPr lang="en-US" sz="500" dirty="0">
                         <a:latin typeface="Calibri" charset="0"/>
@@ -15391,7 +16867,7 @@
                           <a:ea typeface="Calibri" pitchFamily="34" charset="-122"/>
                           <a:cs typeface="Calibri" pitchFamily="34" charset="-120"/>
                         </a:rPr>
-                        <a:t>0.19%</a:t>
+                        <a:t>0.21%</a:t>
                       </a:r>
                       <a:endParaRPr lang="en-US" sz="500" dirty="0">
                         <a:latin typeface="Calibri" charset="0"/>
@@ -15456,7 +16932,7 @@
                           <a:ea typeface="Calibri" pitchFamily="34" charset="-122"/>
                           <a:cs typeface="Calibri" pitchFamily="34" charset="-120"/>
                         </a:rPr>
-                        <a:t>0.23%</a:t>
+                        <a:t>0.21%</a:t>
                       </a:r>
                       <a:endParaRPr lang="en-US" sz="500" dirty="0">
                         <a:latin typeface="Calibri" charset="0"/>
@@ -15521,7 +16997,7 @@
                           <a:ea typeface="Calibri" pitchFamily="34" charset="-122"/>
                           <a:cs typeface="Calibri" pitchFamily="34" charset="-120"/>
                         </a:rPr>
-                        <a:t>0.29%</a:t>
+                        <a:t>0.32%</a:t>
                       </a:r>
                       <a:endParaRPr lang="en-US" sz="500" dirty="0">
                         <a:latin typeface="Calibri" charset="0"/>
@@ -15586,7 +17062,7 @@
                           <a:ea typeface="Calibri" pitchFamily="34" charset="-122"/>
                           <a:cs typeface="Calibri" pitchFamily="34" charset="-120"/>
                         </a:rPr>
-                        <a:t>1.20%</a:t>
+                        <a:t>1.14%</a:t>
                       </a:r>
                       <a:endParaRPr lang="en-US" sz="500" dirty="0">
                         <a:latin typeface="Calibri" charset="0"/>
@@ -15772,7 +17248,7 @@
                           <a:ea typeface="Calibri" pitchFamily="34" charset="-122"/>
                           <a:cs typeface="Calibri" pitchFamily="34" charset="-120"/>
                         </a:rPr>
-                        <a:t>0.00%</a:t>
+                        <a:t>0.01%</a:t>
                       </a:r>
                       <a:endParaRPr lang="en-US" sz="500" dirty="0">
                         <a:latin typeface="Calibri" charset="0"/>
@@ -16487,7 +17963,7 @@
                           <a:ea typeface="Calibri" pitchFamily="34" charset="-122"/>
                           <a:cs typeface="Calibri" pitchFamily="34" charset="-120"/>
                         </a:rPr>
-                        <a:t>0.60%</a:t>
+                        <a:t>0.18%</a:t>
                       </a:r>
                       <a:endParaRPr lang="en-US" sz="500" dirty="0">
                         <a:latin typeface="Calibri" charset="0"/>
@@ -16552,7 +18028,7 @@
                           <a:ea typeface="Calibri" pitchFamily="34" charset="-122"/>
                           <a:cs typeface="Calibri" pitchFamily="34" charset="-120"/>
                         </a:rPr>
-                        <a:t>0.85%</a:t>
+                        <a:t>0.45%</a:t>
                       </a:r>
                       <a:endParaRPr lang="en-US" sz="500" dirty="0">
                         <a:latin typeface="Calibri" charset="0"/>
@@ -17518,7 +18994,7 @@
                           <a:ea typeface="Calibri" pitchFamily="34" charset="-122"/>
                           <a:cs typeface="Calibri" pitchFamily="34" charset="-120"/>
                         </a:rPr>
-                        <a:t>1.55%</a:t>
+                        <a:t>1.57%</a:t>
                       </a:r>
                       <a:endParaRPr lang="en-US" sz="500" dirty="0">
                         <a:latin typeface="Calibri" charset="0"/>
@@ -17715,7 +19191,7 @@
                           <a:ea typeface="Calibri" pitchFamily="34" charset="-122"/>
                           <a:cs typeface="Calibri" pitchFamily="34" charset="-120"/>
                         </a:rPr>
-                        <a:t>0.35%</a:t>
+                        <a:t>0.34%</a:t>
                       </a:r>
                       <a:endParaRPr lang="en-US" sz="500" dirty="0">
                         <a:latin typeface="Calibri" charset="0"/>
@@ -17780,7 +19256,7 @@
                           <a:ea typeface="Calibri" pitchFamily="34" charset="-122"/>
                           <a:cs typeface="Calibri" pitchFamily="34" charset="-120"/>
                         </a:rPr>
-                        <a:t>0.46%</a:t>
+                        <a:t>0.43%</a:t>
                       </a:r>
                       <a:endParaRPr lang="en-US" sz="500" dirty="0">
                         <a:latin typeface="Calibri" charset="0"/>
@@ -17845,7 +19321,7 @@
                           <a:ea typeface="Calibri" pitchFamily="34" charset="-122"/>
                           <a:cs typeface="Calibri" pitchFamily="34" charset="-120"/>
                         </a:rPr>
-                        <a:t>0.47%</a:t>
+                        <a:t>0.48%</a:t>
                       </a:r>
                       <a:endParaRPr lang="en-US" sz="500" dirty="0">
                         <a:latin typeface="Calibri" charset="0"/>
@@ -17910,7 +19386,7 @@
                           <a:ea typeface="Calibri" pitchFamily="34" charset="-122"/>
                           <a:cs typeface="Calibri" pitchFamily="34" charset="-120"/>
                         </a:rPr>
-                        <a:t>0.58%</a:t>
+                        <a:t>0.55%</a:t>
                       </a:r>
                       <a:endParaRPr lang="en-US" sz="500" dirty="0">
                         <a:latin typeface="Calibri" charset="0"/>
@@ -17975,7 +19451,7 @@
                           <a:ea typeface="Calibri" pitchFamily="34" charset="-122"/>
                           <a:cs typeface="Calibri" pitchFamily="34" charset="-120"/>
                         </a:rPr>
-                        <a:t>0.67%</a:t>
+                        <a:t>0.71%</a:t>
                       </a:r>
                       <a:endParaRPr lang="en-US" sz="500" dirty="0">
                         <a:latin typeface="Calibri" charset="0"/>
@@ -18040,7 +19516,7 @@
                           <a:ea typeface="Calibri" pitchFamily="34" charset="-122"/>
                           <a:cs typeface="Calibri" pitchFamily="34" charset="-120"/>
                         </a:rPr>
-                        <a:t>0.73%</a:t>
+                        <a:t>0.74%</a:t>
                       </a:r>
                       <a:endParaRPr lang="en-US" sz="500" dirty="0">
                         <a:latin typeface="Calibri" charset="0"/>
@@ -18105,7 +19581,7 @@
                           <a:ea typeface="Calibri" pitchFamily="34" charset="-122"/>
                           <a:cs typeface="Calibri" pitchFamily="34" charset="-120"/>
                         </a:rPr>
-                        <a:t>0.79%</a:t>
+                        <a:t>0.76%</a:t>
                       </a:r>
                       <a:endParaRPr lang="en-US" sz="500" dirty="0">
                         <a:latin typeface="Calibri" charset="0"/>
@@ -18170,7 +19646,7 @@
                           <a:ea typeface="Calibri" pitchFamily="34" charset="-122"/>
                           <a:cs typeface="Calibri" pitchFamily="34" charset="-120"/>
                         </a:rPr>
-                        <a:t>0.81%</a:t>
+                        <a:t>0.90%</a:t>
                       </a:r>
                       <a:endParaRPr lang="en-US" sz="500" dirty="0">
                         <a:latin typeface="Calibri" charset="0"/>
@@ -18300,7 +19776,7 @@
                           <a:ea typeface="Calibri" pitchFamily="34" charset="-122"/>
                           <a:cs typeface="Calibri" pitchFamily="34" charset="-120"/>
                         </a:rPr>
-                        <a:t>0.92%</a:t>
+                        <a:t>0.86%</a:t>
                       </a:r>
                       <a:endParaRPr lang="en-US" sz="500" dirty="0">
                         <a:latin typeface="Calibri" charset="0"/>
@@ -18365,6 +19841,71 @@
                           <a:ea typeface="Calibri" pitchFamily="34" charset="-122"/>
                           <a:cs typeface="Calibri" pitchFamily="34" charset="-120"/>
                         </a:rPr>
+                        <a:t>1.04%</a:t>
+                      </a:r>
+                      <a:endParaRPr lang="en-US" sz="500" dirty="0">
+                        <a:latin typeface="Calibri" charset="0"/>
+                        <a:ea typeface="Calibri" charset="0"/>
+                        <a:cs typeface="Calibri" charset="0"/>
+                      </a:endParaRPr>
+                    </a:p>
+                  </a:txBody>
+                  <a:tcPr marL="91440" marR="91440" marT="45720" marB="45720">
+                    <a:lnL w="2540" cap="flat" cmpd="sng" algn="ctr">
+                      <a:solidFill>
+                        <a:srgbClr val="EEEEEE"/>
+                      </a:solidFill>
+                      <a:prstDash val="solid"/>
+                      <a:round/>
+                      <a:headEnd type="none" w="med" len="med"/>
+                      <a:tailEnd type="none" w="med" len="med"/>
+                    </a:lnL>
+                    <a:lnR w="2540" cap="flat" cmpd="sng" algn="ctr">
+                      <a:solidFill>
+                        <a:srgbClr val="EEEEEE"/>
+                      </a:solidFill>
+                      <a:prstDash val="solid"/>
+                      <a:round/>
+                      <a:headEnd type="none" w="med" len="med"/>
+                      <a:tailEnd type="none" w="med" len="med"/>
+                    </a:lnR>
+                    <a:lnT w="2540" cap="flat" cmpd="sng" algn="ctr">
+                      <a:solidFill>
+                        <a:srgbClr val="EEEEEE"/>
+                      </a:solidFill>
+                      <a:prstDash val="solid"/>
+                      <a:round/>
+                      <a:headEnd type="none" w="med" len="med"/>
+                      <a:tailEnd type="none" w="med" len="med"/>
+                    </a:lnT>
+                    <a:lnB w="2540" cap="flat" cmpd="sng" algn="ctr">
+                      <a:solidFill>
+                        <a:srgbClr val="EEEEEE"/>
+                      </a:solidFill>
+                      <a:prstDash val="solid"/>
+                      <a:round/>
+                      <a:headEnd type="none" w="med" len="med"/>
+                      <a:tailEnd type="none" w="med" len="med"/>
+                    </a:lnB>
+                  </a:tcPr>
+                </a:tc>
+                <a:tc>
+                  <a:txBody>
+                    <a:bodyPr/>
+                    <a:lstStyle/>
+                    <a:p>
+                      <a:pPr algn="ctr" indent="0" marL="0">
+                        <a:buNone/>
+                      </a:pPr>
+                      <a:r>
+                        <a:rPr lang="en-US" sz="500" dirty="0">
+                          <a:solidFill>
+                            <a:srgbClr val="777777"/>
+                          </a:solidFill>
+                          <a:latin typeface="Calibri" pitchFamily="34" charset="0"/>
+                          <a:ea typeface="Calibri" pitchFamily="34" charset="-122"/>
+                          <a:cs typeface="Calibri" pitchFamily="34" charset="-120"/>
+                        </a:rPr>
                         <a:t>0.94%</a:t>
                       </a:r>
                       <a:endParaRPr lang="en-US" sz="500" dirty="0">
@@ -18422,7 +19963,7 @@
                         <a:buNone/>
                       </a:pPr>
                       <a:r>
-                        <a:rPr lang="en-US" sz="500" dirty="0">
+                        <a:rPr lang="en-US" sz="500" b="1" dirty="0">
                           <a:solidFill>
                             <a:srgbClr val="777777"/>
                           </a:solidFill>
@@ -18430,72 +19971,7 @@
                           <a:ea typeface="Calibri" pitchFamily="34" charset="-122"/>
                           <a:cs typeface="Calibri" pitchFamily="34" charset="-120"/>
                         </a:rPr>
-                        <a:t>0.94%</a:t>
-                      </a:r>
-                      <a:endParaRPr lang="en-US" sz="500" dirty="0">
-                        <a:latin typeface="Calibri" charset="0"/>
-                        <a:ea typeface="Calibri" charset="0"/>
-                        <a:cs typeface="Calibri" charset="0"/>
-                      </a:endParaRPr>
-                    </a:p>
-                  </a:txBody>
-                  <a:tcPr marL="91440" marR="91440" marT="45720" marB="45720">
-                    <a:lnL w="2540" cap="flat" cmpd="sng" algn="ctr">
-                      <a:solidFill>
-                        <a:srgbClr val="EEEEEE"/>
-                      </a:solidFill>
-                      <a:prstDash val="solid"/>
-                      <a:round/>
-                      <a:headEnd type="none" w="med" len="med"/>
-                      <a:tailEnd type="none" w="med" len="med"/>
-                    </a:lnL>
-                    <a:lnR w="2540" cap="flat" cmpd="sng" algn="ctr">
-                      <a:solidFill>
-                        <a:srgbClr val="EEEEEE"/>
-                      </a:solidFill>
-                      <a:prstDash val="solid"/>
-                      <a:round/>
-                      <a:headEnd type="none" w="med" len="med"/>
-                      <a:tailEnd type="none" w="med" len="med"/>
-                    </a:lnR>
-                    <a:lnT w="2540" cap="flat" cmpd="sng" algn="ctr">
-                      <a:solidFill>
-                        <a:srgbClr val="EEEEEE"/>
-                      </a:solidFill>
-                      <a:prstDash val="solid"/>
-                      <a:round/>
-                      <a:headEnd type="none" w="med" len="med"/>
-                      <a:tailEnd type="none" w="med" len="med"/>
-                    </a:lnT>
-                    <a:lnB w="2540" cap="flat" cmpd="sng" algn="ctr">
-                      <a:solidFill>
-                        <a:srgbClr val="EEEEEE"/>
-                      </a:solidFill>
-                      <a:prstDash val="solid"/>
-                      <a:round/>
-                      <a:headEnd type="none" w="med" len="med"/>
-                      <a:tailEnd type="none" w="med" len="med"/>
-                    </a:lnB>
-                  </a:tcPr>
-                </a:tc>
-                <a:tc>
-                  <a:txBody>
-                    <a:bodyPr/>
-                    <a:lstStyle/>
-                    <a:p>
-                      <a:pPr algn="ctr" indent="0" marL="0">
-                        <a:buNone/>
-                      </a:pPr>
-                      <a:r>
-                        <a:rPr lang="en-US" sz="500" b="1" dirty="0">
-                          <a:solidFill>
-                            <a:srgbClr val="777777"/>
-                          </a:solidFill>
-                          <a:latin typeface="Calibri" pitchFamily="34" charset="0"/>
-                          <a:ea typeface="Calibri" pitchFamily="34" charset="-122"/>
-                          <a:cs typeface="Calibri" pitchFamily="34" charset="-120"/>
-                        </a:rPr>
-                        <a:t>8.88%</a:t>
+                        <a:t>8.97%</a:t>
                       </a:r>
                       <a:endParaRPr lang="en-US" sz="500" dirty="0">
                         <a:latin typeface="Calibri" charset="0"/>
@@ -18681,7 +20157,7 @@
                           <a:ea typeface="Calibri" pitchFamily="34" charset="-122"/>
                           <a:cs typeface="Calibri" pitchFamily="34" charset="-120"/>
                         </a:rPr>
-                        <a:t>0.00%</a:t>
+                        <a:t>0.25%</a:t>
                       </a:r>
                       <a:endParaRPr lang="en-US" sz="500" dirty="0">
                         <a:latin typeface="Calibri" charset="0"/>
@@ -19396,7 +20872,7 @@
                           <a:ea typeface="Calibri" pitchFamily="34" charset="-122"/>
                           <a:cs typeface="Calibri" pitchFamily="34" charset="-120"/>
                         </a:rPr>
-                        <a:t>8.43%</a:t>
+                        <a:t>0.79%</a:t>
                       </a:r>
                       <a:endParaRPr lang="en-US" sz="500" dirty="0">
                         <a:latin typeface="Calibri" charset="0"/>
@@ -19461,7 +20937,7 @@
                           <a:ea typeface="Calibri" pitchFamily="34" charset="-122"/>
                           <a:cs typeface="Calibri" pitchFamily="34" charset="-120"/>
                         </a:rPr>
-                        <a:t>15.02%</a:t>
+                        <a:t>6.43%</a:t>
                       </a:r>
                       <a:endParaRPr lang="en-US" sz="500" dirty="0">
                         <a:latin typeface="Calibri" charset="0"/>
@@ -20427,7 +21903,7 @@
                           <a:ea typeface="Calibri" pitchFamily="34" charset="-122"/>
                           <a:cs typeface="Calibri" pitchFamily="34" charset="-120"/>
                         </a:rPr>
-                        <a:t>8.86%</a:t>
+                        <a:t>7.90%</a:t>
                       </a:r>
                       <a:endParaRPr lang="en-US" sz="500" dirty="0">
                         <a:latin typeface="Calibri" charset="0"/>
@@ -20624,6 +22100,331 @@
                           <a:ea typeface="Calibri" pitchFamily="34" charset="-122"/>
                           <a:cs typeface="Calibri" pitchFamily="34" charset="-120"/>
                         </a:rPr>
+                        <a:t>1.00%</a:t>
+                      </a:r>
+                      <a:endParaRPr lang="en-US" sz="500" dirty="0">
+                        <a:latin typeface="Calibri" charset="0"/>
+                        <a:ea typeface="Calibri" charset="0"/>
+                        <a:cs typeface="Calibri" charset="0"/>
+                      </a:endParaRPr>
+                    </a:p>
+                  </a:txBody>
+                  <a:tcPr marL="91440" marR="91440" marT="45720" marB="45720">
+                    <a:lnL w="2540" cap="flat" cmpd="sng" algn="ctr">
+                      <a:solidFill>
+                        <a:srgbClr val="EEEEEE"/>
+                      </a:solidFill>
+                      <a:prstDash val="solid"/>
+                      <a:round/>
+                      <a:headEnd type="none" w="med" len="med"/>
+                      <a:tailEnd type="none" w="med" len="med"/>
+                    </a:lnL>
+                    <a:lnR w="2540" cap="flat" cmpd="sng" algn="ctr">
+                      <a:solidFill>
+                        <a:srgbClr val="EEEEEE"/>
+                      </a:solidFill>
+                      <a:prstDash val="solid"/>
+                      <a:round/>
+                      <a:headEnd type="none" w="med" len="med"/>
+                      <a:tailEnd type="none" w="med" len="med"/>
+                    </a:lnR>
+                    <a:lnT w="2540" cap="flat" cmpd="sng" algn="ctr">
+                      <a:solidFill>
+                        <a:srgbClr val="EEEEEE"/>
+                      </a:solidFill>
+                      <a:prstDash val="solid"/>
+                      <a:round/>
+                      <a:headEnd type="none" w="med" len="med"/>
+                      <a:tailEnd type="none" w="med" len="med"/>
+                    </a:lnT>
+                    <a:lnB w="2540" cap="flat" cmpd="sng" algn="ctr">
+                      <a:solidFill>
+                        <a:srgbClr val="EEEEEE"/>
+                      </a:solidFill>
+                      <a:prstDash val="solid"/>
+                      <a:round/>
+                      <a:headEnd type="none" w="med" len="med"/>
+                      <a:tailEnd type="none" w="med" len="med"/>
+                    </a:lnB>
+                  </a:tcPr>
+                </a:tc>
+                <a:tc>
+                  <a:txBody>
+                    <a:bodyPr/>
+                    <a:lstStyle/>
+                    <a:p>
+                      <a:pPr algn="ctr" indent="0" marL="0">
+                        <a:buNone/>
+                      </a:pPr>
+                      <a:r>
+                        <a:rPr lang="en-US" sz="500" dirty="0">
+                          <a:solidFill>
+                            <a:srgbClr val="777777"/>
+                          </a:solidFill>
+                          <a:latin typeface="Calibri" pitchFamily="34" charset="0"/>
+                          <a:ea typeface="Calibri" pitchFamily="34" charset="-122"/>
+                          <a:cs typeface="Calibri" pitchFamily="34" charset="-120"/>
+                        </a:rPr>
+                        <a:t>0.88%</a:t>
+                      </a:r>
+                      <a:endParaRPr lang="en-US" sz="500" dirty="0">
+                        <a:latin typeface="Calibri" charset="0"/>
+                        <a:ea typeface="Calibri" charset="0"/>
+                        <a:cs typeface="Calibri" charset="0"/>
+                      </a:endParaRPr>
+                    </a:p>
+                  </a:txBody>
+                  <a:tcPr marL="91440" marR="91440" marT="45720" marB="45720">
+                    <a:lnL w="2540" cap="flat" cmpd="sng" algn="ctr">
+                      <a:solidFill>
+                        <a:srgbClr val="EEEEEE"/>
+                      </a:solidFill>
+                      <a:prstDash val="solid"/>
+                      <a:round/>
+                      <a:headEnd type="none" w="med" len="med"/>
+                      <a:tailEnd type="none" w="med" len="med"/>
+                    </a:lnL>
+                    <a:lnR w="2540" cap="flat" cmpd="sng" algn="ctr">
+                      <a:solidFill>
+                        <a:srgbClr val="EEEEEE"/>
+                      </a:solidFill>
+                      <a:prstDash val="solid"/>
+                      <a:round/>
+                      <a:headEnd type="none" w="med" len="med"/>
+                      <a:tailEnd type="none" w="med" len="med"/>
+                    </a:lnR>
+                    <a:lnT w="2540" cap="flat" cmpd="sng" algn="ctr">
+                      <a:solidFill>
+                        <a:srgbClr val="EEEEEE"/>
+                      </a:solidFill>
+                      <a:prstDash val="solid"/>
+                      <a:round/>
+                      <a:headEnd type="none" w="med" len="med"/>
+                      <a:tailEnd type="none" w="med" len="med"/>
+                    </a:lnT>
+                    <a:lnB w="2540" cap="flat" cmpd="sng" algn="ctr">
+                      <a:solidFill>
+                        <a:srgbClr val="EEEEEE"/>
+                      </a:solidFill>
+                      <a:prstDash val="solid"/>
+                      <a:round/>
+                      <a:headEnd type="none" w="med" len="med"/>
+                      <a:tailEnd type="none" w="med" len="med"/>
+                    </a:lnB>
+                  </a:tcPr>
+                </a:tc>
+                <a:tc>
+                  <a:txBody>
+                    <a:bodyPr/>
+                    <a:lstStyle/>
+                    <a:p>
+                      <a:pPr algn="ctr" indent="0" marL="0">
+                        <a:buNone/>
+                      </a:pPr>
+                      <a:r>
+                        <a:rPr lang="en-US" sz="500" dirty="0">
+                          <a:solidFill>
+                            <a:srgbClr val="777777"/>
+                          </a:solidFill>
+                          <a:latin typeface="Calibri" pitchFamily="34" charset="0"/>
+                          <a:ea typeface="Calibri" pitchFamily="34" charset="-122"/>
+                          <a:cs typeface="Calibri" pitchFamily="34" charset="-120"/>
+                        </a:rPr>
+                        <a:t>0.97%</a:t>
+                      </a:r>
+                      <a:endParaRPr lang="en-US" sz="500" dirty="0">
+                        <a:latin typeface="Calibri" charset="0"/>
+                        <a:ea typeface="Calibri" charset="0"/>
+                        <a:cs typeface="Calibri" charset="0"/>
+                      </a:endParaRPr>
+                    </a:p>
+                  </a:txBody>
+                  <a:tcPr marL="91440" marR="91440" marT="45720" marB="45720">
+                    <a:lnL w="2540" cap="flat" cmpd="sng" algn="ctr">
+                      <a:solidFill>
+                        <a:srgbClr val="EEEEEE"/>
+                      </a:solidFill>
+                      <a:prstDash val="solid"/>
+                      <a:round/>
+                      <a:headEnd type="none" w="med" len="med"/>
+                      <a:tailEnd type="none" w="med" len="med"/>
+                    </a:lnL>
+                    <a:lnR w="2540" cap="flat" cmpd="sng" algn="ctr">
+                      <a:solidFill>
+                        <a:srgbClr val="EEEEEE"/>
+                      </a:solidFill>
+                      <a:prstDash val="solid"/>
+                      <a:round/>
+                      <a:headEnd type="none" w="med" len="med"/>
+                      <a:tailEnd type="none" w="med" len="med"/>
+                    </a:lnR>
+                    <a:lnT w="2540" cap="flat" cmpd="sng" algn="ctr">
+                      <a:solidFill>
+                        <a:srgbClr val="EEEEEE"/>
+                      </a:solidFill>
+                      <a:prstDash val="solid"/>
+                      <a:round/>
+                      <a:headEnd type="none" w="med" len="med"/>
+                      <a:tailEnd type="none" w="med" len="med"/>
+                    </a:lnT>
+                    <a:lnB w="2540" cap="flat" cmpd="sng" algn="ctr">
+                      <a:solidFill>
+                        <a:srgbClr val="EEEEEE"/>
+                      </a:solidFill>
+                      <a:prstDash val="solid"/>
+                      <a:round/>
+                      <a:headEnd type="none" w="med" len="med"/>
+                      <a:tailEnd type="none" w="med" len="med"/>
+                    </a:lnB>
+                  </a:tcPr>
+                </a:tc>
+                <a:tc>
+                  <a:txBody>
+                    <a:bodyPr/>
+                    <a:lstStyle/>
+                    <a:p>
+                      <a:pPr algn="ctr" indent="0" marL="0">
+                        <a:buNone/>
+                      </a:pPr>
+                      <a:r>
+                        <a:rPr lang="en-US" sz="500" dirty="0">
+                          <a:solidFill>
+                            <a:srgbClr val="777777"/>
+                          </a:solidFill>
+                          <a:latin typeface="Calibri" pitchFamily="34" charset="0"/>
+                          <a:ea typeface="Calibri" pitchFamily="34" charset="-122"/>
+                          <a:cs typeface="Calibri" pitchFamily="34" charset="-120"/>
+                        </a:rPr>
+                        <a:t>0.88%</a:t>
+                      </a:r>
+                      <a:endParaRPr lang="en-US" sz="500" dirty="0">
+                        <a:latin typeface="Calibri" charset="0"/>
+                        <a:ea typeface="Calibri" charset="0"/>
+                        <a:cs typeface="Calibri" charset="0"/>
+                      </a:endParaRPr>
+                    </a:p>
+                  </a:txBody>
+                  <a:tcPr marL="91440" marR="91440" marT="45720" marB="45720">
+                    <a:lnL w="2540" cap="flat" cmpd="sng" algn="ctr">
+                      <a:solidFill>
+                        <a:srgbClr val="EEEEEE"/>
+                      </a:solidFill>
+                      <a:prstDash val="solid"/>
+                      <a:round/>
+                      <a:headEnd type="none" w="med" len="med"/>
+                      <a:tailEnd type="none" w="med" len="med"/>
+                    </a:lnL>
+                    <a:lnR w="2540" cap="flat" cmpd="sng" algn="ctr">
+                      <a:solidFill>
+                        <a:srgbClr val="EEEEEE"/>
+                      </a:solidFill>
+                      <a:prstDash val="solid"/>
+                      <a:round/>
+                      <a:headEnd type="none" w="med" len="med"/>
+                      <a:tailEnd type="none" w="med" len="med"/>
+                    </a:lnR>
+                    <a:lnT w="2540" cap="flat" cmpd="sng" algn="ctr">
+                      <a:solidFill>
+                        <a:srgbClr val="EEEEEE"/>
+                      </a:solidFill>
+                      <a:prstDash val="solid"/>
+                      <a:round/>
+                      <a:headEnd type="none" w="med" len="med"/>
+                      <a:tailEnd type="none" w="med" len="med"/>
+                    </a:lnT>
+                    <a:lnB w="2540" cap="flat" cmpd="sng" algn="ctr">
+                      <a:solidFill>
+                        <a:srgbClr val="EEEEEE"/>
+                      </a:solidFill>
+                      <a:prstDash val="solid"/>
+                      <a:round/>
+                      <a:headEnd type="none" w="med" len="med"/>
+                      <a:tailEnd type="none" w="med" len="med"/>
+                    </a:lnB>
+                  </a:tcPr>
+                </a:tc>
+                <a:tc>
+                  <a:txBody>
+                    <a:bodyPr/>
+                    <a:lstStyle/>
+                    <a:p>
+                      <a:pPr algn="ctr" indent="0" marL="0">
+                        <a:buNone/>
+                      </a:pPr>
+                      <a:r>
+                        <a:rPr lang="en-US" sz="500" dirty="0">
+                          <a:solidFill>
+                            <a:srgbClr val="777777"/>
+                          </a:solidFill>
+                          <a:latin typeface="Calibri" pitchFamily="34" charset="0"/>
+                          <a:ea typeface="Calibri" pitchFamily="34" charset="-122"/>
+                          <a:cs typeface="Calibri" pitchFamily="34" charset="-120"/>
+                        </a:rPr>
+                        <a:t>1.04%</a:t>
+                      </a:r>
+                      <a:endParaRPr lang="en-US" sz="500" dirty="0">
+                        <a:latin typeface="Calibri" charset="0"/>
+                        <a:ea typeface="Calibri" charset="0"/>
+                        <a:cs typeface="Calibri" charset="0"/>
+                      </a:endParaRPr>
+                    </a:p>
+                  </a:txBody>
+                  <a:tcPr marL="91440" marR="91440" marT="45720" marB="45720">
+                    <a:lnL w="2540" cap="flat" cmpd="sng" algn="ctr">
+                      <a:solidFill>
+                        <a:srgbClr val="EEEEEE"/>
+                      </a:solidFill>
+                      <a:prstDash val="solid"/>
+                      <a:round/>
+                      <a:headEnd type="none" w="med" len="med"/>
+                      <a:tailEnd type="none" w="med" len="med"/>
+                    </a:lnL>
+                    <a:lnR w="2540" cap="flat" cmpd="sng" algn="ctr">
+                      <a:solidFill>
+                        <a:srgbClr val="EEEEEE"/>
+                      </a:solidFill>
+                      <a:prstDash val="solid"/>
+                      <a:round/>
+                      <a:headEnd type="none" w="med" len="med"/>
+                      <a:tailEnd type="none" w="med" len="med"/>
+                    </a:lnR>
+                    <a:lnT w="2540" cap="flat" cmpd="sng" algn="ctr">
+                      <a:solidFill>
+                        <a:srgbClr val="EEEEEE"/>
+                      </a:solidFill>
+                      <a:prstDash val="solid"/>
+                      <a:round/>
+                      <a:headEnd type="none" w="med" len="med"/>
+                      <a:tailEnd type="none" w="med" len="med"/>
+                    </a:lnT>
+                    <a:lnB w="2540" cap="flat" cmpd="sng" algn="ctr">
+                      <a:solidFill>
+                        <a:srgbClr val="EEEEEE"/>
+                      </a:solidFill>
+                      <a:prstDash val="solid"/>
+                      <a:round/>
+                      <a:headEnd type="none" w="med" len="med"/>
+                      <a:tailEnd type="none" w="med" len="med"/>
+                    </a:lnB>
+                  </a:tcPr>
+                </a:tc>
+                <a:tc>
+                  <a:txBody>
+                    <a:bodyPr/>
+                    <a:lstStyle/>
+                    <a:p>
+                      <a:pPr algn="ctr" indent="0" marL="0">
+                        <a:buNone/>
+                      </a:pPr>
+                      <a:r>
+                        <a:rPr lang="en-US" sz="500" dirty="0">
+                          <a:solidFill>
+                            <a:srgbClr val="777777"/>
+                          </a:solidFill>
+                          <a:latin typeface="Calibri" pitchFamily="34" charset="0"/>
+                          <a:ea typeface="Calibri" pitchFamily="34" charset="-122"/>
+                          <a:cs typeface="Calibri" pitchFamily="34" charset="-120"/>
+                        </a:rPr>
                         <a:t>0.94%</a:t>
                       </a:r>
                       <a:endParaRPr lang="en-US" sz="500" dirty="0">
@@ -20689,7 +22490,7 @@
                           <a:ea typeface="Calibri" pitchFamily="34" charset="-122"/>
                           <a:cs typeface="Calibri" pitchFamily="34" charset="-120"/>
                         </a:rPr>
-                        <a:t>0.94%</a:t>
+                        <a:t>0.97%</a:t>
                       </a:r>
                       <a:endParaRPr lang="en-US" sz="500" dirty="0">
                         <a:latin typeface="Calibri" charset="0"/>
@@ -20754,7 +22555,7 @@
                           <a:ea typeface="Calibri" pitchFamily="34" charset="-122"/>
                           <a:cs typeface="Calibri" pitchFamily="34" charset="-120"/>
                         </a:rPr>
-                        <a:t>0.94%</a:t>
+                        <a:t>0.89%</a:t>
                       </a:r>
                       <a:endParaRPr lang="en-US" sz="500" dirty="0">
                         <a:latin typeface="Calibri" charset="0"/>
@@ -20819,7 +22620,7 @@
                           <a:ea typeface="Calibri" pitchFamily="34" charset="-122"/>
                           <a:cs typeface="Calibri" pitchFamily="34" charset="-120"/>
                         </a:rPr>
-                        <a:t>0.94%</a:t>
+                        <a:t>0.78%</a:t>
                       </a:r>
                       <a:endParaRPr lang="en-US" sz="500" dirty="0">
                         <a:latin typeface="Calibri" charset="0"/>
@@ -20884,7 +22685,7 @@
                           <a:ea typeface="Calibri" pitchFamily="34" charset="-122"/>
                           <a:cs typeface="Calibri" pitchFamily="34" charset="-120"/>
                         </a:rPr>
-                        <a:t>0.94%</a:t>
+                        <a:t>0.85%</a:t>
                       </a:r>
                       <a:endParaRPr lang="en-US" sz="500" dirty="0">
                         <a:latin typeface="Calibri" charset="0"/>
@@ -20949,7 +22750,7 @@
                           <a:ea typeface="Calibri" pitchFamily="34" charset="-122"/>
                           <a:cs typeface="Calibri" pitchFamily="34" charset="-120"/>
                         </a:rPr>
-                        <a:t>0.94%</a:t>
+                        <a:t>0.75%</a:t>
                       </a:r>
                       <a:endParaRPr lang="en-US" sz="500" dirty="0">
                         <a:latin typeface="Calibri" charset="0"/>
@@ -21014,64 +22815,64 @@
                           <a:ea typeface="Calibri" pitchFamily="34" charset="-122"/>
                           <a:cs typeface="Calibri" pitchFamily="34" charset="-120"/>
                         </a:rPr>
-                        <a:t>0.93%</a:t>
-                      </a:r>
-                      <a:endParaRPr lang="en-US" sz="500" dirty="0">
-                        <a:latin typeface="Calibri" charset="0"/>
-                        <a:ea typeface="Calibri" charset="0"/>
-                        <a:cs typeface="Calibri" charset="0"/>
-                      </a:endParaRPr>
-                    </a:p>
-                  </a:txBody>
-                  <a:tcPr marL="91440" marR="91440" marT="45720" marB="45720">
-                    <a:lnL w="2540" cap="flat" cmpd="sng" algn="ctr">
-                      <a:solidFill>
-                        <a:srgbClr val="EEEEEE"/>
-                      </a:solidFill>
-                      <a:prstDash val="solid"/>
-                      <a:round/>
-                      <a:headEnd type="none" w="med" len="med"/>
-                      <a:tailEnd type="none" w="med" len="med"/>
-                    </a:lnL>
-                    <a:lnR w="2540" cap="flat" cmpd="sng" algn="ctr">
-                      <a:solidFill>
-                        <a:srgbClr val="EEEEEE"/>
-                      </a:solidFill>
-                      <a:prstDash val="solid"/>
-                      <a:round/>
-                      <a:headEnd type="none" w="med" len="med"/>
-                      <a:tailEnd type="none" w="med" len="med"/>
-                    </a:lnR>
-                    <a:lnT w="2540" cap="flat" cmpd="sng" algn="ctr">
-                      <a:solidFill>
-                        <a:srgbClr val="EEEEEE"/>
-                      </a:solidFill>
-                      <a:prstDash val="solid"/>
-                      <a:round/>
-                      <a:headEnd type="none" w="med" len="med"/>
-                      <a:tailEnd type="none" w="med" len="med"/>
-                    </a:lnT>
-                    <a:lnB w="2540" cap="flat" cmpd="sng" algn="ctr">
-                      <a:solidFill>
-                        <a:srgbClr val="EEEEEE"/>
-                      </a:solidFill>
-                      <a:prstDash val="solid"/>
-                      <a:round/>
-                      <a:headEnd type="none" w="med" len="med"/>
-                      <a:tailEnd type="none" w="med" len="med"/>
-                    </a:lnB>
-                  </a:tcPr>
-                </a:tc>
-                <a:tc>
-                  <a:txBody>
-                    <a:bodyPr/>
-                    <a:lstStyle/>
-                    <a:p>
-                      <a:pPr algn="ctr" indent="0" marL="0">
-                        <a:buNone/>
-                      </a:pPr>
-                      <a:r>
-                        <a:rPr lang="en-US" sz="500" dirty="0">
+                        <a:t>0.71%</a:t>
+                      </a:r>
+                      <a:endParaRPr lang="en-US" sz="500" dirty="0">
+                        <a:latin typeface="Calibri" charset="0"/>
+                        <a:ea typeface="Calibri" charset="0"/>
+                        <a:cs typeface="Calibri" charset="0"/>
+                      </a:endParaRPr>
+                    </a:p>
+                  </a:txBody>
+                  <a:tcPr marL="91440" marR="91440" marT="45720" marB="45720">
+                    <a:lnL w="2540" cap="flat" cmpd="sng" algn="ctr">
+                      <a:solidFill>
+                        <a:srgbClr val="EEEEEE"/>
+                      </a:solidFill>
+                      <a:prstDash val="solid"/>
+                      <a:round/>
+                      <a:headEnd type="none" w="med" len="med"/>
+                      <a:tailEnd type="none" w="med" len="med"/>
+                    </a:lnL>
+                    <a:lnR w="2540" cap="flat" cmpd="sng" algn="ctr">
+                      <a:solidFill>
+                        <a:srgbClr val="EEEEEE"/>
+                      </a:solidFill>
+                      <a:prstDash val="solid"/>
+                      <a:round/>
+                      <a:headEnd type="none" w="med" len="med"/>
+                      <a:tailEnd type="none" w="med" len="med"/>
+                    </a:lnR>
+                    <a:lnT w="2540" cap="flat" cmpd="sng" algn="ctr">
+                      <a:solidFill>
+                        <a:srgbClr val="EEEEEE"/>
+                      </a:solidFill>
+                      <a:prstDash val="solid"/>
+                      <a:round/>
+                      <a:headEnd type="none" w="med" len="med"/>
+                      <a:tailEnd type="none" w="med" len="med"/>
+                    </a:lnT>
+                    <a:lnB w="2540" cap="flat" cmpd="sng" algn="ctr">
+                      <a:solidFill>
+                        <a:srgbClr val="EEEEEE"/>
+                      </a:solidFill>
+                      <a:prstDash val="solid"/>
+                      <a:round/>
+                      <a:headEnd type="none" w="med" len="med"/>
+                      <a:tailEnd type="none" w="med" len="med"/>
+                    </a:lnB>
+                  </a:tcPr>
+                </a:tc>
+                <a:tc>
+                  <a:txBody>
+                    <a:bodyPr/>
+                    <a:lstStyle/>
+                    <a:p>
+                      <a:pPr algn="ctr" indent="0" marL="0">
+                        <a:buNone/>
+                      </a:pPr>
+                      <a:r>
+                        <a:rPr lang="en-US" sz="500" b="1" dirty="0">
                           <a:solidFill>
                             <a:srgbClr val="777777"/>
                           </a:solidFill>
@@ -21079,332 +22880,7 @@
                           <a:ea typeface="Calibri" pitchFamily="34" charset="-122"/>
                           <a:cs typeface="Calibri" pitchFamily="34" charset="-120"/>
                         </a:rPr>
-                        <a:t>0.85%</a:t>
-                      </a:r>
-                      <a:endParaRPr lang="en-US" sz="500" dirty="0">
-                        <a:latin typeface="Calibri" charset="0"/>
-                        <a:ea typeface="Calibri" charset="0"/>
-                        <a:cs typeface="Calibri" charset="0"/>
-                      </a:endParaRPr>
-                    </a:p>
-                  </a:txBody>
-                  <a:tcPr marL="91440" marR="91440" marT="45720" marB="45720">
-                    <a:lnL w="2540" cap="flat" cmpd="sng" algn="ctr">
-                      <a:solidFill>
-                        <a:srgbClr val="EEEEEE"/>
-                      </a:solidFill>
-                      <a:prstDash val="solid"/>
-                      <a:round/>
-                      <a:headEnd type="none" w="med" len="med"/>
-                      <a:tailEnd type="none" w="med" len="med"/>
-                    </a:lnL>
-                    <a:lnR w="2540" cap="flat" cmpd="sng" algn="ctr">
-                      <a:solidFill>
-                        <a:srgbClr val="EEEEEE"/>
-                      </a:solidFill>
-                      <a:prstDash val="solid"/>
-                      <a:round/>
-                      <a:headEnd type="none" w="med" len="med"/>
-                      <a:tailEnd type="none" w="med" len="med"/>
-                    </a:lnR>
-                    <a:lnT w="2540" cap="flat" cmpd="sng" algn="ctr">
-                      <a:solidFill>
-                        <a:srgbClr val="EEEEEE"/>
-                      </a:solidFill>
-                      <a:prstDash val="solid"/>
-                      <a:round/>
-                      <a:headEnd type="none" w="med" len="med"/>
-                      <a:tailEnd type="none" w="med" len="med"/>
-                    </a:lnT>
-                    <a:lnB w="2540" cap="flat" cmpd="sng" algn="ctr">
-                      <a:solidFill>
-                        <a:srgbClr val="EEEEEE"/>
-                      </a:solidFill>
-                      <a:prstDash val="solid"/>
-                      <a:round/>
-                      <a:headEnd type="none" w="med" len="med"/>
-                      <a:tailEnd type="none" w="med" len="med"/>
-                    </a:lnB>
-                  </a:tcPr>
-                </a:tc>
-                <a:tc>
-                  <a:txBody>
-                    <a:bodyPr/>
-                    <a:lstStyle/>
-                    <a:p>
-                      <a:pPr algn="ctr" indent="0" marL="0">
-                        <a:buNone/>
-                      </a:pPr>
-                      <a:r>
-                        <a:rPr lang="en-US" sz="500" dirty="0">
-                          <a:solidFill>
-                            <a:srgbClr val="777777"/>
-                          </a:solidFill>
-                          <a:latin typeface="Calibri" pitchFamily="34" charset="0"/>
-                          <a:ea typeface="Calibri" pitchFamily="34" charset="-122"/>
-                          <a:cs typeface="Calibri" pitchFamily="34" charset="-120"/>
-                        </a:rPr>
-                        <a:t>0.80%</a:t>
-                      </a:r>
-                      <a:endParaRPr lang="en-US" sz="500" dirty="0">
-                        <a:latin typeface="Calibri" charset="0"/>
-                        <a:ea typeface="Calibri" charset="0"/>
-                        <a:cs typeface="Calibri" charset="0"/>
-                      </a:endParaRPr>
-                    </a:p>
-                  </a:txBody>
-                  <a:tcPr marL="91440" marR="91440" marT="45720" marB="45720">
-                    <a:lnL w="2540" cap="flat" cmpd="sng" algn="ctr">
-                      <a:solidFill>
-                        <a:srgbClr val="EEEEEE"/>
-                      </a:solidFill>
-                      <a:prstDash val="solid"/>
-                      <a:round/>
-                      <a:headEnd type="none" w="med" len="med"/>
-                      <a:tailEnd type="none" w="med" len="med"/>
-                    </a:lnL>
-                    <a:lnR w="2540" cap="flat" cmpd="sng" algn="ctr">
-                      <a:solidFill>
-                        <a:srgbClr val="EEEEEE"/>
-                      </a:solidFill>
-                      <a:prstDash val="solid"/>
-                      <a:round/>
-                      <a:headEnd type="none" w="med" len="med"/>
-                      <a:tailEnd type="none" w="med" len="med"/>
-                    </a:lnR>
-                    <a:lnT w="2540" cap="flat" cmpd="sng" algn="ctr">
-                      <a:solidFill>
-                        <a:srgbClr val="EEEEEE"/>
-                      </a:solidFill>
-                      <a:prstDash val="solid"/>
-                      <a:round/>
-                      <a:headEnd type="none" w="med" len="med"/>
-                      <a:tailEnd type="none" w="med" len="med"/>
-                    </a:lnT>
-                    <a:lnB w="2540" cap="flat" cmpd="sng" algn="ctr">
-                      <a:solidFill>
-                        <a:srgbClr val="EEEEEE"/>
-                      </a:solidFill>
-                      <a:prstDash val="solid"/>
-                      <a:round/>
-                      <a:headEnd type="none" w="med" len="med"/>
-                      <a:tailEnd type="none" w="med" len="med"/>
-                    </a:lnB>
-                  </a:tcPr>
-                </a:tc>
-                <a:tc>
-                  <a:txBody>
-                    <a:bodyPr/>
-                    <a:lstStyle/>
-                    <a:p>
-                      <a:pPr algn="ctr" indent="0" marL="0">
-                        <a:buNone/>
-                      </a:pPr>
-                      <a:r>
-                        <a:rPr lang="en-US" sz="500" dirty="0">
-                          <a:solidFill>
-                            <a:srgbClr val="777777"/>
-                          </a:solidFill>
-                          <a:latin typeface="Calibri" pitchFamily="34" charset="0"/>
-                          <a:ea typeface="Calibri" pitchFamily="34" charset="-122"/>
-                          <a:cs typeface="Calibri" pitchFamily="34" charset="-120"/>
-                        </a:rPr>
-                        <a:t>0.79%</a:t>
-                      </a:r>
-                      <a:endParaRPr lang="en-US" sz="500" dirty="0">
-                        <a:latin typeface="Calibri" charset="0"/>
-                        <a:ea typeface="Calibri" charset="0"/>
-                        <a:cs typeface="Calibri" charset="0"/>
-                      </a:endParaRPr>
-                    </a:p>
-                  </a:txBody>
-                  <a:tcPr marL="91440" marR="91440" marT="45720" marB="45720">
-                    <a:lnL w="2540" cap="flat" cmpd="sng" algn="ctr">
-                      <a:solidFill>
-                        <a:srgbClr val="EEEEEE"/>
-                      </a:solidFill>
-                      <a:prstDash val="solid"/>
-                      <a:round/>
-                      <a:headEnd type="none" w="med" len="med"/>
-                      <a:tailEnd type="none" w="med" len="med"/>
-                    </a:lnL>
-                    <a:lnR w="2540" cap="flat" cmpd="sng" algn="ctr">
-                      <a:solidFill>
-                        <a:srgbClr val="EEEEEE"/>
-                      </a:solidFill>
-                      <a:prstDash val="solid"/>
-                      <a:round/>
-                      <a:headEnd type="none" w="med" len="med"/>
-                      <a:tailEnd type="none" w="med" len="med"/>
-                    </a:lnR>
-                    <a:lnT w="2540" cap="flat" cmpd="sng" algn="ctr">
-                      <a:solidFill>
-                        <a:srgbClr val="EEEEEE"/>
-                      </a:solidFill>
-                      <a:prstDash val="solid"/>
-                      <a:round/>
-                      <a:headEnd type="none" w="med" len="med"/>
-                      <a:tailEnd type="none" w="med" len="med"/>
-                    </a:lnT>
-                    <a:lnB w="2540" cap="flat" cmpd="sng" algn="ctr">
-                      <a:solidFill>
-                        <a:srgbClr val="EEEEEE"/>
-                      </a:solidFill>
-                      <a:prstDash val="solid"/>
-                      <a:round/>
-                      <a:headEnd type="none" w="med" len="med"/>
-                      <a:tailEnd type="none" w="med" len="med"/>
-                    </a:lnB>
-                  </a:tcPr>
-                </a:tc>
-                <a:tc>
-                  <a:txBody>
-                    <a:bodyPr/>
-                    <a:lstStyle/>
-                    <a:p>
-                      <a:pPr algn="ctr" indent="0" marL="0">
-                        <a:buNone/>
-                      </a:pPr>
-                      <a:r>
-                        <a:rPr lang="en-US" sz="500" dirty="0">
-                          <a:solidFill>
-                            <a:srgbClr val="777777"/>
-                          </a:solidFill>
-                          <a:latin typeface="Calibri" pitchFamily="34" charset="0"/>
-                          <a:ea typeface="Calibri" pitchFamily="34" charset="-122"/>
-                          <a:cs typeface="Calibri" pitchFamily="34" charset="-120"/>
-                        </a:rPr>
-                        <a:t>0.75%</a:t>
-                      </a:r>
-                      <a:endParaRPr lang="en-US" sz="500" dirty="0">
-                        <a:latin typeface="Calibri" charset="0"/>
-                        <a:ea typeface="Calibri" charset="0"/>
-                        <a:cs typeface="Calibri" charset="0"/>
-                      </a:endParaRPr>
-                    </a:p>
-                  </a:txBody>
-                  <a:tcPr marL="91440" marR="91440" marT="45720" marB="45720">
-                    <a:lnL w="2540" cap="flat" cmpd="sng" algn="ctr">
-                      <a:solidFill>
-                        <a:srgbClr val="EEEEEE"/>
-                      </a:solidFill>
-                      <a:prstDash val="solid"/>
-                      <a:round/>
-                      <a:headEnd type="none" w="med" len="med"/>
-                      <a:tailEnd type="none" w="med" len="med"/>
-                    </a:lnL>
-                    <a:lnR w="2540" cap="flat" cmpd="sng" algn="ctr">
-                      <a:solidFill>
-                        <a:srgbClr val="EEEEEE"/>
-                      </a:solidFill>
-                      <a:prstDash val="solid"/>
-                      <a:round/>
-                      <a:headEnd type="none" w="med" len="med"/>
-                      <a:tailEnd type="none" w="med" len="med"/>
-                    </a:lnR>
-                    <a:lnT w="2540" cap="flat" cmpd="sng" algn="ctr">
-                      <a:solidFill>
-                        <a:srgbClr val="EEEEEE"/>
-                      </a:solidFill>
-                      <a:prstDash val="solid"/>
-                      <a:round/>
-                      <a:headEnd type="none" w="med" len="med"/>
-                      <a:tailEnd type="none" w="med" len="med"/>
-                    </a:lnT>
-                    <a:lnB w="2540" cap="flat" cmpd="sng" algn="ctr">
-                      <a:solidFill>
-                        <a:srgbClr val="EEEEEE"/>
-                      </a:solidFill>
-                      <a:prstDash val="solid"/>
-                      <a:round/>
-                      <a:headEnd type="none" w="med" len="med"/>
-                      <a:tailEnd type="none" w="med" len="med"/>
-                    </a:lnB>
-                  </a:tcPr>
-                </a:tc>
-                <a:tc>
-                  <a:txBody>
-                    <a:bodyPr/>
-                    <a:lstStyle/>
-                    <a:p>
-                      <a:pPr algn="ctr" indent="0" marL="0">
-                        <a:buNone/>
-                      </a:pPr>
-                      <a:r>
-                        <a:rPr lang="en-US" sz="500" dirty="0">
-                          <a:solidFill>
-                            <a:srgbClr val="777777"/>
-                          </a:solidFill>
-                          <a:latin typeface="Calibri" pitchFamily="34" charset="0"/>
-                          <a:ea typeface="Calibri" pitchFamily="34" charset="-122"/>
-                          <a:cs typeface="Calibri" pitchFamily="34" charset="-120"/>
-                        </a:rPr>
-                        <a:t>0.73%</a:t>
-                      </a:r>
-                      <a:endParaRPr lang="en-US" sz="500" dirty="0">
-                        <a:latin typeface="Calibri" charset="0"/>
-                        <a:ea typeface="Calibri" charset="0"/>
-                        <a:cs typeface="Calibri" charset="0"/>
-                      </a:endParaRPr>
-                    </a:p>
-                  </a:txBody>
-                  <a:tcPr marL="91440" marR="91440" marT="45720" marB="45720">
-                    <a:lnL w="2540" cap="flat" cmpd="sng" algn="ctr">
-                      <a:solidFill>
-                        <a:srgbClr val="EEEEEE"/>
-                      </a:solidFill>
-                      <a:prstDash val="solid"/>
-                      <a:round/>
-                      <a:headEnd type="none" w="med" len="med"/>
-                      <a:tailEnd type="none" w="med" len="med"/>
-                    </a:lnL>
-                    <a:lnR w="2540" cap="flat" cmpd="sng" algn="ctr">
-                      <a:solidFill>
-                        <a:srgbClr val="EEEEEE"/>
-                      </a:solidFill>
-                      <a:prstDash val="solid"/>
-                      <a:round/>
-                      <a:headEnd type="none" w="med" len="med"/>
-                      <a:tailEnd type="none" w="med" len="med"/>
-                    </a:lnR>
-                    <a:lnT w="2540" cap="flat" cmpd="sng" algn="ctr">
-                      <a:solidFill>
-                        <a:srgbClr val="EEEEEE"/>
-                      </a:solidFill>
-                      <a:prstDash val="solid"/>
-                      <a:round/>
-                      <a:headEnd type="none" w="med" len="med"/>
-                      <a:tailEnd type="none" w="med" len="med"/>
-                    </a:lnT>
-                    <a:lnB w="2540" cap="flat" cmpd="sng" algn="ctr">
-                      <a:solidFill>
-                        <a:srgbClr val="EEEEEE"/>
-                      </a:solidFill>
-                      <a:prstDash val="solid"/>
-                      <a:round/>
-                      <a:headEnd type="none" w="med" len="med"/>
-                      <a:tailEnd type="none" w="med" len="med"/>
-                    </a:lnB>
-                  </a:tcPr>
-                </a:tc>
-                <a:tc>
-                  <a:txBody>
-                    <a:bodyPr/>
-                    <a:lstStyle/>
-                    <a:p>
-                      <a:pPr algn="ctr" indent="0" marL="0">
-                        <a:buNone/>
-                      </a:pPr>
-                      <a:r>
-                        <a:rPr lang="en-US" sz="500" b="1" dirty="0">
-                          <a:solidFill>
-                            <a:srgbClr val="777777"/>
-                          </a:solidFill>
-                          <a:latin typeface="Calibri" pitchFamily="34" charset="0"/>
-                          <a:ea typeface="Calibri" pitchFamily="34" charset="-122"/>
-                          <a:cs typeface="Calibri" pitchFamily="34" charset="-120"/>
-                        </a:rPr>
-                        <a:t>11.00%</a:t>
+                        <a:t>11.19%</a:t>
                       </a:r>
                       <a:endParaRPr lang="en-US" sz="500" dirty="0">
                         <a:latin typeface="Calibri" charset="0"/>
@@ -21590,7 +23066,7 @@
                           <a:ea typeface="Calibri" pitchFamily="34" charset="-122"/>
                           <a:cs typeface="Calibri" pitchFamily="34" charset="-120"/>
                         </a:rPr>
-                        <a:t>0.00%</a:t>
+                        <a:t>0.79%</a:t>
                       </a:r>
                       <a:endParaRPr lang="en-US" sz="500" dirty="0">
                         <a:latin typeface="Calibri" charset="0"/>
@@ -22305,7 +23781,7 @@
                           <a:ea typeface="Calibri" pitchFamily="34" charset="-122"/>
                           <a:cs typeface="Calibri" pitchFamily="34" charset="-120"/>
                         </a:rPr>
-                        <a:t>7.49%</a:t>
+                        <a:t>0.59%</a:t>
                       </a:r>
                       <a:endParaRPr lang="en-US" sz="500" dirty="0">
                         <a:latin typeface="Calibri" charset="0"/>
@@ -22370,7 +23846,7 @@
                           <a:ea typeface="Calibri" pitchFamily="34" charset="-122"/>
                           <a:cs typeface="Calibri" pitchFamily="34" charset="-120"/>
                         </a:rPr>
-                        <a:t>15.78%</a:t>
+                        <a:t>9.36%</a:t>
                       </a:r>
                       <a:endParaRPr lang="en-US" sz="500" dirty="0">
                         <a:latin typeface="Calibri" charset="0"/>
@@ -23336,7 +24812,7 @@
                           <a:ea typeface="Calibri" pitchFamily="34" charset="-122"/>
                           <a:cs typeface="Calibri" pitchFamily="34" charset="-120"/>
                         </a:rPr>
-                        <a:t>11.90%</a:t>
+                        <a:t>12.13%</a:t>
                       </a:r>
                       <a:endParaRPr lang="en-US" sz="500" dirty="0">
                         <a:latin typeface="Calibri" charset="0"/>
@@ -23533,7 +25009,7 @@
                           <a:ea typeface="Calibri" pitchFamily="34" charset="-122"/>
                           <a:cs typeface="Calibri" pitchFamily="34" charset="-120"/>
                         </a:rPr>
-                        <a:t>0.69%</a:t>
+                        <a:t>0.74%</a:t>
                       </a:r>
                       <a:endParaRPr lang="en-US" sz="500" dirty="0">
                         <a:latin typeface="Calibri" charset="0"/>
@@ -23598,7 +25074,7 @@
                           <a:ea typeface="Calibri" pitchFamily="34" charset="-122"/>
                           <a:cs typeface="Calibri" pitchFamily="34" charset="-120"/>
                         </a:rPr>
-                        <a:t>0.60%</a:t>
+                        <a:t>0.61%</a:t>
                       </a:r>
                       <a:endParaRPr lang="en-US" sz="500" dirty="0">
                         <a:latin typeface="Calibri" charset="0"/>
@@ -23663,7 +25139,7 @@
                           <a:ea typeface="Calibri" pitchFamily="34" charset="-122"/>
                           <a:cs typeface="Calibri" pitchFamily="34" charset="-120"/>
                         </a:rPr>
-                        <a:t>0.60%</a:t>
+                        <a:t>0.56%</a:t>
                       </a:r>
                       <a:endParaRPr lang="en-US" sz="500" dirty="0">
                         <a:latin typeface="Calibri" charset="0"/>
@@ -23728,6 +25204,71 @@
                           <a:ea typeface="Calibri" pitchFamily="34" charset="-122"/>
                           <a:cs typeface="Calibri" pitchFamily="34" charset="-120"/>
                         </a:rPr>
+                        <a:t>0.61%</a:t>
+                      </a:r>
+                      <a:endParaRPr lang="en-US" sz="500" dirty="0">
+                        <a:latin typeface="Calibri" charset="0"/>
+                        <a:ea typeface="Calibri" charset="0"/>
+                        <a:cs typeface="Calibri" charset="0"/>
+                      </a:endParaRPr>
+                    </a:p>
+                  </a:txBody>
+                  <a:tcPr marL="91440" marR="91440" marT="45720" marB="45720">
+                    <a:lnL w="2540" cap="flat" cmpd="sng" algn="ctr">
+                      <a:solidFill>
+                        <a:srgbClr val="EEEEEE"/>
+                      </a:solidFill>
+                      <a:prstDash val="solid"/>
+                      <a:round/>
+                      <a:headEnd type="none" w="med" len="med"/>
+                      <a:tailEnd type="none" w="med" len="med"/>
+                    </a:lnL>
+                    <a:lnR w="2540" cap="flat" cmpd="sng" algn="ctr">
+                      <a:solidFill>
+                        <a:srgbClr val="EEEEEE"/>
+                      </a:solidFill>
+                      <a:prstDash val="solid"/>
+                      <a:round/>
+                      <a:headEnd type="none" w="med" len="med"/>
+                      <a:tailEnd type="none" w="med" len="med"/>
+                    </a:lnR>
+                    <a:lnT w="2540" cap="flat" cmpd="sng" algn="ctr">
+                      <a:solidFill>
+                        <a:srgbClr val="EEEEEE"/>
+                      </a:solidFill>
+                      <a:prstDash val="solid"/>
+                      <a:round/>
+                      <a:headEnd type="none" w="med" len="med"/>
+                      <a:tailEnd type="none" w="med" len="med"/>
+                    </a:lnT>
+                    <a:lnB w="2540" cap="flat" cmpd="sng" algn="ctr">
+                      <a:solidFill>
+                        <a:srgbClr val="EEEEEE"/>
+                      </a:solidFill>
+                      <a:prstDash val="solid"/>
+                      <a:round/>
+                      <a:headEnd type="none" w="med" len="med"/>
+                      <a:tailEnd type="none" w="med" len="med"/>
+                    </a:lnB>
+                  </a:tcPr>
+                </a:tc>
+                <a:tc>
+                  <a:txBody>
+                    <a:bodyPr/>
+                    <a:lstStyle/>
+                    <a:p>
+                      <a:pPr algn="ctr" indent="0" marL="0">
+                        <a:buNone/>
+                      </a:pPr>
+                      <a:r>
+                        <a:rPr lang="en-US" sz="500" dirty="0">
+                          <a:solidFill>
+                            <a:srgbClr val="777777"/>
+                          </a:solidFill>
+                          <a:latin typeface="Calibri" pitchFamily="34" charset="0"/>
+                          <a:ea typeface="Calibri" pitchFamily="34" charset="-122"/>
+                          <a:cs typeface="Calibri" pitchFamily="34" charset="-120"/>
+                        </a:rPr>
                         <a:t>0.55%</a:t>
                       </a:r>
                       <a:endParaRPr lang="en-US" sz="500" dirty="0">
@@ -23793,6 +25334,71 @@
                           <a:ea typeface="Calibri" pitchFamily="34" charset="-122"/>
                           <a:cs typeface="Calibri" pitchFamily="34" charset="-120"/>
                         </a:rPr>
+                        <a:t>0.46%</a:t>
+                      </a:r>
+                      <a:endParaRPr lang="en-US" sz="500" dirty="0">
+                        <a:latin typeface="Calibri" charset="0"/>
+                        <a:ea typeface="Calibri" charset="0"/>
+                        <a:cs typeface="Calibri" charset="0"/>
+                      </a:endParaRPr>
+                    </a:p>
+                  </a:txBody>
+                  <a:tcPr marL="91440" marR="91440" marT="45720" marB="45720">
+                    <a:lnL w="2540" cap="flat" cmpd="sng" algn="ctr">
+                      <a:solidFill>
+                        <a:srgbClr val="EEEEEE"/>
+                      </a:solidFill>
+                      <a:prstDash val="solid"/>
+                      <a:round/>
+                      <a:headEnd type="none" w="med" len="med"/>
+                      <a:tailEnd type="none" w="med" len="med"/>
+                    </a:lnL>
+                    <a:lnR w="2540" cap="flat" cmpd="sng" algn="ctr">
+                      <a:solidFill>
+                        <a:srgbClr val="EEEEEE"/>
+                      </a:solidFill>
+                      <a:prstDash val="solid"/>
+                      <a:round/>
+                      <a:headEnd type="none" w="med" len="med"/>
+                      <a:tailEnd type="none" w="med" len="med"/>
+                    </a:lnR>
+                    <a:lnT w="2540" cap="flat" cmpd="sng" algn="ctr">
+                      <a:solidFill>
+                        <a:srgbClr val="EEEEEE"/>
+                      </a:solidFill>
+                      <a:prstDash val="solid"/>
+                      <a:round/>
+                      <a:headEnd type="none" w="med" len="med"/>
+                      <a:tailEnd type="none" w="med" len="med"/>
+                    </a:lnT>
+                    <a:lnB w="2540" cap="flat" cmpd="sng" algn="ctr">
+                      <a:solidFill>
+                        <a:srgbClr val="EEEEEE"/>
+                      </a:solidFill>
+                      <a:prstDash val="solid"/>
+                      <a:round/>
+                      <a:headEnd type="none" w="med" len="med"/>
+                      <a:tailEnd type="none" w="med" len="med"/>
+                    </a:lnB>
+                  </a:tcPr>
+                </a:tc>
+                <a:tc>
+                  <a:txBody>
+                    <a:bodyPr/>
+                    <a:lstStyle/>
+                    <a:p>
+                      <a:pPr algn="ctr" indent="0" marL="0">
+                        <a:buNone/>
+                      </a:pPr>
+                      <a:r>
+                        <a:rPr lang="en-US" sz="500" dirty="0">
+                          <a:solidFill>
+                            <a:srgbClr val="777777"/>
+                          </a:solidFill>
+                          <a:latin typeface="Calibri" pitchFamily="34" charset="0"/>
+                          <a:ea typeface="Calibri" pitchFamily="34" charset="-122"/>
+                          <a:cs typeface="Calibri" pitchFamily="34" charset="-120"/>
+                        </a:rPr>
                         <a:t>0.53%</a:t>
                       </a:r>
                       <a:endParaRPr lang="en-US" sz="500" dirty="0">
@@ -23858,7 +25464,7 @@
                           <a:ea typeface="Calibri" pitchFamily="34" charset="-122"/>
                           <a:cs typeface="Calibri" pitchFamily="34" charset="-120"/>
                         </a:rPr>
-                        <a:t>0.49%</a:t>
+                        <a:t>0.48%</a:t>
                       </a:r>
                       <a:endParaRPr lang="en-US" sz="500" dirty="0">
                         <a:latin typeface="Calibri" charset="0"/>
@@ -23988,7 +25594,7 @@
                           <a:ea typeface="Calibri" pitchFamily="34" charset="-122"/>
                           <a:cs typeface="Calibri" pitchFamily="34" charset="-120"/>
                         </a:rPr>
-                        <a:t>0.48%</a:t>
+                        <a:t>0.45%</a:t>
                       </a:r>
                       <a:endParaRPr lang="en-US" sz="500" dirty="0">
                         <a:latin typeface="Calibri" charset="0"/>
@@ -24053,7 +25659,7 @@
                           <a:ea typeface="Calibri" pitchFamily="34" charset="-122"/>
                           <a:cs typeface="Calibri" pitchFamily="34" charset="-120"/>
                         </a:rPr>
-                        <a:t>0.46%</a:t>
+                        <a:t>0.44%</a:t>
                       </a:r>
                       <a:endParaRPr lang="en-US" sz="500" dirty="0">
                         <a:latin typeface="Calibri" charset="0"/>
@@ -24118,64 +25724,64 @@
                           <a:ea typeface="Calibri" pitchFamily="34" charset="-122"/>
                           <a:cs typeface="Calibri" pitchFamily="34" charset="-120"/>
                         </a:rPr>
-                        <a:t>0.45%</a:t>
-                      </a:r>
-                      <a:endParaRPr lang="en-US" sz="500" dirty="0">
-                        <a:latin typeface="Calibri" charset="0"/>
-                        <a:ea typeface="Calibri" charset="0"/>
-                        <a:cs typeface="Calibri" charset="0"/>
-                      </a:endParaRPr>
-                    </a:p>
-                  </a:txBody>
-                  <a:tcPr marL="91440" marR="91440" marT="45720" marB="45720">
-                    <a:lnL w="2540" cap="flat" cmpd="sng" algn="ctr">
-                      <a:solidFill>
-                        <a:srgbClr val="EEEEEE"/>
-                      </a:solidFill>
-                      <a:prstDash val="solid"/>
-                      <a:round/>
-                      <a:headEnd type="none" w="med" len="med"/>
-                      <a:tailEnd type="none" w="med" len="med"/>
-                    </a:lnL>
-                    <a:lnR w="2540" cap="flat" cmpd="sng" algn="ctr">
-                      <a:solidFill>
-                        <a:srgbClr val="EEEEEE"/>
-                      </a:solidFill>
-                      <a:prstDash val="solid"/>
-                      <a:round/>
-                      <a:headEnd type="none" w="med" len="med"/>
-                      <a:tailEnd type="none" w="med" len="med"/>
-                    </a:lnR>
-                    <a:lnT w="2540" cap="flat" cmpd="sng" algn="ctr">
-                      <a:solidFill>
-                        <a:srgbClr val="EEEEEE"/>
-                      </a:solidFill>
-                      <a:prstDash val="solid"/>
-                      <a:round/>
-                      <a:headEnd type="none" w="med" len="med"/>
-                      <a:tailEnd type="none" w="med" len="med"/>
-                    </a:lnT>
-                    <a:lnB w="2540" cap="flat" cmpd="sng" algn="ctr">
-                      <a:solidFill>
-                        <a:srgbClr val="EEEEEE"/>
-                      </a:solidFill>
-                      <a:prstDash val="solid"/>
-                      <a:round/>
-                      <a:headEnd type="none" w="med" len="med"/>
-                      <a:tailEnd type="none" w="med" len="med"/>
-                    </a:lnB>
-                  </a:tcPr>
-                </a:tc>
-                <a:tc>
-                  <a:txBody>
-                    <a:bodyPr/>
-                    <a:lstStyle/>
-                    <a:p>
-                      <a:pPr algn="ctr" indent="0" marL="0">
-                        <a:buNone/>
-                      </a:pPr>
-                      <a:r>
-                        <a:rPr lang="en-US" sz="500" dirty="0">
+                        <a:t>0.44%</a:t>
+                      </a:r>
+                      <a:endParaRPr lang="en-US" sz="500" dirty="0">
+                        <a:latin typeface="Calibri" charset="0"/>
+                        <a:ea typeface="Calibri" charset="0"/>
+                        <a:cs typeface="Calibri" charset="0"/>
+                      </a:endParaRPr>
+                    </a:p>
+                  </a:txBody>
+                  <a:tcPr marL="91440" marR="91440" marT="45720" marB="45720">
+                    <a:lnL w="2540" cap="flat" cmpd="sng" algn="ctr">
+                      <a:solidFill>
+                        <a:srgbClr val="EEEEEE"/>
+                      </a:solidFill>
+                      <a:prstDash val="solid"/>
+                      <a:round/>
+                      <a:headEnd type="none" w="med" len="med"/>
+                      <a:tailEnd type="none" w="med" len="med"/>
+                    </a:lnL>
+                    <a:lnR w="2540" cap="flat" cmpd="sng" algn="ctr">
+                      <a:solidFill>
+                        <a:srgbClr val="EEEEEE"/>
+                      </a:solidFill>
+                      <a:prstDash val="solid"/>
+                      <a:round/>
+                      <a:headEnd type="none" w="med" len="med"/>
+                      <a:tailEnd type="none" w="med" len="med"/>
+                    </a:lnR>
+                    <a:lnT w="2540" cap="flat" cmpd="sng" algn="ctr">
+                      <a:solidFill>
+                        <a:srgbClr val="EEEEEE"/>
+                      </a:solidFill>
+                      <a:prstDash val="solid"/>
+                      <a:round/>
+                      <a:headEnd type="none" w="med" len="med"/>
+                      <a:tailEnd type="none" w="med" len="med"/>
+                    </a:lnT>
+                    <a:lnB w="2540" cap="flat" cmpd="sng" algn="ctr">
+                      <a:solidFill>
+                        <a:srgbClr val="EEEEEE"/>
+                      </a:solidFill>
+                      <a:prstDash val="solid"/>
+                      <a:round/>
+                      <a:headEnd type="none" w="med" len="med"/>
+                      <a:tailEnd type="none" w="med" len="med"/>
+                    </a:lnB>
+                  </a:tcPr>
+                </a:tc>
+                <a:tc>
+                  <a:txBody>
+                    <a:bodyPr/>
+                    <a:lstStyle/>
+                    <a:p>
+                      <a:pPr algn="ctr" indent="0" marL="0">
+                        <a:buNone/>
+                      </a:pPr>
+                      <a:r>
+                        <a:rPr lang="en-US" sz="500" b="1" dirty="0">
                           <a:solidFill>
                             <a:srgbClr val="777777"/>
                           </a:solidFill>
@@ -24183,137 +25789,7 @@
                           <a:ea typeface="Calibri" pitchFamily="34" charset="-122"/>
                           <a:cs typeface="Calibri" pitchFamily="34" charset="-120"/>
                         </a:rPr>
-                        <a:t>0.44%</a:t>
-                      </a:r>
-                      <a:endParaRPr lang="en-US" sz="500" dirty="0">
-                        <a:latin typeface="Calibri" charset="0"/>
-                        <a:ea typeface="Calibri" charset="0"/>
-                        <a:cs typeface="Calibri" charset="0"/>
-                      </a:endParaRPr>
-                    </a:p>
-                  </a:txBody>
-                  <a:tcPr marL="91440" marR="91440" marT="45720" marB="45720">
-                    <a:lnL w="2540" cap="flat" cmpd="sng" algn="ctr">
-                      <a:solidFill>
-                        <a:srgbClr val="EEEEEE"/>
-                      </a:solidFill>
-                      <a:prstDash val="solid"/>
-                      <a:round/>
-                      <a:headEnd type="none" w="med" len="med"/>
-                      <a:tailEnd type="none" w="med" len="med"/>
-                    </a:lnL>
-                    <a:lnR w="2540" cap="flat" cmpd="sng" algn="ctr">
-                      <a:solidFill>
-                        <a:srgbClr val="EEEEEE"/>
-                      </a:solidFill>
-                      <a:prstDash val="solid"/>
-                      <a:round/>
-                      <a:headEnd type="none" w="med" len="med"/>
-                      <a:tailEnd type="none" w="med" len="med"/>
-                    </a:lnR>
-                    <a:lnT w="2540" cap="flat" cmpd="sng" algn="ctr">
-                      <a:solidFill>
-                        <a:srgbClr val="EEEEEE"/>
-                      </a:solidFill>
-                      <a:prstDash val="solid"/>
-                      <a:round/>
-                      <a:headEnd type="none" w="med" len="med"/>
-                      <a:tailEnd type="none" w="med" len="med"/>
-                    </a:lnT>
-                    <a:lnB w="2540" cap="flat" cmpd="sng" algn="ctr">
-                      <a:solidFill>
-                        <a:srgbClr val="EEEEEE"/>
-                      </a:solidFill>
-                      <a:prstDash val="solid"/>
-                      <a:round/>
-                      <a:headEnd type="none" w="med" len="med"/>
-                      <a:tailEnd type="none" w="med" len="med"/>
-                    </a:lnB>
-                  </a:tcPr>
-                </a:tc>
-                <a:tc>
-                  <a:txBody>
-                    <a:bodyPr/>
-                    <a:lstStyle/>
-                    <a:p>
-                      <a:pPr algn="ctr" indent="0" marL="0">
-                        <a:buNone/>
-                      </a:pPr>
-                      <a:r>
-                        <a:rPr lang="en-US" sz="500" dirty="0">
-                          <a:solidFill>
-                            <a:srgbClr val="777777"/>
-                          </a:solidFill>
-                          <a:latin typeface="Calibri" pitchFamily="34" charset="0"/>
-                          <a:ea typeface="Calibri" pitchFamily="34" charset="-122"/>
-                          <a:cs typeface="Calibri" pitchFamily="34" charset="-120"/>
-                        </a:rPr>
-                        <a:t>0.43%</a:t>
-                      </a:r>
-                      <a:endParaRPr lang="en-US" sz="500" dirty="0">
-                        <a:latin typeface="Calibri" charset="0"/>
-                        <a:ea typeface="Calibri" charset="0"/>
-                        <a:cs typeface="Calibri" charset="0"/>
-                      </a:endParaRPr>
-                    </a:p>
-                  </a:txBody>
-                  <a:tcPr marL="91440" marR="91440" marT="45720" marB="45720">
-                    <a:lnL w="2540" cap="flat" cmpd="sng" algn="ctr">
-                      <a:solidFill>
-                        <a:srgbClr val="EEEEEE"/>
-                      </a:solidFill>
-                      <a:prstDash val="solid"/>
-                      <a:round/>
-                      <a:headEnd type="none" w="med" len="med"/>
-                      <a:tailEnd type="none" w="med" len="med"/>
-                    </a:lnL>
-                    <a:lnR w="2540" cap="flat" cmpd="sng" algn="ctr">
-                      <a:solidFill>
-                        <a:srgbClr val="EEEEEE"/>
-                      </a:solidFill>
-                      <a:prstDash val="solid"/>
-                      <a:round/>
-                      <a:headEnd type="none" w="med" len="med"/>
-                      <a:tailEnd type="none" w="med" len="med"/>
-                    </a:lnR>
-                    <a:lnT w="2540" cap="flat" cmpd="sng" algn="ctr">
-                      <a:solidFill>
-                        <a:srgbClr val="EEEEEE"/>
-                      </a:solidFill>
-                      <a:prstDash val="solid"/>
-                      <a:round/>
-                      <a:headEnd type="none" w="med" len="med"/>
-                      <a:tailEnd type="none" w="med" len="med"/>
-                    </a:lnT>
-                    <a:lnB w="2540" cap="flat" cmpd="sng" algn="ctr">
-                      <a:solidFill>
-                        <a:srgbClr val="EEEEEE"/>
-                      </a:solidFill>
-                      <a:prstDash val="solid"/>
-                      <a:round/>
-                      <a:headEnd type="none" w="med" len="med"/>
-                      <a:tailEnd type="none" w="med" len="med"/>
-                    </a:lnB>
-                  </a:tcPr>
-                </a:tc>
-                <a:tc>
-                  <a:txBody>
-                    <a:bodyPr/>
-                    <a:lstStyle/>
-                    <a:p>
-                      <a:pPr algn="ctr" indent="0" marL="0">
-                        <a:buNone/>
-                      </a:pPr>
-                      <a:r>
-                        <a:rPr lang="en-US" sz="500" b="1" dirty="0">
-                          <a:solidFill>
-                            <a:srgbClr val="777777"/>
-                          </a:solidFill>
-                          <a:latin typeface="Calibri" pitchFamily="34" charset="0"/>
-                          <a:ea typeface="Calibri" pitchFamily="34" charset="-122"/>
-                          <a:cs typeface="Calibri" pitchFamily="34" charset="-120"/>
-                        </a:rPr>
-                        <a:t>6.38%</a:t>
+                        <a:t>6.54%</a:t>
                       </a:r>
                       <a:endParaRPr lang="en-US" sz="500" dirty="0">
                         <a:latin typeface="Calibri" charset="0"/>
@@ -24499,7 +25975,7 @@
                           <a:ea typeface="Calibri" pitchFamily="34" charset="-122"/>
                           <a:cs typeface="Calibri" pitchFamily="34" charset="-120"/>
                         </a:rPr>
-                        <a:t>0.00%</a:t>
+                        <a:t>0.57%</a:t>
                       </a:r>
                       <a:endParaRPr lang="en-US" sz="500" dirty="0">
                         <a:latin typeface="Calibri" charset="0"/>
@@ -25214,7 +26690,7 @@
                           <a:ea typeface="Calibri" pitchFamily="34" charset="-122"/>
                           <a:cs typeface="Calibri" pitchFamily="34" charset="-120"/>
                         </a:rPr>
-                        <a:t>-2.99%</a:t>
+                        <a:t>0.31%</a:t>
                       </a:r>
                       <a:endParaRPr lang="en-US" sz="500" dirty="0">
                         <a:latin typeface="Calibri" charset="0"/>
@@ -25279,7 +26755,7 @@
                           <a:ea typeface="Calibri" pitchFamily="34" charset="-122"/>
                           <a:cs typeface="Calibri" pitchFamily="34" charset="-120"/>
                         </a:rPr>
-                        <a:t>0.86%</a:t>
+                        <a:t>4.95%</a:t>
                       </a:r>
                       <a:endParaRPr lang="en-US" sz="500" dirty="0">
                         <a:latin typeface="Calibri" charset="0"/>
@@ -26245,7 +27721,7 @@
                           <a:ea typeface="Calibri" pitchFamily="34" charset="-122"/>
                           <a:cs typeface="Calibri" pitchFamily="34" charset="-120"/>
                         </a:rPr>
-                        <a:t>7.14%</a:t>
+                        <a:t>7.25%</a:t>
                       </a:r>
                       <a:endParaRPr lang="en-US" sz="500" dirty="0">
                         <a:latin typeface="Calibri" charset="0"/>
@@ -26442,6 +27918,201 @@
                           <a:ea typeface="Calibri" pitchFamily="34" charset="-122"/>
                           <a:cs typeface="Calibri" pitchFamily="34" charset="-120"/>
                         </a:rPr>
+                        <a:t>0.45%</a:t>
+                      </a:r>
+                      <a:endParaRPr lang="en-US" sz="500" dirty="0">
+                        <a:latin typeface="Calibri" charset="0"/>
+                        <a:ea typeface="Calibri" charset="0"/>
+                        <a:cs typeface="Calibri" charset="0"/>
+                      </a:endParaRPr>
+                    </a:p>
+                  </a:txBody>
+                  <a:tcPr marL="91440" marR="91440" marT="45720" marB="45720">
+                    <a:lnL w="2540" cap="flat" cmpd="sng" algn="ctr">
+                      <a:solidFill>
+                        <a:srgbClr val="EEEEEE"/>
+                      </a:solidFill>
+                      <a:prstDash val="solid"/>
+                      <a:round/>
+                      <a:headEnd type="none" w="med" len="med"/>
+                      <a:tailEnd type="none" w="med" len="med"/>
+                    </a:lnL>
+                    <a:lnR w="2540" cap="flat" cmpd="sng" algn="ctr">
+                      <a:solidFill>
+                        <a:srgbClr val="EEEEEE"/>
+                      </a:solidFill>
+                      <a:prstDash val="solid"/>
+                      <a:round/>
+                      <a:headEnd type="none" w="med" len="med"/>
+                      <a:tailEnd type="none" w="med" len="med"/>
+                    </a:lnR>
+                    <a:lnT w="2540" cap="flat" cmpd="sng" algn="ctr">
+                      <a:solidFill>
+                        <a:srgbClr val="EEEEEE"/>
+                      </a:solidFill>
+                      <a:prstDash val="solid"/>
+                      <a:round/>
+                      <a:headEnd type="none" w="med" len="med"/>
+                      <a:tailEnd type="none" w="med" len="med"/>
+                    </a:lnT>
+                    <a:lnB w="2540" cap="flat" cmpd="sng" algn="ctr">
+                      <a:solidFill>
+                        <a:srgbClr val="EEEEEE"/>
+                      </a:solidFill>
+                      <a:prstDash val="solid"/>
+                      <a:round/>
+                      <a:headEnd type="none" w="med" len="med"/>
+                      <a:tailEnd type="none" w="med" len="med"/>
+                    </a:lnB>
+                  </a:tcPr>
+                </a:tc>
+                <a:tc>
+                  <a:txBody>
+                    <a:bodyPr/>
+                    <a:lstStyle/>
+                    <a:p>
+                      <a:pPr algn="ctr" indent="0" marL="0">
+                        <a:buNone/>
+                      </a:pPr>
+                      <a:r>
+                        <a:rPr lang="en-US" sz="500" dirty="0">
+                          <a:solidFill>
+                            <a:srgbClr val="777777"/>
+                          </a:solidFill>
+                          <a:latin typeface="Calibri" pitchFamily="34" charset="0"/>
+                          <a:ea typeface="Calibri" pitchFamily="34" charset="-122"/>
+                          <a:cs typeface="Calibri" pitchFamily="34" charset="-120"/>
+                        </a:rPr>
+                        <a:t>0.39%</a:t>
+                      </a:r>
+                      <a:endParaRPr lang="en-US" sz="500" dirty="0">
+                        <a:latin typeface="Calibri" charset="0"/>
+                        <a:ea typeface="Calibri" charset="0"/>
+                        <a:cs typeface="Calibri" charset="0"/>
+                      </a:endParaRPr>
+                    </a:p>
+                  </a:txBody>
+                  <a:tcPr marL="91440" marR="91440" marT="45720" marB="45720">
+                    <a:lnL w="2540" cap="flat" cmpd="sng" algn="ctr">
+                      <a:solidFill>
+                        <a:srgbClr val="EEEEEE"/>
+                      </a:solidFill>
+                      <a:prstDash val="solid"/>
+                      <a:round/>
+                      <a:headEnd type="none" w="med" len="med"/>
+                      <a:tailEnd type="none" w="med" len="med"/>
+                    </a:lnL>
+                    <a:lnR w="2540" cap="flat" cmpd="sng" algn="ctr">
+                      <a:solidFill>
+                        <a:srgbClr val="EEEEEE"/>
+                      </a:solidFill>
+                      <a:prstDash val="solid"/>
+                      <a:round/>
+                      <a:headEnd type="none" w="med" len="med"/>
+                      <a:tailEnd type="none" w="med" len="med"/>
+                    </a:lnR>
+                    <a:lnT w="2540" cap="flat" cmpd="sng" algn="ctr">
+                      <a:solidFill>
+                        <a:srgbClr val="EEEEEE"/>
+                      </a:solidFill>
+                      <a:prstDash val="solid"/>
+                      <a:round/>
+                      <a:headEnd type="none" w="med" len="med"/>
+                      <a:tailEnd type="none" w="med" len="med"/>
+                    </a:lnT>
+                    <a:lnB w="2540" cap="flat" cmpd="sng" algn="ctr">
+                      <a:solidFill>
+                        <a:srgbClr val="EEEEEE"/>
+                      </a:solidFill>
+                      <a:prstDash val="solid"/>
+                      <a:round/>
+                      <a:headEnd type="none" w="med" len="med"/>
+                      <a:tailEnd type="none" w="med" len="med"/>
+                    </a:lnB>
+                  </a:tcPr>
+                </a:tc>
+                <a:tc>
+                  <a:txBody>
+                    <a:bodyPr/>
+                    <a:lstStyle/>
+                    <a:p>
+                      <a:pPr algn="ctr" indent="0" marL="0">
+                        <a:buNone/>
+                      </a:pPr>
+                      <a:r>
+                        <a:rPr lang="en-US" sz="500" dirty="0">
+                          <a:solidFill>
+                            <a:srgbClr val="777777"/>
+                          </a:solidFill>
+                          <a:latin typeface="Calibri" pitchFamily="34" charset="0"/>
+                          <a:ea typeface="Calibri" pitchFamily="34" charset="-122"/>
+                          <a:cs typeface="Calibri" pitchFamily="34" charset="-120"/>
+                        </a:rPr>
+                        <a:t>0.43%</a:t>
+                      </a:r>
+                      <a:endParaRPr lang="en-US" sz="500" dirty="0">
+                        <a:latin typeface="Calibri" charset="0"/>
+                        <a:ea typeface="Calibri" charset="0"/>
+                        <a:cs typeface="Calibri" charset="0"/>
+                      </a:endParaRPr>
+                    </a:p>
+                  </a:txBody>
+                  <a:tcPr marL="91440" marR="91440" marT="45720" marB="45720">
+                    <a:lnL w="2540" cap="flat" cmpd="sng" algn="ctr">
+                      <a:solidFill>
+                        <a:srgbClr val="EEEEEE"/>
+                      </a:solidFill>
+                      <a:prstDash val="solid"/>
+                      <a:round/>
+                      <a:headEnd type="none" w="med" len="med"/>
+                      <a:tailEnd type="none" w="med" len="med"/>
+                    </a:lnL>
+                    <a:lnR w="2540" cap="flat" cmpd="sng" algn="ctr">
+                      <a:solidFill>
+                        <a:srgbClr val="EEEEEE"/>
+                      </a:solidFill>
+                      <a:prstDash val="solid"/>
+                      <a:round/>
+                      <a:headEnd type="none" w="med" len="med"/>
+                      <a:tailEnd type="none" w="med" len="med"/>
+                    </a:lnR>
+                    <a:lnT w="2540" cap="flat" cmpd="sng" algn="ctr">
+                      <a:solidFill>
+                        <a:srgbClr val="EEEEEE"/>
+                      </a:solidFill>
+                      <a:prstDash val="solid"/>
+                      <a:round/>
+                      <a:headEnd type="none" w="med" len="med"/>
+                      <a:tailEnd type="none" w="med" len="med"/>
+                    </a:lnT>
+                    <a:lnB w="2540" cap="flat" cmpd="sng" algn="ctr">
+                      <a:solidFill>
+                        <a:srgbClr val="EEEEEE"/>
+                      </a:solidFill>
+                      <a:prstDash val="solid"/>
+                      <a:round/>
+                      <a:headEnd type="none" w="med" len="med"/>
+                      <a:tailEnd type="none" w="med" len="med"/>
+                    </a:lnB>
+                  </a:tcPr>
+                </a:tc>
+                <a:tc>
+                  <a:txBody>
+                    <a:bodyPr/>
+                    <a:lstStyle/>
+                    <a:p>
+                      <a:pPr algn="ctr" indent="0" marL="0">
+                        <a:buNone/>
+                      </a:pPr>
+                      <a:r>
+                        <a:rPr lang="en-US" sz="500" dirty="0">
+                          <a:solidFill>
+                            <a:srgbClr val="777777"/>
+                          </a:solidFill>
+                          <a:latin typeface="Calibri" pitchFamily="34" charset="0"/>
+                          <a:ea typeface="Calibri" pitchFamily="34" charset="-122"/>
+                          <a:cs typeface="Calibri" pitchFamily="34" charset="-120"/>
+                        </a:rPr>
                         <a:t>0.42%</a:t>
                       </a:r>
                       <a:endParaRPr lang="en-US" sz="500" dirty="0">
@@ -26572,6 +28243,201 @@
                           <a:ea typeface="Calibri" pitchFamily="34" charset="-122"/>
                           <a:cs typeface="Calibri" pitchFamily="34" charset="-120"/>
                         </a:rPr>
+                        <a:t>0.43%</a:t>
+                      </a:r>
+                      <a:endParaRPr lang="en-US" sz="500" dirty="0">
+                        <a:latin typeface="Calibri" charset="0"/>
+                        <a:ea typeface="Calibri" charset="0"/>
+                        <a:cs typeface="Calibri" charset="0"/>
+                      </a:endParaRPr>
+                    </a:p>
+                  </a:txBody>
+                  <a:tcPr marL="91440" marR="91440" marT="45720" marB="45720">
+                    <a:lnL w="2540" cap="flat" cmpd="sng" algn="ctr">
+                      <a:solidFill>
+                        <a:srgbClr val="EEEEEE"/>
+                      </a:solidFill>
+                      <a:prstDash val="solid"/>
+                      <a:round/>
+                      <a:headEnd type="none" w="med" len="med"/>
+                      <a:tailEnd type="none" w="med" len="med"/>
+                    </a:lnL>
+                    <a:lnR w="2540" cap="flat" cmpd="sng" algn="ctr">
+                      <a:solidFill>
+                        <a:srgbClr val="EEEEEE"/>
+                      </a:solidFill>
+                      <a:prstDash val="solid"/>
+                      <a:round/>
+                      <a:headEnd type="none" w="med" len="med"/>
+                      <a:tailEnd type="none" w="med" len="med"/>
+                    </a:lnR>
+                    <a:lnT w="2540" cap="flat" cmpd="sng" algn="ctr">
+                      <a:solidFill>
+                        <a:srgbClr val="EEEEEE"/>
+                      </a:solidFill>
+                      <a:prstDash val="solid"/>
+                      <a:round/>
+                      <a:headEnd type="none" w="med" len="med"/>
+                      <a:tailEnd type="none" w="med" len="med"/>
+                    </a:lnT>
+                    <a:lnB w="2540" cap="flat" cmpd="sng" algn="ctr">
+                      <a:solidFill>
+                        <a:srgbClr val="EEEEEE"/>
+                      </a:solidFill>
+                      <a:prstDash val="solid"/>
+                      <a:round/>
+                      <a:headEnd type="none" w="med" len="med"/>
+                      <a:tailEnd type="none" w="med" len="med"/>
+                    </a:lnB>
+                  </a:tcPr>
+                </a:tc>
+                <a:tc>
+                  <a:txBody>
+                    <a:bodyPr/>
+                    <a:lstStyle/>
+                    <a:p>
+                      <a:pPr algn="ctr" indent="0" marL="0">
+                        <a:buNone/>
+                      </a:pPr>
+                      <a:r>
+                        <a:rPr lang="en-US" sz="500" dirty="0">
+                          <a:solidFill>
+                            <a:srgbClr val="777777"/>
+                          </a:solidFill>
+                          <a:latin typeface="Calibri" pitchFamily="34" charset="0"/>
+                          <a:ea typeface="Calibri" pitchFamily="34" charset="-122"/>
+                          <a:cs typeface="Calibri" pitchFamily="34" charset="-120"/>
+                        </a:rPr>
+                        <a:t>0.43%</a:t>
+                      </a:r>
+                      <a:endParaRPr lang="en-US" sz="500" dirty="0">
+                        <a:latin typeface="Calibri" charset="0"/>
+                        <a:ea typeface="Calibri" charset="0"/>
+                        <a:cs typeface="Calibri" charset="0"/>
+                      </a:endParaRPr>
+                    </a:p>
+                  </a:txBody>
+                  <a:tcPr marL="91440" marR="91440" marT="45720" marB="45720">
+                    <a:lnL w="2540" cap="flat" cmpd="sng" algn="ctr">
+                      <a:solidFill>
+                        <a:srgbClr val="EEEEEE"/>
+                      </a:solidFill>
+                      <a:prstDash val="solid"/>
+                      <a:round/>
+                      <a:headEnd type="none" w="med" len="med"/>
+                      <a:tailEnd type="none" w="med" len="med"/>
+                    </a:lnL>
+                    <a:lnR w="2540" cap="flat" cmpd="sng" algn="ctr">
+                      <a:solidFill>
+                        <a:srgbClr val="EEEEEE"/>
+                      </a:solidFill>
+                      <a:prstDash val="solid"/>
+                      <a:round/>
+                      <a:headEnd type="none" w="med" len="med"/>
+                      <a:tailEnd type="none" w="med" len="med"/>
+                    </a:lnR>
+                    <a:lnT w="2540" cap="flat" cmpd="sng" algn="ctr">
+                      <a:solidFill>
+                        <a:srgbClr val="EEEEEE"/>
+                      </a:solidFill>
+                      <a:prstDash val="solid"/>
+                      <a:round/>
+                      <a:headEnd type="none" w="med" len="med"/>
+                      <a:tailEnd type="none" w="med" len="med"/>
+                    </a:lnT>
+                    <a:lnB w="2540" cap="flat" cmpd="sng" algn="ctr">
+                      <a:solidFill>
+                        <a:srgbClr val="EEEEEE"/>
+                      </a:solidFill>
+                      <a:prstDash val="solid"/>
+                      <a:round/>
+                      <a:headEnd type="none" w="med" len="med"/>
+                      <a:tailEnd type="none" w="med" len="med"/>
+                    </a:lnB>
+                  </a:tcPr>
+                </a:tc>
+                <a:tc>
+                  <a:txBody>
+                    <a:bodyPr/>
+                    <a:lstStyle/>
+                    <a:p>
+                      <a:pPr algn="ctr" indent="0" marL="0">
+                        <a:buNone/>
+                      </a:pPr>
+                      <a:r>
+                        <a:rPr lang="en-US" sz="500" dirty="0">
+                          <a:solidFill>
+                            <a:srgbClr val="777777"/>
+                          </a:solidFill>
+                          <a:latin typeface="Calibri" pitchFamily="34" charset="0"/>
+                          <a:ea typeface="Calibri" pitchFamily="34" charset="-122"/>
+                          <a:cs typeface="Calibri" pitchFamily="34" charset="-120"/>
+                        </a:rPr>
+                        <a:t>0.38%</a:t>
+                      </a:r>
+                      <a:endParaRPr lang="en-US" sz="500" dirty="0">
+                        <a:latin typeface="Calibri" charset="0"/>
+                        <a:ea typeface="Calibri" charset="0"/>
+                        <a:cs typeface="Calibri" charset="0"/>
+                      </a:endParaRPr>
+                    </a:p>
+                  </a:txBody>
+                  <a:tcPr marL="91440" marR="91440" marT="45720" marB="45720">
+                    <a:lnL w="2540" cap="flat" cmpd="sng" algn="ctr">
+                      <a:solidFill>
+                        <a:srgbClr val="EEEEEE"/>
+                      </a:solidFill>
+                      <a:prstDash val="solid"/>
+                      <a:round/>
+                      <a:headEnd type="none" w="med" len="med"/>
+                      <a:tailEnd type="none" w="med" len="med"/>
+                    </a:lnL>
+                    <a:lnR w="2540" cap="flat" cmpd="sng" algn="ctr">
+                      <a:solidFill>
+                        <a:srgbClr val="EEEEEE"/>
+                      </a:solidFill>
+                      <a:prstDash val="solid"/>
+                      <a:round/>
+                      <a:headEnd type="none" w="med" len="med"/>
+                      <a:tailEnd type="none" w="med" len="med"/>
+                    </a:lnR>
+                    <a:lnT w="2540" cap="flat" cmpd="sng" algn="ctr">
+                      <a:solidFill>
+                        <a:srgbClr val="EEEEEE"/>
+                      </a:solidFill>
+                      <a:prstDash val="solid"/>
+                      <a:round/>
+                      <a:headEnd type="none" w="med" len="med"/>
+                      <a:tailEnd type="none" w="med" len="med"/>
+                    </a:lnT>
+                    <a:lnB w="2540" cap="flat" cmpd="sng" algn="ctr">
+                      <a:solidFill>
+                        <a:srgbClr val="EEEEEE"/>
+                      </a:solidFill>
+                      <a:prstDash val="solid"/>
+                      <a:round/>
+                      <a:headEnd type="none" w="med" len="med"/>
+                      <a:tailEnd type="none" w="med" len="med"/>
+                    </a:lnB>
+                  </a:tcPr>
+                </a:tc>
+                <a:tc>
+                  <a:txBody>
+                    <a:bodyPr/>
+                    <a:lstStyle/>
+                    <a:p>
+                      <a:pPr algn="ctr" indent="0" marL="0">
+                        <a:buNone/>
+                      </a:pPr>
+                      <a:r>
+                        <a:rPr lang="en-US" sz="500" dirty="0">
+                          <a:solidFill>
+                            <a:srgbClr val="777777"/>
+                          </a:solidFill>
+                          <a:latin typeface="Calibri" pitchFamily="34" charset="0"/>
+                          <a:ea typeface="Calibri" pitchFamily="34" charset="-122"/>
+                          <a:cs typeface="Calibri" pitchFamily="34" charset="-120"/>
+                        </a:rPr>
                         <a:t>0.42%</a:t>
                       </a:r>
                       <a:endParaRPr lang="en-US" sz="500" dirty="0">
@@ -26637,7 +28503,7 @@
                           <a:ea typeface="Calibri" pitchFamily="34" charset="-122"/>
                           <a:cs typeface="Calibri" pitchFamily="34" charset="-120"/>
                         </a:rPr>
-                        <a:t>0.42%</a:t>
+                        <a:t>0.40%</a:t>
                       </a:r>
                       <a:endParaRPr lang="en-US" sz="500" dirty="0">
                         <a:latin typeface="Calibri" charset="0"/>
@@ -26702,7 +28568,7 @@
                           <a:ea typeface="Calibri" pitchFamily="34" charset="-122"/>
                           <a:cs typeface="Calibri" pitchFamily="34" charset="-120"/>
                         </a:rPr>
-                        <a:t>0.42%</a:t>
+                        <a:t>0.38%</a:t>
                       </a:r>
                       <a:endParaRPr lang="en-US" sz="500" dirty="0">
                         <a:latin typeface="Calibri" charset="0"/>
@@ -26767,64 +28633,64 @@
                           <a:ea typeface="Calibri" pitchFamily="34" charset="-122"/>
                           <a:cs typeface="Calibri" pitchFamily="34" charset="-120"/>
                         </a:rPr>
-                        <a:t>0.42%</a:t>
-                      </a:r>
-                      <a:endParaRPr lang="en-US" sz="500" dirty="0">
-                        <a:latin typeface="Calibri" charset="0"/>
-                        <a:ea typeface="Calibri" charset="0"/>
-                        <a:cs typeface="Calibri" charset="0"/>
-                      </a:endParaRPr>
-                    </a:p>
-                  </a:txBody>
-                  <a:tcPr marL="91440" marR="91440" marT="45720" marB="45720">
-                    <a:lnL w="2540" cap="flat" cmpd="sng" algn="ctr">
-                      <a:solidFill>
-                        <a:srgbClr val="EEEEEE"/>
-                      </a:solidFill>
-                      <a:prstDash val="solid"/>
-                      <a:round/>
-                      <a:headEnd type="none" w="med" len="med"/>
-                      <a:tailEnd type="none" w="med" len="med"/>
-                    </a:lnL>
-                    <a:lnR w="2540" cap="flat" cmpd="sng" algn="ctr">
-                      <a:solidFill>
-                        <a:srgbClr val="EEEEEE"/>
-                      </a:solidFill>
-                      <a:prstDash val="solid"/>
-                      <a:round/>
-                      <a:headEnd type="none" w="med" len="med"/>
-                      <a:tailEnd type="none" w="med" len="med"/>
-                    </a:lnR>
-                    <a:lnT w="2540" cap="flat" cmpd="sng" algn="ctr">
-                      <a:solidFill>
-                        <a:srgbClr val="EEEEEE"/>
-                      </a:solidFill>
-                      <a:prstDash val="solid"/>
-                      <a:round/>
-                      <a:headEnd type="none" w="med" len="med"/>
-                      <a:tailEnd type="none" w="med" len="med"/>
-                    </a:lnT>
-                    <a:lnB w="2540" cap="flat" cmpd="sng" algn="ctr">
-                      <a:solidFill>
-                        <a:srgbClr val="EEEEEE"/>
-                      </a:solidFill>
-                      <a:prstDash val="solid"/>
-                      <a:round/>
-                      <a:headEnd type="none" w="med" len="med"/>
-                      <a:tailEnd type="none" w="med" len="med"/>
-                    </a:lnB>
-                  </a:tcPr>
-                </a:tc>
-                <a:tc>
-                  <a:txBody>
-                    <a:bodyPr/>
-                    <a:lstStyle/>
-                    <a:p>
-                      <a:pPr algn="ctr" indent="0" marL="0">
-                        <a:buNone/>
-                      </a:pPr>
-                      <a:r>
-                        <a:rPr lang="en-US" sz="500" dirty="0">
+                        <a:t>0.41%</a:t>
+                      </a:r>
+                      <a:endParaRPr lang="en-US" sz="500" dirty="0">
+                        <a:latin typeface="Calibri" charset="0"/>
+                        <a:ea typeface="Calibri" charset="0"/>
+                        <a:cs typeface="Calibri" charset="0"/>
+                      </a:endParaRPr>
+                    </a:p>
+                  </a:txBody>
+                  <a:tcPr marL="91440" marR="91440" marT="45720" marB="45720">
+                    <a:lnL w="2540" cap="flat" cmpd="sng" algn="ctr">
+                      <a:solidFill>
+                        <a:srgbClr val="EEEEEE"/>
+                      </a:solidFill>
+                      <a:prstDash val="solid"/>
+                      <a:round/>
+                      <a:headEnd type="none" w="med" len="med"/>
+                      <a:tailEnd type="none" w="med" len="med"/>
+                    </a:lnL>
+                    <a:lnR w="2540" cap="flat" cmpd="sng" algn="ctr">
+                      <a:solidFill>
+                        <a:srgbClr val="EEEEEE"/>
+                      </a:solidFill>
+                      <a:prstDash val="solid"/>
+                      <a:round/>
+                      <a:headEnd type="none" w="med" len="med"/>
+                      <a:tailEnd type="none" w="med" len="med"/>
+                    </a:lnR>
+                    <a:lnT w="2540" cap="flat" cmpd="sng" algn="ctr">
+                      <a:solidFill>
+                        <a:srgbClr val="EEEEEE"/>
+                      </a:solidFill>
+                      <a:prstDash val="solid"/>
+                      <a:round/>
+                      <a:headEnd type="none" w="med" len="med"/>
+                      <a:tailEnd type="none" w="med" len="med"/>
+                    </a:lnT>
+                    <a:lnB w="2540" cap="flat" cmpd="sng" algn="ctr">
+                      <a:solidFill>
+                        <a:srgbClr val="EEEEEE"/>
+                      </a:solidFill>
+                      <a:prstDash val="solid"/>
+                      <a:round/>
+                      <a:headEnd type="none" w="med" len="med"/>
+                      <a:tailEnd type="none" w="med" len="med"/>
+                    </a:lnB>
+                  </a:tcPr>
+                </a:tc>
+                <a:tc>
+                  <a:txBody>
+                    <a:bodyPr/>
+                    <a:lstStyle/>
+                    <a:p>
+                      <a:pPr algn="ctr" indent="0" marL="0">
+                        <a:buNone/>
+                      </a:pPr>
+                      <a:r>
+                        <a:rPr lang="en-US" sz="500" b="1" dirty="0">
                           <a:solidFill>
                             <a:srgbClr val="777777"/>
                           </a:solidFill>
@@ -26832,397 +28698,7 @@
                           <a:ea typeface="Calibri" pitchFamily="34" charset="-122"/>
                           <a:cs typeface="Calibri" pitchFamily="34" charset="-120"/>
                         </a:rPr>
-                        <a:t>0.41%</a:t>
-                      </a:r>
-                      <a:endParaRPr lang="en-US" sz="500" dirty="0">
-                        <a:latin typeface="Calibri" charset="0"/>
-                        <a:ea typeface="Calibri" charset="0"/>
-                        <a:cs typeface="Calibri" charset="0"/>
-                      </a:endParaRPr>
-                    </a:p>
-                  </a:txBody>
-                  <a:tcPr marL="91440" marR="91440" marT="45720" marB="45720">
-                    <a:lnL w="2540" cap="flat" cmpd="sng" algn="ctr">
-                      <a:solidFill>
-                        <a:srgbClr val="EEEEEE"/>
-                      </a:solidFill>
-                      <a:prstDash val="solid"/>
-                      <a:round/>
-                      <a:headEnd type="none" w="med" len="med"/>
-                      <a:tailEnd type="none" w="med" len="med"/>
-                    </a:lnL>
-                    <a:lnR w="2540" cap="flat" cmpd="sng" algn="ctr">
-                      <a:solidFill>
-                        <a:srgbClr val="EEEEEE"/>
-                      </a:solidFill>
-                      <a:prstDash val="solid"/>
-                      <a:round/>
-                      <a:headEnd type="none" w="med" len="med"/>
-                      <a:tailEnd type="none" w="med" len="med"/>
-                    </a:lnR>
-                    <a:lnT w="2540" cap="flat" cmpd="sng" algn="ctr">
-                      <a:solidFill>
-                        <a:srgbClr val="EEEEEE"/>
-                      </a:solidFill>
-                      <a:prstDash val="solid"/>
-                      <a:round/>
-                      <a:headEnd type="none" w="med" len="med"/>
-                      <a:tailEnd type="none" w="med" len="med"/>
-                    </a:lnT>
-                    <a:lnB w="2540" cap="flat" cmpd="sng" algn="ctr">
-                      <a:solidFill>
-                        <a:srgbClr val="EEEEEE"/>
-                      </a:solidFill>
-                      <a:prstDash val="solid"/>
-                      <a:round/>
-                      <a:headEnd type="none" w="med" len="med"/>
-                      <a:tailEnd type="none" w="med" len="med"/>
-                    </a:lnB>
-                  </a:tcPr>
-                </a:tc>
-                <a:tc>
-                  <a:txBody>
-                    <a:bodyPr/>
-                    <a:lstStyle/>
-                    <a:p>
-                      <a:pPr algn="ctr" indent="0" marL="0">
-                        <a:buNone/>
-                      </a:pPr>
-                      <a:r>
-                        <a:rPr lang="en-US" sz="500" dirty="0">
-                          <a:solidFill>
-                            <a:srgbClr val="777777"/>
-                          </a:solidFill>
-                          <a:latin typeface="Calibri" pitchFamily="34" charset="0"/>
-                          <a:ea typeface="Calibri" pitchFamily="34" charset="-122"/>
-                          <a:cs typeface="Calibri" pitchFamily="34" charset="-120"/>
-                        </a:rPr>
-                        <a:t>0.40%</a:t>
-                      </a:r>
-                      <a:endParaRPr lang="en-US" sz="500" dirty="0">
-                        <a:latin typeface="Calibri" charset="0"/>
-                        <a:ea typeface="Calibri" charset="0"/>
-                        <a:cs typeface="Calibri" charset="0"/>
-                      </a:endParaRPr>
-                    </a:p>
-                  </a:txBody>
-                  <a:tcPr marL="91440" marR="91440" marT="45720" marB="45720">
-                    <a:lnL w="2540" cap="flat" cmpd="sng" algn="ctr">
-                      <a:solidFill>
-                        <a:srgbClr val="EEEEEE"/>
-                      </a:solidFill>
-                      <a:prstDash val="solid"/>
-                      <a:round/>
-                      <a:headEnd type="none" w="med" len="med"/>
-                      <a:tailEnd type="none" w="med" len="med"/>
-                    </a:lnL>
-                    <a:lnR w="2540" cap="flat" cmpd="sng" algn="ctr">
-                      <a:solidFill>
-                        <a:srgbClr val="EEEEEE"/>
-                      </a:solidFill>
-                      <a:prstDash val="solid"/>
-                      <a:round/>
-                      <a:headEnd type="none" w="med" len="med"/>
-                      <a:tailEnd type="none" w="med" len="med"/>
-                    </a:lnR>
-                    <a:lnT w="2540" cap="flat" cmpd="sng" algn="ctr">
-                      <a:solidFill>
-                        <a:srgbClr val="EEEEEE"/>
-                      </a:solidFill>
-                      <a:prstDash val="solid"/>
-                      <a:round/>
-                      <a:headEnd type="none" w="med" len="med"/>
-                      <a:tailEnd type="none" w="med" len="med"/>
-                    </a:lnT>
-                    <a:lnB w="2540" cap="flat" cmpd="sng" algn="ctr">
-                      <a:solidFill>
-                        <a:srgbClr val="EEEEEE"/>
-                      </a:solidFill>
-                      <a:prstDash val="solid"/>
-                      <a:round/>
-                      <a:headEnd type="none" w="med" len="med"/>
-                      <a:tailEnd type="none" w="med" len="med"/>
-                    </a:lnB>
-                  </a:tcPr>
-                </a:tc>
-                <a:tc>
-                  <a:txBody>
-                    <a:bodyPr/>
-                    <a:lstStyle/>
-                    <a:p>
-                      <a:pPr algn="ctr" indent="0" marL="0">
-                        <a:buNone/>
-                      </a:pPr>
-                      <a:r>
-                        <a:rPr lang="en-US" sz="500" dirty="0">
-                          <a:solidFill>
-                            <a:srgbClr val="777777"/>
-                          </a:solidFill>
-                          <a:latin typeface="Calibri" pitchFamily="34" charset="0"/>
-                          <a:ea typeface="Calibri" pitchFamily="34" charset="-122"/>
-                          <a:cs typeface="Calibri" pitchFamily="34" charset="-120"/>
-                        </a:rPr>
-                        <a:t>0.40%</a:t>
-                      </a:r>
-                      <a:endParaRPr lang="en-US" sz="500" dirty="0">
-                        <a:latin typeface="Calibri" charset="0"/>
-                        <a:ea typeface="Calibri" charset="0"/>
-                        <a:cs typeface="Calibri" charset="0"/>
-                      </a:endParaRPr>
-                    </a:p>
-                  </a:txBody>
-                  <a:tcPr marL="91440" marR="91440" marT="45720" marB="45720">
-                    <a:lnL w="2540" cap="flat" cmpd="sng" algn="ctr">
-                      <a:solidFill>
-                        <a:srgbClr val="EEEEEE"/>
-                      </a:solidFill>
-                      <a:prstDash val="solid"/>
-                      <a:round/>
-                      <a:headEnd type="none" w="med" len="med"/>
-                      <a:tailEnd type="none" w="med" len="med"/>
-                    </a:lnL>
-                    <a:lnR w="2540" cap="flat" cmpd="sng" algn="ctr">
-                      <a:solidFill>
-                        <a:srgbClr val="EEEEEE"/>
-                      </a:solidFill>
-                      <a:prstDash val="solid"/>
-                      <a:round/>
-                      <a:headEnd type="none" w="med" len="med"/>
-                      <a:tailEnd type="none" w="med" len="med"/>
-                    </a:lnR>
-                    <a:lnT w="2540" cap="flat" cmpd="sng" algn="ctr">
-                      <a:solidFill>
-                        <a:srgbClr val="EEEEEE"/>
-                      </a:solidFill>
-                      <a:prstDash val="solid"/>
-                      <a:round/>
-                      <a:headEnd type="none" w="med" len="med"/>
-                      <a:tailEnd type="none" w="med" len="med"/>
-                    </a:lnT>
-                    <a:lnB w="2540" cap="flat" cmpd="sng" algn="ctr">
-                      <a:solidFill>
-                        <a:srgbClr val="EEEEEE"/>
-                      </a:solidFill>
-                      <a:prstDash val="solid"/>
-                      <a:round/>
-                      <a:headEnd type="none" w="med" len="med"/>
-                      <a:tailEnd type="none" w="med" len="med"/>
-                    </a:lnB>
-                  </a:tcPr>
-                </a:tc>
-                <a:tc>
-                  <a:txBody>
-                    <a:bodyPr/>
-                    <a:lstStyle/>
-                    <a:p>
-                      <a:pPr algn="ctr" indent="0" marL="0">
-                        <a:buNone/>
-                      </a:pPr>
-                      <a:r>
-                        <a:rPr lang="en-US" sz="500" dirty="0">
-                          <a:solidFill>
-                            <a:srgbClr val="777777"/>
-                          </a:solidFill>
-                          <a:latin typeface="Calibri" pitchFamily="34" charset="0"/>
-                          <a:ea typeface="Calibri" pitchFamily="34" charset="-122"/>
-                          <a:cs typeface="Calibri" pitchFamily="34" charset="-120"/>
-                        </a:rPr>
-                        <a:t>0.40%</a:t>
-                      </a:r>
-                      <a:endParaRPr lang="en-US" sz="500" dirty="0">
-                        <a:latin typeface="Calibri" charset="0"/>
-                        <a:ea typeface="Calibri" charset="0"/>
-                        <a:cs typeface="Calibri" charset="0"/>
-                      </a:endParaRPr>
-                    </a:p>
-                  </a:txBody>
-                  <a:tcPr marL="91440" marR="91440" marT="45720" marB="45720">
-                    <a:lnL w="2540" cap="flat" cmpd="sng" algn="ctr">
-                      <a:solidFill>
-                        <a:srgbClr val="EEEEEE"/>
-                      </a:solidFill>
-                      <a:prstDash val="solid"/>
-                      <a:round/>
-                      <a:headEnd type="none" w="med" len="med"/>
-                      <a:tailEnd type="none" w="med" len="med"/>
-                    </a:lnL>
-                    <a:lnR w="2540" cap="flat" cmpd="sng" algn="ctr">
-                      <a:solidFill>
-                        <a:srgbClr val="EEEEEE"/>
-                      </a:solidFill>
-                      <a:prstDash val="solid"/>
-                      <a:round/>
-                      <a:headEnd type="none" w="med" len="med"/>
-                      <a:tailEnd type="none" w="med" len="med"/>
-                    </a:lnR>
-                    <a:lnT w="2540" cap="flat" cmpd="sng" algn="ctr">
-                      <a:solidFill>
-                        <a:srgbClr val="EEEEEE"/>
-                      </a:solidFill>
-                      <a:prstDash val="solid"/>
-                      <a:round/>
-                      <a:headEnd type="none" w="med" len="med"/>
-                      <a:tailEnd type="none" w="med" len="med"/>
-                    </a:lnT>
-                    <a:lnB w="2540" cap="flat" cmpd="sng" algn="ctr">
-                      <a:solidFill>
-                        <a:srgbClr val="EEEEEE"/>
-                      </a:solidFill>
-                      <a:prstDash val="solid"/>
-                      <a:round/>
-                      <a:headEnd type="none" w="med" len="med"/>
-                      <a:tailEnd type="none" w="med" len="med"/>
-                    </a:lnB>
-                  </a:tcPr>
-                </a:tc>
-                <a:tc>
-                  <a:txBody>
-                    <a:bodyPr/>
-                    <a:lstStyle/>
-                    <a:p>
-                      <a:pPr algn="ctr" indent="0" marL="0">
-                        <a:buNone/>
-                      </a:pPr>
-                      <a:r>
-                        <a:rPr lang="en-US" sz="500" dirty="0">
-                          <a:solidFill>
-                            <a:srgbClr val="777777"/>
-                          </a:solidFill>
-                          <a:latin typeface="Calibri" pitchFamily="34" charset="0"/>
-                          <a:ea typeface="Calibri" pitchFamily="34" charset="-122"/>
-                          <a:cs typeface="Calibri" pitchFamily="34" charset="-120"/>
-                        </a:rPr>
-                        <a:t>0.40%</a:t>
-                      </a:r>
-                      <a:endParaRPr lang="en-US" sz="500" dirty="0">
-                        <a:latin typeface="Calibri" charset="0"/>
-                        <a:ea typeface="Calibri" charset="0"/>
-                        <a:cs typeface="Calibri" charset="0"/>
-                      </a:endParaRPr>
-                    </a:p>
-                  </a:txBody>
-                  <a:tcPr marL="91440" marR="91440" marT="45720" marB="45720">
-                    <a:lnL w="2540" cap="flat" cmpd="sng" algn="ctr">
-                      <a:solidFill>
-                        <a:srgbClr val="EEEEEE"/>
-                      </a:solidFill>
-                      <a:prstDash val="solid"/>
-                      <a:round/>
-                      <a:headEnd type="none" w="med" len="med"/>
-                      <a:tailEnd type="none" w="med" len="med"/>
-                    </a:lnL>
-                    <a:lnR w="2540" cap="flat" cmpd="sng" algn="ctr">
-                      <a:solidFill>
-                        <a:srgbClr val="EEEEEE"/>
-                      </a:solidFill>
-                      <a:prstDash val="solid"/>
-                      <a:round/>
-                      <a:headEnd type="none" w="med" len="med"/>
-                      <a:tailEnd type="none" w="med" len="med"/>
-                    </a:lnR>
-                    <a:lnT w="2540" cap="flat" cmpd="sng" algn="ctr">
-                      <a:solidFill>
-                        <a:srgbClr val="EEEEEE"/>
-                      </a:solidFill>
-                      <a:prstDash val="solid"/>
-                      <a:round/>
-                      <a:headEnd type="none" w="med" len="med"/>
-                      <a:tailEnd type="none" w="med" len="med"/>
-                    </a:lnT>
-                    <a:lnB w="2540" cap="flat" cmpd="sng" algn="ctr">
-                      <a:solidFill>
-                        <a:srgbClr val="EEEEEE"/>
-                      </a:solidFill>
-                      <a:prstDash val="solid"/>
-                      <a:round/>
-                      <a:headEnd type="none" w="med" len="med"/>
-                      <a:tailEnd type="none" w="med" len="med"/>
-                    </a:lnB>
-                  </a:tcPr>
-                </a:tc>
-                <a:tc>
-                  <a:txBody>
-                    <a:bodyPr/>
-                    <a:lstStyle/>
-                    <a:p>
-                      <a:pPr algn="ctr" indent="0" marL="0">
-                        <a:buNone/>
-                      </a:pPr>
-                      <a:r>
-                        <a:rPr lang="en-US" sz="500" dirty="0">
-                          <a:solidFill>
-                            <a:srgbClr val="777777"/>
-                          </a:solidFill>
-                          <a:latin typeface="Calibri" pitchFamily="34" charset="0"/>
-                          <a:ea typeface="Calibri" pitchFamily="34" charset="-122"/>
-                          <a:cs typeface="Calibri" pitchFamily="34" charset="-120"/>
-                        </a:rPr>
-                        <a:t>0.39%</a:t>
-                      </a:r>
-                      <a:endParaRPr lang="en-US" sz="500" dirty="0">
-                        <a:latin typeface="Calibri" charset="0"/>
-                        <a:ea typeface="Calibri" charset="0"/>
-                        <a:cs typeface="Calibri" charset="0"/>
-                      </a:endParaRPr>
-                    </a:p>
-                  </a:txBody>
-                  <a:tcPr marL="91440" marR="91440" marT="45720" marB="45720">
-                    <a:lnL w="2540" cap="flat" cmpd="sng" algn="ctr">
-                      <a:solidFill>
-                        <a:srgbClr val="EEEEEE"/>
-                      </a:solidFill>
-                      <a:prstDash val="solid"/>
-                      <a:round/>
-                      <a:headEnd type="none" w="med" len="med"/>
-                      <a:tailEnd type="none" w="med" len="med"/>
-                    </a:lnL>
-                    <a:lnR w="2540" cap="flat" cmpd="sng" algn="ctr">
-                      <a:solidFill>
-                        <a:srgbClr val="EEEEEE"/>
-                      </a:solidFill>
-                      <a:prstDash val="solid"/>
-                      <a:round/>
-                      <a:headEnd type="none" w="med" len="med"/>
-                      <a:tailEnd type="none" w="med" len="med"/>
-                    </a:lnR>
-                    <a:lnT w="2540" cap="flat" cmpd="sng" algn="ctr">
-                      <a:solidFill>
-                        <a:srgbClr val="EEEEEE"/>
-                      </a:solidFill>
-                      <a:prstDash val="solid"/>
-                      <a:round/>
-                      <a:headEnd type="none" w="med" len="med"/>
-                      <a:tailEnd type="none" w="med" len="med"/>
-                    </a:lnT>
-                    <a:lnB w="2540" cap="flat" cmpd="sng" algn="ctr">
-                      <a:solidFill>
-                        <a:srgbClr val="EEEEEE"/>
-                      </a:solidFill>
-                      <a:prstDash val="solid"/>
-                      <a:round/>
-                      <a:headEnd type="none" w="med" len="med"/>
-                      <a:tailEnd type="none" w="med" len="med"/>
-                    </a:lnB>
-                  </a:tcPr>
-                </a:tc>
-                <a:tc>
-                  <a:txBody>
-                    <a:bodyPr/>
-                    <a:lstStyle/>
-                    <a:p>
-                      <a:pPr algn="ctr" indent="0" marL="0">
-                        <a:buNone/>
-                      </a:pPr>
-                      <a:r>
-                        <a:rPr lang="en-US" sz="500" b="1" dirty="0">
-                          <a:solidFill>
-                            <a:srgbClr val="777777"/>
-                          </a:solidFill>
-                          <a:latin typeface="Calibri" pitchFamily="34" charset="0"/>
-                          <a:ea typeface="Calibri" pitchFamily="34" charset="-122"/>
-                          <a:cs typeface="Calibri" pitchFamily="34" charset="-120"/>
-                        </a:rPr>
-                        <a:t>4.99%</a:t>
+                        <a:t>4.61%</a:t>
                       </a:r>
                       <a:endParaRPr lang="en-US" sz="500" dirty="0">
                         <a:latin typeface="Calibri" charset="0"/>
@@ -27408,7 +28884,7 @@
                           <a:ea typeface="Calibri" pitchFamily="34" charset="-122"/>
                           <a:cs typeface="Calibri" pitchFamily="34" charset="-120"/>
                         </a:rPr>
-                        <a:t>0.00%</a:t>
+                        <a:t>0.29%</a:t>
                       </a:r>
                       <a:endParaRPr lang="en-US" sz="500" dirty="0">
                         <a:latin typeface="Calibri" charset="0"/>
@@ -27473,6 +28949,461 @@
                           <a:ea typeface="Calibri" pitchFamily="34" charset="-122"/>
                           <a:cs typeface="Calibri" pitchFamily="34" charset="-120"/>
                         </a:rPr>
+                        <a:t>0.30%</a:t>
+                      </a:r>
+                      <a:endParaRPr lang="en-US" sz="500" dirty="0">
+                        <a:latin typeface="Calibri" charset="0"/>
+                        <a:ea typeface="Calibri" charset="0"/>
+                        <a:cs typeface="Calibri" charset="0"/>
+                      </a:endParaRPr>
+                    </a:p>
+                  </a:txBody>
+                  <a:tcPr marL="91440" marR="91440" marT="45720" marB="45720">
+                    <a:lnL w="2540" cap="flat" cmpd="sng" algn="ctr">
+                      <a:solidFill>
+                        <a:srgbClr val="EEEEEE"/>
+                      </a:solidFill>
+                      <a:prstDash val="solid"/>
+                      <a:round/>
+                      <a:headEnd type="none" w="med" len="med"/>
+                      <a:tailEnd type="none" w="med" len="med"/>
+                    </a:lnL>
+                    <a:lnR w="2540" cap="flat" cmpd="sng" algn="ctr">
+                      <a:solidFill>
+                        <a:srgbClr val="EEEEEE"/>
+                      </a:solidFill>
+                      <a:prstDash val="solid"/>
+                      <a:round/>
+                      <a:headEnd type="none" w="med" len="med"/>
+                      <a:tailEnd type="none" w="med" len="med"/>
+                    </a:lnR>
+                    <a:lnT w="2540" cap="flat" cmpd="sng" algn="ctr">
+                      <a:solidFill>
+                        <a:srgbClr val="EEEEEE"/>
+                      </a:solidFill>
+                      <a:prstDash val="solid"/>
+                      <a:round/>
+                      <a:headEnd type="none" w="med" len="med"/>
+                      <a:tailEnd type="none" w="med" len="med"/>
+                    </a:lnT>
+                    <a:lnB w="2540" cap="flat" cmpd="sng" algn="ctr">
+                      <a:solidFill>
+                        <a:srgbClr val="EEEEEE"/>
+                      </a:solidFill>
+                      <a:prstDash val="solid"/>
+                      <a:round/>
+                      <a:headEnd type="none" w="med" len="med"/>
+                      <a:tailEnd type="none" w="med" len="med"/>
+                    </a:lnB>
+                  </a:tcPr>
+                </a:tc>
+                <a:tc>
+                  <a:txBody>
+                    <a:bodyPr/>
+                    <a:lstStyle/>
+                    <a:p>
+                      <a:pPr algn="ctr" indent="0" marL="0">
+                        <a:buNone/>
+                      </a:pPr>
+                      <a:r>
+                        <a:rPr lang="en-US" sz="500" dirty="0">
+                          <a:solidFill>
+                            <a:srgbClr val="999999"/>
+                          </a:solidFill>
+                          <a:latin typeface="Calibri" pitchFamily="34" charset="0"/>
+                          <a:ea typeface="Calibri" pitchFamily="34" charset="-122"/>
+                          <a:cs typeface="Calibri" pitchFamily="34" charset="-120"/>
+                        </a:rPr>
+                        <a:t>0.30%</a:t>
+                      </a:r>
+                      <a:endParaRPr lang="en-US" sz="500" dirty="0">
+                        <a:latin typeface="Calibri" charset="0"/>
+                        <a:ea typeface="Calibri" charset="0"/>
+                        <a:cs typeface="Calibri" charset="0"/>
+                      </a:endParaRPr>
+                    </a:p>
+                  </a:txBody>
+                  <a:tcPr marL="91440" marR="91440" marT="45720" marB="45720">
+                    <a:lnL w="2540" cap="flat" cmpd="sng" algn="ctr">
+                      <a:solidFill>
+                        <a:srgbClr val="EEEEEE"/>
+                      </a:solidFill>
+                      <a:prstDash val="solid"/>
+                      <a:round/>
+                      <a:headEnd type="none" w="med" len="med"/>
+                      <a:tailEnd type="none" w="med" len="med"/>
+                    </a:lnL>
+                    <a:lnR w="2540" cap="flat" cmpd="sng" algn="ctr">
+                      <a:solidFill>
+                        <a:srgbClr val="EEEEEE"/>
+                      </a:solidFill>
+                      <a:prstDash val="solid"/>
+                      <a:round/>
+                      <a:headEnd type="none" w="med" len="med"/>
+                      <a:tailEnd type="none" w="med" len="med"/>
+                    </a:lnR>
+                    <a:lnT w="2540" cap="flat" cmpd="sng" algn="ctr">
+                      <a:solidFill>
+                        <a:srgbClr val="EEEEEE"/>
+                      </a:solidFill>
+                      <a:prstDash val="solid"/>
+                      <a:round/>
+                      <a:headEnd type="none" w="med" len="med"/>
+                      <a:tailEnd type="none" w="med" len="med"/>
+                    </a:lnT>
+                    <a:lnB w="2540" cap="flat" cmpd="sng" algn="ctr">
+                      <a:solidFill>
+                        <a:srgbClr val="EEEEEE"/>
+                      </a:solidFill>
+                      <a:prstDash val="solid"/>
+                      <a:round/>
+                      <a:headEnd type="none" w="med" len="med"/>
+                      <a:tailEnd type="none" w="med" len="med"/>
+                    </a:lnB>
+                  </a:tcPr>
+                </a:tc>
+                <a:tc>
+                  <a:txBody>
+                    <a:bodyPr/>
+                    <a:lstStyle/>
+                    <a:p>
+                      <a:pPr algn="ctr" indent="0" marL="0">
+                        <a:buNone/>
+                      </a:pPr>
+                      <a:r>
+                        <a:rPr lang="en-US" sz="500" dirty="0">
+                          <a:solidFill>
+                            <a:srgbClr val="999999"/>
+                          </a:solidFill>
+                          <a:latin typeface="Calibri" pitchFamily="34" charset="0"/>
+                          <a:ea typeface="Calibri" pitchFamily="34" charset="-122"/>
+                          <a:cs typeface="Calibri" pitchFamily="34" charset="-120"/>
+                        </a:rPr>
+                        <a:t>0.30%</a:t>
+                      </a:r>
+                      <a:endParaRPr lang="en-US" sz="500" dirty="0">
+                        <a:latin typeface="Calibri" charset="0"/>
+                        <a:ea typeface="Calibri" charset="0"/>
+                        <a:cs typeface="Calibri" charset="0"/>
+                      </a:endParaRPr>
+                    </a:p>
+                  </a:txBody>
+                  <a:tcPr marL="91440" marR="91440" marT="45720" marB="45720">
+                    <a:lnL w="2540" cap="flat" cmpd="sng" algn="ctr">
+                      <a:solidFill>
+                        <a:srgbClr val="EEEEEE"/>
+                      </a:solidFill>
+                      <a:prstDash val="solid"/>
+                      <a:round/>
+                      <a:headEnd type="none" w="med" len="med"/>
+                      <a:tailEnd type="none" w="med" len="med"/>
+                    </a:lnL>
+                    <a:lnR w="2540" cap="flat" cmpd="sng" algn="ctr">
+                      <a:solidFill>
+                        <a:srgbClr val="EEEEEE"/>
+                      </a:solidFill>
+                      <a:prstDash val="solid"/>
+                      <a:round/>
+                      <a:headEnd type="none" w="med" len="med"/>
+                      <a:tailEnd type="none" w="med" len="med"/>
+                    </a:lnR>
+                    <a:lnT w="2540" cap="flat" cmpd="sng" algn="ctr">
+                      <a:solidFill>
+                        <a:srgbClr val="EEEEEE"/>
+                      </a:solidFill>
+                      <a:prstDash val="solid"/>
+                      <a:round/>
+                      <a:headEnd type="none" w="med" len="med"/>
+                      <a:tailEnd type="none" w="med" len="med"/>
+                    </a:lnT>
+                    <a:lnB w="2540" cap="flat" cmpd="sng" algn="ctr">
+                      <a:solidFill>
+                        <a:srgbClr val="EEEEEE"/>
+                      </a:solidFill>
+                      <a:prstDash val="solid"/>
+                      <a:round/>
+                      <a:headEnd type="none" w="med" len="med"/>
+                      <a:tailEnd type="none" w="med" len="med"/>
+                    </a:lnB>
+                  </a:tcPr>
+                </a:tc>
+                <a:tc>
+                  <a:txBody>
+                    <a:bodyPr/>
+                    <a:lstStyle/>
+                    <a:p>
+                      <a:pPr algn="ctr" indent="0" marL="0">
+                        <a:buNone/>
+                      </a:pPr>
+                      <a:r>
+                        <a:rPr lang="en-US" sz="500" dirty="0">
+                          <a:solidFill>
+                            <a:srgbClr val="999999"/>
+                          </a:solidFill>
+                          <a:latin typeface="Calibri" pitchFamily="34" charset="0"/>
+                          <a:ea typeface="Calibri" pitchFamily="34" charset="-122"/>
+                          <a:cs typeface="Calibri" pitchFamily="34" charset="-120"/>
+                        </a:rPr>
+                        <a:t>0.30%</a:t>
+                      </a:r>
+                      <a:endParaRPr lang="en-US" sz="500" dirty="0">
+                        <a:latin typeface="Calibri" charset="0"/>
+                        <a:ea typeface="Calibri" charset="0"/>
+                        <a:cs typeface="Calibri" charset="0"/>
+                      </a:endParaRPr>
+                    </a:p>
+                  </a:txBody>
+                  <a:tcPr marL="91440" marR="91440" marT="45720" marB="45720">
+                    <a:lnL w="2540" cap="flat" cmpd="sng" algn="ctr">
+                      <a:solidFill>
+                        <a:srgbClr val="EEEEEE"/>
+                      </a:solidFill>
+                      <a:prstDash val="solid"/>
+                      <a:round/>
+                      <a:headEnd type="none" w="med" len="med"/>
+                      <a:tailEnd type="none" w="med" len="med"/>
+                    </a:lnL>
+                    <a:lnR w="2540" cap="flat" cmpd="sng" algn="ctr">
+                      <a:solidFill>
+                        <a:srgbClr val="EEEEEE"/>
+                      </a:solidFill>
+                      <a:prstDash val="solid"/>
+                      <a:round/>
+                      <a:headEnd type="none" w="med" len="med"/>
+                      <a:tailEnd type="none" w="med" len="med"/>
+                    </a:lnR>
+                    <a:lnT w="2540" cap="flat" cmpd="sng" algn="ctr">
+                      <a:solidFill>
+                        <a:srgbClr val="EEEEEE"/>
+                      </a:solidFill>
+                      <a:prstDash val="solid"/>
+                      <a:round/>
+                      <a:headEnd type="none" w="med" len="med"/>
+                      <a:tailEnd type="none" w="med" len="med"/>
+                    </a:lnT>
+                    <a:lnB w="2540" cap="flat" cmpd="sng" algn="ctr">
+                      <a:solidFill>
+                        <a:srgbClr val="EEEEEE"/>
+                      </a:solidFill>
+                      <a:prstDash val="solid"/>
+                      <a:round/>
+                      <a:headEnd type="none" w="med" len="med"/>
+                      <a:tailEnd type="none" w="med" len="med"/>
+                    </a:lnB>
+                  </a:tcPr>
+                </a:tc>
+                <a:tc>
+                  <a:txBody>
+                    <a:bodyPr/>
+                    <a:lstStyle/>
+                    <a:p>
+                      <a:pPr algn="ctr" indent="0" marL="0">
+                        <a:buNone/>
+                      </a:pPr>
+                      <a:r>
+                        <a:rPr lang="en-US" sz="500" dirty="0">
+                          <a:solidFill>
+                            <a:srgbClr val="999999"/>
+                          </a:solidFill>
+                          <a:latin typeface="Calibri" pitchFamily="34" charset="0"/>
+                          <a:ea typeface="Calibri" pitchFamily="34" charset="-122"/>
+                          <a:cs typeface="Calibri" pitchFamily="34" charset="-120"/>
+                        </a:rPr>
+                        <a:t>0.30%</a:t>
+                      </a:r>
+                      <a:endParaRPr lang="en-US" sz="500" dirty="0">
+                        <a:latin typeface="Calibri" charset="0"/>
+                        <a:ea typeface="Calibri" charset="0"/>
+                        <a:cs typeface="Calibri" charset="0"/>
+                      </a:endParaRPr>
+                    </a:p>
+                  </a:txBody>
+                  <a:tcPr marL="91440" marR="91440" marT="45720" marB="45720">
+                    <a:lnL w="2540" cap="flat" cmpd="sng" algn="ctr">
+                      <a:solidFill>
+                        <a:srgbClr val="EEEEEE"/>
+                      </a:solidFill>
+                      <a:prstDash val="solid"/>
+                      <a:round/>
+                      <a:headEnd type="none" w="med" len="med"/>
+                      <a:tailEnd type="none" w="med" len="med"/>
+                    </a:lnL>
+                    <a:lnR w="2540" cap="flat" cmpd="sng" algn="ctr">
+                      <a:solidFill>
+                        <a:srgbClr val="EEEEEE"/>
+                      </a:solidFill>
+                      <a:prstDash val="solid"/>
+                      <a:round/>
+                      <a:headEnd type="none" w="med" len="med"/>
+                      <a:tailEnd type="none" w="med" len="med"/>
+                    </a:lnR>
+                    <a:lnT w="2540" cap="flat" cmpd="sng" algn="ctr">
+                      <a:solidFill>
+                        <a:srgbClr val="EEEEEE"/>
+                      </a:solidFill>
+                      <a:prstDash val="solid"/>
+                      <a:round/>
+                      <a:headEnd type="none" w="med" len="med"/>
+                      <a:tailEnd type="none" w="med" len="med"/>
+                    </a:lnT>
+                    <a:lnB w="2540" cap="flat" cmpd="sng" algn="ctr">
+                      <a:solidFill>
+                        <a:srgbClr val="EEEEEE"/>
+                      </a:solidFill>
+                      <a:prstDash val="solid"/>
+                      <a:round/>
+                      <a:headEnd type="none" w="med" len="med"/>
+                      <a:tailEnd type="none" w="med" len="med"/>
+                    </a:lnB>
+                  </a:tcPr>
+                </a:tc>
+                <a:tc>
+                  <a:txBody>
+                    <a:bodyPr/>
+                    <a:lstStyle/>
+                    <a:p>
+                      <a:pPr algn="ctr" indent="0" marL="0">
+                        <a:buNone/>
+                      </a:pPr>
+                      <a:r>
+                        <a:rPr lang="en-US" sz="500" dirty="0">
+                          <a:solidFill>
+                            <a:srgbClr val="999999"/>
+                          </a:solidFill>
+                          <a:latin typeface="Calibri" pitchFamily="34" charset="0"/>
+                          <a:ea typeface="Calibri" pitchFamily="34" charset="-122"/>
+                          <a:cs typeface="Calibri" pitchFamily="34" charset="-120"/>
+                        </a:rPr>
+                        <a:t>0.29%</a:t>
+                      </a:r>
+                      <a:endParaRPr lang="en-US" sz="500" dirty="0">
+                        <a:latin typeface="Calibri" charset="0"/>
+                        <a:ea typeface="Calibri" charset="0"/>
+                        <a:cs typeface="Calibri" charset="0"/>
+                      </a:endParaRPr>
+                    </a:p>
+                  </a:txBody>
+                  <a:tcPr marL="91440" marR="91440" marT="45720" marB="45720">
+                    <a:lnL w="2540" cap="flat" cmpd="sng" algn="ctr">
+                      <a:solidFill>
+                        <a:srgbClr val="EEEEEE"/>
+                      </a:solidFill>
+                      <a:prstDash val="solid"/>
+                      <a:round/>
+                      <a:headEnd type="none" w="med" len="med"/>
+                      <a:tailEnd type="none" w="med" len="med"/>
+                    </a:lnL>
+                    <a:lnR w="2540" cap="flat" cmpd="sng" algn="ctr">
+                      <a:solidFill>
+                        <a:srgbClr val="EEEEEE"/>
+                      </a:solidFill>
+                      <a:prstDash val="solid"/>
+                      <a:round/>
+                      <a:headEnd type="none" w="med" len="med"/>
+                      <a:tailEnd type="none" w="med" len="med"/>
+                    </a:lnR>
+                    <a:lnT w="2540" cap="flat" cmpd="sng" algn="ctr">
+                      <a:solidFill>
+                        <a:srgbClr val="EEEEEE"/>
+                      </a:solidFill>
+                      <a:prstDash val="solid"/>
+                      <a:round/>
+                      <a:headEnd type="none" w="med" len="med"/>
+                      <a:tailEnd type="none" w="med" len="med"/>
+                    </a:lnT>
+                    <a:lnB w="2540" cap="flat" cmpd="sng" algn="ctr">
+                      <a:solidFill>
+                        <a:srgbClr val="EEEEEE"/>
+                      </a:solidFill>
+                      <a:prstDash val="solid"/>
+                      <a:round/>
+                      <a:headEnd type="none" w="med" len="med"/>
+                      <a:tailEnd type="none" w="med" len="med"/>
+                    </a:lnB>
+                  </a:tcPr>
+                </a:tc>
+                <a:tc>
+                  <a:txBody>
+                    <a:bodyPr/>
+                    <a:lstStyle/>
+                    <a:p>
+                      <a:pPr algn="ctr" indent="0" marL="0">
+                        <a:buNone/>
+                      </a:pPr>
+                      <a:r>
+                        <a:rPr lang="en-US" sz="500" dirty="0">
+                          <a:solidFill>
+                            <a:srgbClr val="999999"/>
+                          </a:solidFill>
+                          <a:latin typeface="Calibri" pitchFamily="34" charset="0"/>
+                          <a:ea typeface="Calibri" pitchFamily="34" charset="-122"/>
+                          <a:cs typeface="Calibri" pitchFamily="34" charset="-120"/>
+                        </a:rPr>
+                        <a:t>0.29%</a:t>
+                      </a:r>
+                      <a:endParaRPr lang="en-US" sz="500" dirty="0">
+                        <a:latin typeface="Calibri" charset="0"/>
+                        <a:ea typeface="Calibri" charset="0"/>
+                        <a:cs typeface="Calibri" charset="0"/>
+                      </a:endParaRPr>
+                    </a:p>
+                  </a:txBody>
+                  <a:tcPr marL="91440" marR="91440" marT="45720" marB="45720">
+                    <a:lnL w="2540" cap="flat" cmpd="sng" algn="ctr">
+                      <a:solidFill>
+                        <a:srgbClr val="EEEEEE"/>
+                      </a:solidFill>
+                      <a:prstDash val="solid"/>
+                      <a:round/>
+                      <a:headEnd type="none" w="med" len="med"/>
+                      <a:tailEnd type="none" w="med" len="med"/>
+                    </a:lnL>
+                    <a:lnR w="2540" cap="flat" cmpd="sng" algn="ctr">
+                      <a:solidFill>
+                        <a:srgbClr val="EEEEEE"/>
+                      </a:solidFill>
+                      <a:prstDash val="solid"/>
+                      <a:round/>
+                      <a:headEnd type="none" w="med" len="med"/>
+                      <a:tailEnd type="none" w="med" len="med"/>
+                    </a:lnR>
+                    <a:lnT w="2540" cap="flat" cmpd="sng" algn="ctr">
+                      <a:solidFill>
+                        <a:srgbClr val="EEEEEE"/>
+                      </a:solidFill>
+                      <a:prstDash val="solid"/>
+                      <a:round/>
+                      <a:headEnd type="none" w="med" len="med"/>
+                      <a:tailEnd type="none" w="med" len="med"/>
+                    </a:lnT>
+                    <a:lnB w="2540" cap="flat" cmpd="sng" algn="ctr">
+                      <a:solidFill>
+                        <a:srgbClr val="EEEEEE"/>
+                      </a:solidFill>
+                      <a:prstDash val="solid"/>
+                      <a:round/>
+                      <a:headEnd type="none" w="med" len="med"/>
+                      <a:tailEnd type="none" w="med" len="med"/>
+                    </a:lnB>
+                  </a:tcPr>
+                </a:tc>
+                <a:tc>
+                  <a:txBody>
+                    <a:bodyPr/>
+                    <a:lstStyle/>
+                    <a:p>
+                      <a:pPr algn="ctr" indent="0" marL="0">
+                        <a:buNone/>
+                      </a:pPr>
+                      <a:r>
+                        <a:rPr lang="en-US" sz="500" dirty="0">
+                          <a:solidFill>
+                            <a:srgbClr val="999999"/>
+                          </a:solidFill>
+                          <a:latin typeface="Calibri" pitchFamily="34" charset="0"/>
+                          <a:ea typeface="Calibri" pitchFamily="34" charset="-122"/>
+                          <a:cs typeface="Calibri" pitchFamily="34" charset="-120"/>
+                        </a:rPr>
                         <a:t>0.28%</a:t>
                       </a:r>
                       <a:endParaRPr lang="en-US" sz="500" dirty="0">
@@ -27538,7 +29469,7 @@
                           <a:ea typeface="Calibri" pitchFamily="34" charset="-122"/>
                           <a:cs typeface="Calibri" pitchFamily="34" charset="-120"/>
                         </a:rPr>
-                        <a:t>0.31%</a:t>
+                        <a:t>0.28%</a:t>
                       </a:r>
                       <a:endParaRPr lang="en-US" sz="500" dirty="0">
                         <a:latin typeface="Calibri" charset="0"/>
@@ -27603,7 +29534,7 @@
                           <a:ea typeface="Calibri" pitchFamily="34" charset="-122"/>
                           <a:cs typeface="Calibri" pitchFamily="34" charset="-120"/>
                         </a:rPr>
-                        <a:t>0.30%</a:t>
+                        <a:t>0.28%</a:t>
                       </a:r>
                       <a:endParaRPr lang="en-US" sz="500" dirty="0">
                         <a:latin typeface="Calibri" charset="0"/>
@@ -27668,462 +29599,7 @@
                           <a:ea typeface="Calibri" pitchFamily="34" charset="-122"/>
                           <a:cs typeface="Calibri" pitchFamily="34" charset="-120"/>
                         </a:rPr>
-                        <a:t>0.31%</a:t>
-                      </a:r>
-                      <a:endParaRPr lang="en-US" sz="500" dirty="0">
-                        <a:latin typeface="Calibri" charset="0"/>
-                        <a:ea typeface="Calibri" charset="0"/>
-                        <a:cs typeface="Calibri" charset="0"/>
-                      </a:endParaRPr>
-                    </a:p>
-                  </a:txBody>
-                  <a:tcPr marL="91440" marR="91440" marT="45720" marB="45720">
-                    <a:lnL w="2540" cap="flat" cmpd="sng" algn="ctr">
-                      <a:solidFill>
-                        <a:srgbClr val="EEEEEE"/>
-                      </a:solidFill>
-                      <a:prstDash val="solid"/>
-                      <a:round/>
-                      <a:headEnd type="none" w="med" len="med"/>
-                      <a:tailEnd type="none" w="med" len="med"/>
-                    </a:lnL>
-                    <a:lnR w="2540" cap="flat" cmpd="sng" algn="ctr">
-                      <a:solidFill>
-                        <a:srgbClr val="EEEEEE"/>
-                      </a:solidFill>
-                      <a:prstDash val="solid"/>
-                      <a:round/>
-                      <a:headEnd type="none" w="med" len="med"/>
-                      <a:tailEnd type="none" w="med" len="med"/>
-                    </a:lnR>
-                    <a:lnT w="2540" cap="flat" cmpd="sng" algn="ctr">
-                      <a:solidFill>
-                        <a:srgbClr val="EEEEEE"/>
-                      </a:solidFill>
-                      <a:prstDash val="solid"/>
-                      <a:round/>
-                      <a:headEnd type="none" w="med" len="med"/>
-                      <a:tailEnd type="none" w="med" len="med"/>
-                    </a:lnT>
-                    <a:lnB w="2540" cap="flat" cmpd="sng" algn="ctr">
-                      <a:solidFill>
-                        <a:srgbClr val="EEEEEE"/>
-                      </a:solidFill>
-                      <a:prstDash val="solid"/>
-                      <a:round/>
-                      <a:headEnd type="none" w="med" len="med"/>
-                      <a:tailEnd type="none" w="med" len="med"/>
-                    </a:lnB>
-                  </a:tcPr>
-                </a:tc>
-                <a:tc>
-                  <a:txBody>
-                    <a:bodyPr/>
-                    <a:lstStyle/>
-                    <a:p>
-                      <a:pPr algn="ctr" indent="0" marL="0">
-                        <a:buNone/>
-                      </a:pPr>
-                      <a:r>
-                        <a:rPr lang="en-US" sz="500" dirty="0">
-                          <a:solidFill>
-                            <a:srgbClr val="999999"/>
-                          </a:solidFill>
-                          <a:latin typeface="Calibri" pitchFamily="34" charset="0"/>
-                          <a:ea typeface="Calibri" pitchFamily="34" charset="-122"/>
-                          <a:cs typeface="Calibri" pitchFamily="34" charset="-120"/>
-                        </a:rPr>
-                        <a:t>0.30%</a:t>
-                      </a:r>
-                      <a:endParaRPr lang="en-US" sz="500" dirty="0">
-                        <a:latin typeface="Calibri" charset="0"/>
-                        <a:ea typeface="Calibri" charset="0"/>
-                        <a:cs typeface="Calibri" charset="0"/>
-                      </a:endParaRPr>
-                    </a:p>
-                  </a:txBody>
-                  <a:tcPr marL="91440" marR="91440" marT="45720" marB="45720">
-                    <a:lnL w="2540" cap="flat" cmpd="sng" algn="ctr">
-                      <a:solidFill>
-                        <a:srgbClr val="EEEEEE"/>
-                      </a:solidFill>
-                      <a:prstDash val="solid"/>
-                      <a:round/>
-                      <a:headEnd type="none" w="med" len="med"/>
-                      <a:tailEnd type="none" w="med" len="med"/>
-                    </a:lnL>
-                    <a:lnR w="2540" cap="flat" cmpd="sng" algn="ctr">
-                      <a:solidFill>
-                        <a:srgbClr val="EEEEEE"/>
-                      </a:solidFill>
-                      <a:prstDash val="solid"/>
-                      <a:round/>
-                      <a:headEnd type="none" w="med" len="med"/>
-                      <a:tailEnd type="none" w="med" len="med"/>
-                    </a:lnR>
-                    <a:lnT w="2540" cap="flat" cmpd="sng" algn="ctr">
-                      <a:solidFill>
-                        <a:srgbClr val="EEEEEE"/>
-                      </a:solidFill>
-                      <a:prstDash val="solid"/>
-                      <a:round/>
-                      <a:headEnd type="none" w="med" len="med"/>
-                      <a:tailEnd type="none" w="med" len="med"/>
-                    </a:lnT>
-                    <a:lnB w="2540" cap="flat" cmpd="sng" algn="ctr">
-                      <a:solidFill>
-                        <a:srgbClr val="EEEEEE"/>
-                      </a:solidFill>
-                      <a:prstDash val="solid"/>
-                      <a:round/>
-                      <a:headEnd type="none" w="med" len="med"/>
-                      <a:tailEnd type="none" w="med" len="med"/>
-                    </a:lnB>
-                  </a:tcPr>
-                </a:tc>
-                <a:tc>
-                  <a:txBody>
-                    <a:bodyPr/>
-                    <a:lstStyle/>
-                    <a:p>
-                      <a:pPr algn="ctr" indent="0" marL="0">
-                        <a:buNone/>
-                      </a:pPr>
-                      <a:r>
-                        <a:rPr lang="en-US" sz="500" dirty="0">
-                          <a:solidFill>
-                            <a:srgbClr val="999999"/>
-                          </a:solidFill>
-                          <a:latin typeface="Calibri" pitchFamily="34" charset="0"/>
-                          <a:ea typeface="Calibri" pitchFamily="34" charset="-122"/>
-                          <a:cs typeface="Calibri" pitchFamily="34" charset="-120"/>
-                        </a:rPr>
-                        <a:t>0.30%</a:t>
-                      </a:r>
-                      <a:endParaRPr lang="en-US" sz="500" dirty="0">
-                        <a:latin typeface="Calibri" charset="0"/>
-                        <a:ea typeface="Calibri" charset="0"/>
-                        <a:cs typeface="Calibri" charset="0"/>
-                      </a:endParaRPr>
-                    </a:p>
-                  </a:txBody>
-                  <a:tcPr marL="91440" marR="91440" marT="45720" marB="45720">
-                    <a:lnL w="2540" cap="flat" cmpd="sng" algn="ctr">
-                      <a:solidFill>
-                        <a:srgbClr val="EEEEEE"/>
-                      </a:solidFill>
-                      <a:prstDash val="solid"/>
-                      <a:round/>
-                      <a:headEnd type="none" w="med" len="med"/>
-                      <a:tailEnd type="none" w="med" len="med"/>
-                    </a:lnL>
-                    <a:lnR w="2540" cap="flat" cmpd="sng" algn="ctr">
-                      <a:solidFill>
-                        <a:srgbClr val="EEEEEE"/>
-                      </a:solidFill>
-                      <a:prstDash val="solid"/>
-                      <a:round/>
-                      <a:headEnd type="none" w="med" len="med"/>
-                      <a:tailEnd type="none" w="med" len="med"/>
-                    </a:lnR>
-                    <a:lnT w="2540" cap="flat" cmpd="sng" algn="ctr">
-                      <a:solidFill>
-                        <a:srgbClr val="EEEEEE"/>
-                      </a:solidFill>
-                      <a:prstDash val="solid"/>
-                      <a:round/>
-                      <a:headEnd type="none" w="med" len="med"/>
-                      <a:tailEnd type="none" w="med" len="med"/>
-                    </a:lnT>
-                    <a:lnB w="2540" cap="flat" cmpd="sng" algn="ctr">
-                      <a:solidFill>
-                        <a:srgbClr val="EEEEEE"/>
-                      </a:solidFill>
-                      <a:prstDash val="solid"/>
-                      <a:round/>
-                      <a:headEnd type="none" w="med" len="med"/>
-                      <a:tailEnd type="none" w="med" len="med"/>
-                    </a:lnB>
-                  </a:tcPr>
-                </a:tc>
-                <a:tc>
-                  <a:txBody>
-                    <a:bodyPr/>
-                    <a:lstStyle/>
-                    <a:p>
-                      <a:pPr algn="ctr" indent="0" marL="0">
-                        <a:buNone/>
-                      </a:pPr>
-                      <a:r>
-                        <a:rPr lang="en-US" sz="500" dirty="0">
-                          <a:solidFill>
-                            <a:srgbClr val="999999"/>
-                          </a:solidFill>
-                          <a:latin typeface="Calibri" pitchFamily="34" charset="0"/>
-                          <a:ea typeface="Calibri" pitchFamily="34" charset="-122"/>
-                          <a:cs typeface="Calibri" pitchFamily="34" charset="-120"/>
-                        </a:rPr>
-                        <a:t>0.30%</a:t>
-                      </a:r>
-                      <a:endParaRPr lang="en-US" sz="500" dirty="0">
-                        <a:latin typeface="Calibri" charset="0"/>
-                        <a:ea typeface="Calibri" charset="0"/>
-                        <a:cs typeface="Calibri" charset="0"/>
-                      </a:endParaRPr>
-                    </a:p>
-                  </a:txBody>
-                  <a:tcPr marL="91440" marR="91440" marT="45720" marB="45720">
-                    <a:lnL w="2540" cap="flat" cmpd="sng" algn="ctr">
-                      <a:solidFill>
-                        <a:srgbClr val="EEEEEE"/>
-                      </a:solidFill>
-                      <a:prstDash val="solid"/>
-                      <a:round/>
-                      <a:headEnd type="none" w="med" len="med"/>
-                      <a:tailEnd type="none" w="med" len="med"/>
-                    </a:lnL>
-                    <a:lnR w="2540" cap="flat" cmpd="sng" algn="ctr">
-                      <a:solidFill>
-                        <a:srgbClr val="EEEEEE"/>
-                      </a:solidFill>
-                      <a:prstDash val="solid"/>
-                      <a:round/>
-                      <a:headEnd type="none" w="med" len="med"/>
-                      <a:tailEnd type="none" w="med" len="med"/>
-                    </a:lnR>
-                    <a:lnT w="2540" cap="flat" cmpd="sng" algn="ctr">
-                      <a:solidFill>
-                        <a:srgbClr val="EEEEEE"/>
-                      </a:solidFill>
-                      <a:prstDash val="solid"/>
-                      <a:round/>
-                      <a:headEnd type="none" w="med" len="med"/>
-                      <a:tailEnd type="none" w="med" len="med"/>
-                    </a:lnT>
-                    <a:lnB w="2540" cap="flat" cmpd="sng" algn="ctr">
-                      <a:solidFill>
-                        <a:srgbClr val="EEEEEE"/>
-                      </a:solidFill>
-                      <a:prstDash val="solid"/>
-                      <a:round/>
-                      <a:headEnd type="none" w="med" len="med"/>
-                      <a:tailEnd type="none" w="med" len="med"/>
-                    </a:lnB>
-                  </a:tcPr>
-                </a:tc>
-                <a:tc>
-                  <a:txBody>
-                    <a:bodyPr/>
-                    <a:lstStyle/>
-                    <a:p>
-                      <a:pPr algn="ctr" indent="0" marL="0">
-                        <a:buNone/>
-                      </a:pPr>
-                      <a:r>
-                        <a:rPr lang="en-US" sz="500" dirty="0">
-                          <a:solidFill>
-                            <a:srgbClr val="999999"/>
-                          </a:solidFill>
-                          <a:latin typeface="Calibri" pitchFamily="34" charset="0"/>
-                          <a:ea typeface="Calibri" pitchFamily="34" charset="-122"/>
-                          <a:cs typeface="Calibri" pitchFamily="34" charset="-120"/>
-                        </a:rPr>
-                        <a:t>0.28%</a:t>
-                      </a:r>
-                      <a:endParaRPr lang="en-US" sz="500" dirty="0">
-                        <a:latin typeface="Calibri" charset="0"/>
-                        <a:ea typeface="Calibri" charset="0"/>
-                        <a:cs typeface="Calibri" charset="0"/>
-                      </a:endParaRPr>
-                    </a:p>
-                  </a:txBody>
-                  <a:tcPr marL="91440" marR="91440" marT="45720" marB="45720">
-                    <a:lnL w="2540" cap="flat" cmpd="sng" algn="ctr">
-                      <a:solidFill>
-                        <a:srgbClr val="EEEEEE"/>
-                      </a:solidFill>
-                      <a:prstDash val="solid"/>
-                      <a:round/>
-                      <a:headEnd type="none" w="med" len="med"/>
-                      <a:tailEnd type="none" w="med" len="med"/>
-                    </a:lnL>
-                    <a:lnR w="2540" cap="flat" cmpd="sng" algn="ctr">
-                      <a:solidFill>
-                        <a:srgbClr val="EEEEEE"/>
-                      </a:solidFill>
-                      <a:prstDash val="solid"/>
-                      <a:round/>
-                      <a:headEnd type="none" w="med" len="med"/>
-                      <a:tailEnd type="none" w="med" len="med"/>
-                    </a:lnR>
-                    <a:lnT w="2540" cap="flat" cmpd="sng" algn="ctr">
-                      <a:solidFill>
-                        <a:srgbClr val="EEEEEE"/>
-                      </a:solidFill>
-                      <a:prstDash val="solid"/>
-                      <a:round/>
-                      <a:headEnd type="none" w="med" len="med"/>
-                      <a:tailEnd type="none" w="med" len="med"/>
-                    </a:lnT>
-                    <a:lnB w="2540" cap="flat" cmpd="sng" algn="ctr">
-                      <a:solidFill>
-                        <a:srgbClr val="EEEEEE"/>
-                      </a:solidFill>
-                      <a:prstDash val="solid"/>
-                      <a:round/>
-                      <a:headEnd type="none" w="med" len="med"/>
-                      <a:tailEnd type="none" w="med" len="med"/>
-                    </a:lnB>
-                  </a:tcPr>
-                </a:tc>
-                <a:tc>
-                  <a:txBody>
-                    <a:bodyPr/>
-                    <a:lstStyle/>
-                    <a:p>
-                      <a:pPr algn="ctr" indent="0" marL="0">
-                        <a:buNone/>
-                      </a:pPr>
-                      <a:r>
-                        <a:rPr lang="en-US" sz="500" dirty="0">
-                          <a:solidFill>
-                            <a:srgbClr val="999999"/>
-                          </a:solidFill>
-                          <a:latin typeface="Calibri" pitchFamily="34" charset="0"/>
-                          <a:ea typeface="Calibri" pitchFamily="34" charset="-122"/>
-                          <a:cs typeface="Calibri" pitchFamily="34" charset="-120"/>
-                        </a:rPr>
-                        <a:t>0.29%</a:t>
-                      </a:r>
-                      <a:endParaRPr lang="en-US" sz="500" dirty="0">
-                        <a:latin typeface="Calibri" charset="0"/>
-                        <a:ea typeface="Calibri" charset="0"/>
-                        <a:cs typeface="Calibri" charset="0"/>
-                      </a:endParaRPr>
-                    </a:p>
-                  </a:txBody>
-                  <a:tcPr marL="91440" marR="91440" marT="45720" marB="45720">
-                    <a:lnL w="2540" cap="flat" cmpd="sng" algn="ctr">
-                      <a:solidFill>
-                        <a:srgbClr val="EEEEEE"/>
-                      </a:solidFill>
-                      <a:prstDash val="solid"/>
-                      <a:round/>
-                      <a:headEnd type="none" w="med" len="med"/>
-                      <a:tailEnd type="none" w="med" len="med"/>
-                    </a:lnL>
-                    <a:lnR w="2540" cap="flat" cmpd="sng" algn="ctr">
-                      <a:solidFill>
-                        <a:srgbClr val="EEEEEE"/>
-                      </a:solidFill>
-                      <a:prstDash val="solid"/>
-                      <a:round/>
-                      <a:headEnd type="none" w="med" len="med"/>
-                      <a:tailEnd type="none" w="med" len="med"/>
-                    </a:lnR>
-                    <a:lnT w="2540" cap="flat" cmpd="sng" algn="ctr">
-                      <a:solidFill>
-                        <a:srgbClr val="EEEEEE"/>
-                      </a:solidFill>
-                      <a:prstDash val="solid"/>
-                      <a:round/>
-                      <a:headEnd type="none" w="med" len="med"/>
-                      <a:tailEnd type="none" w="med" len="med"/>
-                    </a:lnT>
-                    <a:lnB w="2540" cap="flat" cmpd="sng" algn="ctr">
-                      <a:solidFill>
-                        <a:srgbClr val="EEEEEE"/>
-                      </a:solidFill>
-                      <a:prstDash val="solid"/>
-                      <a:round/>
-                      <a:headEnd type="none" w="med" len="med"/>
-                      <a:tailEnd type="none" w="med" len="med"/>
-                    </a:lnB>
-                  </a:tcPr>
-                </a:tc>
-                <a:tc>
-                  <a:txBody>
-                    <a:bodyPr/>
-                    <a:lstStyle/>
-                    <a:p>
-                      <a:pPr algn="ctr" indent="0" marL="0">
-                        <a:buNone/>
-                      </a:pPr>
-                      <a:r>
-                        <a:rPr lang="en-US" sz="500" dirty="0">
-                          <a:solidFill>
-                            <a:srgbClr val="999999"/>
-                          </a:solidFill>
-                          <a:latin typeface="Calibri" pitchFamily="34" charset="0"/>
-                          <a:ea typeface="Calibri" pitchFamily="34" charset="-122"/>
-                          <a:cs typeface="Calibri" pitchFamily="34" charset="-120"/>
-                        </a:rPr>
-                        <a:t>0.28%</a:t>
-                      </a:r>
-                      <a:endParaRPr lang="en-US" sz="500" dirty="0">
-                        <a:latin typeface="Calibri" charset="0"/>
-                        <a:ea typeface="Calibri" charset="0"/>
-                        <a:cs typeface="Calibri" charset="0"/>
-                      </a:endParaRPr>
-                    </a:p>
-                  </a:txBody>
-                  <a:tcPr marL="91440" marR="91440" marT="45720" marB="45720">
-                    <a:lnL w="2540" cap="flat" cmpd="sng" algn="ctr">
-                      <a:solidFill>
-                        <a:srgbClr val="EEEEEE"/>
-                      </a:solidFill>
-                      <a:prstDash val="solid"/>
-                      <a:round/>
-                      <a:headEnd type="none" w="med" len="med"/>
-                      <a:tailEnd type="none" w="med" len="med"/>
-                    </a:lnL>
-                    <a:lnR w="2540" cap="flat" cmpd="sng" algn="ctr">
-                      <a:solidFill>
-                        <a:srgbClr val="EEEEEE"/>
-                      </a:solidFill>
-                      <a:prstDash val="solid"/>
-                      <a:round/>
-                      <a:headEnd type="none" w="med" len="med"/>
-                      <a:tailEnd type="none" w="med" len="med"/>
-                    </a:lnR>
-                    <a:lnT w="2540" cap="flat" cmpd="sng" algn="ctr">
-                      <a:solidFill>
-                        <a:srgbClr val="EEEEEE"/>
-                      </a:solidFill>
-                      <a:prstDash val="solid"/>
-                      <a:round/>
-                      <a:headEnd type="none" w="med" len="med"/>
-                      <a:tailEnd type="none" w="med" len="med"/>
-                    </a:lnT>
-                    <a:lnB w="2540" cap="flat" cmpd="sng" algn="ctr">
-                      <a:solidFill>
-                        <a:srgbClr val="EEEEEE"/>
-                      </a:solidFill>
-                      <a:prstDash val="solid"/>
-                      <a:round/>
-                      <a:headEnd type="none" w="med" len="med"/>
-                      <a:tailEnd type="none" w="med" len="med"/>
-                    </a:lnB>
-                  </a:tcPr>
-                </a:tc>
-                <a:tc>
-                  <a:txBody>
-                    <a:bodyPr/>
-                    <a:lstStyle/>
-                    <a:p>
-                      <a:pPr algn="ctr" indent="0" marL="0">
-                        <a:buNone/>
-                      </a:pPr>
-                      <a:r>
-                        <a:rPr lang="en-US" sz="500" dirty="0">
-                          <a:solidFill>
-                            <a:srgbClr val="999999"/>
-                          </a:solidFill>
-                          <a:latin typeface="Calibri" pitchFamily="34" charset="0"/>
-                          <a:ea typeface="Calibri" pitchFamily="34" charset="-122"/>
-                          <a:cs typeface="Calibri" pitchFamily="34" charset="-120"/>
-                        </a:rPr>
-                        <a:t>0.56%</a:t>
+                        <a:t>0.27%</a:t>
                       </a:r>
                       <a:endParaRPr lang="en-US" sz="500" dirty="0">
                         <a:latin typeface="Calibri" charset="0"/>
@@ -28829,7 +30305,7 @@
                           <a:ea typeface="Calibri" pitchFamily="34" charset="-122"/>
                           <a:cs typeface="Calibri" pitchFamily="34" charset="-120"/>
                         </a:rPr>
-                        <a:t>0.49%</a:t>
+                        <a:t>0.47%</a:t>
                       </a:r>
                       <a:endParaRPr lang="en-US" sz="500" dirty="0">
                         <a:latin typeface="Calibri" charset="0"/>
@@ -28959,7 +30435,7 @@
                           <a:ea typeface="Calibri" pitchFamily="34" charset="-122"/>
                           <a:cs typeface="Calibri" pitchFamily="34" charset="-120"/>
                         </a:rPr>
-                        <a:t>0.46%</a:t>
+                        <a:t>0.44%</a:t>
                       </a:r>
                       <a:endParaRPr lang="en-US" sz="500" dirty="0">
                         <a:latin typeface="Calibri" charset="0"/>
@@ -29089,7 +30565,7 @@
                           <a:ea typeface="Calibri" pitchFamily="34" charset="-122"/>
                           <a:cs typeface="Calibri" pitchFamily="34" charset="-120"/>
                         </a:rPr>
-                        <a:t>0.49%</a:t>
+                        <a:t>0.48%</a:t>
                       </a:r>
                       <a:endParaRPr lang="en-US" sz="500" dirty="0">
                         <a:latin typeface="Calibri" charset="0"/>
@@ -29154,7 +30630,7 @@
                           <a:ea typeface="Calibri" pitchFamily="34" charset="-122"/>
                           <a:cs typeface="Calibri" pitchFamily="34" charset="-120"/>
                         </a:rPr>
-                        <a:t>5.75%</a:t>
+                        <a:t>5.91%</a:t>
                       </a:r>
                       <a:endParaRPr lang="en-US" sz="500" dirty="0">
                         <a:latin typeface="Calibri" charset="0"/>
@@ -29351,7 +30827,7 @@
                           <a:ea typeface="Calibri" pitchFamily="34" charset="-122"/>
                           <a:cs typeface="Calibri" pitchFamily="34" charset="-120"/>
                         </a:rPr>
-                        <a:t>0.37%</a:t>
+                        <a:t>0.39%</a:t>
                       </a:r>
                       <a:endParaRPr lang="en-US" sz="500" dirty="0">
                         <a:latin typeface="Calibri" charset="0"/>
@@ -29416,7 +30892,7 @@
                           <a:ea typeface="Calibri" pitchFamily="34" charset="-122"/>
                           <a:cs typeface="Calibri" pitchFamily="34" charset="-120"/>
                         </a:rPr>
-                        <a:t>0.37%</a:t>
+                        <a:t>0.36%</a:t>
                       </a:r>
                       <a:endParaRPr lang="en-US" sz="500" dirty="0">
                         <a:latin typeface="Calibri" charset="0"/>
@@ -29481,7 +30957,7 @@
                           <a:ea typeface="Calibri" pitchFamily="34" charset="-122"/>
                           <a:cs typeface="Calibri" pitchFamily="34" charset="-120"/>
                         </a:rPr>
-                        <a:t>0.37%</a:t>
+                        <a:t>0.39%</a:t>
                       </a:r>
                       <a:endParaRPr lang="en-US" sz="500" dirty="0">
                         <a:latin typeface="Calibri" charset="0"/>
@@ -29546,7 +31022,7 @@
                           <a:ea typeface="Calibri" pitchFamily="34" charset="-122"/>
                           <a:cs typeface="Calibri" pitchFamily="34" charset="-120"/>
                         </a:rPr>
-                        <a:t>0.37%</a:t>
+                        <a:t>0.38%</a:t>
                       </a:r>
                       <a:endParaRPr lang="en-US" sz="500" dirty="0">
                         <a:latin typeface="Calibri" charset="0"/>
@@ -30229,7 +31705,7 @@
                           <a:ea typeface="Calibri" pitchFamily="34" charset="-122"/>
                           <a:cs typeface="Calibri" pitchFamily="34" charset="-120"/>
                         </a:rPr>
-                        <a:t>0.00%</a:t>
+                        <a:t>0.26%</a:t>
                       </a:r>
                       <a:endParaRPr lang="en-US" sz="500" dirty="0">
                         <a:latin typeface="Calibri" charset="0"/>
@@ -30294,7 +31770,7 @@
                           <a:ea typeface="Calibri" pitchFamily="34" charset="-122"/>
                           <a:cs typeface="Calibri" pitchFamily="34" charset="-120"/>
                         </a:rPr>
-                        <a:t>0.24%</a:t>
+                        <a:t>0.26%</a:t>
                       </a:r>
                       <a:endParaRPr lang="en-US" sz="500" dirty="0">
                         <a:latin typeface="Calibri" charset="0"/>
@@ -30359,7 +31835,7 @@
                           <a:ea typeface="Calibri" pitchFamily="34" charset="-122"/>
                           <a:cs typeface="Calibri" pitchFamily="34" charset="-120"/>
                         </a:rPr>
-                        <a:t>0.27%</a:t>
+                        <a:t>0.26%</a:t>
                       </a:r>
                       <a:endParaRPr lang="en-US" sz="500" dirty="0">
                         <a:latin typeface="Calibri" charset="0"/>
@@ -31107,6 +32583,71 @@
                           <a:ea typeface="Calibri" pitchFamily="34" charset="-122"/>
                           <a:cs typeface="Calibri" pitchFamily="34" charset="-120"/>
                         </a:rPr>
+                        <a:t>0.52%</a:t>
+                      </a:r>
+                      <a:endParaRPr lang="en-US" sz="500" dirty="0">
+                        <a:latin typeface="Calibri" charset="0"/>
+                        <a:ea typeface="Calibri" charset="0"/>
+                        <a:cs typeface="Calibri" charset="0"/>
+                      </a:endParaRPr>
+                    </a:p>
+                  </a:txBody>
+                  <a:tcPr marL="91440" marR="91440" marT="45720" marB="45720">
+                    <a:lnL w="2540" cap="flat" cmpd="sng" algn="ctr">
+                      <a:solidFill>
+                        <a:srgbClr val="EEEEEE"/>
+                      </a:solidFill>
+                      <a:prstDash val="solid"/>
+                      <a:round/>
+                      <a:headEnd type="none" w="med" len="med"/>
+                      <a:tailEnd type="none" w="med" len="med"/>
+                    </a:lnL>
+                    <a:lnR w="2540" cap="flat" cmpd="sng" algn="ctr">
+                      <a:solidFill>
+                        <a:srgbClr val="EEEEEE"/>
+                      </a:solidFill>
+                      <a:prstDash val="solid"/>
+                      <a:round/>
+                      <a:headEnd type="none" w="med" len="med"/>
+                      <a:tailEnd type="none" w="med" len="med"/>
+                    </a:lnR>
+                    <a:lnT w="2540" cap="flat" cmpd="sng" algn="ctr">
+                      <a:solidFill>
+                        <a:srgbClr val="EEEEEE"/>
+                      </a:solidFill>
+                      <a:prstDash val="solid"/>
+                      <a:round/>
+                      <a:headEnd type="none" w="med" len="med"/>
+                      <a:tailEnd type="none" w="med" len="med"/>
+                    </a:lnT>
+                    <a:lnB w="2540" cap="flat" cmpd="sng" algn="ctr">
+                      <a:solidFill>
+                        <a:srgbClr val="EEEEEE"/>
+                      </a:solidFill>
+                      <a:prstDash val="solid"/>
+                      <a:round/>
+                      <a:headEnd type="none" w="med" len="med"/>
+                      <a:tailEnd type="none" w="med" len="med"/>
+                    </a:lnB>
+                  </a:tcPr>
+                </a:tc>
+                <a:tc>
+                  <a:txBody>
+                    <a:bodyPr/>
+                    <a:lstStyle/>
+                    <a:p>
+                      <a:pPr algn="ctr" indent="0" marL="0">
+                        <a:buNone/>
+                      </a:pPr>
+                      <a:r>
+                        <a:rPr lang="en-US" sz="500" dirty="0">
+                          <a:solidFill>
+                            <a:srgbClr val="000000"/>
+                          </a:solidFill>
+                          <a:latin typeface="Calibri" pitchFamily="34" charset="0"/>
+                          <a:ea typeface="Calibri" pitchFamily="34" charset="-122"/>
+                          <a:cs typeface="Calibri" pitchFamily="34" charset="-120"/>
+                        </a:rPr>
                         <a:t>0.54%</a:t>
                       </a:r>
                       <a:endParaRPr lang="en-US" sz="500" dirty="0">
@@ -31172,72 +32713,7 @@
                           <a:ea typeface="Calibri" pitchFamily="34" charset="-122"/>
                           <a:cs typeface="Calibri" pitchFamily="34" charset="-120"/>
                         </a:rPr>
-                        <a:t>0.50%</a:t>
-                      </a:r>
-                      <a:endParaRPr lang="en-US" sz="500" dirty="0">
-                        <a:latin typeface="Calibri" charset="0"/>
-                        <a:ea typeface="Calibri" charset="0"/>
-                        <a:cs typeface="Calibri" charset="0"/>
-                      </a:endParaRPr>
-                    </a:p>
-                  </a:txBody>
-                  <a:tcPr marL="91440" marR="91440" marT="45720" marB="45720">
-                    <a:lnL w="2540" cap="flat" cmpd="sng" algn="ctr">
-                      <a:solidFill>
-                        <a:srgbClr val="EEEEEE"/>
-                      </a:solidFill>
-                      <a:prstDash val="solid"/>
-                      <a:round/>
-                      <a:headEnd type="none" w="med" len="med"/>
-                      <a:tailEnd type="none" w="med" len="med"/>
-                    </a:lnL>
-                    <a:lnR w="2540" cap="flat" cmpd="sng" algn="ctr">
-                      <a:solidFill>
-                        <a:srgbClr val="EEEEEE"/>
-                      </a:solidFill>
-                      <a:prstDash val="solid"/>
-                      <a:round/>
-                      <a:headEnd type="none" w="med" len="med"/>
-                      <a:tailEnd type="none" w="med" len="med"/>
-                    </a:lnR>
-                    <a:lnT w="2540" cap="flat" cmpd="sng" algn="ctr">
-                      <a:solidFill>
-                        <a:srgbClr val="EEEEEE"/>
-                      </a:solidFill>
-                      <a:prstDash val="solid"/>
-                      <a:round/>
-                      <a:headEnd type="none" w="med" len="med"/>
-                      <a:tailEnd type="none" w="med" len="med"/>
-                    </a:lnT>
-                    <a:lnB w="2540" cap="flat" cmpd="sng" algn="ctr">
-                      <a:solidFill>
-                        <a:srgbClr val="EEEEEE"/>
-                      </a:solidFill>
-                      <a:prstDash val="solid"/>
-                      <a:round/>
-                      <a:headEnd type="none" w="med" len="med"/>
-                      <a:tailEnd type="none" w="med" len="med"/>
-                    </a:lnB>
-                  </a:tcPr>
-                </a:tc>
-                <a:tc>
-                  <a:txBody>
-                    <a:bodyPr/>
-                    <a:lstStyle/>
-                    <a:p>
-                      <a:pPr algn="ctr" indent="0" marL="0">
-                        <a:buNone/>
-                      </a:pPr>
-                      <a:r>
-                        <a:rPr lang="en-US" sz="500" dirty="0">
-                          <a:solidFill>
-                            <a:srgbClr val="000000"/>
-                          </a:solidFill>
-                          <a:latin typeface="Calibri" pitchFamily="34" charset="0"/>
-                          <a:ea typeface="Calibri" pitchFamily="34" charset="-122"/>
-                          <a:cs typeface="Calibri" pitchFamily="34" charset="-120"/>
-                        </a:rPr>
-                        <a:t>0.57%</a:t>
+                        <a:t>0.55%</a:t>
                       </a:r>
                       <a:endParaRPr lang="en-US" sz="500" dirty="0">
                         <a:latin typeface="Calibri" charset="0"/>

--- a/folletos/2026-04/pptx/FIP_VANTRUST_LIQUIDEZ_ALTO_CAPITAL.pptx
+++ b/folletos/2026-04/pptx/FIP_VANTRUST_LIQUIDEZ_ALTO_CAPITAL.pptx
@@ -4589,7 +4589,7 @@
                 <a:ea typeface="Calibri" pitchFamily="34" charset="-122"/>
                 <a:cs typeface="Calibri" pitchFamily="34" charset="-120"/>
               </a:rPr>
-              <a:t>prueba CLP</a:t>
+              <a:t>prueba 13 CLP</a:t>
             </a:r>
             <a:endParaRPr lang="en-US" sz="800" dirty="0"/>
           </a:p>

--- a/folletos/2026-04/pptx/FIP_VANTRUST_LIQUIDEZ_ALTO_CAPITAL.pptx
+++ b/folletos/2026-04/pptx/FIP_VANTRUST_LIQUIDEZ_ALTO_CAPITAL.pptx
@@ -4589,7 +4589,7 @@
                 <a:ea typeface="Calibri" pitchFamily="34" charset="-122"/>
                 <a:cs typeface="Calibri" pitchFamily="34" charset="-120"/>
               </a:rPr>
-              <a:t>prueba CLP</a:t>
+              <a:t>prueba 14 CLP</a:t>
             </a:r>
             <a:endParaRPr lang="en-US" sz="800" dirty="0"/>
           </a:p>
